--- a/1.training_model/slide_presentation/Device Identifier 20260414.pptx
+++ b/1.training_model/slide_presentation/Device Identifier 20260414.pptx
@@ -209,7 +209,7 @@
           <a:p>
             <a:fld id="{23D8B80A-F233-4240-BDAF-6537AE249829}" type="datetimeFigureOut">
               <a:rPr lang="en-MY" smtClean="0"/>
-              <a:t>20/4/2026</a:t>
+              <a:t>23/4/2026</a:t>
             </a:fld>
             <a:endParaRPr lang="en-MY"/>
           </a:p>
@@ -1920,7 +1920,7 @@
           <a:p>
             <a:fld id="{1CD01395-AC05-405C-BAB9-E5D2B9FDBB40}" type="datetimeFigureOut">
               <a:rPr lang="en-MY" smtClean="0"/>
-              <a:t>20/4/2026</a:t>
+              <a:t>23/4/2026</a:t>
             </a:fld>
             <a:endParaRPr lang="en-MY"/>
           </a:p>
@@ -2235,7 +2235,7 @@
           <a:p>
             <a:fld id="{1CD01395-AC05-405C-BAB9-E5D2B9FDBB40}" type="datetimeFigureOut">
               <a:rPr lang="en-MY" smtClean="0"/>
-              <a:t>20/4/2026</a:t>
+              <a:t>23/4/2026</a:t>
             </a:fld>
             <a:endParaRPr lang="en-MY"/>
           </a:p>
@@ -2457,7 +2457,7 @@
           <a:p>
             <a:fld id="{1CD01395-AC05-405C-BAB9-E5D2B9FDBB40}" type="datetimeFigureOut">
               <a:rPr lang="en-MY" smtClean="0"/>
-              <a:t>20/4/2026</a:t>
+              <a:t>23/4/2026</a:t>
             </a:fld>
             <a:endParaRPr lang="en-MY"/>
           </a:p>
@@ -2748,7 +2748,7 @@
           <a:p>
             <a:fld id="{1CD01395-AC05-405C-BAB9-E5D2B9FDBB40}" type="datetimeFigureOut">
               <a:rPr lang="en-MY" smtClean="0"/>
-              <a:t>20/4/2026</a:t>
+              <a:t>23/4/2026</a:t>
             </a:fld>
             <a:endParaRPr lang="en-MY"/>
           </a:p>
@@ -3202,7 +3202,7 @@
           <a:p>
             <a:fld id="{1CD01395-AC05-405C-BAB9-E5D2B9FDBB40}" type="datetimeFigureOut">
               <a:rPr lang="en-MY" smtClean="0"/>
-              <a:t>20/4/2026</a:t>
+              <a:t>23/4/2026</a:t>
             </a:fld>
             <a:endParaRPr lang="en-MY"/>
           </a:p>
@@ -3778,7 +3778,7 @@
           <a:p>
             <a:fld id="{1CD01395-AC05-405C-BAB9-E5D2B9FDBB40}" type="datetimeFigureOut">
               <a:rPr lang="en-MY" smtClean="0"/>
-              <a:t>20/4/2026</a:t>
+              <a:t>23/4/2026</a:t>
             </a:fld>
             <a:endParaRPr lang="en-MY"/>
           </a:p>
@@ -4639,7 +4639,7 @@
           <a:p>
             <a:fld id="{1CD01395-AC05-405C-BAB9-E5D2B9FDBB40}" type="datetimeFigureOut">
               <a:rPr lang="en-MY" smtClean="0"/>
-              <a:t>20/4/2026</a:t>
+              <a:t>23/4/2026</a:t>
             </a:fld>
             <a:endParaRPr lang="en-MY"/>
           </a:p>
@@ -4844,7 +4844,7 @@
           <a:p>
             <a:fld id="{1CD01395-AC05-405C-BAB9-E5D2B9FDBB40}" type="datetimeFigureOut">
               <a:rPr lang="en-MY" smtClean="0"/>
-              <a:t>20/4/2026</a:t>
+              <a:t>23/4/2026</a:t>
             </a:fld>
             <a:endParaRPr lang="en-MY"/>
           </a:p>
@@ -5058,7 +5058,7 @@
           <a:p>
             <a:fld id="{1CD01395-AC05-405C-BAB9-E5D2B9FDBB40}" type="datetimeFigureOut">
               <a:rPr lang="en-MY" smtClean="0"/>
-              <a:t>20/4/2026</a:t>
+              <a:t>23/4/2026</a:t>
             </a:fld>
             <a:endParaRPr lang="en-MY"/>
           </a:p>
@@ -5263,7 +5263,7 @@
           <a:p>
             <a:fld id="{1CD01395-AC05-405C-BAB9-E5D2B9FDBB40}" type="datetimeFigureOut">
               <a:rPr lang="en-MY" smtClean="0"/>
-              <a:t>20/4/2026</a:t>
+              <a:t>23/4/2026</a:t>
             </a:fld>
             <a:endParaRPr lang="en-MY"/>
           </a:p>
@@ -5543,7 +5543,7 @@
           <a:p>
             <a:fld id="{1CD01395-AC05-405C-BAB9-E5D2B9FDBB40}" type="datetimeFigureOut">
               <a:rPr lang="en-MY" smtClean="0"/>
-              <a:t>20/4/2026</a:t>
+              <a:t>23/4/2026</a:t>
             </a:fld>
             <a:endParaRPr lang="en-MY"/>
           </a:p>
@@ -5810,7 +5810,7 @@
           <a:p>
             <a:fld id="{1CD01395-AC05-405C-BAB9-E5D2B9FDBB40}" type="datetimeFigureOut">
               <a:rPr lang="en-MY" smtClean="0"/>
-              <a:t>20/4/2026</a:t>
+              <a:t>23/4/2026</a:t>
             </a:fld>
             <a:endParaRPr lang="en-MY"/>
           </a:p>
@@ -6225,7 +6225,7 @@
           <a:p>
             <a:fld id="{1CD01395-AC05-405C-BAB9-E5D2B9FDBB40}" type="datetimeFigureOut">
               <a:rPr lang="en-MY" smtClean="0"/>
-              <a:t>20/4/2026</a:t>
+              <a:t>23/4/2026</a:t>
             </a:fld>
             <a:endParaRPr lang="en-MY"/>
           </a:p>
@@ -6373,7 +6373,7 @@
           <a:p>
             <a:fld id="{1CD01395-AC05-405C-BAB9-E5D2B9FDBB40}" type="datetimeFigureOut">
               <a:rPr lang="en-MY" smtClean="0"/>
-              <a:t>20/4/2026</a:t>
+              <a:t>23/4/2026</a:t>
             </a:fld>
             <a:endParaRPr lang="en-MY"/>
           </a:p>
@@ -6498,7 +6498,7 @@
           <a:p>
             <a:fld id="{1CD01395-AC05-405C-BAB9-E5D2B9FDBB40}" type="datetimeFigureOut">
               <a:rPr lang="en-MY" smtClean="0"/>
-              <a:t>20/4/2026</a:t>
+              <a:t>23/4/2026</a:t>
             </a:fld>
             <a:endParaRPr lang="en-MY"/>
           </a:p>
@@ -6777,7 +6777,7 @@
           <a:p>
             <a:fld id="{1CD01395-AC05-405C-BAB9-E5D2B9FDBB40}" type="datetimeFigureOut">
               <a:rPr lang="en-MY" smtClean="0"/>
-              <a:t>20/4/2026</a:t>
+              <a:t>23/4/2026</a:t>
             </a:fld>
             <a:endParaRPr lang="en-MY"/>
           </a:p>
@@ -7092,7 +7092,7 @@
           <a:p>
             <a:fld id="{1CD01395-AC05-405C-BAB9-E5D2B9FDBB40}" type="datetimeFigureOut">
               <a:rPr lang="en-MY" smtClean="0"/>
-              <a:t>20/4/2026</a:t>
+              <a:t>23/4/2026</a:t>
             </a:fld>
             <a:endParaRPr lang="en-MY"/>
           </a:p>
@@ -7345,7 +7345,7 @@
           <a:p>
             <a:fld id="{1CD01395-AC05-405C-BAB9-E5D2B9FDBB40}" type="datetimeFigureOut">
               <a:rPr lang="en-MY" smtClean="0"/>
-              <a:t>20/4/2026</a:t>
+              <a:t>23/4/2026</a:t>
             </a:fld>
             <a:endParaRPr lang="en-MY"/>
           </a:p>
@@ -10539,6 +10539,36 @@
           <a:chExt cx="0" cy="0"/>
         </a:xfrm>
       </p:grpSpPr>
+      <p:pic>
+        <p:nvPicPr>
+          <p:cNvPr id="3" name="Picture 2">
+            <a:extLst>
+              <a:ext uri="{FF2B5EF4-FFF2-40B4-BE49-F238E27FC236}">
+                <a16:creationId xmlns:a16="http://schemas.microsoft.com/office/drawing/2014/main" id="{1582A625-0A36-5DBD-23AD-272844215260}"/>
+              </a:ext>
+            </a:extLst>
+          </p:cNvPr>
+          <p:cNvPicPr>
+            <a:picLocks noChangeAspect="1"/>
+          </p:cNvPicPr>
+          <p:nvPr/>
+        </p:nvPicPr>
+        <p:blipFill>
+          <a:blip r:embed="rId3"/>
+          <a:stretch>
+            <a:fillRect/>
+          </a:stretch>
+        </p:blipFill>
+        <p:spPr>
+          <a:xfrm>
+            <a:off x="1219200" y="442912"/>
+            <a:ext cx="9753600" cy="5972175"/>
+          </a:xfrm>
+          <a:prstGeom prst="rect">
+            <a:avLst/>
+          </a:prstGeom>
+        </p:spPr>
+      </p:pic>
     </p:spTree>
     <p:extLst>
       <p:ext uri="{BB962C8B-B14F-4D97-AF65-F5344CB8AC3E}">

--- a/1.training_model/slide_presentation/Device Identifier 20260414.pptx
+++ b/1.training_model/slide_presentation/Device Identifier 20260414.pptx
@@ -5,22 +5,23 @@
     <p:sldMasterId id="2147483696" r:id="rId1"/>
   </p:sldMasterIdLst>
   <p:notesMasterIdLst>
-    <p:notesMasterId r:id="rId15"/>
+    <p:notesMasterId r:id="rId16"/>
   </p:notesMasterIdLst>
   <p:sldIdLst>
     <p:sldId id="256" r:id="rId2"/>
     <p:sldId id="292" r:id="rId3"/>
     <p:sldId id="323" r:id="rId4"/>
     <p:sldId id="324" r:id="rId5"/>
-    <p:sldId id="322" r:id="rId6"/>
-    <p:sldId id="321" r:id="rId7"/>
-    <p:sldId id="308" r:id="rId8"/>
-    <p:sldId id="318" r:id="rId9"/>
-    <p:sldId id="319" r:id="rId10"/>
-    <p:sldId id="315" r:id="rId11"/>
-    <p:sldId id="317" r:id="rId12"/>
-    <p:sldId id="313" r:id="rId13"/>
-    <p:sldId id="316" r:id="rId14"/>
+    <p:sldId id="325" r:id="rId6"/>
+    <p:sldId id="322" r:id="rId7"/>
+    <p:sldId id="321" r:id="rId8"/>
+    <p:sldId id="308" r:id="rId9"/>
+    <p:sldId id="318" r:id="rId10"/>
+    <p:sldId id="319" r:id="rId11"/>
+    <p:sldId id="315" r:id="rId12"/>
+    <p:sldId id="317" r:id="rId13"/>
+    <p:sldId id="313" r:id="rId14"/>
+    <p:sldId id="316" r:id="rId15"/>
   </p:sldIdLst>
   <p:sldSz cx="12192000" cy="6858000"/>
   <p:notesSz cx="6858000" cy="9144000"/>
@@ -209,7 +210,7 @@
           <a:p>
             <a:fld id="{23D8B80A-F233-4240-BDAF-6537AE249829}" type="datetimeFigureOut">
               <a:rPr lang="en-MY" smtClean="0"/>
-              <a:t>23/4/2026</a:t>
+              <a:t>27/4/2026</a:t>
             </a:fld>
             <a:endParaRPr lang="en-MY"/>
           </a:p>
@@ -569,6 +570,114 @@
         <p:cNvPr id="1" name="">
           <a:extLst>
             <a:ext uri="{FF2B5EF4-FFF2-40B4-BE49-F238E27FC236}">
+              <a16:creationId xmlns:a16="http://schemas.microsoft.com/office/drawing/2014/main" id="{9C44BB0E-3305-ACF4-B9DB-3771A05F8201}"/>
+            </a:ext>
+          </a:extLst>
+        </p:cNvPr>
+        <p:cNvGrpSpPr/>
+        <p:nvPr/>
+      </p:nvGrpSpPr>
+      <p:grpSpPr>
+        <a:xfrm>
+          <a:off x="0" y="0"/>
+          <a:ext cx="0" cy="0"/>
+          <a:chOff x="0" y="0"/>
+          <a:chExt cx="0" cy="0"/>
+        </a:xfrm>
+      </p:grpSpPr>
+      <p:sp>
+        <p:nvSpPr>
+          <p:cNvPr id="2" name="Slide Image Placeholder 1">
+            <a:extLst>
+              <a:ext uri="{FF2B5EF4-FFF2-40B4-BE49-F238E27FC236}">
+                <a16:creationId xmlns:a16="http://schemas.microsoft.com/office/drawing/2014/main" id="{F125AB61-A186-C05A-CE87-0AAC4CACF4E9}"/>
+              </a:ext>
+            </a:extLst>
+          </p:cNvPr>
+          <p:cNvSpPr>
+            <a:spLocks noGrp="1" noRot="1" noChangeAspect="1"/>
+          </p:cNvSpPr>
+          <p:nvPr>
+            <p:ph type="sldImg"/>
+          </p:nvPr>
+        </p:nvSpPr>
+        <p:spPr/>
+      </p:sp>
+      <p:sp>
+        <p:nvSpPr>
+          <p:cNvPr id="3" name="Notes Placeholder 2">
+            <a:extLst>
+              <a:ext uri="{FF2B5EF4-FFF2-40B4-BE49-F238E27FC236}">
+                <a16:creationId xmlns:a16="http://schemas.microsoft.com/office/drawing/2014/main" id="{35039EA4-5C53-1F6E-2F8C-EEDBDF608C48}"/>
+              </a:ext>
+            </a:extLst>
+          </p:cNvPr>
+          <p:cNvSpPr>
+            <a:spLocks noGrp="1"/>
+          </p:cNvSpPr>
+          <p:nvPr>
+            <p:ph type="body" idx="1"/>
+          </p:nvPr>
+        </p:nvSpPr>
+        <p:spPr/>
+        <p:txBody>
+          <a:bodyPr/>
+          <a:lstStyle/>
+          <a:p>
+            <a:endParaRPr lang="en-MY" dirty="0"/>
+          </a:p>
+        </p:txBody>
+      </p:sp>
+      <p:sp>
+        <p:nvSpPr>
+          <p:cNvPr id="4" name="Slide Number Placeholder 3">
+            <a:extLst>
+              <a:ext uri="{FF2B5EF4-FFF2-40B4-BE49-F238E27FC236}">
+                <a16:creationId xmlns:a16="http://schemas.microsoft.com/office/drawing/2014/main" id="{6DE186D5-1C82-55C9-9C81-848494B232E8}"/>
+              </a:ext>
+            </a:extLst>
+          </p:cNvPr>
+          <p:cNvSpPr>
+            <a:spLocks noGrp="1"/>
+          </p:cNvSpPr>
+          <p:nvPr>
+            <p:ph type="sldNum" sz="quarter" idx="5"/>
+          </p:nvPr>
+        </p:nvSpPr>
+        <p:spPr/>
+        <p:txBody>
+          <a:bodyPr/>
+          <a:lstStyle/>
+          <a:p>
+            <a:fld id="{D16833E0-5E66-4D1D-89F5-BD860FDD8F71}" type="slidenum">
+              <a:rPr lang="en-MY" smtClean="0"/>
+              <a:t>11</a:t>
+            </a:fld>
+            <a:endParaRPr lang="en-MY"/>
+          </a:p>
+        </p:txBody>
+      </p:sp>
+    </p:spTree>
+    <p:extLst>
+      <p:ext uri="{BB962C8B-B14F-4D97-AF65-F5344CB8AC3E}">
+        <p14:creationId xmlns:p14="http://schemas.microsoft.com/office/powerpoint/2010/main" val="1118155047"/>
+      </p:ext>
+    </p:extLst>
+  </p:cSld>
+  <p:clrMapOvr>
+    <a:masterClrMapping/>
+  </p:clrMapOvr>
+</p:notes>
+</file>
+
+<file path=ppt/notesSlides/notesSlide11.xml><?xml version="1.0" encoding="utf-8"?>
+<p:notes xmlns:a="http://schemas.openxmlformats.org/drawingml/2006/main" xmlns:r="http://schemas.openxmlformats.org/officeDocument/2006/relationships" xmlns:p="http://schemas.openxmlformats.org/presentationml/2006/main">
+  <p:cSld>
+    <p:spTree>
+      <p:nvGrpSpPr>
+        <p:cNvPr id="1" name="">
+          <a:extLst>
+            <a:ext uri="{FF2B5EF4-FFF2-40B4-BE49-F238E27FC236}">
               <a16:creationId xmlns:a16="http://schemas.microsoft.com/office/drawing/2014/main" id="{0E574DD7-697C-EC60-8D90-337CFF4A361D}"/>
             </a:ext>
           </a:extLst>
@@ -650,7 +759,7 @@
           <a:p>
             <a:fld id="{D16833E0-5E66-4D1D-89F5-BD860FDD8F71}" type="slidenum">
               <a:rPr lang="en-MY" smtClean="0"/>
-              <a:t>11</a:t>
+              <a:t>12</a:t>
             </a:fld>
             <a:endParaRPr lang="en-MY"/>
           </a:p>
@@ -669,7 +778,7 @@
 </p:notes>
 </file>
 
-<file path=ppt/notesSlides/notesSlide11.xml><?xml version="1.0" encoding="utf-8"?>
+<file path=ppt/notesSlides/notesSlide12.xml><?xml version="1.0" encoding="utf-8"?>
 <p:notes xmlns:a="http://schemas.openxmlformats.org/drawingml/2006/main" xmlns:r="http://schemas.openxmlformats.org/officeDocument/2006/relationships" xmlns:p="http://schemas.openxmlformats.org/presentationml/2006/main">
   <p:cSld>
     <p:spTree>
@@ -758,7 +867,7 @@
           <a:p>
             <a:fld id="{D16833E0-5E66-4D1D-89F5-BD860FDD8F71}" type="slidenum">
               <a:rPr lang="en-MY" smtClean="0"/>
-              <a:t>12</a:t>
+              <a:t>13</a:t>
             </a:fld>
             <a:endParaRPr lang="en-MY"/>
           </a:p>
@@ -777,7 +886,7 @@
 </p:notes>
 </file>
 
-<file path=ppt/notesSlides/notesSlide12.xml><?xml version="1.0" encoding="utf-8"?>
+<file path=ppt/notesSlides/notesSlide13.xml><?xml version="1.0" encoding="utf-8"?>
 <p:notes xmlns:a="http://schemas.openxmlformats.org/drawingml/2006/main" xmlns:r="http://schemas.openxmlformats.org/officeDocument/2006/relationships" xmlns:p="http://schemas.openxmlformats.org/presentationml/2006/main">
   <p:cSld>
     <p:spTree>
@@ -866,7 +975,7 @@
           <a:p>
             <a:fld id="{D16833E0-5E66-4D1D-89F5-BD860FDD8F71}" type="slidenum">
               <a:rPr lang="en-MY" smtClean="0"/>
-              <a:t>13</a:t>
+              <a:t>14</a:t>
             </a:fld>
             <a:endParaRPr lang="en-MY"/>
           </a:p>
@@ -1109,6 +1218,114 @@
         <p:cNvPr id="1" name="">
           <a:extLst>
             <a:ext uri="{FF2B5EF4-FFF2-40B4-BE49-F238E27FC236}">
+              <a16:creationId xmlns:a16="http://schemas.microsoft.com/office/drawing/2014/main" id="{A4A596CF-9DBF-1802-F324-3589B456E90D}"/>
+            </a:ext>
+          </a:extLst>
+        </p:cNvPr>
+        <p:cNvGrpSpPr/>
+        <p:nvPr/>
+      </p:nvGrpSpPr>
+      <p:grpSpPr>
+        <a:xfrm>
+          <a:off x="0" y="0"/>
+          <a:ext cx="0" cy="0"/>
+          <a:chOff x="0" y="0"/>
+          <a:chExt cx="0" cy="0"/>
+        </a:xfrm>
+      </p:grpSpPr>
+      <p:sp>
+        <p:nvSpPr>
+          <p:cNvPr id="2" name="Slide Image Placeholder 1">
+            <a:extLst>
+              <a:ext uri="{FF2B5EF4-FFF2-40B4-BE49-F238E27FC236}">
+                <a16:creationId xmlns:a16="http://schemas.microsoft.com/office/drawing/2014/main" id="{BB73E8EA-45DC-644E-1166-64F41C2683F7}"/>
+              </a:ext>
+            </a:extLst>
+          </p:cNvPr>
+          <p:cNvSpPr>
+            <a:spLocks noGrp="1" noRot="1" noChangeAspect="1"/>
+          </p:cNvSpPr>
+          <p:nvPr>
+            <p:ph type="sldImg"/>
+          </p:nvPr>
+        </p:nvSpPr>
+        <p:spPr/>
+      </p:sp>
+      <p:sp>
+        <p:nvSpPr>
+          <p:cNvPr id="3" name="Notes Placeholder 2">
+            <a:extLst>
+              <a:ext uri="{FF2B5EF4-FFF2-40B4-BE49-F238E27FC236}">
+                <a16:creationId xmlns:a16="http://schemas.microsoft.com/office/drawing/2014/main" id="{FD7188DD-12F9-8098-5B69-24C7EA0019F3}"/>
+              </a:ext>
+            </a:extLst>
+          </p:cNvPr>
+          <p:cNvSpPr>
+            <a:spLocks noGrp="1"/>
+          </p:cNvSpPr>
+          <p:nvPr>
+            <p:ph type="body" idx="1"/>
+          </p:nvPr>
+        </p:nvSpPr>
+        <p:spPr/>
+        <p:txBody>
+          <a:bodyPr/>
+          <a:lstStyle/>
+          <a:p>
+            <a:endParaRPr lang="en-MY" dirty="0"/>
+          </a:p>
+        </p:txBody>
+      </p:sp>
+      <p:sp>
+        <p:nvSpPr>
+          <p:cNvPr id="4" name="Slide Number Placeholder 3">
+            <a:extLst>
+              <a:ext uri="{FF2B5EF4-FFF2-40B4-BE49-F238E27FC236}">
+                <a16:creationId xmlns:a16="http://schemas.microsoft.com/office/drawing/2014/main" id="{29A967BE-86A3-29C7-E477-4384FA7A8114}"/>
+              </a:ext>
+            </a:extLst>
+          </p:cNvPr>
+          <p:cNvSpPr>
+            <a:spLocks noGrp="1"/>
+          </p:cNvSpPr>
+          <p:nvPr>
+            <p:ph type="sldNum" sz="quarter" idx="5"/>
+          </p:nvPr>
+        </p:nvSpPr>
+        <p:spPr/>
+        <p:txBody>
+          <a:bodyPr/>
+          <a:lstStyle/>
+          <a:p>
+            <a:fld id="{D16833E0-5E66-4D1D-89F5-BD860FDD8F71}" type="slidenum">
+              <a:rPr lang="en-MY" smtClean="0"/>
+              <a:t>5</a:t>
+            </a:fld>
+            <a:endParaRPr lang="en-MY"/>
+          </a:p>
+        </p:txBody>
+      </p:sp>
+    </p:spTree>
+    <p:extLst>
+      <p:ext uri="{BB962C8B-B14F-4D97-AF65-F5344CB8AC3E}">
+        <p14:creationId xmlns:p14="http://schemas.microsoft.com/office/powerpoint/2010/main" val="3929301460"/>
+      </p:ext>
+    </p:extLst>
+  </p:cSld>
+  <p:clrMapOvr>
+    <a:masterClrMapping/>
+  </p:clrMapOvr>
+</p:notes>
+</file>
+
+<file path=ppt/notesSlides/notesSlide5.xml><?xml version="1.0" encoding="utf-8"?>
+<p:notes xmlns:a="http://schemas.openxmlformats.org/drawingml/2006/main" xmlns:r="http://schemas.openxmlformats.org/officeDocument/2006/relationships" xmlns:p="http://schemas.openxmlformats.org/presentationml/2006/main">
+  <p:cSld>
+    <p:spTree>
+      <p:nvGrpSpPr>
+        <p:cNvPr id="1" name="">
+          <a:extLst>
+            <a:ext uri="{FF2B5EF4-FFF2-40B4-BE49-F238E27FC236}">
               <a16:creationId xmlns:a16="http://schemas.microsoft.com/office/drawing/2014/main" id="{760B0DA3-B6BD-4EFE-90F9-176D4D36867B}"/>
             </a:ext>
           </a:extLst>
@@ -1190,7 +1407,7 @@
           <a:p>
             <a:fld id="{D16833E0-5E66-4D1D-89F5-BD860FDD8F71}" type="slidenum">
               <a:rPr lang="en-MY" smtClean="0"/>
-              <a:t>5</a:t>
+              <a:t>6</a:t>
             </a:fld>
             <a:endParaRPr lang="en-MY"/>
           </a:p>
@@ -1209,7 +1426,7 @@
 </p:notes>
 </file>
 
-<file path=ppt/notesSlides/notesSlide5.xml><?xml version="1.0" encoding="utf-8"?>
+<file path=ppt/notesSlides/notesSlide6.xml><?xml version="1.0" encoding="utf-8"?>
 <p:notes xmlns:a="http://schemas.openxmlformats.org/drawingml/2006/main" xmlns:r="http://schemas.openxmlformats.org/officeDocument/2006/relationships" xmlns:p="http://schemas.openxmlformats.org/presentationml/2006/main">
   <p:cSld>
     <p:spTree>
@@ -1298,7 +1515,7 @@
           <a:p>
             <a:fld id="{D16833E0-5E66-4D1D-89F5-BD860FDD8F71}" type="slidenum">
               <a:rPr lang="en-MY" smtClean="0"/>
-              <a:t>6</a:t>
+              <a:t>7</a:t>
             </a:fld>
             <a:endParaRPr lang="en-MY"/>
           </a:p>
@@ -1317,7 +1534,7 @@
 </p:notes>
 </file>
 
-<file path=ppt/notesSlides/notesSlide6.xml><?xml version="1.0" encoding="utf-8"?>
+<file path=ppt/notesSlides/notesSlide7.xml><?xml version="1.0" encoding="utf-8"?>
 <p:notes xmlns:a="http://schemas.openxmlformats.org/drawingml/2006/main" xmlns:r="http://schemas.openxmlformats.org/officeDocument/2006/relationships" xmlns:p="http://schemas.openxmlformats.org/presentationml/2006/main">
   <p:cSld>
     <p:spTree>
@@ -1406,7 +1623,7 @@
           <a:p>
             <a:fld id="{D16833E0-5E66-4D1D-89F5-BD860FDD8F71}" type="slidenum">
               <a:rPr lang="en-MY" smtClean="0"/>
-              <a:t>7</a:t>
+              <a:t>8</a:t>
             </a:fld>
             <a:endParaRPr lang="en-MY"/>
           </a:p>
@@ -1425,7 +1642,7 @@
 </p:notes>
 </file>
 
-<file path=ppt/notesSlides/notesSlide7.xml><?xml version="1.0" encoding="utf-8"?>
+<file path=ppt/notesSlides/notesSlide8.xml><?xml version="1.0" encoding="utf-8"?>
 <p:notes xmlns:a="http://schemas.openxmlformats.org/drawingml/2006/main" xmlns:r="http://schemas.openxmlformats.org/officeDocument/2006/relationships" xmlns:p="http://schemas.openxmlformats.org/presentationml/2006/main">
   <p:cSld>
     <p:spTree>
@@ -1514,7 +1731,7 @@
           <a:p>
             <a:fld id="{D16833E0-5E66-4D1D-89F5-BD860FDD8F71}" type="slidenum">
               <a:rPr lang="en-MY" smtClean="0"/>
-              <a:t>8</a:t>
+              <a:t>9</a:t>
             </a:fld>
             <a:endParaRPr lang="en-MY"/>
           </a:p>
@@ -1533,7 +1750,7 @@
 </p:notes>
 </file>
 
-<file path=ppt/notesSlides/notesSlide8.xml><?xml version="1.0" encoding="utf-8"?>
+<file path=ppt/notesSlides/notesSlide9.xml><?xml version="1.0" encoding="utf-8"?>
 <p:notes xmlns:a="http://schemas.openxmlformats.org/drawingml/2006/main" xmlns:r="http://schemas.openxmlformats.org/officeDocument/2006/relationships" xmlns:p="http://schemas.openxmlformats.org/presentationml/2006/main">
   <p:cSld>
     <p:spTree>
@@ -1622,7 +1839,7 @@
           <a:p>
             <a:fld id="{D16833E0-5E66-4D1D-89F5-BD860FDD8F71}" type="slidenum">
               <a:rPr lang="en-MY" smtClean="0"/>
-              <a:t>9</a:t>
+              <a:t>10</a:t>
             </a:fld>
             <a:endParaRPr lang="en-MY"/>
           </a:p>
@@ -1632,114 +1849,6 @@
     <p:extLst>
       <p:ext uri="{BB962C8B-B14F-4D97-AF65-F5344CB8AC3E}">
         <p14:creationId xmlns:p14="http://schemas.microsoft.com/office/powerpoint/2010/main" val="2926556692"/>
-      </p:ext>
-    </p:extLst>
-  </p:cSld>
-  <p:clrMapOvr>
-    <a:masterClrMapping/>
-  </p:clrMapOvr>
-</p:notes>
-</file>
-
-<file path=ppt/notesSlides/notesSlide9.xml><?xml version="1.0" encoding="utf-8"?>
-<p:notes xmlns:a="http://schemas.openxmlformats.org/drawingml/2006/main" xmlns:r="http://schemas.openxmlformats.org/officeDocument/2006/relationships" xmlns:p="http://schemas.openxmlformats.org/presentationml/2006/main">
-  <p:cSld>
-    <p:spTree>
-      <p:nvGrpSpPr>
-        <p:cNvPr id="1" name="">
-          <a:extLst>
-            <a:ext uri="{FF2B5EF4-FFF2-40B4-BE49-F238E27FC236}">
-              <a16:creationId xmlns:a16="http://schemas.microsoft.com/office/drawing/2014/main" id="{9C44BB0E-3305-ACF4-B9DB-3771A05F8201}"/>
-            </a:ext>
-          </a:extLst>
-        </p:cNvPr>
-        <p:cNvGrpSpPr/>
-        <p:nvPr/>
-      </p:nvGrpSpPr>
-      <p:grpSpPr>
-        <a:xfrm>
-          <a:off x="0" y="0"/>
-          <a:ext cx="0" cy="0"/>
-          <a:chOff x="0" y="0"/>
-          <a:chExt cx="0" cy="0"/>
-        </a:xfrm>
-      </p:grpSpPr>
-      <p:sp>
-        <p:nvSpPr>
-          <p:cNvPr id="2" name="Slide Image Placeholder 1">
-            <a:extLst>
-              <a:ext uri="{FF2B5EF4-FFF2-40B4-BE49-F238E27FC236}">
-                <a16:creationId xmlns:a16="http://schemas.microsoft.com/office/drawing/2014/main" id="{F125AB61-A186-C05A-CE87-0AAC4CACF4E9}"/>
-              </a:ext>
-            </a:extLst>
-          </p:cNvPr>
-          <p:cNvSpPr>
-            <a:spLocks noGrp="1" noRot="1" noChangeAspect="1"/>
-          </p:cNvSpPr>
-          <p:nvPr>
-            <p:ph type="sldImg"/>
-          </p:nvPr>
-        </p:nvSpPr>
-        <p:spPr/>
-      </p:sp>
-      <p:sp>
-        <p:nvSpPr>
-          <p:cNvPr id="3" name="Notes Placeholder 2">
-            <a:extLst>
-              <a:ext uri="{FF2B5EF4-FFF2-40B4-BE49-F238E27FC236}">
-                <a16:creationId xmlns:a16="http://schemas.microsoft.com/office/drawing/2014/main" id="{35039EA4-5C53-1F6E-2F8C-EEDBDF608C48}"/>
-              </a:ext>
-            </a:extLst>
-          </p:cNvPr>
-          <p:cNvSpPr>
-            <a:spLocks noGrp="1"/>
-          </p:cNvSpPr>
-          <p:nvPr>
-            <p:ph type="body" idx="1"/>
-          </p:nvPr>
-        </p:nvSpPr>
-        <p:spPr/>
-        <p:txBody>
-          <a:bodyPr/>
-          <a:lstStyle/>
-          <a:p>
-            <a:endParaRPr lang="en-MY" dirty="0"/>
-          </a:p>
-        </p:txBody>
-      </p:sp>
-      <p:sp>
-        <p:nvSpPr>
-          <p:cNvPr id="4" name="Slide Number Placeholder 3">
-            <a:extLst>
-              <a:ext uri="{FF2B5EF4-FFF2-40B4-BE49-F238E27FC236}">
-                <a16:creationId xmlns:a16="http://schemas.microsoft.com/office/drawing/2014/main" id="{6DE186D5-1C82-55C9-9C81-848494B232E8}"/>
-              </a:ext>
-            </a:extLst>
-          </p:cNvPr>
-          <p:cNvSpPr>
-            <a:spLocks noGrp="1"/>
-          </p:cNvSpPr>
-          <p:nvPr>
-            <p:ph type="sldNum" sz="quarter" idx="5"/>
-          </p:nvPr>
-        </p:nvSpPr>
-        <p:spPr/>
-        <p:txBody>
-          <a:bodyPr/>
-          <a:lstStyle/>
-          <a:p>
-            <a:fld id="{D16833E0-5E66-4D1D-89F5-BD860FDD8F71}" type="slidenum">
-              <a:rPr lang="en-MY" smtClean="0"/>
-              <a:t>10</a:t>
-            </a:fld>
-            <a:endParaRPr lang="en-MY"/>
-          </a:p>
-        </p:txBody>
-      </p:sp>
-    </p:spTree>
-    <p:extLst>
-      <p:ext uri="{BB962C8B-B14F-4D97-AF65-F5344CB8AC3E}">
-        <p14:creationId xmlns:p14="http://schemas.microsoft.com/office/powerpoint/2010/main" val="1118155047"/>
       </p:ext>
     </p:extLst>
   </p:cSld>
@@ -1920,7 +2029,7 @@
           <a:p>
             <a:fld id="{1CD01395-AC05-405C-BAB9-E5D2B9FDBB40}" type="datetimeFigureOut">
               <a:rPr lang="en-MY" smtClean="0"/>
-              <a:t>23/4/2026</a:t>
+              <a:t>27/4/2026</a:t>
             </a:fld>
             <a:endParaRPr lang="en-MY"/>
           </a:p>
@@ -2235,7 +2344,7 @@
           <a:p>
             <a:fld id="{1CD01395-AC05-405C-BAB9-E5D2B9FDBB40}" type="datetimeFigureOut">
               <a:rPr lang="en-MY" smtClean="0"/>
-              <a:t>23/4/2026</a:t>
+              <a:t>27/4/2026</a:t>
             </a:fld>
             <a:endParaRPr lang="en-MY"/>
           </a:p>
@@ -2457,7 +2566,7 @@
           <a:p>
             <a:fld id="{1CD01395-AC05-405C-BAB9-E5D2B9FDBB40}" type="datetimeFigureOut">
               <a:rPr lang="en-MY" smtClean="0"/>
-              <a:t>23/4/2026</a:t>
+              <a:t>27/4/2026</a:t>
             </a:fld>
             <a:endParaRPr lang="en-MY"/>
           </a:p>
@@ -2748,7 +2857,7 @@
           <a:p>
             <a:fld id="{1CD01395-AC05-405C-BAB9-E5D2B9FDBB40}" type="datetimeFigureOut">
               <a:rPr lang="en-MY" smtClean="0"/>
-              <a:t>23/4/2026</a:t>
+              <a:t>27/4/2026</a:t>
             </a:fld>
             <a:endParaRPr lang="en-MY"/>
           </a:p>
@@ -3202,7 +3311,7 @@
           <a:p>
             <a:fld id="{1CD01395-AC05-405C-BAB9-E5D2B9FDBB40}" type="datetimeFigureOut">
               <a:rPr lang="en-MY" smtClean="0"/>
-              <a:t>23/4/2026</a:t>
+              <a:t>27/4/2026</a:t>
             </a:fld>
             <a:endParaRPr lang="en-MY"/>
           </a:p>
@@ -3778,7 +3887,7 @@
           <a:p>
             <a:fld id="{1CD01395-AC05-405C-BAB9-E5D2B9FDBB40}" type="datetimeFigureOut">
               <a:rPr lang="en-MY" smtClean="0"/>
-              <a:t>23/4/2026</a:t>
+              <a:t>27/4/2026</a:t>
             </a:fld>
             <a:endParaRPr lang="en-MY"/>
           </a:p>
@@ -4639,7 +4748,7 @@
           <a:p>
             <a:fld id="{1CD01395-AC05-405C-BAB9-E5D2B9FDBB40}" type="datetimeFigureOut">
               <a:rPr lang="en-MY" smtClean="0"/>
-              <a:t>23/4/2026</a:t>
+              <a:t>27/4/2026</a:t>
             </a:fld>
             <a:endParaRPr lang="en-MY"/>
           </a:p>
@@ -4844,7 +4953,7 @@
           <a:p>
             <a:fld id="{1CD01395-AC05-405C-BAB9-E5D2B9FDBB40}" type="datetimeFigureOut">
               <a:rPr lang="en-MY" smtClean="0"/>
-              <a:t>23/4/2026</a:t>
+              <a:t>27/4/2026</a:t>
             </a:fld>
             <a:endParaRPr lang="en-MY"/>
           </a:p>
@@ -5058,7 +5167,7 @@
           <a:p>
             <a:fld id="{1CD01395-AC05-405C-BAB9-E5D2B9FDBB40}" type="datetimeFigureOut">
               <a:rPr lang="en-MY" smtClean="0"/>
-              <a:t>23/4/2026</a:t>
+              <a:t>27/4/2026</a:t>
             </a:fld>
             <a:endParaRPr lang="en-MY"/>
           </a:p>
@@ -5263,7 +5372,7 @@
           <a:p>
             <a:fld id="{1CD01395-AC05-405C-BAB9-E5D2B9FDBB40}" type="datetimeFigureOut">
               <a:rPr lang="en-MY" smtClean="0"/>
-              <a:t>23/4/2026</a:t>
+              <a:t>27/4/2026</a:t>
             </a:fld>
             <a:endParaRPr lang="en-MY"/>
           </a:p>
@@ -5543,7 +5652,7 @@
           <a:p>
             <a:fld id="{1CD01395-AC05-405C-BAB9-E5D2B9FDBB40}" type="datetimeFigureOut">
               <a:rPr lang="en-MY" smtClean="0"/>
-              <a:t>23/4/2026</a:t>
+              <a:t>27/4/2026</a:t>
             </a:fld>
             <a:endParaRPr lang="en-MY"/>
           </a:p>
@@ -5810,7 +5919,7 @@
           <a:p>
             <a:fld id="{1CD01395-AC05-405C-BAB9-E5D2B9FDBB40}" type="datetimeFigureOut">
               <a:rPr lang="en-MY" smtClean="0"/>
-              <a:t>23/4/2026</a:t>
+              <a:t>27/4/2026</a:t>
             </a:fld>
             <a:endParaRPr lang="en-MY"/>
           </a:p>
@@ -6225,7 +6334,7 @@
           <a:p>
             <a:fld id="{1CD01395-AC05-405C-BAB9-E5D2B9FDBB40}" type="datetimeFigureOut">
               <a:rPr lang="en-MY" smtClean="0"/>
-              <a:t>23/4/2026</a:t>
+              <a:t>27/4/2026</a:t>
             </a:fld>
             <a:endParaRPr lang="en-MY"/>
           </a:p>
@@ -6373,7 +6482,7 @@
           <a:p>
             <a:fld id="{1CD01395-AC05-405C-BAB9-E5D2B9FDBB40}" type="datetimeFigureOut">
               <a:rPr lang="en-MY" smtClean="0"/>
-              <a:t>23/4/2026</a:t>
+              <a:t>27/4/2026</a:t>
             </a:fld>
             <a:endParaRPr lang="en-MY"/>
           </a:p>
@@ -6498,7 +6607,7 @@
           <a:p>
             <a:fld id="{1CD01395-AC05-405C-BAB9-E5D2B9FDBB40}" type="datetimeFigureOut">
               <a:rPr lang="en-MY" smtClean="0"/>
-              <a:t>23/4/2026</a:t>
+              <a:t>27/4/2026</a:t>
             </a:fld>
             <a:endParaRPr lang="en-MY"/>
           </a:p>
@@ -6777,7 +6886,7 @@
           <a:p>
             <a:fld id="{1CD01395-AC05-405C-BAB9-E5D2B9FDBB40}" type="datetimeFigureOut">
               <a:rPr lang="en-MY" smtClean="0"/>
-              <a:t>23/4/2026</a:t>
+              <a:t>27/4/2026</a:t>
             </a:fld>
             <a:endParaRPr lang="en-MY"/>
           </a:p>
@@ -7092,7 +7201,7 @@
           <a:p>
             <a:fld id="{1CD01395-AC05-405C-BAB9-E5D2B9FDBB40}" type="datetimeFigureOut">
               <a:rPr lang="en-MY" smtClean="0"/>
-              <a:t>23/4/2026</a:t>
+              <a:t>27/4/2026</a:t>
             </a:fld>
             <a:endParaRPr lang="en-MY"/>
           </a:p>
@@ -7345,7 +7454,7 @@
           <a:p>
             <a:fld id="{1CD01395-AC05-405C-BAB9-E5D2B9FDBB40}" type="datetimeFigureOut">
               <a:rPr lang="en-MY" smtClean="0"/>
-              <a:t>23/4/2026</a:t>
+              <a:t>27/4/2026</a:t>
             </a:fld>
             <a:endParaRPr lang="en-MY"/>
           </a:p>
@@ -7882,6 +7991,101 @@
         <p:cNvPr id="1" name="">
           <a:extLst>
             <a:ext uri="{FF2B5EF4-FFF2-40B4-BE49-F238E27FC236}">
+              <a16:creationId xmlns:a16="http://schemas.microsoft.com/office/drawing/2014/main" id="{07E4B138-F79B-3190-6C13-DD914FBA320A}"/>
+            </a:ext>
+          </a:extLst>
+        </p:cNvPr>
+        <p:cNvGrpSpPr/>
+        <p:nvPr/>
+      </p:nvGrpSpPr>
+      <p:grpSpPr>
+        <a:xfrm>
+          <a:off x="0" y="0"/>
+          <a:ext cx="0" cy="0"/>
+          <a:chOff x="0" y="0"/>
+          <a:chExt cx="0" cy="0"/>
+        </a:xfrm>
+      </p:grpSpPr>
+      <p:sp>
+        <p:nvSpPr>
+          <p:cNvPr id="4" name="Rectangle 3">
+            <a:extLst>
+              <a:ext uri="{FF2B5EF4-FFF2-40B4-BE49-F238E27FC236}">
+                <a16:creationId xmlns:a16="http://schemas.microsoft.com/office/drawing/2014/main" id="{096F011D-CEEF-7433-5524-F23B10ACF13E}"/>
+              </a:ext>
+            </a:extLst>
+          </p:cNvPr>
+          <p:cNvSpPr/>
+          <p:nvPr/>
+        </p:nvSpPr>
+        <p:spPr>
+          <a:xfrm>
+            <a:off x="3964564" y="2276475"/>
+            <a:ext cx="4074536" cy="1587509"/>
+          </a:xfrm>
+          <a:prstGeom prst="rect">
+            <a:avLst/>
+          </a:prstGeom>
+          <a:noFill/>
+          <a:ln>
+            <a:noFill/>
+          </a:ln>
+        </p:spPr>
+        <p:style>
+          <a:lnRef idx="2">
+            <a:schemeClr val="accent6"/>
+          </a:lnRef>
+          <a:fillRef idx="1">
+            <a:schemeClr val="lt1"/>
+          </a:fillRef>
+          <a:effectRef idx="0">
+            <a:schemeClr val="accent6"/>
+          </a:effectRef>
+          <a:fontRef idx="minor">
+            <a:schemeClr val="dk1"/>
+          </a:fontRef>
+        </p:style>
+        <p:txBody>
+          <a:bodyPr rtlCol="0" anchor="ctr"/>
+          <a:lstStyle/>
+          <a:p>
+            <a:pPr algn="ctr"/>
+            <a:r>
+              <a:rPr lang="en-MY" sz="4800" dirty="0"/>
+              <a:t>DATASET</a:t>
+            </a:r>
+          </a:p>
+        </p:txBody>
+      </p:sp>
+    </p:spTree>
+    <p:extLst>
+      <p:ext uri="{BB962C8B-B14F-4D97-AF65-F5344CB8AC3E}">
+        <p14:creationId xmlns:p14="http://schemas.microsoft.com/office/powerpoint/2010/main" val="2967482216"/>
+      </p:ext>
+    </p:extLst>
+  </p:cSld>
+  <p:clrMapOvr>
+    <a:masterClrMapping/>
+  </p:clrMapOvr>
+</p:sld>
+</file>
+
+<file path=ppt/slides/slide11.xml><?xml version="1.0" encoding="utf-8"?>
+<p:sld xmlns:a="http://schemas.openxmlformats.org/drawingml/2006/main" xmlns:r="http://schemas.openxmlformats.org/officeDocument/2006/relationships" xmlns:p="http://schemas.openxmlformats.org/presentationml/2006/main" showMasterSp="0">
+  <p:cSld>
+    <p:bg>
+      <p:bgPr>
+        <a:solidFill>
+          <a:srgbClr val="CDF6F9"/>
+        </a:solidFill>
+        <a:effectLst/>
+      </p:bgPr>
+    </p:bg>
+    <p:spTree>
+      <p:nvGrpSpPr>
+        <p:cNvPr id="1" name="">
+          <a:extLst>
+            <a:ext uri="{FF2B5EF4-FFF2-40B4-BE49-F238E27FC236}">
               <a16:creationId xmlns:a16="http://schemas.microsoft.com/office/drawing/2014/main" id="{9EFF50E8-C2B0-9D88-2CE4-13199422C558}"/>
             </a:ext>
           </a:extLst>
@@ -8105,7 +8309,7 @@
 </p:sld>
 </file>
 
-<file path=ppt/slides/slide11.xml><?xml version="1.0" encoding="utf-8"?>
+<file path=ppt/slides/slide12.xml><?xml version="1.0" encoding="utf-8"?>
 <p:sld xmlns:a="http://schemas.openxmlformats.org/drawingml/2006/main" xmlns:r="http://schemas.openxmlformats.org/officeDocument/2006/relationships" xmlns:p="http://schemas.openxmlformats.org/presentationml/2006/main" showMasterSp="0">
   <p:cSld>
     <p:bg>
@@ -8335,7 +8539,7 @@
 </p:sld>
 </file>
 
-<file path=ppt/slides/slide12.xml><?xml version="1.0" encoding="utf-8"?>
+<file path=ppt/slides/slide13.xml><?xml version="1.0" encoding="utf-8"?>
 <p:sld xmlns:a="http://schemas.openxmlformats.org/drawingml/2006/main" xmlns:r="http://schemas.openxmlformats.org/officeDocument/2006/relationships" xmlns:p="http://schemas.openxmlformats.org/presentationml/2006/main" showMasterSp="0">
   <p:cSld>
     <p:bg>
@@ -8522,7 +8726,7 @@
 </p:sld>
 </file>
 
-<file path=ppt/slides/slide13.xml><?xml version="1.0" encoding="utf-8"?>
+<file path=ppt/slides/slide14.xml><?xml version="1.0" encoding="utf-8"?>
 <p:sld xmlns:a="http://schemas.openxmlformats.org/drawingml/2006/main" xmlns:r="http://schemas.openxmlformats.org/officeDocument/2006/relationships" xmlns:p="http://schemas.openxmlformats.org/presentationml/2006/main" showMasterSp="0">
   <p:cSld>
     <p:bg>
@@ -10583,6 +10787,80 @@
 </file>
 
 <file path=ppt/slides/slide5.xml><?xml version="1.0" encoding="utf-8"?>
+<p:sld xmlns:a="http://schemas.openxmlformats.org/drawingml/2006/main" xmlns:r="http://schemas.openxmlformats.org/officeDocument/2006/relationships" xmlns:p="http://schemas.openxmlformats.org/presentationml/2006/main" showMasterSp="0">
+  <p:cSld>
+    <p:bg>
+      <p:bgPr>
+        <a:solidFill>
+          <a:srgbClr val="CDF6F9"/>
+        </a:solidFill>
+        <a:effectLst/>
+      </p:bgPr>
+    </p:bg>
+    <p:spTree>
+      <p:nvGrpSpPr>
+        <p:cNvPr id="1" name="">
+          <a:extLst>
+            <a:ext uri="{FF2B5EF4-FFF2-40B4-BE49-F238E27FC236}">
+              <a16:creationId xmlns:a16="http://schemas.microsoft.com/office/drawing/2014/main" id="{7F2C4EC8-5B76-523F-ED3F-BC66B74B0733}"/>
+            </a:ext>
+          </a:extLst>
+        </p:cNvPr>
+        <p:cNvGrpSpPr/>
+        <p:nvPr/>
+      </p:nvGrpSpPr>
+      <p:grpSpPr>
+        <a:xfrm>
+          <a:off x="0" y="0"/>
+          <a:ext cx="0" cy="0"/>
+          <a:chOff x="0" y="0"/>
+          <a:chExt cx="0" cy="0"/>
+        </a:xfrm>
+      </p:grpSpPr>
+      <p:pic>
+        <p:nvPicPr>
+          <p:cNvPr id="4" name="Picture 3">
+            <a:extLst>
+              <a:ext uri="{FF2B5EF4-FFF2-40B4-BE49-F238E27FC236}">
+                <a16:creationId xmlns:a16="http://schemas.microsoft.com/office/drawing/2014/main" id="{810480DF-968A-2171-73C4-16EEF11F55E8}"/>
+              </a:ext>
+            </a:extLst>
+          </p:cNvPr>
+          <p:cNvPicPr>
+            <a:picLocks noChangeAspect="1"/>
+          </p:cNvPicPr>
+          <p:nvPr/>
+        </p:nvPicPr>
+        <p:blipFill>
+          <a:blip r:embed="rId3"/>
+          <a:stretch>
+            <a:fillRect/>
+          </a:stretch>
+        </p:blipFill>
+        <p:spPr>
+          <a:xfrm>
+            <a:off x="867707" y="2356149"/>
+            <a:ext cx="10456586" cy="1981110"/>
+          </a:xfrm>
+          <a:prstGeom prst="rect">
+            <a:avLst/>
+          </a:prstGeom>
+        </p:spPr>
+      </p:pic>
+    </p:spTree>
+    <p:extLst>
+      <p:ext uri="{BB962C8B-B14F-4D97-AF65-F5344CB8AC3E}">
+        <p14:creationId xmlns:p14="http://schemas.microsoft.com/office/powerpoint/2010/main" val="3425137762"/>
+      </p:ext>
+    </p:extLst>
+  </p:cSld>
+  <p:clrMapOvr>
+    <a:masterClrMapping/>
+  </p:clrMapOvr>
+</p:sld>
+</file>
+
+<file path=ppt/slides/slide6.xml><?xml version="1.0" encoding="utf-8"?>
 <p:sld xmlns:a="http://schemas.openxmlformats.org/drawingml/2006/main" xmlns:r="http://schemas.openxmlformats.org/officeDocument/2006/relationships" xmlns:p="http://schemas.openxmlformats.org/presentationml/2006/main" showMasterSp="0">
   <p:cSld>
     <p:bg>
@@ -12239,7 +12517,7 @@
 </p:sld>
 </file>
 
-<file path=ppt/slides/slide6.xml><?xml version="1.0" encoding="utf-8"?>
+<file path=ppt/slides/slide7.xml><?xml version="1.0" encoding="utf-8"?>
 <p:sld xmlns:a="http://schemas.openxmlformats.org/drawingml/2006/main" xmlns:r="http://schemas.openxmlformats.org/officeDocument/2006/relationships" xmlns:p="http://schemas.openxmlformats.org/presentationml/2006/main" showMasterSp="0">
   <p:cSld>
     <p:bg>
@@ -13634,7 +13912,7 @@
 </p:sld>
 </file>
 
-<file path=ppt/slides/slide7.xml><?xml version="1.0" encoding="utf-8"?>
+<file path=ppt/slides/slide8.xml><?xml version="1.0" encoding="utf-8"?>
 <p:sld xmlns:a="http://schemas.openxmlformats.org/drawingml/2006/main" xmlns:r="http://schemas.openxmlformats.org/officeDocument/2006/relationships" xmlns:p="http://schemas.openxmlformats.org/presentationml/2006/main" showMasterSp="0">
   <p:cSld>
     <p:bg>
@@ -13729,7 +14007,7 @@
 </p:sld>
 </file>
 
-<file path=ppt/slides/slide8.xml><?xml version="1.0" encoding="utf-8"?>
+<file path=ppt/slides/slide9.xml><?xml version="1.0" encoding="utf-8"?>
 <p:sld xmlns:a="http://schemas.openxmlformats.org/drawingml/2006/main" xmlns:r="http://schemas.openxmlformats.org/officeDocument/2006/relationships" xmlns:p="http://schemas.openxmlformats.org/presentationml/2006/main" showMasterSp="0">
   <p:cSld>
     <p:bg>
@@ -14336,101 +14614,6 @@
     <p:extLst>
       <p:ext uri="{BB962C8B-B14F-4D97-AF65-F5344CB8AC3E}">
         <p14:creationId xmlns:p14="http://schemas.microsoft.com/office/powerpoint/2010/main" val="2413008996"/>
-      </p:ext>
-    </p:extLst>
-  </p:cSld>
-  <p:clrMapOvr>
-    <a:masterClrMapping/>
-  </p:clrMapOvr>
-</p:sld>
-</file>
-
-<file path=ppt/slides/slide9.xml><?xml version="1.0" encoding="utf-8"?>
-<p:sld xmlns:a="http://schemas.openxmlformats.org/drawingml/2006/main" xmlns:r="http://schemas.openxmlformats.org/officeDocument/2006/relationships" xmlns:p="http://schemas.openxmlformats.org/presentationml/2006/main" showMasterSp="0">
-  <p:cSld>
-    <p:bg>
-      <p:bgPr>
-        <a:solidFill>
-          <a:srgbClr val="CDF6F9"/>
-        </a:solidFill>
-        <a:effectLst/>
-      </p:bgPr>
-    </p:bg>
-    <p:spTree>
-      <p:nvGrpSpPr>
-        <p:cNvPr id="1" name="">
-          <a:extLst>
-            <a:ext uri="{FF2B5EF4-FFF2-40B4-BE49-F238E27FC236}">
-              <a16:creationId xmlns:a16="http://schemas.microsoft.com/office/drawing/2014/main" id="{07E4B138-F79B-3190-6C13-DD914FBA320A}"/>
-            </a:ext>
-          </a:extLst>
-        </p:cNvPr>
-        <p:cNvGrpSpPr/>
-        <p:nvPr/>
-      </p:nvGrpSpPr>
-      <p:grpSpPr>
-        <a:xfrm>
-          <a:off x="0" y="0"/>
-          <a:ext cx="0" cy="0"/>
-          <a:chOff x="0" y="0"/>
-          <a:chExt cx="0" cy="0"/>
-        </a:xfrm>
-      </p:grpSpPr>
-      <p:sp>
-        <p:nvSpPr>
-          <p:cNvPr id="4" name="Rectangle 3">
-            <a:extLst>
-              <a:ext uri="{FF2B5EF4-FFF2-40B4-BE49-F238E27FC236}">
-                <a16:creationId xmlns:a16="http://schemas.microsoft.com/office/drawing/2014/main" id="{096F011D-CEEF-7433-5524-F23B10ACF13E}"/>
-              </a:ext>
-            </a:extLst>
-          </p:cNvPr>
-          <p:cNvSpPr/>
-          <p:nvPr/>
-        </p:nvSpPr>
-        <p:spPr>
-          <a:xfrm>
-            <a:off x="3964564" y="2276475"/>
-            <a:ext cx="4074536" cy="1587509"/>
-          </a:xfrm>
-          <a:prstGeom prst="rect">
-            <a:avLst/>
-          </a:prstGeom>
-          <a:noFill/>
-          <a:ln>
-            <a:noFill/>
-          </a:ln>
-        </p:spPr>
-        <p:style>
-          <a:lnRef idx="2">
-            <a:schemeClr val="accent6"/>
-          </a:lnRef>
-          <a:fillRef idx="1">
-            <a:schemeClr val="lt1"/>
-          </a:fillRef>
-          <a:effectRef idx="0">
-            <a:schemeClr val="accent6"/>
-          </a:effectRef>
-          <a:fontRef idx="minor">
-            <a:schemeClr val="dk1"/>
-          </a:fontRef>
-        </p:style>
-        <p:txBody>
-          <a:bodyPr rtlCol="0" anchor="ctr"/>
-          <a:lstStyle/>
-          <a:p>
-            <a:pPr algn="ctr"/>
-            <a:r>
-              <a:rPr lang="en-MY" sz="4800" dirty="0"/>
-              <a:t>DATASET</a:t>
-            </a:r>
-          </a:p>
-        </p:txBody>
-      </p:sp>
-    </p:spTree>
-    <p:extLst>
-      <p:ext uri="{BB962C8B-B14F-4D97-AF65-F5344CB8AC3E}">
-        <p14:creationId xmlns:p14="http://schemas.microsoft.com/office/powerpoint/2010/main" val="2967482216"/>
       </p:ext>
     </p:extLst>
   </p:cSld>

--- a/1.training_model/slide_presentation/Device Identifier 20260414.pptx
+++ b/1.training_model/slide_presentation/Device Identifier 20260414.pptx
@@ -5,23 +5,27 @@
     <p:sldMasterId id="2147483696" r:id="rId1"/>
   </p:sldMasterIdLst>
   <p:notesMasterIdLst>
-    <p:notesMasterId r:id="rId16"/>
+    <p:notesMasterId r:id="rId20"/>
   </p:notesMasterIdLst>
   <p:sldIdLst>
     <p:sldId id="256" r:id="rId2"/>
     <p:sldId id="292" r:id="rId3"/>
     <p:sldId id="323" r:id="rId4"/>
     <p:sldId id="324" r:id="rId5"/>
-    <p:sldId id="325" r:id="rId6"/>
-    <p:sldId id="322" r:id="rId7"/>
-    <p:sldId id="321" r:id="rId8"/>
-    <p:sldId id="308" r:id="rId9"/>
-    <p:sldId id="318" r:id="rId10"/>
-    <p:sldId id="319" r:id="rId11"/>
-    <p:sldId id="315" r:id="rId12"/>
-    <p:sldId id="317" r:id="rId13"/>
-    <p:sldId id="313" r:id="rId14"/>
-    <p:sldId id="316" r:id="rId15"/>
+    <p:sldId id="326" r:id="rId6"/>
+    <p:sldId id="325" r:id="rId7"/>
+    <p:sldId id="329" r:id="rId8"/>
+    <p:sldId id="328" r:id="rId9"/>
+    <p:sldId id="327" r:id="rId10"/>
+    <p:sldId id="322" r:id="rId11"/>
+    <p:sldId id="321" r:id="rId12"/>
+    <p:sldId id="308" r:id="rId13"/>
+    <p:sldId id="318" r:id="rId14"/>
+    <p:sldId id="319" r:id="rId15"/>
+    <p:sldId id="315" r:id="rId16"/>
+    <p:sldId id="317" r:id="rId17"/>
+    <p:sldId id="313" r:id="rId18"/>
+    <p:sldId id="316" r:id="rId19"/>
   </p:sldIdLst>
   <p:sldSz cx="12192000" cy="6858000"/>
   <p:notesSz cx="6858000" cy="9144000"/>
@@ -210,7 +214,7 @@
           <a:p>
             <a:fld id="{23D8B80A-F233-4240-BDAF-6537AE249829}" type="datetimeFigureOut">
               <a:rPr lang="en-MY" smtClean="0"/>
-              <a:t>27/4/2026</a:t>
+              <a:t>30/4/2026</a:t>
             </a:fld>
             <a:endParaRPr lang="en-MY"/>
           </a:p>
@@ -570,6 +574,438 @@
         <p:cNvPr id="1" name="">
           <a:extLst>
             <a:ext uri="{FF2B5EF4-FFF2-40B4-BE49-F238E27FC236}">
+              <a16:creationId xmlns:a16="http://schemas.microsoft.com/office/drawing/2014/main" id="{C3584F9D-DF34-D68D-5A96-B29CB925814B}"/>
+            </a:ext>
+          </a:extLst>
+        </p:cNvPr>
+        <p:cNvGrpSpPr/>
+        <p:nvPr/>
+      </p:nvGrpSpPr>
+      <p:grpSpPr>
+        <a:xfrm>
+          <a:off x="0" y="0"/>
+          <a:ext cx="0" cy="0"/>
+          <a:chOff x="0" y="0"/>
+          <a:chExt cx="0" cy="0"/>
+        </a:xfrm>
+      </p:grpSpPr>
+      <p:sp>
+        <p:nvSpPr>
+          <p:cNvPr id="2" name="Slide Image Placeholder 1">
+            <a:extLst>
+              <a:ext uri="{FF2B5EF4-FFF2-40B4-BE49-F238E27FC236}">
+                <a16:creationId xmlns:a16="http://schemas.microsoft.com/office/drawing/2014/main" id="{AA443717-5F7A-19C6-C199-39BC97677BF0}"/>
+              </a:ext>
+            </a:extLst>
+          </p:cNvPr>
+          <p:cNvSpPr>
+            <a:spLocks noGrp="1" noRot="1" noChangeAspect="1"/>
+          </p:cNvSpPr>
+          <p:nvPr>
+            <p:ph type="sldImg"/>
+          </p:nvPr>
+        </p:nvSpPr>
+        <p:spPr/>
+      </p:sp>
+      <p:sp>
+        <p:nvSpPr>
+          <p:cNvPr id="3" name="Notes Placeholder 2">
+            <a:extLst>
+              <a:ext uri="{FF2B5EF4-FFF2-40B4-BE49-F238E27FC236}">
+                <a16:creationId xmlns:a16="http://schemas.microsoft.com/office/drawing/2014/main" id="{69277B9B-7E4F-4D34-F255-5FDBC89B62D9}"/>
+              </a:ext>
+            </a:extLst>
+          </p:cNvPr>
+          <p:cNvSpPr>
+            <a:spLocks noGrp="1"/>
+          </p:cNvSpPr>
+          <p:nvPr>
+            <p:ph type="body" idx="1"/>
+          </p:nvPr>
+        </p:nvSpPr>
+        <p:spPr/>
+        <p:txBody>
+          <a:bodyPr/>
+          <a:lstStyle/>
+          <a:p>
+            <a:endParaRPr lang="en-MY" dirty="0"/>
+          </a:p>
+        </p:txBody>
+      </p:sp>
+      <p:sp>
+        <p:nvSpPr>
+          <p:cNvPr id="4" name="Slide Number Placeholder 3">
+            <a:extLst>
+              <a:ext uri="{FF2B5EF4-FFF2-40B4-BE49-F238E27FC236}">
+                <a16:creationId xmlns:a16="http://schemas.microsoft.com/office/drawing/2014/main" id="{9B881C03-D632-C4F9-D6AE-2D2C18AAAB26}"/>
+              </a:ext>
+            </a:extLst>
+          </p:cNvPr>
+          <p:cNvSpPr>
+            <a:spLocks noGrp="1"/>
+          </p:cNvSpPr>
+          <p:nvPr>
+            <p:ph type="sldNum" sz="quarter" idx="5"/>
+          </p:nvPr>
+        </p:nvSpPr>
+        <p:spPr/>
+        <p:txBody>
+          <a:bodyPr/>
+          <a:lstStyle/>
+          <a:p>
+            <a:fld id="{D16833E0-5E66-4D1D-89F5-BD860FDD8F71}" type="slidenum">
+              <a:rPr lang="en-MY" smtClean="0"/>
+              <a:t>11</a:t>
+            </a:fld>
+            <a:endParaRPr lang="en-MY"/>
+          </a:p>
+        </p:txBody>
+      </p:sp>
+    </p:spTree>
+    <p:extLst>
+      <p:ext uri="{BB962C8B-B14F-4D97-AF65-F5344CB8AC3E}">
+        <p14:creationId xmlns:p14="http://schemas.microsoft.com/office/powerpoint/2010/main" val="4210462848"/>
+      </p:ext>
+    </p:extLst>
+  </p:cSld>
+  <p:clrMapOvr>
+    <a:masterClrMapping/>
+  </p:clrMapOvr>
+</p:notes>
+</file>
+
+<file path=ppt/notesSlides/notesSlide11.xml><?xml version="1.0" encoding="utf-8"?>
+<p:notes xmlns:a="http://schemas.openxmlformats.org/drawingml/2006/main" xmlns:r="http://schemas.openxmlformats.org/officeDocument/2006/relationships" xmlns:p="http://schemas.openxmlformats.org/presentationml/2006/main">
+  <p:cSld>
+    <p:spTree>
+      <p:nvGrpSpPr>
+        <p:cNvPr id="1" name="">
+          <a:extLst>
+            <a:ext uri="{FF2B5EF4-FFF2-40B4-BE49-F238E27FC236}">
+              <a16:creationId xmlns:a16="http://schemas.microsoft.com/office/drawing/2014/main" id="{3B1F4DAA-70A6-619B-B882-53C351F21905}"/>
+            </a:ext>
+          </a:extLst>
+        </p:cNvPr>
+        <p:cNvGrpSpPr/>
+        <p:nvPr/>
+      </p:nvGrpSpPr>
+      <p:grpSpPr>
+        <a:xfrm>
+          <a:off x="0" y="0"/>
+          <a:ext cx="0" cy="0"/>
+          <a:chOff x="0" y="0"/>
+          <a:chExt cx="0" cy="0"/>
+        </a:xfrm>
+      </p:grpSpPr>
+      <p:sp>
+        <p:nvSpPr>
+          <p:cNvPr id="2" name="Slide Image Placeholder 1">
+            <a:extLst>
+              <a:ext uri="{FF2B5EF4-FFF2-40B4-BE49-F238E27FC236}">
+                <a16:creationId xmlns:a16="http://schemas.microsoft.com/office/drawing/2014/main" id="{ADCDED79-13C1-8857-2F41-72B92A91978A}"/>
+              </a:ext>
+            </a:extLst>
+          </p:cNvPr>
+          <p:cNvSpPr>
+            <a:spLocks noGrp="1" noRot="1" noChangeAspect="1"/>
+          </p:cNvSpPr>
+          <p:nvPr>
+            <p:ph type="sldImg"/>
+          </p:nvPr>
+        </p:nvSpPr>
+        <p:spPr/>
+      </p:sp>
+      <p:sp>
+        <p:nvSpPr>
+          <p:cNvPr id="3" name="Notes Placeholder 2">
+            <a:extLst>
+              <a:ext uri="{FF2B5EF4-FFF2-40B4-BE49-F238E27FC236}">
+                <a16:creationId xmlns:a16="http://schemas.microsoft.com/office/drawing/2014/main" id="{A1E72453-B321-C6C9-71EE-DC448A0F510F}"/>
+              </a:ext>
+            </a:extLst>
+          </p:cNvPr>
+          <p:cNvSpPr>
+            <a:spLocks noGrp="1"/>
+          </p:cNvSpPr>
+          <p:nvPr>
+            <p:ph type="body" idx="1"/>
+          </p:nvPr>
+        </p:nvSpPr>
+        <p:spPr/>
+        <p:txBody>
+          <a:bodyPr/>
+          <a:lstStyle/>
+          <a:p>
+            <a:endParaRPr lang="en-MY" dirty="0"/>
+          </a:p>
+        </p:txBody>
+      </p:sp>
+      <p:sp>
+        <p:nvSpPr>
+          <p:cNvPr id="4" name="Slide Number Placeholder 3">
+            <a:extLst>
+              <a:ext uri="{FF2B5EF4-FFF2-40B4-BE49-F238E27FC236}">
+                <a16:creationId xmlns:a16="http://schemas.microsoft.com/office/drawing/2014/main" id="{2720399C-0CE2-CEC4-FD6D-A77A9605FC7B}"/>
+              </a:ext>
+            </a:extLst>
+          </p:cNvPr>
+          <p:cNvSpPr>
+            <a:spLocks noGrp="1"/>
+          </p:cNvSpPr>
+          <p:nvPr>
+            <p:ph type="sldNum" sz="quarter" idx="5"/>
+          </p:nvPr>
+        </p:nvSpPr>
+        <p:spPr/>
+        <p:txBody>
+          <a:bodyPr/>
+          <a:lstStyle/>
+          <a:p>
+            <a:fld id="{D16833E0-5E66-4D1D-89F5-BD860FDD8F71}" type="slidenum">
+              <a:rPr lang="en-MY" smtClean="0"/>
+              <a:t>12</a:t>
+            </a:fld>
+            <a:endParaRPr lang="en-MY"/>
+          </a:p>
+        </p:txBody>
+      </p:sp>
+    </p:spTree>
+    <p:extLst>
+      <p:ext uri="{BB962C8B-B14F-4D97-AF65-F5344CB8AC3E}">
+        <p14:creationId xmlns:p14="http://schemas.microsoft.com/office/powerpoint/2010/main" val="3525914453"/>
+      </p:ext>
+    </p:extLst>
+  </p:cSld>
+  <p:clrMapOvr>
+    <a:masterClrMapping/>
+  </p:clrMapOvr>
+</p:notes>
+</file>
+
+<file path=ppt/notesSlides/notesSlide12.xml><?xml version="1.0" encoding="utf-8"?>
+<p:notes xmlns:a="http://schemas.openxmlformats.org/drawingml/2006/main" xmlns:r="http://schemas.openxmlformats.org/officeDocument/2006/relationships" xmlns:p="http://schemas.openxmlformats.org/presentationml/2006/main">
+  <p:cSld>
+    <p:spTree>
+      <p:nvGrpSpPr>
+        <p:cNvPr id="1" name="">
+          <a:extLst>
+            <a:ext uri="{FF2B5EF4-FFF2-40B4-BE49-F238E27FC236}">
+              <a16:creationId xmlns:a16="http://schemas.microsoft.com/office/drawing/2014/main" id="{5CC92DFC-8109-DB30-B777-59AD008AB610}"/>
+            </a:ext>
+          </a:extLst>
+        </p:cNvPr>
+        <p:cNvGrpSpPr/>
+        <p:nvPr/>
+      </p:nvGrpSpPr>
+      <p:grpSpPr>
+        <a:xfrm>
+          <a:off x="0" y="0"/>
+          <a:ext cx="0" cy="0"/>
+          <a:chOff x="0" y="0"/>
+          <a:chExt cx="0" cy="0"/>
+        </a:xfrm>
+      </p:grpSpPr>
+      <p:sp>
+        <p:nvSpPr>
+          <p:cNvPr id="2" name="Slide Image Placeholder 1">
+            <a:extLst>
+              <a:ext uri="{FF2B5EF4-FFF2-40B4-BE49-F238E27FC236}">
+                <a16:creationId xmlns:a16="http://schemas.microsoft.com/office/drawing/2014/main" id="{A5EF552C-4C8D-1FC9-AC7B-00BDC2537DFB}"/>
+              </a:ext>
+            </a:extLst>
+          </p:cNvPr>
+          <p:cNvSpPr>
+            <a:spLocks noGrp="1" noRot="1" noChangeAspect="1"/>
+          </p:cNvSpPr>
+          <p:nvPr>
+            <p:ph type="sldImg"/>
+          </p:nvPr>
+        </p:nvSpPr>
+        <p:spPr/>
+      </p:sp>
+      <p:sp>
+        <p:nvSpPr>
+          <p:cNvPr id="3" name="Notes Placeholder 2">
+            <a:extLst>
+              <a:ext uri="{FF2B5EF4-FFF2-40B4-BE49-F238E27FC236}">
+                <a16:creationId xmlns:a16="http://schemas.microsoft.com/office/drawing/2014/main" id="{F55A7152-DC10-80C6-FE6C-1C4AA89990B8}"/>
+              </a:ext>
+            </a:extLst>
+          </p:cNvPr>
+          <p:cNvSpPr>
+            <a:spLocks noGrp="1"/>
+          </p:cNvSpPr>
+          <p:nvPr>
+            <p:ph type="body" idx="1"/>
+          </p:nvPr>
+        </p:nvSpPr>
+        <p:spPr/>
+        <p:txBody>
+          <a:bodyPr/>
+          <a:lstStyle/>
+          <a:p>
+            <a:endParaRPr lang="en-MY" dirty="0"/>
+          </a:p>
+        </p:txBody>
+      </p:sp>
+      <p:sp>
+        <p:nvSpPr>
+          <p:cNvPr id="4" name="Slide Number Placeholder 3">
+            <a:extLst>
+              <a:ext uri="{FF2B5EF4-FFF2-40B4-BE49-F238E27FC236}">
+                <a16:creationId xmlns:a16="http://schemas.microsoft.com/office/drawing/2014/main" id="{16E31090-AD71-A3D3-E914-D8C02CC5F817}"/>
+              </a:ext>
+            </a:extLst>
+          </p:cNvPr>
+          <p:cNvSpPr>
+            <a:spLocks noGrp="1"/>
+          </p:cNvSpPr>
+          <p:nvPr>
+            <p:ph type="sldNum" sz="quarter" idx="5"/>
+          </p:nvPr>
+        </p:nvSpPr>
+        <p:spPr/>
+        <p:txBody>
+          <a:bodyPr/>
+          <a:lstStyle/>
+          <a:p>
+            <a:fld id="{D16833E0-5E66-4D1D-89F5-BD860FDD8F71}" type="slidenum">
+              <a:rPr lang="en-MY" smtClean="0"/>
+              <a:t>13</a:t>
+            </a:fld>
+            <a:endParaRPr lang="en-MY"/>
+          </a:p>
+        </p:txBody>
+      </p:sp>
+    </p:spTree>
+    <p:extLst>
+      <p:ext uri="{BB962C8B-B14F-4D97-AF65-F5344CB8AC3E}">
+        <p14:creationId xmlns:p14="http://schemas.microsoft.com/office/powerpoint/2010/main" val="3596086676"/>
+      </p:ext>
+    </p:extLst>
+  </p:cSld>
+  <p:clrMapOvr>
+    <a:masterClrMapping/>
+  </p:clrMapOvr>
+</p:notes>
+</file>
+
+<file path=ppt/notesSlides/notesSlide13.xml><?xml version="1.0" encoding="utf-8"?>
+<p:notes xmlns:a="http://schemas.openxmlformats.org/drawingml/2006/main" xmlns:r="http://schemas.openxmlformats.org/officeDocument/2006/relationships" xmlns:p="http://schemas.openxmlformats.org/presentationml/2006/main">
+  <p:cSld>
+    <p:spTree>
+      <p:nvGrpSpPr>
+        <p:cNvPr id="1" name="">
+          <a:extLst>
+            <a:ext uri="{FF2B5EF4-FFF2-40B4-BE49-F238E27FC236}">
+              <a16:creationId xmlns:a16="http://schemas.microsoft.com/office/drawing/2014/main" id="{F918F35F-167D-DA30-7EF9-CB97D0CEA94C}"/>
+            </a:ext>
+          </a:extLst>
+        </p:cNvPr>
+        <p:cNvGrpSpPr/>
+        <p:nvPr/>
+      </p:nvGrpSpPr>
+      <p:grpSpPr>
+        <a:xfrm>
+          <a:off x="0" y="0"/>
+          <a:ext cx="0" cy="0"/>
+          <a:chOff x="0" y="0"/>
+          <a:chExt cx="0" cy="0"/>
+        </a:xfrm>
+      </p:grpSpPr>
+      <p:sp>
+        <p:nvSpPr>
+          <p:cNvPr id="2" name="Slide Image Placeholder 1">
+            <a:extLst>
+              <a:ext uri="{FF2B5EF4-FFF2-40B4-BE49-F238E27FC236}">
+                <a16:creationId xmlns:a16="http://schemas.microsoft.com/office/drawing/2014/main" id="{6F6C49EA-68AD-BF5D-54CF-28AD9EBD7FB6}"/>
+              </a:ext>
+            </a:extLst>
+          </p:cNvPr>
+          <p:cNvSpPr>
+            <a:spLocks noGrp="1" noRot="1" noChangeAspect="1"/>
+          </p:cNvSpPr>
+          <p:nvPr>
+            <p:ph type="sldImg"/>
+          </p:nvPr>
+        </p:nvSpPr>
+        <p:spPr/>
+      </p:sp>
+      <p:sp>
+        <p:nvSpPr>
+          <p:cNvPr id="3" name="Notes Placeholder 2">
+            <a:extLst>
+              <a:ext uri="{FF2B5EF4-FFF2-40B4-BE49-F238E27FC236}">
+                <a16:creationId xmlns:a16="http://schemas.microsoft.com/office/drawing/2014/main" id="{E95B01D4-2E51-D1C9-0313-8E5226EF0005}"/>
+              </a:ext>
+            </a:extLst>
+          </p:cNvPr>
+          <p:cNvSpPr>
+            <a:spLocks noGrp="1"/>
+          </p:cNvSpPr>
+          <p:nvPr>
+            <p:ph type="body" idx="1"/>
+          </p:nvPr>
+        </p:nvSpPr>
+        <p:spPr/>
+        <p:txBody>
+          <a:bodyPr/>
+          <a:lstStyle/>
+          <a:p>
+            <a:endParaRPr lang="en-MY" dirty="0"/>
+          </a:p>
+        </p:txBody>
+      </p:sp>
+      <p:sp>
+        <p:nvSpPr>
+          <p:cNvPr id="4" name="Slide Number Placeholder 3">
+            <a:extLst>
+              <a:ext uri="{FF2B5EF4-FFF2-40B4-BE49-F238E27FC236}">
+                <a16:creationId xmlns:a16="http://schemas.microsoft.com/office/drawing/2014/main" id="{0145040E-D612-6BAA-0D60-6ADCEEF2EB12}"/>
+              </a:ext>
+            </a:extLst>
+          </p:cNvPr>
+          <p:cNvSpPr>
+            <a:spLocks noGrp="1"/>
+          </p:cNvSpPr>
+          <p:nvPr>
+            <p:ph type="sldNum" sz="quarter" idx="5"/>
+          </p:nvPr>
+        </p:nvSpPr>
+        <p:spPr/>
+        <p:txBody>
+          <a:bodyPr/>
+          <a:lstStyle/>
+          <a:p>
+            <a:fld id="{D16833E0-5E66-4D1D-89F5-BD860FDD8F71}" type="slidenum">
+              <a:rPr lang="en-MY" smtClean="0"/>
+              <a:t>14</a:t>
+            </a:fld>
+            <a:endParaRPr lang="en-MY"/>
+          </a:p>
+        </p:txBody>
+      </p:sp>
+    </p:spTree>
+    <p:extLst>
+      <p:ext uri="{BB962C8B-B14F-4D97-AF65-F5344CB8AC3E}">
+        <p14:creationId xmlns:p14="http://schemas.microsoft.com/office/powerpoint/2010/main" val="2926556692"/>
+      </p:ext>
+    </p:extLst>
+  </p:cSld>
+  <p:clrMapOvr>
+    <a:masterClrMapping/>
+  </p:clrMapOvr>
+</p:notes>
+</file>
+
+<file path=ppt/notesSlides/notesSlide14.xml><?xml version="1.0" encoding="utf-8"?>
+<p:notes xmlns:a="http://schemas.openxmlformats.org/drawingml/2006/main" xmlns:r="http://schemas.openxmlformats.org/officeDocument/2006/relationships" xmlns:p="http://schemas.openxmlformats.org/presentationml/2006/main">
+  <p:cSld>
+    <p:spTree>
+      <p:nvGrpSpPr>
+        <p:cNvPr id="1" name="">
+          <a:extLst>
+            <a:ext uri="{FF2B5EF4-FFF2-40B4-BE49-F238E27FC236}">
               <a16:creationId xmlns:a16="http://schemas.microsoft.com/office/drawing/2014/main" id="{9C44BB0E-3305-ACF4-B9DB-3771A05F8201}"/>
             </a:ext>
           </a:extLst>
@@ -651,7 +1087,7 @@
           <a:p>
             <a:fld id="{D16833E0-5E66-4D1D-89F5-BD860FDD8F71}" type="slidenum">
               <a:rPr lang="en-MY" smtClean="0"/>
-              <a:t>11</a:t>
+              <a:t>15</a:t>
             </a:fld>
             <a:endParaRPr lang="en-MY"/>
           </a:p>
@@ -670,7 +1106,7 @@
 </p:notes>
 </file>
 
-<file path=ppt/notesSlides/notesSlide11.xml><?xml version="1.0" encoding="utf-8"?>
+<file path=ppt/notesSlides/notesSlide15.xml><?xml version="1.0" encoding="utf-8"?>
 <p:notes xmlns:a="http://schemas.openxmlformats.org/drawingml/2006/main" xmlns:r="http://schemas.openxmlformats.org/officeDocument/2006/relationships" xmlns:p="http://schemas.openxmlformats.org/presentationml/2006/main">
   <p:cSld>
     <p:spTree>
@@ -759,7 +1195,7 @@
           <a:p>
             <a:fld id="{D16833E0-5E66-4D1D-89F5-BD860FDD8F71}" type="slidenum">
               <a:rPr lang="en-MY" smtClean="0"/>
-              <a:t>12</a:t>
+              <a:t>16</a:t>
             </a:fld>
             <a:endParaRPr lang="en-MY"/>
           </a:p>
@@ -778,7 +1214,7 @@
 </p:notes>
 </file>
 
-<file path=ppt/notesSlides/notesSlide12.xml><?xml version="1.0" encoding="utf-8"?>
+<file path=ppt/notesSlides/notesSlide16.xml><?xml version="1.0" encoding="utf-8"?>
 <p:notes xmlns:a="http://schemas.openxmlformats.org/drawingml/2006/main" xmlns:r="http://schemas.openxmlformats.org/officeDocument/2006/relationships" xmlns:p="http://schemas.openxmlformats.org/presentationml/2006/main">
   <p:cSld>
     <p:spTree>
@@ -867,7 +1303,7 @@
           <a:p>
             <a:fld id="{D16833E0-5E66-4D1D-89F5-BD860FDD8F71}" type="slidenum">
               <a:rPr lang="en-MY" smtClean="0"/>
-              <a:t>13</a:t>
+              <a:t>17</a:t>
             </a:fld>
             <a:endParaRPr lang="en-MY"/>
           </a:p>
@@ -886,7 +1322,7 @@
 </p:notes>
 </file>
 
-<file path=ppt/notesSlides/notesSlide13.xml><?xml version="1.0" encoding="utf-8"?>
+<file path=ppt/notesSlides/notesSlide17.xml><?xml version="1.0" encoding="utf-8"?>
 <p:notes xmlns:a="http://schemas.openxmlformats.org/drawingml/2006/main" xmlns:r="http://schemas.openxmlformats.org/officeDocument/2006/relationships" xmlns:p="http://schemas.openxmlformats.org/presentationml/2006/main">
   <p:cSld>
     <p:spTree>
@@ -975,7 +1411,7 @@
           <a:p>
             <a:fld id="{D16833E0-5E66-4D1D-89F5-BD860FDD8F71}" type="slidenum">
               <a:rPr lang="en-MY" smtClean="0"/>
-              <a:t>14</a:t>
+              <a:t>18</a:t>
             </a:fld>
             <a:endParaRPr lang="en-MY"/>
           </a:p>
@@ -1218,6 +1654,114 @@
         <p:cNvPr id="1" name="">
           <a:extLst>
             <a:ext uri="{FF2B5EF4-FFF2-40B4-BE49-F238E27FC236}">
+              <a16:creationId xmlns:a16="http://schemas.microsoft.com/office/drawing/2014/main" id="{F02A6445-2BDF-182C-5C0C-F122092793D6}"/>
+            </a:ext>
+          </a:extLst>
+        </p:cNvPr>
+        <p:cNvGrpSpPr/>
+        <p:nvPr/>
+      </p:nvGrpSpPr>
+      <p:grpSpPr>
+        <a:xfrm>
+          <a:off x="0" y="0"/>
+          <a:ext cx="0" cy="0"/>
+          <a:chOff x="0" y="0"/>
+          <a:chExt cx="0" cy="0"/>
+        </a:xfrm>
+      </p:grpSpPr>
+      <p:sp>
+        <p:nvSpPr>
+          <p:cNvPr id="2" name="Slide Image Placeholder 1">
+            <a:extLst>
+              <a:ext uri="{FF2B5EF4-FFF2-40B4-BE49-F238E27FC236}">
+                <a16:creationId xmlns:a16="http://schemas.microsoft.com/office/drawing/2014/main" id="{C9D02AEA-8EFA-BB67-5B13-5B150D1AD1C3}"/>
+              </a:ext>
+            </a:extLst>
+          </p:cNvPr>
+          <p:cNvSpPr>
+            <a:spLocks noGrp="1" noRot="1" noChangeAspect="1"/>
+          </p:cNvSpPr>
+          <p:nvPr>
+            <p:ph type="sldImg"/>
+          </p:nvPr>
+        </p:nvSpPr>
+        <p:spPr/>
+      </p:sp>
+      <p:sp>
+        <p:nvSpPr>
+          <p:cNvPr id="3" name="Notes Placeholder 2">
+            <a:extLst>
+              <a:ext uri="{FF2B5EF4-FFF2-40B4-BE49-F238E27FC236}">
+                <a16:creationId xmlns:a16="http://schemas.microsoft.com/office/drawing/2014/main" id="{3A1D60AE-ED27-3D3E-ED1F-764F03B89AE8}"/>
+              </a:ext>
+            </a:extLst>
+          </p:cNvPr>
+          <p:cNvSpPr>
+            <a:spLocks noGrp="1"/>
+          </p:cNvSpPr>
+          <p:nvPr>
+            <p:ph type="body" idx="1"/>
+          </p:nvPr>
+        </p:nvSpPr>
+        <p:spPr/>
+        <p:txBody>
+          <a:bodyPr/>
+          <a:lstStyle/>
+          <a:p>
+            <a:endParaRPr lang="en-MY" dirty="0"/>
+          </a:p>
+        </p:txBody>
+      </p:sp>
+      <p:sp>
+        <p:nvSpPr>
+          <p:cNvPr id="4" name="Slide Number Placeholder 3">
+            <a:extLst>
+              <a:ext uri="{FF2B5EF4-FFF2-40B4-BE49-F238E27FC236}">
+                <a16:creationId xmlns:a16="http://schemas.microsoft.com/office/drawing/2014/main" id="{38EC2A09-58C6-90C2-3EA0-770104EF8558}"/>
+              </a:ext>
+            </a:extLst>
+          </p:cNvPr>
+          <p:cNvSpPr>
+            <a:spLocks noGrp="1"/>
+          </p:cNvSpPr>
+          <p:nvPr>
+            <p:ph type="sldNum" sz="quarter" idx="5"/>
+          </p:nvPr>
+        </p:nvSpPr>
+        <p:spPr/>
+        <p:txBody>
+          <a:bodyPr/>
+          <a:lstStyle/>
+          <a:p>
+            <a:fld id="{D16833E0-5E66-4D1D-89F5-BD860FDD8F71}" type="slidenum">
+              <a:rPr lang="en-MY" smtClean="0"/>
+              <a:t>5</a:t>
+            </a:fld>
+            <a:endParaRPr lang="en-MY"/>
+          </a:p>
+        </p:txBody>
+      </p:sp>
+    </p:spTree>
+    <p:extLst>
+      <p:ext uri="{BB962C8B-B14F-4D97-AF65-F5344CB8AC3E}">
+        <p14:creationId xmlns:p14="http://schemas.microsoft.com/office/powerpoint/2010/main" val="3800527732"/>
+      </p:ext>
+    </p:extLst>
+  </p:cSld>
+  <p:clrMapOvr>
+    <a:masterClrMapping/>
+  </p:clrMapOvr>
+</p:notes>
+</file>
+
+<file path=ppt/notesSlides/notesSlide5.xml><?xml version="1.0" encoding="utf-8"?>
+<p:notes xmlns:a="http://schemas.openxmlformats.org/drawingml/2006/main" xmlns:r="http://schemas.openxmlformats.org/officeDocument/2006/relationships" xmlns:p="http://schemas.openxmlformats.org/presentationml/2006/main">
+  <p:cSld>
+    <p:spTree>
+      <p:nvGrpSpPr>
+        <p:cNvPr id="1" name="">
+          <a:extLst>
+            <a:ext uri="{FF2B5EF4-FFF2-40B4-BE49-F238E27FC236}">
               <a16:creationId xmlns:a16="http://schemas.microsoft.com/office/drawing/2014/main" id="{A4A596CF-9DBF-1802-F324-3589B456E90D}"/>
             </a:ext>
           </a:extLst>
@@ -1299,7 +1843,7 @@
           <a:p>
             <a:fld id="{D16833E0-5E66-4D1D-89F5-BD860FDD8F71}" type="slidenum">
               <a:rPr lang="en-MY" smtClean="0"/>
-              <a:t>5</a:t>
+              <a:t>6</a:t>
             </a:fld>
             <a:endParaRPr lang="en-MY"/>
           </a:p>
@@ -1318,7 +1862,331 @@
 </p:notes>
 </file>
 
-<file path=ppt/notesSlides/notesSlide5.xml><?xml version="1.0" encoding="utf-8"?>
+<file path=ppt/notesSlides/notesSlide6.xml><?xml version="1.0" encoding="utf-8"?>
+<p:notes xmlns:a="http://schemas.openxmlformats.org/drawingml/2006/main" xmlns:r="http://schemas.openxmlformats.org/officeDocument/2006/relationships" xmlns:p="http://schemas.openxmlformats.org/presentationml/2006/main">
+  <p:cSld>
+    <p:spTree>
+      <p:nvGrpSpPr>
+        <p:cNvPr id="1" name="">
+          <a:extLst>
+            <a:ext uri="{FF2B5EF4-FFF2-40B4-BE49-F238E27FC236}">
+              <a16:creationId xmlns:a16="http://schemas.microsoft.com/office/drawing/2014/main" id="{5DF51BCA-D6CF-8A81-1124-AC45526060B0}"/>
+            </a:ext>
+          </a:extLst>
+        </p:cNvPr>
+        <p:cNvGrpSpPr/>
+        <p:nvPr/>
+      </p:nvGrpSpPr>
+      <p:grpSpPr>
+        <a:xfrm>
+          <a:off x="0" y="0"/>
+          <a:ext cx="0" cy="0"/>
+          <a:chOff x="0" y="0"/>
+          <a:chExt cx="0" cy="0"/>
+        </a:xfrm>
+      </p:grpSpPr>
+      <p:sp>
+        <p:nvSpPr>
+          <p:cNvPr id="2" name="Slide Image Placeholder 1">
+            <a:extLst>
+              <a:ext uri="{FF2B5EF4-FFF2-40B4-BE49-F238E27FC236}">
+                <a16:creationId xmlns:a16="http://schemas.microsoft.com/office/drawing/2014/main" id="{ED4551C9-485E-0E04-4949-AEC093FCBA29}"/>
+              </a:ext>
+            </a:extLst>
+          </p:cNvPr>
+          <p:cNvSpPr>
+            <a:spLocks noGrp="1" noRot="1" noChangeAspect="1"/>
+          </p:cNvSpPr>
+          <p:nvPr>
+            <p:ph type="sldImg"/>
+          </p:nvPr>
+        </p:nvSpPr>
+        <p:spPr/>
+      </p:sp>
+      <p:sp>
+        <p:nvSpPr>
+          <p:cNvPr id="3" name="Notes Placeholder 2">
+            <a:extLst>
+              <a:ext uri="{FF2B5EF4-FFF2-40B4-BE49-F238E27FC236}">
+                <a16:creationId xmlns:a16="http://schemas.microsoft.com/office/drawing/2014/main" id="{E19340B6-08DD-5C3E-9E67-943687EB8106}"/>
+              </a:ext>
+            </a:extLst>
+          </p:cNvPr>
+          <p:cNvSpPr>
+            <a:spLocks noGrp="1"/>
+          </p:cNvSpPr>
+          <p:nvPr>
+            <p:ph type="body" idx="1"/>
+          </p:nvPr>
+        </p:nvSpPr>
+        <p:spPr/>
+        <p:txBody>
+          <a:bodyPr/>
+          <a:lstStyle/>
+          <a:p>
+            <a:endParaRPr lang="en-MY" dirty="0"/>
+          </a:p>
+        </p:txBody>
+      </p:sp>
+      <p:sp>
+        <p:nvSpPr>
+          <p:cNvPr id="4" name="Slide Number Placeholder 3">
+            <a:extLst>
+              <a:ext uri="{FF2B5EF4-FFF2-40B4-BE49-F238E27FC236}">
+                <a16:creationId xmlns:a16="http://schemas.microsoft.com/office/drawing/2014/main" id="{3B35BEEB-2274-3A93-B78E-D1C1790D7AAD}"/>
+              </a:ext>
+            </a:extLst>
+          </p:cNvPr>
+          <p:cNvSpPr>
+            <a:spLocks noGrp="1"/>
+          </p:cNvSpPr>
+          <p:nvPr>
+            <p:ph type="sldNum" sz="quarter" idx="5"/>
+          </p:nvPr>
+        </p:nvSpPr>
+        <p:spPr/>
+        <p:txBody>
+          <a:bodyPr/>
+          <a:lstStyle/>
+          <a:p>
+            <a:fld id="{D16833E0-5E66-4D1D-89F5-BD860FDD8F71}" type="slidenum">
+              <a:rPr lang="en-MY" smtClean="0"/>
+              <a:t>7</a:t>
+            </a:fld>
+            <a:endParaRPr lang="en-MY"/>
+          </a:p>
+        </p:txBody>
+      </p:sp>
+    </p:spTree>
+    <p:extLst>
+      <p:ext uri="{BB962C8B-B14F-4D97-AF65-F5344CB8AC3E}">
+        <p14:creationId xmlns:p14="http://schemas.microsoft.com/office/powerpoint/2010/main" val="2361073371"/>
+      </p:ext>
+    </p:extLst>
+  </p:cSld>
+  <p:clrMapOvr>
+    <a:masterClrMapping/>
+  </p:clrMapOvr>
+</p:notes>
+</file>
+
+<file path=ppt/notesSlides/notesSlide7.xml><?xml version="1.0" encoding="utf-8"?>
+<p:notes xmlns:a="http://schemas.openxmlformats.org/drawingml/2006/main" xmlns:r="http://schemas.openxmlformats.org/officeDocument/2006/relationships" xmlns:p="http://schemas.openxmlformats.org/presentationml/2006/main">
+  <p:cSld>
+    <p:spTree>
+      <p:nvGrpSpPr>
+        <p:cNvPr id="1" name="">
+          <a:extLst>
+            <a:ext uri="{FF2B5EF4-FFF2-40B4-BE49-F238E27FC236}">
+              <a16:creationId xmlns:a16="http://schemas.microsoft.com/office/drawing/2014/main" id="{06AC407D-DE97-F5DB-AA93-B489D3A99B07}"/>
+            </a:ext>
+          </a:extLst>
+        </p:cNvPr>
+        <p:cNvGrpSpPr/>
+        <p:nvPr/>
+      </p:nvGrpSpPr>
+      <p:grpSpPr>
+        <a:xfrm>
+          <a:off x="0" y="0"/>
+          <a:ext cx="0" cy="0"/>
+          <a:chOff x="0" y="0"/>
+          <a:chExt cx="0" cy="0"/>
+        </a:xfrm>
+      </p:grpSpPr>
+      <p:sp>
+        <p:nvSpPr>
+          <p:cNvPr id="2" name="Slide Image Placeholder 1">
+            <a:extLst>
+              <a:ext uri="{FF2B5EF4-FFF2-40B4-BE49-F238E27FC236}">
+                <a16:creationId xmlns:a16="http://schemas.microsoft.com/office/drawing/2014/main" id="{ADC8E8EA-2B08-090E-17F9-F52A6FA37E3E}"/>
+              </a:ext>
+            </a:extLst>
+          </p:cNvPr>
+          <p:cNvSpPr>
+            <a:spLocks noGrp="1" noRot="1" noChangeAspect="1"/>
+          </p:cNvSpPr>
+          <p:nvPr>
+            <p:ph type="sldImg"/>
+          </p:nvPr>
+        </p:nvSpPr>
+        <p:spPr/>
+      </p:sp>
+      <p:sp>
+        <p:nvSpPr>
+          <p:cNvPr id="3" name="Notes Placeholder 2">
+            <a:extLst>
+              <a:ext uri="{FF2B5EF4-FFF2-40B4-BE49-F238E27FC236}">
+                <a16:creationId xmlns:a16="http://schemas.microsoft.com/office/drawing/2014/main" id="{AA6392F1-7D7B-ED32-D419-722532A6FE99}"/>
+              </a:ext>
+            </a:extLst>
+          </p:cNvPr>
+          <p:cNvSpPr>
+            <a:spLocks noGrp="1"/>
+          </p:cNvSpPr>
+          <p:nvPr>
+            <p:ph type="body" idx="1"/>
+          </p:nvPr>
+        </p:nvSpPr>
+        <p:spPr/>
+        <p:txBody>
+          <a:bodyPr/>
+          <a:lstStyle/>
+          <a:p>
+            <a:endParaRPr lang="en-MY" dirty="0"/>
+          </a:p>
+        </p:txBody>
+      </p:sp>
+      <p:sp>
+        <p:nvSpPr>
+          <p:cNvPr id="4" name="Slide Number Placeholder 3">
+            <a:extLst>
+              <a:ext uri="{FF2B5EF4-FFF2-40B4-BE49-F238E27FC236}">
+                <a16:creationId xmlns:a16="http://schemas.microsoft.com/office/drawing/2014/main" id="{3692D747-B633-9036-2B53-3290D675769B}"/>
+              </a:ext>
+            </a:extLst>
+          </p:cNvPr>
+          <p:cNvSpPr>
+            <a:spLocks noGrp="1"/>
+          </p:cNvSpPr>
+          <p:nvPr>
+            <p:ph type="sldNum" sz="quarter" idx="5"/>
+          </p:nvPr>
+        </p:nvSpPr>
+        <p:spPr/>
+        <p:txBody>
+          <a:bodyPr/>
+          <a:lstStyle/>
+          <a:p>
+            <a:fld id="{D16833E0-5E66-4D1D-89F5-BD860FDD8F71}" type="slidenum">
+              <a:rPr lang="en-MY" smtClean="0"/>
+              <a:t>8</a:t>
+            </a:fld>
+            <a:endParaRPr lang="en-MY"/>
+          </a:p>
+        </p:txBody>
+      </p:sp>
+    </p:spTree>
+    <p:extLst>
+      <p:ext uri="{BB962C8B-B14F-4D97-AF65-F5344CB8AC3E}">
+        <p14:creationId xmlns:p14="http://schemas.microsoft.com/office/powerpoint/2010/main" val="2039971155"/>
+      </p:ext>
+    </p:extLst>
+  </p:cSld>
+  <p:clrMapOvr>
+    <a:masterClrMapping/>
+  </p:clrMapOvr>
+</p:notes>
+</file>
+
+<file path=ppt/notesSlides/notesSlide8.xml><?xml version="1.0" encoding="utf-8"?>
+<p:notes xmlns:a="http://schemas.openxmlformats.org/drawingml/2006/main" xmlns:r="http://schemas.openxmlformats.org/officeDocument/2006/relationships" xmlns:p="http://schemas.openxmlformats.org/presentationml/2006/main">
+  <p:cSld>
+    <p:spTree>
+      <p:nvGrpSpPr>
+        <p:cNvPr id="1" name="">
+          <a:extLst>
+            <a:ext uri="{FF2B5EF4-FFF2-40B4-BE49-F238E27FC236}">
+              <a16:creationId xmlns:a16="http://schemas.microsoft.com/office/drawing/2014/main" id="{CD65CC31-DDBD-A83E-77AD-73DD9EA7AADA}"/>
+            </a:ext>
+          </a:extLst>
+        </p:cNvPr>
+        <p:cNvGrpSpPr/>
+        <p:nvPr/>
+      </p:nvGrpSpPr>
+      <p:grpSpPr>
+        <a:xfrm>
+          <a:off x="0" y="0"/>
+          <a:ext cx="0" cy="0"/>
+          <a:chOff x="0" y="0"/>
+          <a:chExt cx="0" cy="0"/>
+        </a:xfrm>
+      </p:grpSpPr>
+      <p:sp>
+        <p:nvSpPr>
+          <p:cNvPr id="2" name="Slide Image Placeholder 1">
+            <a:extLst>
+              <a:ext uri="{FF2B5EF4-FFF2-40B4-BE49-F238E27FC236}">
+                <a16:creationId xmlns:a16="http://schemas.microsoft.com/office/drawing/2014/main" id="{75A6BE32-AD46-3994-D2B5-596BFA4482B9}"/>
+              </a:ext>
+            </a:extLst>
+          </p:cNvPr>
+          <p:cNvSpPr>
+            <a:spLocks noGrp="1" noRot="1" noChangeAspect="1"/>
+          </p:cNvSpPr>
+          <p:nvPr>
+            <p:ph type="sldImg"/>
+          </p:nvPr>
+        </p:nvSpPr>
+        <p:spPr/>
+      </p:sp>
+      <p:sp>
+        <p:nvSpPr>
+          <p:cNvPr id="3" name="Notes Placeholder 2">
+            <a:extLst>
+              <a:ext uri="{FF2B5EF4-FFF2-40B4-BE49-F238E27FC236}">
+                <a16:creationId xmlns:a16="http://schemas.microsoft.com/office/drawing/2014/main" id="{2DD8584B-F663-50AD-7BAD-29E261633728}"/>
+              </a:ext>
+            </a:extLst>
+          </p:cNvPr>
+          <p:cNvSpPr>
+            <a:spLocks noGrp="1"/>
+          </p:cNvSpPr>
+          <p:nvPr>
+            <p:ph type="body" idx="1"/>
+          </p:nvPr>
+        </p:nvSpPr>
+        <p:spPr/>
+        <p:txBody>
+          <a:bodyPr/>
+          <a:lstStyle/>
+          <a:p>
+            <a:endParaRPr lang="en-MY" dirty="0"/>
+          </a:p>
+        </p:txBody>
+      </p:sp>
+      <p:sp>
+        <p:nvSpPr>
+          <p:cNvPr id="4" name="Slide Number Placeholder 3">
+            <a:extLst>
+              <a:ext uri="{FF2B5EF4-FFF2-40B4-BE49-F238E27FC236}">
+                <a16:creationId xmlns:a16="http://schemas.microsoft.com/office/drawing/2014/main" id="{0A1087DB-E39A-687F-05EB-96BC857E8EC2}"/>
+              </a:ext>
+            </a:extLst>
+          </p:cNvPr>
+          <p:cNvSpPr>
+            <a:spLocks noGrp="1"/>
+          </p:cNvSpPr>
+          <p:nvPr>
+            <p:ph type="sldNum" sz="quarter" idx="5"/>
+          </p:nvPr>
+        </p:nvSpPr>
+        <p:spPr/>
+        <p:txBody>
+          <a:bodyPr/>
+          <a:lstStyle/>
+          <a:p>
+            <a:fld id="{D16833E0-5E66-4D1D-89F5-BD860FDD8F71}" type="slidenum">
+              <a:rPr lang="en-MY" smtClean="0"/>
+              <a:t>9</a:t>
+            </a:fld>
+            <a:endParaRPr lang="en-MY"/>
+          </a:p>
+        </p:txBody>
+      </p:sp>
+    </p:spTree>
+    <p:extLst>
+      <p:ext uri="{BB962C8B-B14F-4D97-AF65-F5344CB8AC3E}">
+        <p14:creationId xmlns:p14="http://schemas.microsoft.com/office/powerpoint/2010/main" val="1599132718"/>
+      </p:ext>
+    </p:extLst>
+  </p:cSld>
+  <p:clrMapOvr>
+    <a:masterClrMapping/>
+  </p:clrMapOvr>
+</p:notes>
+</file>
+
+<file path=ppt/notesSlides/notesSlide9.xml><?xml version="1.0" encoding="utf-8"?>
 <p:notes xmlns:a="http://schemas.openxmlformats.org/drawingml/2006/main" xmlns:r="http://schemas.openxmlformats.org/officeDocument/2006/relationships" xmlns:p="http://schemas.openxmlformats.org/presentationml/2006/main">
   <p:cSld>
     <p:spTree>
@@ -1407,7 +2275,7 @@
           <a:p>
             <a:fld id="{D16833E0-5E66-4D1D-89F5-BD860FDD8F71}" type="slidenum">
               <a:rPr lang="en-MY" smtClean="0"/>
-              <a:t>6</a:t>
+              <a:t>10</a:t>
             </a:fld>
             <a:endParaRPr lang="en-MY"/>
           </a:p>
@@ -1417,438 +2285,6 @@
     <p:extLst>
       <p:ext uri="{BB962C8B-B14F-4D97-AF65-F5344CB8AC3E}">
         <p14:creationId xmlns:p14="http://schemas.microsoft.com/office/powerpoint/2010/main" val="1721200387"/>
-      </p:ext>
-    </p:extLst>
-  </p:cSld>
-  <p:clrMapOvr>
-    <a:masterClrMapping/>
-  </p:clrMapOvr>
-</p:notes>
-</file>
-
-<file path=ppt/notesSlides/notesSlide6.xml><?xml version="1.0" encoding="utf-8"?>
-<p:notes xmlns:a="http://schemas.openxmlformats.org/drawingml/2006/main" xmlns:r="http://schemas.openxmlformats.org/officeDocument/2006/relationships" xmlns:p="http://schemas.openxmlformats.org/presentationml/2006/main">
-  <p:cSld>
-    <p:spTree>
-      <p:nvGrpSpPr>
-        <p:cNvPr id="1" name="">
-          <a:extLst>
-            <a:ext uri="{FF2B5EF4-FFF2-40B4-BE49-F238E27FC236}">
-              <a16:creationId xmlns:a16="http://schemas.microsoft.com/office/drawing/2014/main" id="{C3584F9D-DF34-D68D-5A96-B29CB925814B}"/>
-            </a:ext>
-          </a:extLst>
-        </p:cNvPr>
-        <p:cNvGrpSpPr/>
-        <p:nvPr/>
-      </p:nvGrpSpPr>
-      <p:grpSpPr>
-        <a:xfrm>
-          <a:off x="0" y="0"/>
-          <a:ext cx="0" cy="0"/>
-          <a:chOff x="0" y="0"/>
-          <a:chExt cx="0" cy="0"/>
-        </a:xfrm>
-      </p:grpSpPr>
-      <p:sp>
-        <p:nvSpPr>
-          <p:cNvPr id="2" name="Slide Image Placeholder 1">
-            <a:extLst>
-              <a:ext uri="{FF2B5EF4-FFF2-40B4-BE49-F238E27FC236}">
-                <a16:creationId xmlns:a16="http://schemas.microsoft.com/office/drawing/2014/main" id="{AA443717-5F7A-19C6-C199-39BC97677BF0}"/>
-              </a:ext>
-            </a:extLst>
-          </p:cNvPr>
-          <p:cNvSpPr>
-            <a:spLocks noGrp="1" noRot="1" noChangeAspect="1"/>
-          </p:cNvSpPr>
-          <p:nvPr>
-            <p:ph type="sldImg"/>
-          </p:nvPr>
-        </p:nvSpPr>
-        <p:spPr/>
-      </p:sp>
-      <p:sp>
-        <p:nvSpPr>
-          <p:cNvPr id="3" name="Notes Placeholder 2">
-            <a:extLst>
-              <a:ext uri="{FF2B5EF4-FFF2-40B4-BE49-F238E27FC236}">
-                <a16:creationId xmlns:a16="http://schemas.microsoft.com/office/drawing/2014/main" id="{69277B9B-7E4F-4D34-F255-5FDBC89B62D9}"/>
-              </a:ext>
-            </a:extLst>
-          </p:cNvPr>
-          <p:cNvSpPr>
-            <a:spLocks noGrp="1"/>
-          </p:cNvSpPr>
-          <p:nvPr>
-            <p:ph type="body" idx="1"/>
-          </p:nvPr>
-        </p:nvSpPr>
-        <p:spPr/>
-        <p:txBody>
-          <a:bodyPr/>
-          <a:lstStyle/>
-          <a:p>
-            <a:endParaRPr lang="en-MY" dirty="0"/>
-          </a:p>
-        </p:txBody>
-      </p:sp>
-      <p:sp>
-        <p:nvSpPr>
-          <p:cNvPr id="4" name="Slide Number Placeholder 3">
-            <a:extLst>
-              <a:ext uri="{FF2B5EF4-FFF2-40B4-BE49-F238E27FC236}">
-                <a16:creationId xmlns:a16="http://schemas.microsoft.com/office/drawing/2014/main" id="{9B881C03-D632-C4F9-D6AE-2D2C18AAAB26}"/>
-              </a:ext>
-            </a:extLst>
-          </p:cNvPr>
-          <p:cNvSpPr>
-            <a:spLocks noGrp="1"/>
-          </p:cNvSpPr>
-          <p:nvPr>
-            <p:ph type="sldNum" sz="quarter" idx="5"/>
-          </p:nvPr>
-        </p:nvSpPr>
-        <p:spPr/>
-        <p:txBody>
-          <a:bodyPr/>
-          <a:lstStyle/>
-          <a:p>
-            <a:fld id="{D16833E0-5E66-4D1D-89F5-BD860FDD8F71}" type="slidenum">
-              <a:rPr lang="en-MY" smtClean="0"/>
-              <a:t>7</a:t>
-            </a:fld>
-            <a:endParaRPr lang="en-MY"/>
-          </a:p>
-        </p:txBody>
-      </p:sp>
-    </p:spTree>
-    <p:extLst>
-      <p:ext uri="{BB962C8B-B14F-4D97-AF65-F5344CB8AC3E}">
-        <p14:creationId xmlns:p14="http://schemas.microsoft.com/office/powerpoint/2010/main" val="4210462848"/>
-      </p:ext>
-    </p:extLst>
-  </p:cSld>
-  <p:clrMapOvr>
-    <a:masterClrMapping/>
-  </p:clrMapOvr>
-</p:notes>
-</file>
-
-<file path=ppt/notesSlides/notesSlide7.xml><?xml version="1.0" encoding="utf-8"?>
-<p:notes xmlns:a="http://schemas.openxmlformats.org/drawingml/2006/main" xmlns:r="http://schemas.openxmlformats.org/officeDocument/2006/relationships" xmlns:p="http://schemas.openxmlformats.org/presentationml/2006/main">
-  <p:cSld>
-    <p:spTree>
-      <p:nvGrpSpPr>
-        <p:cNvPr id="1" name="">
-          <a:extLst>
-            <a:ext uri="{FF2B5EF4-FFF2-40B4-BE49-F238E27FC236}">
-              <a16:creationId xmlns:a16="http://schemas.microsoft.com/office/drawing/2014/main" id="{3B1F4DAA-70A6-619B-B882-53C351F21905}"/>
-            </a:ext>
-          </a:extLst>
-        </p:cNvPr>
-        <p:cNvGrpSpPr/>
-        <p:nvPr/>
-      </p:nvGrpSpPr>
-      <p:grpSpPr>
-        <a:xfrm>
-          <a:off x="0" y="0"/>
-          <a:ext cx="0" cy="0"/>
-          <a:chOff x="0" y="0"/>
-          <a:chExt cx="0" cy="0"/>
-        </a:xfrm>
-      </p:grpSpPr>
-      <p:sp>
-        <p:nvSpPr>
-          <p:cNvPr id="2" name="Slide Image Placeholder 1">
-            <a:extLst>
-              <a:ext uri="{FF2B5EF4-FFF2-40B4-BE49-F238E27FC236}">
-                <a16:creationId xmlns:a16="http://schemas.microsoft.com/office/drawing/2014/main" id="{ADCDED79-13C1-8857-2F41-72B92A91978A}"/>
-              </a:ext>
-            </a:extLst>
-          </p:cNvPr>
-          <p:cNvSpPr>
-            <a:spLocks noGrp="1" noRot="1" noChangeAspect="1"/>
-          </p:cNvSpPr>
-          <p:nvPr>
-            <p:ph type="sldImg"/>
-          </p:nvPr>
-        </p:nvSpPr>
-        <p:spPr/>
-      </p:sp>
-      <p:sp>
-        <p:nvSpPr>
-          <p:cNvPr id="3" name="Notes Placeholder 2">
-            <a:extLst>
-              <a:ext uri="{FF2B5EF4-FFF2-40B4-BE49-F238E27FC236}">
-                <a16:creationId xmlns:a16="http://schemas.microsoft.com/office/drawing/2014/main" id="{A1E72453-B321-C6C9-71EE-DC448A0F510F}"/>
-              </a:ext>
-            </a:extLst>
-          </p:cNvPr>
-          <p:cNvSpPr>
-            <a:spLocks noGrp="1"/>
-          </p:cNvSpPr>
-          <p:nvPr>
-            <p:ph type="body" idx="1"/>
-          </p:nvPr>
-        </p:nvSpPr>
-        <p:spPr/>
-        <p:txBody>
-          <a:bodyPr/>
-          <a:lstStyle/>
-          <a:p>
-            <a:endParaRPr lang="en-MY" dirty="0"/>
-          </a:p>
-        </p:txBody>
-      </p:sp>
-      <p:sp>
-        <p:nvSpPr>
-          <p:cNvPr id="4" name="Slide Number Placeholder 3">
-            <a:extLst>
-              <a:ext uri="{FF2B5EF4-FFF2-40B4-BE49-F238E27FC236}">
-                <a16:creationId xmlns:a16="http://schemas.microsoft.com/office/drawing/2014/main" id="{2720399C-0CE2-CEC4-FD6D-A77A9605FC7B}"/>
-              </a:ext>
-            </a:extLst>
-          </p:cNvPr>
-          <p:cNvSpPr>
-            <a:spLocks noGrp="1"/>
-          </p:cNvSpPr>
-          <p:nvPr>
-            <p:ph type="sldNum" sz="quarter" idx="5"/>
-          </p:nvPr>
-        </p:nvSpPr>
-        <p:spPr/>
-        <p:txBody>
-          <a:bodyPr/>
-          <a:lstStyle/>
-          <a:p>
-            <a:fld id="{D16833E0-5E66-4D1D-89F5-BD860FDD8F71}" type="slidenum">
-              <a:rPr lang="en-MY" smtClean="0"/>
-              <a:t>8</a:t>
-            </a:fld>
-            <a:endParaRPr lang="en-MY"/>
-          </a:p>
-        </p:txBody>
-      </p:sp>
-    </p:spTree>
-    <p:extLst>
-      <p:ext uri="{BB962C8B-B14F-4D97-AF65-F5344CB8AC3E}">
-        <p14:creationId xmlns:p14="http://schemas.microsoft.com/office/powerpoint/2010/main" val="3525914453"/>
-      </p:ext>
-    </p:extLst>
-  </p:cSld>
-  <p:clrMapOvr>
-    <a:masterClrMapping/>
-  </p:clrMapOvr>
-</p:notes>
-</file>
-
-<file path=ppt/notesSlides/notesSlide8.xml><?xml version="1.0" encoding="utf-8"?>
-<p:notes xmlns:a="http://schemas.openxmlformats.org/drawingml/2006/main" xmlns:r="http://schemas.openxmlformats.org/officeDocument/2006/relationships" xmlns:p="http://schemas.openxmlformats.org/presentationml/2006/main">
-  <p:cSld>
-    <p:spTree>
-      <p:nvGrpSpPr>
-        <p:cNvPr id="1" name="">
-          <a:extLst>
-            <a:ext uri="{FF2B5EF4-FFF2-40B4-BE49-F238E27FC236}">
-              <a16:creationId xmlns:a16="http://schemas.microsoft.com/office/drawing/2014/main" id="{5CC92DFC-8109-DB30-B777-59AD008AB610}"/>
-            </a:ext>
-          </a:extLst>
-        </p:cNvPr>
-        <p:cNvGrpSpPr/>
-        <p:nvPr/>
-      </p:nvGrpSpPr>
-      <p:grpSpPr>
-        <a:xfrm>
-          <a:off x="0" y="0"/>
-          <a:ext cx="0" cy="0"/>
-          <a:chOff x="0" y="0"/>
-          <a:chExt cx="0" cy="0"/>
-        </a:xfrm>
-      </p:grpSpPr>
-      <p:sp>
-        <p:nvSpPr>
-          <p:cNvPr id="2" name="Slide Image Placeholder 1">
-            <a:extLst>
-              <a:ext uri="{FF2B5EF4-FFF2-40B4-BE49-F238E27FC236}">
-                <a16:creationId xmlns:a16="http://schemas.microsoft.com/office/drawing/2014/main" id="{A5EF552C-4C8D-1FC9-AC7B-00BDC2537DFB}"/>
-              </a:ext>
-            </a:extLst>
-          </p:cNvPr>
-          <p:cNvSpPr>
-            <a:spLocks noGrp="1" noRot="1" noChangeAspect="1"/>
-          </p:cNvSpPr>
-          <p:nvPr>
-            <p:ph type="sldImg"/>
-          </p:nvPr>
-        </p:nvSpPr>
-        <p:spPr/>
-      </p:sp>
-      <p:sp>
-        <p:nvSpPr>
-          <p:cNvPr id="3" name="Notes Placeholder 2">
-            <a:extLst>
-              <a:ext uri="{FF2B5EF4-FFF2-40B4-BE49-F238E27FC236}">
-                <a16:creationId xmlns:a16="http://schemas.microsoft.com/office/drawing/2014/main" id="{F55A7152-DC10-80C6-FE6C-1C4AA89990B8}"/>
-              </a:ext>
-            </a:extLst>
-          </p:cNvPr>
-          <p:cNvSpPr>
-            <a:spLocks noGrp="1"/>
-          </p:cNvSpPr>
-          <p:nvPr>
-            <p:ph type="body" idx="1"/>
-          </p:nvPr>
-        </p:nvSpPr>
-        <p:spPr/>
-        <p:txBody>
-          <a:bodyPr/>
-          <a:lstStyle/>
-          <a:p>
-            <a:endParaRPr lang="en-MY" dirty="0"/>
-          </a:p>
-        </p:txBody>
-      </p:sp>
-      <p:sp>
-        <p:nvSpPr>
-          <p:cNvPr id="4" name="Slide Number Placeholder 3">
-            <a:extLst>
-              <a:ext uri="{FF2B5EF4-FFF2-40B4-BE49-F238E27FC236}">
-                <a16:creationId xmlns:a16="http://schemas.microsoft.com/office/drawing/2014/main" id="{16E31090-AD71-A3D3-E914-D8C02CC5F817}"/>
-              </a:ext>
-            </a:extLst>
-          </p:cNvPr>
-          <p:cNvSpPr>
-            <a:spLocks noGrp="1"/>
-          </p:cNvSpPr>
-          <p:nvPr>
-            <p:ph type="sldNum" sz="quarter" idx="5"/>
-          </p:nvPr>
-        </p:nvSpPr>
-        <p:spPr/>
-        <p:txBody>
-          <a:bodyPr/>
-          <a:lstStyle/>
-          <a:p>
-            <a:fld id="{D16833E0-5E66-4D1D-89F5-BD860FDD8F71}" type="slidenum">
-              <a:rPr lang="en-MY" smtClean="0"/>
-              <a:t>9</a:t>
-            </a:fld>
-            <a:endParaRPr lang="en-MY"/>
-          </a:p>
-        </p:txBody>
-      </p:sp>
-    </p:spTree>
-    <p:extLst>
-      <p:ext uri="{BB962C8B-B14F-4D97-AF65-F5344CB8AC3E}">
-        <p14:creationId xmlns:p14="http://schemas.microsoft.com/office/powerpoint/2010/main" val="3596086676"/>
-      </p:ext>
-    </p:extLst>
-  </p:cSld>
-  <p:clrMapOvr>
-    <a:masterClrMapping/>
-  </p:clrMapOvr>
-</p:notes>
-</file>
-
-<file path=ppt/notesSlides/notesSlide9.xml><?xml version="1.0" encoding="utf-8"?>
-<p:notes xmlns:a="http://schemas.openxmlformats.org/drawingml/2006/main" xmlns:r="http://schemas.openxmlformats.org/officeDocument/2006/relationships" xmlns:p="http://schemas.openxmlformats.org/presentationml/2006/main">
-  <p:cSld>
-    <p:spTree>
-      <p:nvGrpSpPr>
-        <p:cNvPr id="1" name="">
-          <a:extLst>
-            <a:ext uri="{FF2B5EF4-FFF2-40B4-BE49-F238E27FC236}">
-              <a16:creationId xmlns:a16="http://schemas.microsoft.com/office/drawing/2014/main" id="{F918F35F-167D-DA30-7EF9-CB97D0CEA94C}"/>
-            </a:ext>
-          </a:extLst>
-        </p:cNvPr>
-        <p:cNvGrpSpPr/>
-        <p:nvPr/>
-      </p:nvGrpSpPr>
-      <p:grpSpPr>
-        <a:xfrm>
-          <a:off x="0" y="0"/>
-          <a:ext cx="0" cy="0"/>
-          <a:chOff x="0" y="0"/>
-          <a:chExt cx="0" cy="0"/>
-        </a:xfrm>
-      </p:grpSpPr>
-      <p:sp>
-        <p:nvSpPr>
-          <p:cNvPr id="2" name="Slide Image Placeholder 1">
-            <a:extLst>
-              <a:ext uri="{FF2B5EF4-FFF2-40B4-BE49-F238E27FC236}">
-                <a16:creationId xmlns:a16="http://schemas.microsoft.com/office/drawing/2014/main" id="{6F6C49EA-68AD-BF5D-54CF-28AD9EBD7FB6}"/>
-              </a:ext>
-            </a:extLst>
-          </p:cNvPr>
-          <p:cNvSpPr>
-            <a:spLocks noGrp="1" noRot="1" noChangeAspect="1"/>
-          </p:cNvSpPr>
-          <p:nvPr>
-            <p:ph type="sldImg"/>
-          </p:nvPr>
-        </p:nvSpPr>
-        <p:spPr/>
-      </p:sp>
-      <p:sp>
-        <p:nvSpPr>
-          <p:cNvPr id="3" name="Notes Placeholder 2">
-            <a:extLst>
-              <a:ext uri="{FF2B5EF4-FFF2-40B4-BE49-F238E27FC236}">
-                <a16:creationId xmlns:a16="http://schemas.microsoft.com/office/drawing/2014/main" id="{E95B01D4-2E51-D1C9-0313-8E5226EF0005}"/>
-              </a:ext>
-            </a:extLst>
-          </p:cNvPr>
-          <p:cNvSpPr>
-            <a:spLocks noGrp="1"/>
-          </p:cNvSpPr>
-          <p:nvPr>
-            <p:ph type="body" idx="1"/>
-          </p:nvPr>
-        </p:nvSpPr>
-        <p:spPr/>
-        <p:txBody>
-          <a:bodyPr/>
-          <a:lstStyle/>
-          <a:p>
-            <a:endParaRPr lang="en-MY" dirty="0"/>
-          </a:p>
-        </p:txBody>
-      </p:sp>
-      <p:sp>
-        <p:nvSpPr>
-          <p:cNvPr id="4" name="Slide Number Placeholder 3">
-            <a:extLst>
-              <a:ext uri="{FF2B5EF4-FFF2-40B4-BE49-F238E27FC236}">
-                <a16:creationId xmlns:a16="http://schemas.microsoft.com/office/drawing/2014/main" id="{0145040E-D612-6BAA-0D60-6ADCEEF2EB12}"/>
-              </a:ext>
-            </a:extLst>
-          </p:cNvPr>
-          <p:cNvSpPr>
-            <a:spLocks noGrp="1"/>
-          </p:cNvSpPr>
-          <p:nvPr>
-            <p:ph type="sldNum" sz="quarter" idx="5"/>
-          </p:nvPr>
-        </p:nvSpPr>
-        <p:spPr/>
-        <p:txBody>
-          <a:bodyPr/>
-          <a:lstStyle/>
-          <a:p>
-            <a:fld id="{D16833E0-5E66-4D1D-89F5-BD860FDD8F71}" type="slidenum">
-              <a:rPr lang="en-MY" smtClean="0"/>
-              <a:t>10</a:t>
-            </a:fld>
-            <a:endParaRPr lang="en-MY"/>
-          </a:p>
-        </p:txBody>
-      </p:sp>
-    </p:spTree>
-    <p:extLst>
-      <p:ext uri="{BB962C8B-B14F-4D97-AF65-F5344CB8AC3E}">
-        <p14:creationId xmlns:p14="http://schemas.microsoft.com/office/powerpoint/2010/main" val="2926556692"/>
       </p:ext>
     </p:extLst>
   </p:cSld>
@@ -2029,7 +2465,7 @@
           <a:p>
             <a:fld id="{1CD01395-AC05-405C-BAB9-E5D2B9FDBB40}" type="datetimeFigureOut">
               <a:rPr lang="en-MY" smtClean="0"/>
-              <a:t>27/4/2026</a:t>
+              <a:t>30/4/2026</a:t>
             </a:fld>
             <a:endParaRPr lang="en-MY"/>
           </a:p>
@@ -2344,7 +2780,7 @@
           <a:p>
             <a:fld id="{1CD01395-AC05-405C-BAB9-E5D2B9FDBB40}" type="datetimeFigureOut">
               <a:rPr lang="en-MY" smtClean="0"/>
-              <a:t>27/4/2026</a:t>
+              <a:t>30/4/2026</a:t>
             </a:fld>
             <a:endParaRPr lang="en-MY"/>
           </a:p>
@@ -2566,7 +3002,7 @@
           <a:p>
             <a:fld id="{1CD01395-AC05-405C-BAB9-E5D2B9FDBB40}" type="datetimeFigureOut">
               <a:rPr lang="en-MY" smtClean="0"/>
-              <a:t>27/4/2026</a:t>
+              <a:t>30/4/2026</a:t>
             </a:fld>
             <a:endParaRPr lang="en-MY"/>
           </a:p>
@@ -2857,7 +3293,7 @@
           <a:p>
             <a:fld id="{1CD01395-AC05-405C-BAB9-E5D2B9FDBB40}" type="datetimeFigureOut">
               <a:rPr lang="en-MY" smtClean="0"/>
-              <a:t>27/4/2026</a:t>
+              <a:t>30/4/2026</a:t>
             </a:fld>
             <a:endParaRPr lang="en-MY"/>
           </a:p>
@@ -3311,7 +3747,7 @@
           <a:p>
             <a:fld id="{1CD01395-AC05-405C-BAB9-E5D2B9FDBB40}" type="datetimeFigureOut">
               <a:rPr lang="en-MY" smtClean="0"/>
-              <a:t>27/4/2026</a:t>
+              <a:t>30/4/2026</a:t>
             </a:fld>
             <a:endParaRPr lang="en-MY"/>
           </a:p>
@@ -3887,7 +4323,7 @@
           <a:p>
             <a:fld id="{1CD01395-AC05-405C-BAB9-E5D2B9FDBB40}" type="datetimeFigureOut">
               <a:rPr lang="en-MY" smtClean="0"/>
-              <a:t>27/4/2026</a:t>
+              <a:t>30/4/2026</a:t>
             </a:fld>
             <a:endParaRPr lang="en-MY"/>
           </a:p>
@@ -4748,7 +5184,7 @@
           <a:p>
             <a:fld id="{1CD01395-AC05-405C-BAB9-E5D2B9FDBB40}" type="datetimeFigureOut">
               <a:rPr lang="en-MY" smtClean="0"/>
-              <a:t>27/4/2026</a:t>
+              <a:t>30/4/2026</a:t>
             </a:fld>
             <a:endParaRPr lang="en-MY"/>
           </a:p>
@@ -4953,7 +5389,7 @@
           <a:p>
             <a:fld id="{1CD01395-AC05-405C-BAB9-E5D2B9FDBB40}" type="datetimeFigureOut">
               <a:rPr lang="en-MY" smtClean="0"/>
-              <a:t>27/4/2026</a:t>
+              <a:t>30/4/2026</a:t>
             </a:fld>
             <a:endParaRPr lang="en-MY"/>
           </a:p>
@@ -5167,7 +5603,7 @@
           <a:p>
             <a:fld id="{1CD01395-AC05-405C-BAB9-E5D2B9FDBB40}" type="datetimeFigureOut">
               <a:rPr lang="en-MY" smtClean="0"/>
-              <a:t>27/4/2026</a:t>
+              <a:t>30/4/2026</a:t>
             </a:fld>
             <a:endParaRPr lang="en-MY"/>
           </a:p>
@@ -5372,7 +5808,7 @@
           <a:p>
             <a:fld id="{1CD01395-AC05-405C-BAB9-E5D2B9FDBB40}" type="datetimeFigureOut">
               <a:rPr lang="en-MY" smtClean="0"/>
-              <a:t>27/4/2026</a:t>
+              <a:t>30/4/2026</a:t>
             </a:fld>
             <a:endParaRPr lang="en-MY"/>
           </a:p>
@@ -5652,7 +6088,7 @@
           <a:p>
             <a:fld id="{1CD01395-AC05-405C-BAB9-E5D2B9FDBB40}" type="datetimeFigureOut">
               <a:rPr lang="en-MY" smtClean="0"/>
-              <a:t>27/4/2026</a:t>
+              <a:t>30/4/2026</a:t>
             </a:fld>
             <a:endParaRPr lang="en-MY"/>
           </a:p>
@@ -5919,7 +6355,7 @@
           <a:p>
             <a:fld id="{1CD01395-AC05-405C-BAB9-E5D2B9FDBB40}" type="datetimeFigureOut">
               <a:rPr lang="en-MY" smtClean="0"/>
-              <a:t>27/4/2026</a:t>
+              <a:t>30/4/2026</a:t>
             </a:fld>
             <a:endParaRPr lang="en-MY"/>
           </a:p>
@@ -6334,7 +6770,7 @@
           <a:p>
             <a:fld id="{1CD01395-AC05-405C-BAB9-E5D2B9FDBB40}" type="datetimeFigureOut">
               <a:rPr lang="en-MY" smtClean="0"/>
-              <a:t>27/4/2026</a:t>
+              <a:t>30/4/2026</a:t>
             </a:fld>
             <a:endParaRPr lang="en-MY"/>
           </a:p>
@@ -6482,7 +6918,7 @@
           <a:p>
             <a:fld id="{1CD01395-AC05-405C-BAB9-E5D2B9FDBB40}" type="datetimeFigureOut">
               <a:rPr lang="en-MY" smtClean="0"/>
-              <a:t>27/4/2026</a:t>
+              <a:t>30/4/2026</a:t>
             </a:fld>
             <a:endParaRPr lang="en-MY"/>
           </a:p>
@@ -6607,7 +7043,7 @@
           <a:p>
             <a:fld id="{1CD01395-AC05-405C-BAB9-E5D2B9FDBB40}" type="datetimeFigureOut">
               <a:rPr lang="en-MY" smtClean="0"/>
-              <a:t>27/4/2026</a:t>
+              <a:t>30/4/2026</a:t>
             </a:fld>
             <a:endParaRPr lang="en-MY"/>
           </a:p>
@@ -6886,7 +7322,7 @@
           <a:p>
             <a:fld id="{1CD01395-AC05-405C-BAB9-E5D2B9FDBB40}" type="datetimeFigureOut">
               <a:rPr lang="en-MY" smtClean="0"/>
-              <a:t>27/4/2026</a:t>
+              <a:t>30/4/2026</a:t>
             </a:fld>
             <a:endParaRPr lang="en-MY"/>
           </a:p>
@@ -7201,7 +7637,7 @@
           <a:p>
             <a:fld id="{1CD01395-AC05-405C-BAB9-E5D2B9FDBB40}" type="datetimeFigureOut">
               <a:rPr lang="en-MY" smtClean="0"/>
-              <a:t>27/4/2026</a:t>
+              <a:t>30/4/2026</a:t>
             </a:fld>
             <a:endParaRPr lang="en-MY"/>
           </a:p>
@@ -7454,7 +7890,7 @@
           <a:p>
             <a:fld id="{1CD01395-AC05-405C-BAB9-E5D2B9FDBB40}" type="datetimeFigureOut">
               <a:rPr lang="en-MY" smtClean="0"/>
-              <a:t>27/4/2026</a:t>
+              <a:t>30/4/2026</a:t>
             </a:fld>
             <a:endParaRPr lang="en-MY"/>
           </a:p>
@@ -7980,2891 +8416,6 @@
   <p:cSld>
     <p:bg>
       <p:bgPr>
-        <a:solidFill>
-          <a:srgbClr val="CDF6F9"/>
-        </a:solidFill>
-        <a:effectLst/>
-      </p:bgPr>
-    </p:bg>
-    <p:spTree>
-      <p:nvGrpSpPr>
-        <p:cNvPr id="1" name="">
-          <a:extLst>
-            <a:ext uri="{FF2B5EF4-FFF2-40B4-BE49-F238E27FC236}">
-              <a16:creationId xmlns:a16="http://schemas.microsoft.com/office/drawing/2014/main" id="{07E4B138-F79B-3190-6C13-DD914FBA320A}"/>
-            </a:ext>
-          </a:extLst>
-        </p:cNvPr>
-        <p:cNvGrpSpPr/>
-        <p:nvPr/>
-      </p:nvGrpSpPr>
-      <p:grpSpPr>
-        <a:xfrm>
-          <a:off x="0" y="0"/>
-          <a:ext cx="0" cy="0"/>
-          <a:chOff x="0" y="0"/>
-          <a:chExt cx="0" cy="0"/>
-        </a:xfrm>
-      </p:grpSpPr>
-      <p:sp>
-        <p:nvSpPr>
-          <p:cNvPr id="4" name="Rectangle 3">
-            <a:extLst>
-              <a:ext uri="{FF2B5EF4-FFF2-40B4-BE49-F238E27FC236}">
-                <a16:creationId xmlns:a16="http://schemas.microsoft.com/office/drawing/2014/main" id="{096F011D-CEEF-7433-5524-F23B10ACF13E}"/>
-              </a:ext>
-            </a:extLst>
-          </p:cNvPr>
-          <p:cNvSpPr/>
-          <p:nvPr/>
-        </p:nvSpPr>
-        <p:spPr>
-          <a:xfrm>
-            <a:off x="3964564" y="2276475"/>
-            <a:ext cx="4074536" cy="1587509"/>
-          </a:xfrm>
-          <a:prstGeom prst="rect">
-            <a:avLst/>
-          </a:prstGeom>
-          <a:noFill/>
-          <a:ln>
-            <a:noFill/>
-          </a:ln>
-        </p:spPr>
-        <p:style>
-          <a:lnRef idx="2">
-            <a:schemeClr val="accent6"/>
-          </a:lnRef>
-          <a:fillRef idx="1">
-            <a:schemeClr val="lt1"/>
-          </a:fillRef>
-          <a:effectRef idx="0">
-            <a:schemeClr val="accent6"/>
-          </a:effectRef>
-          <a:fontRef idx="minor">
-            <a:schemeClr val="dk1"/>
-          </a:fontRef>
-        </p:style>
-        <p:txBody>
-          <a:bodyPr rtlCol="0" anchor="ctr"/>
-          <a:lstStyle/>
-          <a:p>
-            <a:pPr algn="ctr"/>
-            <a:r>
-              <a:rPr lang="en-MY" sz="4800" dirty="0"/>
-              <a:t>DATASET</a:t>
-            </a:r>
-          </a:p>
-        </p:txBody>
-      </p:sp>
-    </p:spTree>
-    <p:extLst>
-      <p:ext uri="{BB962C8B-B14F-4D97-AF65-F5344CB8AC3E}">
-        <p14:creationId xmlns:p14="http://schemas.microsoft.com/office/powerpoint/2010/main" val="2967482216"/>
-      </p:ext>
-    </p:extLst>
-  </p:cSld>
-  <p:clrMapOvr>
-    <a:masterClrMapping/>
-  </p:clrMapOvr>
-</p:sld>
-</file>
-
-<file path=ppt/slides/slide11.xml><?xml version="1.0" encoding="utf-8"?>
-<p:sld xmlns:a="http://schemas.openxmlformats.org/drawingml/2006/main" xmlns:r="http://schemas.openxmlformats.org/officeDocument/2006/relationships" xmlns:p="http://schemas.openxmlformats.org/presentationml/2006/main" showMasterSp="0">
-  <p:cSld>
-    <p:bg>
-      <p:bgPr>
-        <a:solidFill>
-          <a:srgbClr val="CDF6F9"/>
-        </a:solidFill>
-        <a:effectLst/>
-      </p:bgPr>
-    </p:bg>
-    <p:spTree>
-      <p:nvGrpSpPr>
-        <p:cNvPr id="1" name="">
-          <a:extLst>
-            <a:ext uri="{FF2B5EF4-FFF2-40B4-BE49-F238E27FC236}">
-              <a16:creationId xmlns:a16="http://schemas.microsoft.com/office/drawing/2014/main" id="{9EFF50E8-C2B0-9D88-2CE4-13199422C558}"/>
-            </a:ext>
-          </a:extLst>
-        </p:cNvPr>
-        <p:cNvGrpSpPr/>
-        <p:nvPr/>
-      </p:nvGrpSpPr>
-      <p:grpSpPr>
-        <a:xfrm>
-          <a:off x="0" y="0"/>
-          <a:ext cx="0" cy="0"/>
-          <a:chOff x="0" y="0"/>
-          <a:chExt cx="0" cy="0"/>
-        </a:xfrm>
-      </p:grpSpPr>
-      <p:sp>
-        <p:nvSpPr>
-          <p:cNvPr id="10" name="TextBox 9">
-            <a:extLst>
-              <a:ext uri="{FF2B5EF4-FFF2-40B4-BE49-F238E27FC236}">
-                <a16:creationId xmlns:a16="http://schemas.microsoft.com/office/drawing/2014/main" id="{6CFAA6D5-A483-F1D3-F473-4EB5FF643CAF}"/>
-              </a:ext>
-            </a:extLst>
-          </p:cNvPr>
-          <p:cNvSpPr txBox="1"/>
-          <p:nvPr/>
-        </p:nvSpPr>
-        <p:spPr>
-          <a:xfrm>
-            <a:off x="295275" y="6446936"/>
-            <a:ext cx="7924800" cy="276999"/>
-          </a:xfrm>
-          <a:prstGeom prst="rect">
-            <a:avLst/>
-          </a:prstGeom>
-          <a:noFill/>
-        </p:spPr>
-        <p:txBody>
-          <a:bodyPr wrap="square">
-            <a:spAutoFit/>
-          </a:bodyPr>
-          <a:lstStyle/>
-          <a:p>
-            <a:r>
-              <a:rPr lang="en-MY" sz="1200" dirty="0" err="1"/>
-              <a:t>Filepath</a:t>
-            </a:r>
-            <a:r>
-              <a:rPr lang="en-MY" sz="1200" dirty="0"/>
-              <a:t>  : "C:\Users\sitisyaziyah\Documents\Device_Identifier\Dummy data\</a:t>
-            </a:r>
-            <a:r>
-              <a:rPr lang="en-MY" sz="1200" dirty="0" err="1"/>
-              <a:t>Oiltek</a:t>
-            </a:r>
-            <a:r>
-              <a:rPr lang="en-MY" sz="1200" dirty="0"/>
-              <a:t> - structured data.xlsx“ </a:t>
-            </a:r>
-          </a:p>
-        </p:txBody>
-      </p:sp>
-      <p:pic>
-        <p:nvPicPr>
-          <p:cNvPr id="3" name="Picture 2">
-            <a:extLst>
-              <a:ext uri="{FF2B5EF4-FFF2-40B4-BE49-F238E27FC236}">
-                <a16:creationId xmlns:a16="http://schemas.microsoft.com/office/drawing/2014/main" id="{0C83CBDE-1BA2-B6EE-EF7D-4C4EAB60B290}"/>
-              </a:ext>
-            </a:extLst>
-          </p:cNvPr>
-          <p:cNvPicPr>
-            <a:picLocks noChangeAspect="1"/>
-          </p:cNvPicPr>
-          <p:nvPr/>
-        </p:nvPicPr>
-        <p:blipFill>
-          <a:blip r:embed="rId3"/>
-          <a:stretch>
-            <a:fillRect/>
-          </a:stretch>
-        </p:blipFill>
-        <p:spPr>
-          <a:xfrm>
-            <a:off x="2731019" y="1801640"/>
-            <a:ext cx="6259455" cy="3810103"/>
-          </a:xfrm>
-          <a:prstGeom prst="rect">
-            <a:avLst/>
-          </a:prstGeom>
-        </p:spPr>
-      </p:pic>
-      <p:sp>
-        <p:nvSpPr>
-          <p:cNvPr id="14" name="Rectangle 13">
-            <a:extLst>
-              <a:ext uri="{FF2B5EF4-FFF2-40B4-BE49-F238E27FC236}">
-                <a16:creationId xmlns:a16="http://schemas.microsoft.com/office/drawing/2014/main" id="{C05E45FF-768C-F053-BFFD-3176BF216B90}"/>
-              </a:ext>
-            </a:extLst>
-          </p:cNvPr>
-          <p:cNvSpPr/>
-          <p:nvPr/>
-        </p:nvSpPr>
-        <p:spPr>
-          <a:xfrm>
-            <a:off x="4498993" y="966447"/>
-            <a:ext cx="2369561" cy="733425"/>
-          </a:xfrm>
-          <a:prstGeom prst="rect">
-            <a:avLst/>
-          </a:prstGeom>
-          <a:noFill/>
-          <a:ln>
-            <a:noFill/>
-          </a:ln>
-        </p:spPr>
-        <p:style>
-          <a:lnRef idx="2">
-            <a:schemeClr val="accent6"/>
-          </a:lnRef>
-          <a:fillRef idx="1">
-            <a:schemeClr val="lt1"/>
-          </a:fillRef>
-          <a:effectRef idx="0">
-            <a:schemeClr val="accent6"/>
-          </a:effectRef>
-          <a:fontRef idx="minor">
-            <a:schemeClr val="dk1"/>
-          </a:fontRef>
-        </p:style>
-        <p:txBody>
-          <a:bodyPr rtlCol="0" anchor="ctr"/>
-          <a:lstStyle/>
-          <a:p>
-            <a:r>
-              <a:rPr lang="en-US" sz="1400" dirty="0"/>
-              <a:t>P</a:t>
-            </a:r>
-            <a:r>
-              <a:rPr lang="en-MY" sz="1400" dirty="0"/>
-              <a:t>ROJECT 		: A1706</a:t>
-            </a:r>
-          </a:p>
-          <a:p>
-            <a:r>
-              <a:rPr lang="en-MY" sz="1400" dirty="0"/>
-              <a:t>CUSTOMER 		: </a:t>
-            </a:r>
-            <a:r>
-              <a:rPr lang="en-MY" sz="1400" b="1" dirty="0"/>
-              <a:t>OILTEK</a:t>
-            </a:r>
-          </a:p>
-          <a:p>
-            <a:r>
-              <a:rPr lang="en-MY" sz="1400" dirty="0"/>
-              <a:t>TOTAL DEVICE 	: 130</a:t>
-            </a:r>
-          </a:p>
-        </p:txBody>
-      </p:sp>
-      <p:sp>
-        <p:nvSpPr>
-          <p:cNvPr id="2" name="Rectangle 1">
-            <a:extLst>
-              <a:ext uri="{FF2B5EF4-FFF2-40B4-BE49-F238E27FC236}">
-                <a16:creationId xmlns:a16="http://schemas.microsoft.com/office/drawing/2014/main" id="{21873DC8-6958-BDE3-BB2B-08C22786164B}"/>
-              </a:ext>
-            </a:extLst>
-          </p:cNvPr>
-          <p:cNvSpPr/>
-          <p:nvPr/>
-        </p:nvSpPr>
-        <p:spPr>
-          <a:xfrm>
-            <a:off x="4739671" y="258561"/>
-            <a:ext cx="2242153" cy="707886"/>
-          </a:xfrm>
-          <a:prstGeom prst="rect">
-            <a:avLst/>
-          </a:prstGeom>
-          <a:noFill/>
-        </p:spPr>
-        <p:txBody>
-          <a:bodyPr wrap="square" lIns="91440" tIns="45720" rIns="91440" bIns="45720">
-            <a:spAutoFit/>
-          </a:bodyPr>
-          <a:lstStyle/>
-          <a:p>
-            <a:pPr algn="ctr"/>
-            <a:r>
-              <a:rPr lang="en-US" sz="4000" b="0" cap="none" spc="0" dirty="0">
-                <a:ln w="0"/>
-                <a:solidFill>
-                  <a:schemeClr val="tx1"/>
-                </a:solidFill>
-                <a:effectLst>
-                  <a:outerShdw blurRad="38100" dist="19050" dir="2700000" algn="tl" rotWithShape="0">
-                    <a:schemeClr val="dk1">
-                      <a:alpha val="40000"/>
-                    </a:schemeClr>
-                  </a:outerShdw>
-                </a:effectLst>
-              </a:rPr>
-              <a:t>OILTEK</a:t>
-            </a:r>
-          </a:p>
-        </p:txBody>
-      </p:sp>
-    </p:spTree>
-    <p:extLst>
-      <p:ext uri="{BB962C8B-B14F-4D97-AF65-F5344CB8AC3E}">
-        <p14:creationId xmlns:p14="http://schemas.microsoft.com/office/powerpoint/2010/main" val="3555587184"/>
-      </p:ext>
-    </p:extLst>
-  </p:cSld>
-  <p:clrMapOvr>
-    <a:masterClrMapping/>
-  </p:clrMapOvr>
-</p:sld>
-</file>
-
-<file path=ppt/slides/slide12.xml><?xml version="1.0" encoding="utf-8"?>
-<p:sld xmlns:a="http://schemas.openxmlformats.org/drawingml/2006/main" xmlns:r="http://schemas.openxmlformats.org/officeDocument/2006/relationships" xmlns:p="http://schemas.openxmlformats.org/presentationml/2006/main" showMasterSp="0">
-  <p:cSld>
-    <p:bg>
-      <p:bgPr>
-        <a:solidFill>
-          <a:srgbClr val="CDF6F9"/>
-        </a:solidFill>
-        <a:effectLst/>
-      </p:bgPr>
-    </p:bg>
-    <p:spTree>
-      <p:nvGrpSpPr>
-        <p:cNvPr id="1" name="">
-          <a:extLst>
-            <a:ext uri="{FF2B5EF4-FFF2-40B4-BE49-F238E27FC236}">
-              <a16:creationId xmlns:a16="http://schemas.microsoft.com/office/drawing/2014/main" id="{52304AE1-9FFD-5D1C-EA30-76AB0E14338F}"/>
-            </a:ext>
-          </a:extLst>
-        </p:cNvPr>
-        <p:cNvGrpSpPr/>
-        <p:nvPr/>
-      </p:nvGrpSpPr>
-      <p:grpSpPr>
-        <a:xfrm>
-          <a:off x="0" y="0"/>
-          <a:ext cx="0" cy="0"/>
-          <a:chOff x="0" y="0"/>
-          <a:chExt cx="0" cy="0"/>
-        </a:xfrm>
-      </p:grpSpPr>
-      <p:sp>
-        <p:nvSpPr>
-          <p:cNvPr id="5" name="Rectangle 4">
-            <a:extLst>
-              <a:ext uri="{FF2B5EF4-FFF2-40B4-BE49-F238E27FC236}">
-                <a16:creationId xmlns:a16="http://schemas.microsoft.com/office/drawing/2014/main" id="{DD2F06A8-6F34-FB7C-99CA-D5B7B6BA0829}"/>
-              </a:ext>
-            </a:extLst>
-          </p:cNvPr>
-          <p:cNvSpPr/>
-          <p:nvPr/>
-        </p:nvSpPr>
-        <p:spPr>
-          <a:xfrm>
-            <a:off x="3357243" y="663392"/>
-            <a:ext cx="5235070" cy="389810"/>
-          </a:xfrm>
-          <a:prstGeom prst="rect">
-            <a:avLst/>
-          </a:prstGeom>
-          <a:noFill/>
-          <a:ln>
-            <a:noFill/>
-          </a:ln>
-        </p:spPr>
-        <p:style>
-          <a:lnRef idx="2">
-            <a:schemeClr val="accent6"/>
-          </a:lnRef>
-          <a:fillRef idx="1">
-            <a:schemeClr val="lt1"/>
-          </a:fillRef>
-          <a:effectRef idx="0">
-            <a:schemeClr val="accent6"/>
-          </a:effectRef>
-          <a:fontRef idx="minor">
-            <a:schemeClr val="dk1"/>
-          </a:fontRef>
-        </p:style>
-        <p:txBody>
-          <a:bodyPr rtlCol="0" anchor="ctr"/>
-          <a:lstStyle/>
-          <a:p>
-            <a:pPr algn="ctr"/>
-            <a:r>
-              <a:rPr lang="en-MY" sz="1400" dirty="0"/>
-              <a:t>CUSTOMER : UGS  </a:t>
-            </a:r>
-            <a:r>
-              <a:rPr lang="en-US" sz="1400" dirty="0"/>
-              <a:t>P</a:t>
-            </a:r>
-            <a:r>
-              <a:rPr lang="en-MY" sz="1400" dirty="0"/>
-              <a:t>ROJECT: A2027        TOTAL DEVICE : 328</a:t>
-            </a:r>
-          </a:p>
-        </p:txBody>
-      </p:sp>
-      <p:sp>
-        <p:nvSpPr>
-          <p:cNvPr id="10" name="TextBox 9">
-            <a:extLst>
-              <a:ext uri="{FF2B5EF4-FFF2-40B4-BE49-F238E27FC236}">
-                <a16:creationId xmlns:a16="http://schemas.microsoft.com/office/drawing/2014/main" id="{E950CA3E-626B-CB93-987C-9518012BE204}"/>
-              </a:ext>
-            </a:extLst>
-          </p:cNvPr>
-          <p:cNvSpPr txBox="1"/>
-          <p:nvPr/>
-        </p:nvSpPr>
-        <p:spPr>
-          <a:xfrm>
-            <a:off x="95250" y="6593130"/>
-            <a:ext cx="7924800" cy="261610"/>
-          </a:xfrm>
-          <a:prstGeom prst="rect">
-            <a:avLst/>
-          </a:prstGeom>
-          <a:noFill/>
-        </p:spPr>
-        <p:txBody>
-          <a:bodyPr wrap="square">
-            <a:spAutoFit/>
-          </a:bodyPr>
-          <a:lstStyle/>
-          <a:p>
-            <a:r>
-              <a:rPr lang="en-MY" sz="1050" dirty="0" err="1"/>
-              <a:t>Filepath</a:t>
-            </a:r>
-            <a:r>
-              <a:rPr lang="en-MY" sz="1050" dirty="0"/>
-              <a:t>  : "C:\Users\sitisyaziyah\Documents\Device_Identifier\Dummy data\UGS - structured data.xlsx“ (sheet = A2027-S2)</a:t>
-            </a:r>
-          </a:p>
-        </p:txBody>
-      </p:sp>
-      <p:pic>
-        <p:nvPicPr>
-          <p:cNvPr id="4" name="Picture 3">
-            <a:extLst>
-              <a:ext uri="{FF2B5EF4-FFF2-40B4-BE49-F238E27FC236}">
-                <a16:creationId xmlns:a16="http://schemas.microsoft.com/office/drawing/2014/main" id="{64D1F1BF-BC42-246A-BEF3-35FBB30AFBC6}"/>
-              </a:ext>
-            </a:extLst>
-          </p:cNvPr>
-          <p:cNvPicPr>
-            <a:picLocks noChangeAspect="1"/>
-          </p:cNvPicPr>
-          <p:nvPr/>
-        </p:nvPicPr>
-        <p:blipFill>
-          <a:blip r:embed="rId3"/>
-          <a:stretch>
-            <a:fillRect/>
-          </a:stretch>
-        </p:blipFill>
-        <p:spPr>
-          <a:xfrm>
-            <a:off x="1034810" y="1053202"/>
-            <a:ext cx="10286971" cy="5453172"/>
-          </a:xfrm>
-          <a:prstGeom prst="rect">
-            <a:avLst/>
-          </a:prstGeom>
-        </p:spPr>
-      </p:pic>
-      <p:sp>
-        <p:nvSpPr>
-          <p:cNvPr id="2" name="Rectangle 1">
-            <a:extLst>
-              <a:ext uri="{FF2B5EF4-FFF2-40B4-BE49-F238E27FC236}">
-                <a16:creationId xmlns:a16="http://schemas.microsoft.com/office/drawing/2014/main" id="{AA3692A3-9B0B-DC5B-8A80-F2C1BAA3C152}"/>
-              </a:ext>
-            </a:extLst>
-          </p:cNvPr>
-          <p:cNvSpPr/>
-          <p:nvPr/>
-        </p:nvSpPr>
-        <p:spPr>
-          <a:xfrm>
-            <a:off x="4675663" y="34751"/>
-            <a:ext cx="2242153" cy="707886"/>
-          </a:xfrm>
-          <a:prstGeom prst="rect">
-            <a:avLst/>
-          </a:prstGeom>
-          <a:noFill/>
-        </p:spPr>
-        <p:txBody>
-          <a:bodyPr wrap="square" lIns="91440" tIns="45720" rIns="91440" bIns="45720">
-            <a:spAutoFit/>
-          </a:bodyPr>
-          <a:lstStyle/>
-          <a:p>
-            <a:pPr algn="ctr"/>
-            <a:r>
-              <a:rPr lang="en-US" sz="4000" dirty="0">
-                <a:ln w="0"/>
-                <a:effectLst>
-                  <a:outerShdw blurRad="38100" dist="19050" dir="2700000" algn="tl" rotWithShape="0">
-                    <a:schemeClr val="dk1">
-                      <a:alpha val="40000"/>
-                    </a:schemeClr>
-                  </a:outerShdw>
-                </a:effectLst>
-              </a:rPr>
-              <a:t>UGS</a:t>
-            </a:r>
-            <a:endParaRPr lang="en-US" sz="4000" b="0" cap="none" spc="0" dirty="0">
-              <a:ln w="0"/>
-              <a:solidFill>
-                <a:schemeClr val="tx1"/>
-              </a:solidFill>
-              <a:effectLst>
-                <a:outerShdw blurRad="38100" dist="19050" dir="2700000" algn="tl" rotWithShape="0">
-                  <a:schemeClr val="dk1">
-                    <a:alpha val="40000"/>
-                  </a:schemeClr>
-                </a:outerShdw>
-              </a:effectLst>
-            </a:endParaRPr>
-          </a:p>
-        </p:txBody>
-      </p:sp>
-    </p:spTree>
-    <p:extLst>
-      <p:ext uri="{BB962C8B-B14F-4D97-AF65-F5344CB8AC3E}">
-        <p14:creationId xmlns:p14="http://schemas.microsoft.com/office/powerpoint/2010/main" val="588220425"/>
-      </p:ext>
-    </p:extLst>
-  </p:cSld>
-  <p:clrMapOvr>
-    <a:masterClrMapping/>
-  </p:clrMapOvr>
-</p:sld>
-</file>
-
-<file path=ppt/slides/slide13.xml><?xml version="1.0" encoding="utf-8"?>
-<p:sld xmlns:a="http://schemas.openxmlformats.org/drawingml/2006/main" xmlns:r="http://schemas.openxmlformats.org/officeDocument/2006/relationships" xmlns:p="http://schemas.openxmlformats.org/presentationml/2006/main" showMasterSp="0">
-  <p:cSld>
-    <p:bg>
-      <p:bgPr>
-        <a:solidFill>
-          <a:srgbClr val="CDF6F9"/>
-        </a:solidFill>
-        <a:effectLst/>
-      </p:bgPr>
-    </p:bg>
-    <p:spTree>
-      <p:nvGrpSpPr>
-        <p:cNvPr id="1" name="">
-          <a:extLst>
-            <a:ext uri="{FF2B5EF4-FFF2-40B4-BE49-F238E27FC236}">
-              <a16:creationId xmlns:a16="http://schemas.microsoft.com/office/drawing/2014/main" id="{BF679647-F271-F17F-14F8-01FF566A07DB}"/>
-            </a:ext>
-          </a:extLst>
-        </p:cNvPr>
-        <p:cNvGrpSpPr/>
-        <p:nvPr/>
-      </p:nvGrpSpPr>
-      <p:grpSpPr>
-        <a:xfrm>
-          <a:off x="0" y="0"/>
-          <a:ext cx="0" cy="0"/>
-          <a:chOff x="0" y="0"/>
-          <a:chExt cx="0" cy="0"/>
-        </a:xfrm>
-      </p:grpSpPr>
-      <p:pic>
-        <p:nvPicPr>
-          <p:cNvPr id="4" name="Picture 3">
-            <a:extLst>
-              <a:ext uri="{FF2B5EF4-FFF2-40B4-BE49-F238E27FC236}">
-                <a16:creationId xmlns:a16="http://schemas.microsoft.com/office/drawing/2014/main" id="{F56E8B70-DC69-FF92-CA47-5D65C926AD5B}"/>
-              </a:ext>
-            </a:extLst>
-          </p:cNvPr>
-          <p:cNvPicPr>
-            <a:picLocks noChangeAspect="1"/>
-          </p:cNvPicPr>
-          <p:nvPr/>
-        </p:nvPicPr>
-        <p:blipFill>
-          <a:blip r:embed="rId3"/>
-          <a:stretch>
-            <a:fillRect/>
-          </a:stretch>
-        </p:blipFill>
-        <p:spPr>
-          <a:xfrm>
-            <a:off x="2765534" y="1180986"/>
-            <a:ext cx="6073801" cy="5105514"/>
-          </a:xfrm>
-          <a:prstGeom prst="rect">
-            <a:avLst/>
-          </a:prstGeom>
-        </p:spPr>
-      </p:pic>
-      <p:sp>
-        <p:nvSpPr>
-          <p:cNvPr id="9" name="Rectangle 8">
-            <a:extLst>
-              <a:ext uri="{FF2B5EF4-FFF2-40B4-BE49-F238E27FC236}">
-                <a16:creationId xmlns:a16="http://schemas.microsoft.com/office/drawing/2014/main" id="{6DFF0C8E-DEB7-77E9-5323-611C30F53488}"/>
-              </a:ext>
-            </a:extLst>
-          </p:cNvPr>
-          <p:cNvSpPr/>
-          <p:nvPr/>
-        </p:nvSpPr>
-        <p:spPr>
-          <a:xfrm>
-            <a:off x="194180" y="257175"/>
-            <a:ext cx="2369561" cy="790575"/>
-          </a:xfrm>
-          <a:prstGeom prst="rect">
-            <a:avLst/>
-          </a:prstGeom>
-          <a:noFill/>
-          <a:ln>
-            <a:noFill/>
-          </a:ln>
-        </p:spPr>
-        <p:style>
-          <a:lnRef idx="2">
-            <a:schemeClr val="accent6"/>
-          </a:lnRef>
-          <a:fillRef idx="1">
-            <a:schemeClr val="lt1"/>
-          </a:fillRef>
-          <a:effectRef idx="0">
-            <a:schemeClr val="accent6"/>
-          </a:effectRef>
-          <a:fontRef idx="minor">
-            <a:schemeClr val="dk1"/>
-          </a:fontRef>
-        </p:style>
-        <p:txBody>
-          <a:bodyPr rtlCol="0" anchor="ctr"/>
-          <a:lstStyle/>
-          <a:p>
-            <a:r>
-              <a:rPr lang="en-US" sz="1400" dirty="0"/>
-              <a:t>P</a:t>
-            </a:r>
-            <a:r>
-              <a:rPr lang="en-MY" sz="1400" dirty="0"/>
-              <a:t>ROJECT 	: A1706</a:t>
-            </a:r>
-          </a:p>
-          <a:p>
-            <a:r>
-              <a:rPr lang="en-MY" sz="1400" dirty="0"/>
-              <a:t>CUSTOMER 	: OILTEK</a:t>
-            </a:r>
-          </a:p>
-          <a:p>
-            <a:r>
-              <a:rPr lang="en-MY" sz="1400" dirty="0"/>
-              <a:t>FORMAT DATASET TO LOAD</a:t>
-            </a:r>
-          </a:p>
-        </p:txBody>
-      </p:sp>
-      <p:sp>
-        <p:nvSpPr>
-          <p:cNvPr id="7" name="TextBox 6">
-            <a:extLst>
-              <a:ext uri="{FF2B5EF4-FFF2-40B4-BE49-F238E27FC236}">
-                <a16:creationId xmlns:a16="http://schemas.microsoft.com/office/drawing/2014/main" id="{F21A24C2-F84D-BA8F-3749-5EF19C48A0AF}"/>
-              </a:ext>
-            </a:extLst>
-          </p:cNvPr>
-          <p:cNvSpPr txBox="1"/>
-          <p:nvPr/>
-        </p:nvSpPr>
-        <p:spPr>
-          <a:xfrm>
-            <a:off x="295275" y="6446936"/>
-            <a:ext cx="7924800" cy="276999"/>
-          </a:xfrm>
-          <a:prstGeom prst="rect">
-            <a:avLst/>
-          </a:prstGeom>
-          <a:noFill/>
-        </p:spPr>
-        <p:txBody>
-          <a:bodyPr wrap="square">
-            <a:spAutoFit/>
-          </a:bodyPr>
-          <a:lstStyle/>
-          <a:p>
-            <a:r>
-              <a:rPr lang="en-MY" sz="1200" dirty="0" err="1"/>
-              <a:t>Filepath</a:t>
-            </a:r>
-            <a:r>
-              <a:rPr lang="en-MY" sz="1200" dirty="0"/>
-              <a:t>  : "C:\Users\sitisyaziyah\Documents\Device_Identifier\Dummy data\</a:t>
-            </a:r>
-            <a:r>
-              <a:rPr lang="en-MY" sz="1200" dirty="0" err="1"/>
-              <a:t>Oiltek</a:t>
-            </a:r>
-            <a:r>
-              <a:rPr lang="en-MY" sz="1200" dirty="0"/>
-              <a:t> - structured data.xlsx“ (sheet = A1076_df)</a:t>
-            </a:r>
-          </a:p>
-        </p:txBody>
-      </p:sp>
-    </p:spTree>
-    <p:extLst>
-      <p:ext uri="{BB962C8B-B14F-4D97-AF65-F5344CB8AC3E}">
-        <p14:creationId xmlns:p14="http://schemas.microsoft.com/office/powerpoint/2010/main" val="3597209293"/>
-      </p:ext>
-    </p:extLst>
-  </p:cSld>
-  <p:clrMapOvr>
-    <a:masterClrMapping/>
-  </p:clrMapOvr>
-</p:sld>
-</file>
-
-<file path=ppt/slides/slide14.xml><?xml version="1.0" encoding="utf-8"?>
-<p:sld xmlns:a="http://schemas.openxmlformats.org/drawingml/2006/main" xmlns:r="http://schemas.openxmlformats.org/officeDocument/2006/relationships" xmlns:p="http://schemas.openxmlformats.org/presentationml/2006/main" showMasterSp="0">
-  <p:cSld>
-    <p:bg>
-      <p:bgPr>
-        <a:solidFill>
-          <a:srgbClr val="CDF6F9"/>
-        </a:solidFill>
-        <a:effectLst/>
-      </p:bgPr>
-    </p:bg>
-    <p:spTree>
-      <p:nvGrpSpPr>
-        <p:cNvPr id="1" name="">
-          <a:extLst>
-            <a:ext uri="{FF2B5EF4-FFF2-40B4-BE49-F238E27FC236}">
-              <a16:creationId xmlns:a16="http://schemas.microsoft.com/office/drawing/2014/main" id="{496294E8-DB96-89DD-76FD-F0FEDF6D616B}"/>
-            </a:ext>
-          </a:extLst>
-        </p:cNvPr>
-        <p:cNvGrpSpPr/>
-        <p:nvPr/>
-      </p:nvGrpSpPr>
-      <p:grpSpPr>
-        <a:xfrm>
-          <a:off x="0" y="0"/>
-          <a:ext cx="0" cy="0"/>
-          <a:chOff x="0" y="0"/>
-          <a:chExt cx="0" cy="0"/>
-        </a:xfrm>
-      </p:grpSpPr>
-      <p:sp>
-        <p:nvSpPr>
-          <p:cNvPr id="5" name="Rectangle 4">
-            <a:extLst>
-              <a:ext uri="{FF2B5EF4-FFF2-40B4-BE49-F238E27FC236}">
-                <a16:creationId xmlns:a16="http://schemas.microsoft.com/office/drawing/2014/main" id="{65CA863E-898B-B444-42D6-372454A7A07A}"/>
-              </a:ext>
-            </a:extLst>
-          </p:cNvPr>
-          <p:cNvSpPr/>
-          <p:nvPr/>
-        </p:nvSpPr>
-        <p:spPr>
-          <a:xfrm>
-            <a:off x="3861306" y="134065"/>
-            <a:ext cx="5235070" cy="389810"/>
-          </a:xfrm>
-          <a:prstGeom prst="rect">
-            <a:avLst/>
-          </a:prstGeom>
-          <a:noFill/>
-          <a:ln>
-            <a:noFill/>
-          </a:ln>
-        </p:spPr>
-        <p:style>
-          <a:lnRef idx="2">
-            <a:schemeClr val="accent6"/>
-          </a:lnRef>
-          <a:fillRef idx="1">
-            <a:schemeClr val="lt1"/>
-          </a:fillRef>
-          <a:effectRef idx="0">
-            <a:schemeClr val="accent6"/>
-          </a:effectRef>
-          <a:fontRef idx="minor">
-            <a:schemeClr val="dk1"/>
-          </a:fontRef>
-        </p:style>
-        <p:txBody>
-          <a:bodyPr rtlCol="0" anchor="ctr"/>
-          <a:lstStyle/>
-          <a:p>
-            <a:pPr algn="ctr"/>
-            <a:r>
-              <a:rPr lang="en-MY" sz="1400" dirty="0"/>
-              <a:t>CUSTOMER : UGS  </a:t>
-            </a:r>
-            <a:r>
-              <a:rPr lang="en-US" sz="1400" dirty="0"/>
-              <a:t>P</a:t>
-            </a:r>
-            <a:r>
-              <a:rPr lang="en-MY" sz="1400" dirty="0"/>
-              <a:t>ROJECT: A1887 TOTAL DEVICE : 286</a:t>
-            </a:r>
-          </a:p>
-        </p:txBody>
-      </p:sp>
-      <p:sp>
-        <p:nvSpPr>
-          <p:cNvPr id="10" name="TextBox 9">
-            <a:extLst>
-              <a:ext uri="{FF2B5EF4-FFF2-40B4-BE49-F238E27FC236}">
-                <a16:creationId xmlns:a16="http://schemas.microsoft.com/office/drawing/2014/main" id="{E6238E74-41BE-EAF8-7443-9CB7F70C1DEC}"/>
-              </a:ext>
-            </a:extLst>
-          </p:cNvPr>
-          <p:cNvSpPr txBox="1"/>
-          <p:nvPr/>
-        </p:nvSpPr>
-        <p:spPr>
-          <a:xfrm>
-            <a:off x="95250" y="6593130"/>
-            <a:ext cx="7924800" cy="261610"/>
-          </a:xfrm>
-          <a:prstGeom prst="rect">
-            <a:avLst/>
-          </a:prstGeom>
-          <a:noFill/>
-        </p:spPr>
-        <p:txBody>
-          <a:bodyPr wrap="square">
-            <a:spAutoFit/>
-          </a:bodyPr>
-          <a:lstStyle/>
-          <a:p>
-            <a:r>
-              <a:rPr lang="en-MY" sz="1050" dirty="0" err="1"/>
-              <a:t>Filepath</a:t>
-            </a:r>
-            <a:r>
-              <a:rPr lang="en-MY" sz="1050" dirty="0"/>
-              <a:t>  : "C:\Users\sitisyaziyah\Documents\Device_Identifier\Dummy data\UGS - structured data.xlsx“ (sheet = A1887-S2)</a:t>
-            </a:r>
-          </a:p>
-        </p:txBody>
-      </p:sp>
-      <p:pic>
-        <p:nvPicPr>
-          <p:cNvPr id="3" name="Picture 2">
-            <a:extLst>
-              <a:ext uri="{FF2B5EF4-FFF2-40B4-BE49-F238E27FC236}">
-                <a16:creationId xmlns:a16="http://schemas.microsoft.com/office/drawing/2014/main" id="{26DED758-7E45-8B88-A1CE-96FED269D5C0}"/>
-              </a:ext>
-            </a:extLst>
-          </p:cNvPr>
-          <p:cNvPicPr>
-            <a:picLocks noChangeAspect="1"/>
-          </p:cNvPicPr>
-          <p:nvPr/>
-        </p:nvPicPr>
-        <p:blipFill>
-          <a:blip r:embed="rId3"/>
-          <a:stretch>
-            <a:fillRect/>
-          </a:stretch>
-        </p:blipFill>
-        <p:spPr>
-          <a:xfrm>
-            <a:off x="2081358" y="500715"/>
-            <a:ext cx="8794965" cy="6092415"/>
-          </a:xfrm>
-          <a:prstGeom prst="rect">
-            <a:avLst/>
-          </a:prstGeom>
-        </p:spPr>
-      </p:pic>
-      <p:sp>
-        <p:nvSpPr>
-          <p:cNvPr id="2" name="TextBox 1">
-            <a:extLst>
-              <a:ext uri="{FF2B5EF4-FFF2-40B4-BE49-F238E27FC236}">
-                <a16:creationId xmlns:a16="http://schemas.microsoft.com/office/drawing/2014/main" id="{CF6F83BE-392E-BF69-95E6-E186F278EF24}"/>
-              </a:ext>
-            </a:extLst>
-          </p:cNvPr>
-          <p:cNvSpPr txBox="1"/>
-          <p:nvPr/>
-        </p:nvSpPr>
-        <p:spPr>
-          <a:xfrm>
-            <a:off x="261702" y="500715"/>
-            <a:ext cx="1819656" cy="1200329"/>
-          </a:xfrm>
-          <a:prstGeom prst="rect">
-            <a:avLst/>
-          </a:prstGeom>
-          <a:noFill/>
-        </p:spPr>
-        <p:txBody>
-          <a:bodyPr wrap="square" rtlCol="0">
-            <a:spAutoFit/>
-          </a:bodyPr>
-          <a:lstStyle/>
-          <a:p>
-            <a:r>
-              <a:rPr lang="en-MY" dirty="0">
-                <a:solidFill>
-                  <a:srgbClr val="FF0000"/>
-                </a:solidFill>
-              </a:rPr>
-              <a:t>Note 16/4/2026</a:t>
-            </a:r>
-          </a:p>
-          <a:p>
-            <a:r>
-              <a:rPr lang="en-MY" dirty="0">
-                <a:solidFill>
-                  <a:srgbClr val="FF0000"/>
-                </a:solidFill>
-              </a:rPr>
-              <a:t>DROPOUT OILTEK_A1827</a:t>
-            </a:r>
-          </a:p>
-          <a:p>
-            <a:r>
-              <a:rPr lang="en-MY" dirty="0">
-                <a:solidFill>
-                  <a:srgbClr val="FF0000"/>
-                </a:solidFill>
-              </a:rPr>
-              <a:t>UGS_A1887</a:t>
-            </a:r>
-          </a:p>
-        </p:txBody>
-      </p:sp>
-    </p:spTree>
-    <p:extLst>
-      <p:ext uri="{BB962C8B-B14F-4D97-AF65-F5344CB8AC3E}">
-        <p14:creationId xmlns:p14="http://schemas.microsoft.com/office/powerpoint/2010/main" val="1691097330"/>
-      </p:ext>
-    </p:extLst>
-  </p:cSld>
-  <p:clrMapOvr>
-    <a:masterClrMapping/>
-  </p:clrMapOvr>
-</p:sld>
-</file>
-
-<file path=ppt/slides/slide2.xml><?xml version="1.0" encoding="utf-8"?>
-<p:sld xmlns:a="http://schemas.openxmlformats.org/drawingml/2006/main" xmlns:r="http://schemas.openxmlformats.org/officeDocument/2006/relationships" xmlns:p="http://schemas.openxmlformats.org/presentationml/2006/main" showMasterSp="0">
-  <p:cSld>
-    <p:bg>
-      <p:bgPr>
-        <a:solidFill>
-          <a:schemeClr val="bg1"/>
-        </a:solidFill>
-        <a:effectLst/>
-      </p:bgPr>
-    </p:bg>
-    <p:spTree>
-      <p:nvGrpSpPr>
-        <p:cNvPr id="1" name="">
-          <a:extLst>
-            <a:ext uri="{FF2B5EF4-FFF2-40B4-BE49-F238E27FC236}">
-              <a16:creationId xmlns:a16="http://schemas.microsoft.com/office/drawing/2014/main" id="{5ACDE19C-F5BD-B912-3E54-53724452BF82}"/>
-            </a:ext>
-          </a:extLst>
-        </p:cNvPr>
-        <p:cNvGrpSpPr/>
-        <p:nvPr/>
-      </p:nvGrpSpPr>
-      <p:grpSpPr>
-        <a:xfrm>
-          <a:off x="0" y="0"/>
-          <a:ext cx="0" cy="0"/>
-          <a:chOff x="0" y="0"/>
-          <a:chExt cx="0" cy="0"/>
-        </a:xfrm>
-      </p:grpSpPr>
-      <p:sp>
-        <p:nvSpPr>
-          <p:cNvPr id="4" name="Rectangle 3">
-            <a:extLst>
-              <a:ext uri="{FF2B5EF4-FFF2-40B4-BE49-F238E27FC236}">
-                <a16:creationId xmlns:a16="http://schemas.microsoft.com/office/drawing/2014/main" id="{1DDB410C-EA40-6A78-6A16-2CEC8DDAB8CC}"/>
-              </a:ext>
-            </a:extLst>
-          </p:cNvPr>
-          <p:cNvSpPr/>
-          <p:nvPr/>
-        </p:nvSpPr>
-        <p:spPr>
-          <a:xfrm>
-            <a:off x="7555894" y="235052"/>
-            <a:ext cx="2379453" cy="623006"/>
-          </a:xfrm>
-          <a:prstGeom prst="rect">
-            <a:avLst/>
-          </a:prstGeom>
-          <a:ln>
-            <a:solidFill>
-              <a:schemeClr val="tx1"/>
-            </a:solidFill>
-          </a:ln>
-        </p:spPr>
-        <p:style>
-          <a:lnRef idx="2">
-            <a:schemeClr val="accent6"/>
-          </a:lnRef>
-          <a:fillRef idx="1">
-            <a:schemeClr val="lt1"/>
-          </a:fillRef>
-          <a:effectRef idx="0">
-            <a:schemeClr val="accent6"/>
-          </a:effectRef>
-          <a:fontRef idx="minor">
-            <a:schemeClr val="dk1"/>
-          </a:fontRef>
-        </p:style>
-        <p:txBody>
-          <a:bodyPr rtlCol="0" anchor="ctr"/>
-          <a:lstStyle/>
-          <a:p>
-            <a:pPr algn="ctr">
-              <a:lnSpc>
-                <a:spcPts val="1400"/>
-              </a:lnSpc>
-            </a:pPr>
-            <a:r>
-              <a:rPr lang="en-MY" sz="1200" b="1" dirty="0">
-                <a:latin typeface="Arial" panose="020B0604020202020204" pitchFamily="34" charset="0"/>
-                <a:cs typeface="Arial" panose="020B0604020202020204" pitchFamily="34" charset="0"/>
-              </a:rPr>
-              <a:t>INPUT</a:t>
-            </a:r>
-          </a:p>
-          <a:p>
-            <a:pPr algn="ctr">
-              <a:lnSpc>
-                <a:spcPts val="1400"/>
-              </a:lnSpc>
-            </a:pPr>
-            <a:r>
-              <a:rPr lang="en-MY" sz="1200" dirty="0">
-                <a:latin typeface="Arial" panose="020B0604020202020204" pitchFamily="34" charset="0"/>
-                <a:cs typeface="Arial" panose="020B0604020202020204" pitchFamily="34" charset="0"/>
-              </a:rPr>
-              <a:t>(Customer, Project, Device ID</a:t>
-            </a:r>
-            <a:r>
-              <a:rPr lang="en-MY" sz="1200" b="1" dirty="0">
-                <a:latin typeface="Arial" panose="020B0604020202020204" pitchFamily="34" charset="0"/>
-                <a:cs typeface="Arial" panose="020B0604020202020204" pitchFamily="34" charset="0"/>
-              </a:rPr>
-              <a:t>)</a:t>
-            </a:r>
-          </a:p>
-        </p:txBody>
-      </p:sp>
-      <p:sp>
-        <p:nvSpPr>
-          <p:cNvPr id="11" name="Rectangle 10">
-            <a:extLst>
-              <a:ext uri="{FF2B5EF4-FFF2-40B4-BE49-F238E27FC236}">
-                <a16:creationId xmlns:a16="http://schemas.microsoft.com/office/drawing/2014/main" id="{A0F783AE-E4BB-7E7F-7041-A46A51505740}"/>
-              </a:ext>
-            </a:extLst>
-          </p:cNvPr>
-          <p:cNvSpPr/>
-          <p:nvPr/>
-        </p:nvSpPr>
-        <p:spPr>
-          <a:xfrm>
-            <a:off x="7012337" y="4244120"/>
-            <a:ext cx="3475552" cy="597506"/>
-          </a:xfrm>
-          <a:prstGeom prst="rect">
-            <a:avLst/>
-          </a:prstGeom>
-          <a:ln>
-            <a:solidFill>
-              <a:schemeClr val="tx1"/>
-            </a:solidFill>
-          </a:ln>
-        </p:spPr>
-        <p:style>
-          <a:lnRef idx="2">
-            <a:schemeClr val="accent6"/>
-          </a:lnRef>
-          <a:fillRef idx="1">
-            <a:schemeClr val="lt1"/>
-          </a:fillRef>
-          <a:effectRef idx="0">
-            <a:schemeClr val="accent6"/>
-          </a:effectRef>
-          <a:fontRef idx="minor">
-            <a:schemeClr val="dk1"/>
-          </a:fontRef>
-        </p:style>
-        <p:txBody>
-          <a:bodyPr rtlCol="0" anchor="ctr"/>
-          <a:lstStyle/>
-          <a:p>
-            <a:pPr algn="ctr"/>
-            <a:r>
-              <a:rPr lang="en-MY" sz="1200" b="1" dirty="0">
-                <a:latin typeface="Arial" panose="020B0604020202020204" pitchFamily="34" charset="0"/>
-                <a:cs typeface="Arial" panose="020B0604020202020204" pitchFamily="34" charset="0"/>
-              </a:rPr>
-              <a:t>RESULT OUTPUT</a:t>
-            </a:r>
-          </a:p>
-          <a:p>
-            <a:pPr algn="ctr"/>
-            <a:r>
-              <a:rPr lang="en-MY" sz="1200" dirty="0">
-                <a:latin typeface="Arial" panose="020B0604020202020204" pitchFamily="34" charset="0"/>
-                <a:cs typeface="Arial" panose="020B0604020202020204" pitchFamily="34" charset="0"/>
-              </a:rPr>
-              <a:t>(Customer, Project, Device ID,  Section, Cluster)</a:t>
-            </a:r>
-          </a:p>
-        </p:txBody>
-      </p:sp>
-      <p:sp>
-        <p:nvSpPr>
-          <p:cNvPr id="13" name="Rectangle 12">
-            <a:extLst>
-              <a:ext uri="{FF2B5EF4-FFF2-40B4-BE49-F238E27FC236}">
-                <a16:creationId xmlns:a16="http://schemas.microsoft.com/office/drawing/2014/main" id="{467A7917-7751-58A4-D13B-2017E2CC3231}"/>
-              </a:ext>
-            </a:extLst>
-          </p:cNvPr>
-          <p:cNvSpPr/>
-          <p:nvPr/>
-        </p:nvSpPr>
-        <p:spPr>
-          <a:xfrm>
-            <a:off x="4365" y="318300"/>
-            <a:ext cx="2312411" cy="368381"/>
-          </a:xfrm>
-          <a:prstGeom prst="rect">
-            <a:avLst/>
-          </a:prstGeom>
-          <a:noFill/>
-          <a:ln>
-            <a:noFill/>
-          </a:ln>
-        </p:spPr>
-        <p:style>
-          <a:lnRef idx="2">
-            <a:schemeClr val="accent6"/>
-          </a:lnRef>
-          <a:fillRef idx="1">
-            <a:schemeClr val="lt1"/>
-          </a:fillRef>
-          <a:effectRef idx="0">
-            <a:schemeClr val="accent6"/>
-          </a:effectRef>
-          <a:fontRef idx="minor">
-            <a:schemeClr val="dk1"/>
-          </a:fontRef>
-        </p:style>
-        <p:txBody>
-          <a:bodyPr rtlCol="0" anchor="ctr"/>
-          <a:lstStyle/>
-          <a:p>
-            <a:pPr algn="ctr"/>
-            <a:r>
-              <a:rPr lang="en-MY" sz="1400" dirty="0"/>
-              <a:t>UPDATE ON (16.04.2026)</a:t>
-            </a:r>
-          </a:p>
-        </p:txBody>
-      </p:sp>
-      <p:sp>
-        <p:nvSpPr>
-          <p:cNvPr id="3" name="Rectangle 2">
-            <a:extLst>
-              <a:ext uri="{FF2B5EF4-FFF2-40B4-BE49-F238E27FC236}">
-                <a16:creationId xmlns:a16="http://schemas.microsoft.com/office/drawing/2014/main" id="{DB4ADA14-556C-C309-8718-D47DA0A7B155}"/>
-              </a:ext>
-            </a:extLst>
-          </p:cNvPr>
-          <p:cNvSpPr/>
-          <p:nvPr/>
-        </p:nvSpPr>
-        <p:spPr>
-          <a:xfrm>
-            <a:off x="2627196" y="3465462"/>
-            <a:ext cx="2240611" cy="478898"/>
-          </a:xfrm>
-          <a:prstGeom prst="rect">
-            <a:avLst/>
-          </a:prstGeom>
-          <a:ln>
-            <a:solidFill>
-              <a:schemeClr val="tx1"/>
-            </a:solidFill>
-          </a:ln>
-        </p:spPr>
-        <p:style>
-          <a:lnRef idx="2">
-            <a:schemeClr val="accent6"/>
-          </a:lnRef>
-          <a:fillRef idx="1">
-            <a:schemeClr val="lt1"/>
-          </a:fillRef>
-          <a:effectRef idx="0">
-            <a:schemeClr val="accent6"/>
-          </a:effectRef>
-          <a:fontRef idx="minor">
-            <a:schemeClr val="dk1"/>
-          </a:fontRef>
-        </p:style>
-        <p:txBody>
-          <a:bodyPr rtlCol="0" anchor="ctr"/>
-          <a:lstStyle/>
-          <a:p>
-            <a:pPr algn="ctr"/>
-            <a:r>
-              <a:rPr lang="en-MY" sz="1200" b="1" dirty="0">
-                <a:solidFill>
-                  <a:srgbClr val="FF0000"/>
-                </a:solidFill>
-                <a:latin typeface="Arial" panose="020B0604020202020204" pitchFamily="34" charset="0"/>
-                <a:cs typeface="Arial" panose="020B0604020202020204" pitchFamily="34" charset="0"/>
-              </a:rPr>
-              <a:t>UNKNOWN</a:t>
-            </a:r>
-          </a:p>
-          <a:p>
-            <a:pPr algn="ctr"/>
-            <a:r>
-              <a:rPr lang="en-MY" sz="1200" dirty="0">
-                <a:latin typeface="Arial" panose="020B0604020202020204" pitchFamily="34" charset="0"/>
-                <a:cs typeface="Arial" panose="020B0604020202020204" pitchFamily="34" charset="0"/>
-              </a:rPr>
-              <a:t>= Assign by User</a:t>
-            </a:r>
-          </a:p>
-        </p:txBody>
-      </p:sp>
-      <p:sp>
-        <p:nvSpPr>
-          <p:cNvPr id="15" name="Rectangle 14">
-            <a:extLst>
-              <a:ext uri="{FF2B5EF4-FFF2-40B4-BE49-F238E27FC236}">
-                <a16:creationId xmlns:a16="http://schemas.microsoft.com/office/drawing/2014/main" id="{C961EBCC-E49B-C93D-F2D2-210F5633FD72}"/>
-              </a:ext>
-            </a:extLst>
-          </p:cNvPr>
-          <p:cNvSpPr/>
-          <p:nvPr/>
-        </p:nvSpPr>
-        <p:spPr>
-          <a:xfrm>
-            <a:off x="2627194" y="2541670"/>
-            <a:ext cx="2240613" cy="338527"/>
-          </a:xfrm>
-          <a:prstGeom prst="rect">
-            <a:avLst/>
-          </a:prstGeom>
-          <a:ln>
-            <a:solidFill>
-              <a:schemeClr val="tx1"/>
-            </a:solidFill>
-          </a:ln>
-        </p:spPr>
-        <p:style>
-          <a:lnRef idx="2">
-            <a:schemeClr val="accent6"/>
-          </a:lnRef>
-          <a:fillRef idx="1">
-            <a:schemeClr val="lt1"/>
-          </a:fillRef>
-          <a:effectRef idx="0">
-            <a:schemeClr val="accent6"/>
-          </a:effectRef>
-          <a:fontRef idx="minor">
-            <a:schemeClr val="dk1"/>
-          </a:fontRef>
-        </p:style>
-        <p:txBody>
-          <a:bodyPr rtlCol="0" anchor="ctr"/>
-          <a:lstStyle/>
-          <a:p>
-            <a:pPr algn="ctr"/>
-            <a:r>
-              <a:rPr lang="en-MY" sz="1200" dirty="0">
-                <a:latin typeface="Arial" panose="020B0604020202020204" pitchFamily="34" charset="0"/>
-                <a:cs typeface="Arial" panose="020B0604020202020204" pitchFamily="34" charset="0"/>
-              </a:rPr>
-              <a:t>NEW LIST OF EQUIPMENT</a:t>
-            </a:r>
-          </a:p>
-        </p:txBody>
-      </p:sp>
-      <p:sp>
-        <p:nvSpPr>
-          <p:cNvPr id="33" name="Rectangle 32">
-            <a:extLst>
-              <a:ext uri="{FF2B5EF4-FFF2-40B4-BE49-F238E27FC236}">
-                <a16:creationId xmlns:a16="http://schemas.microsoft.com/office/drawing/2014/main" id="{C45C02FA-690D-C3CB-2191-C15372D0FC28}"/>
-              </a:ext>
-            </a:extLst>
-          </p:cNvPr>
-          <p:cNvSpPr/>
-          <p:nvPr/>
-        </p:nvSpPr>
-        <p:spPr>
-          <a:xfrm>
-            <a:off x="7214203" y="1909007"/>
-            <a:ext cx="3076565" cy="1795904"/>
-          </a:xfrm>
-          <a:prstGeom prst="rect">
-            <a:avLst/>
-          </a:prstGeom>
-          <a:solidFill>
-            <a:schemeClr val="bg1"/>
-          </a:solidFill>
-          <a:ln w="12700">
-            <a:solidFill>
-              <a:schemeClr val="tx1"/>
-            </a:solidFill>
-          </a:ln>
-        </p:spPr>
-        <p:style>
-          <a:lnRef idx="2">
-            <a:schemeClr val="accent6"/>
-          </a:lnRef>
-          <a:fillRef idx="1">
-            <a:schemeClr val="lt1"/>
-          </a:fillRef>
-          <a:effectRef idx="0">
-            <a:schemeClr val="accent6"/>
-          </a:effectRef>
-          <a:fontRef idx="minor">
-            <a:schemeClr val="dk1"/>
-          </a:fontRef>
-        </p:style>
-        <p:txBody>
-          <a:bodyPr rtlCol="0" anchor="ctr"/>
-          <a:lstStyle/>
-          <a:p>
-            <a:pPr algn="ctr"/>
-            <a:endParaRPr lang="en-MY" sz="1600" b="1" dirty="0"/>
-          </a:p>
-        </p:txBody>
-      </p:sp>
-      <p:cxnSp>
-        <p:nvCxnSpPr>
-          <p:cNvPr id="86" name="Straight Arrow Connector 85">
-            <a:extLst>
-              <a:ext uri="{FF2B5EF4-FFF2-40B4-BE49-F238E27FC236}">
-                <a16:creationId xmlns:a16="http://schemas.microsoft.com/office/drawing/2014/main" id="{62DE82C8-536C-FB4F-0DF1-B2B400ED795F}"/>
-              </a:ext>
-            </a:extLst>
-          </p:cNvPr>
-          <p:cNvCxnSpPr>
-            <a:cxnSpLocks/>
-            <a:stCxn id="15" idx="3"/>
-            <a:endCxn id="48" idx="1"/>
-          </p:cNvCxnSpPr>
-          <p:nvPr/>
-        </p:nvCxnSpPr>
-        <p:spPr>
-          <a:xfrm flipV="1">
-            <a:off x="4867807" y="1846624"/>
-            <a:ext cx="2352143" cy="864310"/>
-          </a:xfrm>
-          <a:prstGeom prst="straightConnector1">
-            <a:avLst/>
-          </a:prstGeom>
-          <a:ln w="57150">
-            <a:solidFill>
-              <a:schemeClr val="accent1">
-                <a:lumMod val="75000"/>
-              </a:schemeClr>
-            </a:solidFill>
-            <a:tailEnd type="triangle"/>
-          </a:ln>
-        </p:spPr>
-        <p:style>
-          <a:lnRef idx="1">
-            <a:schemeClr val="accent1"/>
-          </a:lnRef>
-          <a:fillRef idx="0">
-            <a:schemeClr val="accent1"/>
-          </a:fillRef>
-          <a:effectRef idx="0">
-            <a:schemeClr val="accent1"/>
-          </a:effectRef>
-          <a:fontRef idx="minor">
-            <a:schemeClr val="tx1"/>
-          </a:fontRef>
-        </p:style>
-      </p:cxnSp>
-      <p:cxnSp>
-        <p:nvCxnSpPr>
-          <p:cNvPr id="20" name="Straight Arrow Connector 19">
-            <a:extLst>
-              <a:ext uri="{FF2B5EF4-FFF2-40B4-BE49-F238E27FC236}">
-                <a16:creationId xmlns:a16="http://schemas.microsoft.com/office/drawing/2014/main" id="{B6F19441-888D-F983-EB9B-43F03913D145}"/>
-              </a:ext>
-            </a:extLst>
-          </p:cNvPr>
-          <p:cNvCxnSpPr>
-            <a:cxnSpLocks/>
-            <a:stCxn id="33" idx="2"/>
-            <a:endCxn id="11" idx="0"/>
-          </p:cNvCxnSpPr>
-          <p:nvPr/>
-        </p:nvCxnSpPr>
-        <p:spPr>
-          <a:xfrm flipH="1">
-            <a:off x="8750113" y="3704911"/>
-            <a:ext cx="2373" cy="539209"/>
-          </a:xfrm>
-          <a:prstGeom prst="straightConnector1">
-            <a:avLst/>
-          </a:prstGeom>
-          <a:ln w="57150">
-            <a:solidFill>
-              <a:schemeClr val="accent1">
-                <a:lumMod val="75000"/>
-              </a:schemeClr>
-            </a:solidFill>
-            <a:tailEnd type="triangle"/>
-          </a:ln>
-        </p:spPr>
-        <p:style>
-          <a:lnRef idx="1">
-            <a:schemeClr val="accent1"/>
-          </a:lnRef>
-          <a:fillRef idx="0">
-            <a:schemeClr val="accent1"/>
-          </a:fillRef>
-          <a:effectRef idx="0">
-            <a:schemeClr val="accent1"/>
-          </a:effectRef>
-          <a:fontRef idx="minor">
-            <a:schemeClr val="tx1"/>
-          </a:fontRef>
-        </p:style>
-      </p:cxnSp>
-      <p:sp>
-        <p:nvSpPr>
-          <p:cNvPr id="104" name="Rectangle 103">
-            <a:extLst>
-              <a:ext uri="{FF2B5EF4-FFF2-40B4-BE49-F238E27FC236}">
-                <a16:creationId xmlns:a16="http://schemas.microsoft.com/office/drawing/2014/main" id="{E50DA2D7-5321-C782-AAA8-70008D5D8EB0}"/>
-              </a:ext>
-            </a:extLst>
-          </p:cNvPr>
-          <p:cNvSpPr/>
-          <p:nvPr/>
-        </p:nvSpPr>
-        <p:spPr>
-          <a:xfrm>
-            <a:off x="8279967" y="2315001"/>
-            <a:ext cx="1049965" cy="267977"/>
-          </a:xfrm>
-          <a:prstGeom prst="rect">
-            <a:avLst/>
-          </a:prstGeom>
-          <a:ln w="6350">
-            <a:solidFill>
-              <a:schemeClr val="tx1"/>
-            </a:solidFill>
-          </a:ln>
-        </p:spPr>
-        <p:style>
-          <a:lnRef idx="2">
-            <a:schemeClr val="accent6"/>
-          </a:lnRef>
-          <a:fillRef idx="1">
-            <a:schemeClr val="lt1"/>
-          </a:fillRef>
-          <a:effectRef idx="0">
-            <a:schemeClr val="accent6"/>
-          </a:effectRef>
-          <a:fontRef idx="minor">
-            <a:schemeClr val="dk1"/>
-          </a:fontRef>
-        </p:style>
-        <p:txBody>
-          <a:bodyPr rtlCol="0" anchor="ctr"/>
-          <a:lstStyle/>
-          <a:p>
-            <a:pPr algn="ctr"/>
-            <a:r>
-              <a:rPr lang="en-US" sz="1200" b="1" noProof="1">
-                <a:latin typeface="Arial" panose="020B0604020202020204" pitchFamily="34" charset="0"/>
-                <a:cs typeface="Arial" panose="020B0604020202020204" pitchFamily="34" charset="0"/>
-              </a:rPr>
-              <a:t>XGBoost</a:t>
-            </a:r>
-            <a:endParaRPr lang="en-MY" sz="1100" dirty="0">
-              <a:latin typeface="Arial" panose="020B0604020202020204" pitchFamily="34" charset="0"/>
-              <a:cs typeface="Arial" panose="020B0604020202020204" pitchFamily="34" charset="0"/>
-            </a:endParaRPr>
-          </a:p>
-        </p:txBody>
-      </p:sp>
-      <p:sp>
-        <p:nvSpPr>
-          <p:cNvPr id="113" name="Rectangle 112">
-            <a:extLst>
-              <a:ext uri="{FF2B5EF4-FFF2-40B4-BE49-F238E27FC236}">
-                <a16:creationId xmlns:a16="http://schemas.microsoft.com/office/drawing/2014/main" id="{1498A5A2-DD75-04DF-0A80-6D33023126E4}"/>
-              </a:ext>
-            </a:extLst>
-          </p:cNvPr>
-          <p:cNvSpPr/>
-          <p:nvPr/>
-        </p:nvSpPr>
-        <p:spPr>
-          <a:xfrm>
-            <a:off x="8344749" y="2858630"/>
-            <a:ext cx="920400" cy="237596"/>
-          </a:xfrm>
-          <a:prstGeom prst="rect">
-            <a:avLst/>
-          </a:prstGeom>
-          <a:ln w="6350">
-            <a:solidFill>
-              <a:schemeClr val="tx1"/>
-            </a:solidFill>
-          </a:ln>
-        </p:spPr>
-        <p:style>
-          <a:lnRef idx="2">
-            <a:schemeClr val="accent6"/>
-          </a:lnRef>
-          <a:fillRef idx="1">
-            <a:schemeClr val="lt1"/>
-          </a:fillRef>
-          <a:effectRef idx="0">
-            <a:schemeClr val="accent6"/>
-          </a:effectRef>
-          <a:fontRef idx="minor">
-            <a:schemeClr val="dk1"/>
-          </a:fontRef>
-        </p:style>
-        <p:txBody>
-          <a:bodyPr rtlCol="0" anchor="ctr"/>
-          <a:lstStyle/>
-          <a:p>
-            <a:pPr algn="ctr"/>
-            <a:r>
-              <a:rPr lang="en-US" sz="1200" dirty="0">
-                <a:latin typeface="Arial" panose="020B0604020202020204" pitchFamily="34" charset="0"/>
-                <a:cs typeface="Arial" panose="020B0604020202020204" pitchFamily="34" charset="0"/>
-              </a:rPr>
-              <a:t>Cluster</a:t>
-            </a:r>
-            <a:endParaRPr lang="en-MY" sz="1600" dirty="0">
-              <a:latin typeface="Arial" panose="020B0604020202020204" pitchFamily="34" charset="0"/>
-              <a:cs typeface="Arial" panose="020B0604020202020204" pitchFamily="34" charset="0"/>
-            </a:endParaRPr>
-          </a:p>
-        </p:txBody>
-      </p:sp>
-      <p:cxnSp>
-        <p:nvCxnSpPr>
-          <p:cNvPr id="114" name="Straight Arrow Connector 113">
-            <a:extLst>
-              <a:ext uri="{FF2B5EF4-FFF2-40B4-BE49-F238E27FC236}">
-                <a16:creationId xmlns:a16="http://schemas.microsoft.com/office/drawing/2014/main" id="{0900296C-AD16-20AA-03BB-D5F941E72D3A}"/>
-              </a:ext>
-            </a:extLst>
-          </p:cNvPr>
-          <p:cNvCxnSpPr>
-            <a:cxnSpLocks/>
-            <a:stCxn id="104" idx="2"/>
-            <a:endCxn id="113" idx="0"/>
-          </p:cNvCxnSpPr>
-          <p:nvPr/>
-        </p:nvCxnSpPr>
-        <p:spPr>
-          <a:xfrm flipH="1">
-            <a:off x="8804949" y="2582978"/>
-            <a:ext cx="1" cy="275652"/>
-          </a:xfrm>
-          <a:prstGeom prst="straightConnector1">
-            <a:avLst/>
-          </a:prstGeom>
-          <a:ln>
-            <a:solidFill>
-              <a:schemeClr val="tx2"/>
-            </a:solidFill>
-            <a:tailEnd type="triangle"/>
-          </a:ln>
-        </p:spPr>
-        <p:style>
-          <a:lnRef idx="1">
-            <a:schemeClr val="accent1"/>
-          </a:lnRef>
-          <a:fillRef idx="0">
-            <a:schemeClr val="accent1"/>
-          </a:fillRef>
-          <a:effectRef idx="0">
-            <a:schemeClr val="accent1"/>
-          </a:effectRef>
-          <a:fontRef idx="minor">
-            <a:schemeClr val="tx1"/>
-          </a:fontRef>
-        </p:style>
-      </p:cxnSp>
-      <p:cxnSp>
-        <p:nvCxnSpPr>
-          <p:cNvPr id="68" name="Straight Arrow Connector 67">
-            <a:extLst>
-              <a:ext uri="{FF2B5EF4-FFF2-40B4-BE49-F238E27FC236}">
-                <a16:creationId xmlns:a16="http://schemas.microsoft.com/office/drawing/2014/main" id="{411AFC0C-CF7A-CDF2-EC1E-07215C078581}"/>
-              </a:ext>
-            </a:extLst>
-          </p:cNvPr>
-          <p:cNvCxnSpPr>
-            <a:cxnSpLocks/>
-            <a:stCxn id="11" idx="1"/>
-            <a:endCxn id="3" idx="3"/>
-          </p:cNvCxnSpPr>
-          <p:nvPr/>
-        </p:nvCxnSpPr>
-        <p:spPr>
-          <a:xfrm flipH="1" flipV="1">
-            <a:off x="4867807" y="3704911"/>
-            <a:ext cx="2144530" cy="837962"/>
-          </a:xfrm>
-          <a:prstGeom prst="straightConnector1">
-            <a:avLst/>
-          </a:prstGeom>
-          <a:ln w="57150">
-            <a:solidFill>
-              <a:schemeClr val="accent1">
-                <a:lumMod val="75000"/>
-              </a:schemeClr>
-            </a:solidFill>
-            <a:tailEnd type="triangle"/>
-          </a:ln>
-        </p:spPr>
-        <p:style>
-          <a:lnRef idx="1">
-            <a:schemeClr val="accent1"/>
-          </a:lnRef>
-          <a:fillRef idx="0">
-            <a:schemeClr val="accent1"/>
-          </a:fillRef>
-          <a:effectRef idx="0">
-            <a:schemeClr val="accent1"/>
-          </a:effectRef>
-          <a:fontRef idx="minor">
-            <a:schemeClr val="tx1"/>
-          </a:fontRef>
-        </p:style>
-      </p:cxnSp>
-      <p:sp>
-        <p:nvSpPr>
-          <p:cNvPr id="78" name="Rectangle 77">
-            <a:extLst>
-              <a:ext uri="{FF2B5EF4-FFF2-40B4-BE49-F238E27FC236}">
-                <a16:creationId xmlns:a16="http://schemas.microsoft.com/office/drawing/2014/main" id="{82450F8A-D658-9FDB-7531-BCD001B299A6}"/>
-              </a:ext>
-            </a:extLst>
-          </p:cNvPr>
-          <p:cNvSpPr/>
-          <p:nvPr/>
-        </p:nvSpPr>
-        <p:spPr>
-          <a:xfrm>
-            <a:off x="7483204" y="5312444"/>
-            <a:ext cx="2541886" cy="288020"/>
-          </a:xfrm>
-          <a:prstGeom prst="rect">
-            <a:avLst/>
-          </a:prstGeom>
-          <a:ln>
-            <a:solidFill>
-              <a:schemeClr val="tx1"/>
-            </a:solidFill>
-          </a:ln>
-        </p:spPr>
-        <p:style>
-          <a:lnRef idx="2">
-            <a:schemeClr val="accent6"/>
-          </a:lnRef>
-          <a:fillRef idx="1">
-            <a:schemeClr val="lt1"/>
-          </a:fillRef>
-          <a:effectRef idx="0">
-            <a:schemeClr val="accent6"/>
-          </a:effectRef>
-          <a:fontRef idx="minor">
-            <a:schemeClr val="dk1"/>
-          </a:fontRef>
-        </p:style>
-        <p:txBody>
-          <a:bodyPr rtlCol="0" anchor="ctr"/>
-          <a:lstStyle/>
-          <a:p>
-            <a:pPr algn="ctr"/>
-            <a:r>
-              <a:rPr lang="en-US" sz="1600" dirty="0"/>
-              <a:t>UPDATE &amp; SAVE MODEL</a:t>
-            </a:r>
-            <a:endParaRPr lang="en-MY" sz="1600" dirty="0"/>
-          </a:p>
-        </p:txBody>
-      </p:sp>
-      <p:cxnSp>
-        <p:nvCxnSpPr>
-          <p:cNvPr id="79" name="Straight Arrow Connector 78">
-            <a:extLst>
-              <a:ext uri="{FF2B5EF4-FFF2-40B4-BE49-F238E27FC236}">
-                <a16:creationId xmlns:a16="http://schemas.microsoft.com/office/drawing/2014/main" id="{47316FE7-4B6A-51D9-845B-5E9B0697049A}"/>
-              </a:ext>
-            </a:extLst>
-          </p:cNvPr>
-          <p:cNvCxnSpPr>
-            <a:cxnSpLocks/>
-            <a:stCxn id="11" idx="2"/>
-            <a:endCxn id="78" idx="0"/>
-          </p:cNvCxnSpPr>
-          <p:nvPr/>
-        </p:nvCxnSpPr>
-        <p:spPr>
-          <a:xfrm>
-            <a:off x="8750113" y="4841626"/>
-            <a:ext cx="4034" cy="470818"/>
-          </a:xfrm>
-          <a:prstGeom prst="straightConnector1">
-            <a:avLst/>
-          </a:prstGeom>
-          <a:ln w="57150">
-            <a:solidFill>
-              <a:schemeClr val="accent1">
-                <a:lumMod val="75000"/>
-              </a:schemeClr>
-            </a:solidFill>
-            <a:tailEnd type="triangle"/>
-          </a:ln>
-        </p:spPr>
-        <p:style>
-          <a:lnRef idx="1">
-            <a:schemeClr val="accent1"/>
-          </a:lnRef>
-          <a:fillRef idx="0">
-            <a:schemeClr val="accent1"/>
-          </a:fillRef>
-          <a:effectRef idx="0">
-            <a:schemeClr val="accent1"/>
-          </a:effectRef>
-          <a:fontRef idx="minor">
-            <a:schemeClr val="tx1"/>
-          </a:fontRef>
-        </p:style>
-      </p:cxnSp>
-      <p:cxnSp>
-        <p:nvCxnSpPr>
-          <p:cNvPr id="87" name="Straight Arrow Connector 86">
-            <a:extLst>
-              <a:ext uri="{FF2B5EF4-FFF2-40B4-BE49-F238E27FC236}">
-                <a16:creationId xmlns:a16="http://schemas.microsoft.com/office/drawing/2014/main" id="{C3DC5C35-9205-120B-F8B2-E5B5DF7F3564}"/>
-              </a:ext>
-            </a:extLst>
-          </p:cNvPr>
-          <p:cNvCxnSpPr>
-            <a:cxnSpLocks/>
-            <a:stCxn id="3" idx="0"/>
-            <a:endCxn id="15" idx="2"/>
-          </p:cNvCxnSpPr>
-          <p:nvPr/>
-        </p:nvCxnSpPr>
-        <p:spPr>
-          <a:xfrm flipH="1" flipV="1">
-            <a:off x="3747501" y="2880197"/>
-            <a:ext cx="1" cy="585265"/>
-          </a:xfrm>
-          <a:prstGeom prst="straightConnector1">
-            <a:avLst/>
-          </a:prstGeom>
-          <a:ln w="57150">
-            <a:solidFill>
-              <a:schemeClr val="accent1">
-                <a:lumMod val="75000"/>
-              </a:schemeClr>
-            </a:solidFill>
-            <a:tailEnd type="triangle"/>
-          </a:ln>
-        </p:spPr>
-        <p:style>
-          <a:lnRef idx="1">
-            <a:schemeClr val="accent1"/>
-          </a:lnRef>
-          <a:fillRef idx="0">
-            <a:schemeClr val="accent1"/>
-          </a:fillRef>
-          <a:effectRef idx="0">
-            <a:schemeClr val="accent1"/>
-          </a:effectRef>
-          <a:fontRef idx="minor">
-            <a:schemeClr val="tx1"/>
-          </a:fontRef>
-        </p:style>
-      </p:cxnSp>
-      <p:sp>
-        <p:nvSpPr>
-          <p:cNvPr id="100" name="Rectangle 99">
-            <a:extLst>
-              <a:ext uri="{FF2B5EF4-FFF2-40B4-BE49-F238E27FC236}">
-                <a16:creationId xmlns:a16="http://schemas.microsoft.com/office/drawing/2014/main" id="{5FB6E3BF-51CF-78EE-4FA8-C9102DF918B9}"/>
-              </a:ext>
-            </a:extLst>
-          </p:cNvPr>
-          <p:cNvSpPr/>
-          <p:nvPr/>
-        </p:nvSpPr>
-        <p:spPr>
-          <a:xfrm>
-            <a:off x="32941" y="100051"/>
-            <a:ext cx="2647950" cy="316961"/>
-          </a:xfrm>
-          <a:prstGeom prst="rect">
-            <a:avLst/>
-          </a:prstGeom>
-          <a:ln>
-            <a:noFill/>
-          </a:ln>
-        </p:spPr>
-        <p:style>
-          <a:lnRef idx="2">
-            <a:schemeClr val="accent6"/>
-          </a:lnRef>
-          <a:fillRef idx="1">
-            <a:schemeClr val="lt1"/>
-          </a:fillRef>
-          <a:effectRef idx="0">
-            <a:schemeClr val="accent6"/>
-          </a:effectRef>
-          <a:fontRef idx="minor">
-            <a:schemeClr val="dk1"/>
-          </a:fontRef>
-        </p:style>
-        <p:txBody>
-          <a:bodyPr rtlCol="0" anchor="ctr"/>
-          <a:lstStyle/>
-          <a:p>
-            <a:pPr algn="ctr"/>
-            <a:r>
-              <a:rPr lang="en-MY" sz="1400" b="1" dirty="0"/>
-              <a:t>MACHINE LEARNING PIPELINE</a:t>
-            </a:r>
-          </a:p>
-        </p:txBody>
-      </p:sp>
-      <p:sp>
-        <p:nvSpPr>
-          <p:cNvPr id="48" name="Rectangle 47">
-            <a:extLst>
-              <a:ext uri="{FF2B5EF4-FFF2-40B4-BE49-F238E27FC236}">
-                <a16:creationId xmlns:a16="http://schemas.microsoft.com/office/drawing/2014/main" id="{0E2A37EF-F5AC-7249-4426-A2982CEBE2CF}"/>
-              </a:ext>
-            </a:extLst>
-          </p:cNvPr>
-          <p:cNvSpPr/>
-          <p:nvPr/>
-        </p:nvSpPr>
-        <p:spPr>
-          <a:xfrm>
-            <a:off x="7219950" y="1616505"/>
-            <a:ext cx="3076575" cy="460237"/>
-          </a:xfrm>
-          <a:prstGeom prst="rect">
-            <a:avLst/>
-          </a:prstGeom>
-          <a:solidFill>
-            <a:schemeClr val="bg1"/>
-          </a:solidFill>
-          <a:ln>
-            <a:solidFill>
-              <a:schemeClr val="tx1"/>
-            </a:solidFill>
-          </a:ln>
-        </p:spPr>
-        <p:style>
-          <a:lnRef idx="2">
-            <a:schemeClr val="accent6"/>
-          </a:lnRef>
-          <a:fillRef idx="1">
-            <a:schemeClr val="lt1"/>
-          </a:fillRef>
-          <a:effectRef idx="0">
-            <a:schemeClr val="accent6"/>
-          </a:effectRef>
-          <a:fontRef idx="minor">
-            <a:schemeClr val="dk1"/>
-          </a:fontRef>
-        </p:style>
-        <p:txBody>
-          <a:bodyPr rtlCol="0" anchor="ctr"/>
-          <a:lstStyle/>
-          <a:p>
-            <a:pPr algn="ctr"/>
-            <a:r>
-              <a:rPr lang="en-US" sz="1600" b="1" dirty="0"/>
-              <a:t>ML </a:t>
-            </a:r>
-            <a:r>
-              <a:rPr lang="en-US" sz="1600" b="1" dirty="0">
-                <a:latin typeface="Arial" panose="020B0604020202020204" pitchFamily="34" charset="0"/>
-                <a:cs typeface="Arial" panose="020B0604020202020204" pitchFamily="34" charset="0"/>
-              </a:rPr>
-              <a:t>MODEL</a:t>
-            </a:r>
-            <a:endParaRPr lang="en-MY" sz="1600" b="1" dirty="0">
-              <a:latin typeface="Arial" panose="020B0604020202020204" pitchFamily="34" charset="0"/>
-              <a:cs typeface="Arial" panose="020B0604020202020204" pitchFamily="34" charset="0"/>
-            </a:endParaRPr>
-          </a:p>
-        </p:txBody>
-      </p:sp>
-      <p:cxnSp>
-        <p:nvCxnSpPr>
-          <p:cNvPr id="9" name="Straight Arrow Connector 8">
-            <a:extLst>
-              <a:ext uri="{FF2B5EF4-FFF2-40B4-BE49-F238E27FC236}">
-                <a16:creationId xmlns:a16="http://schemas.microsoft.com/office/drawing/2014/main" id="{52E69D06-D05B-E33C-20DE-DEE14E7B6417}"/>
-              </a:ext>
-            </a:extLst>
-          </p:cNvPr>
-          <p:cNvCxnSpPr>
-            <a:cxnSpLocks/>
-            <a:stCxn id="113" idx="2"/>
-            <a:endCxn id="17" idx="0"/>
-          </p:cNvCxnSpPr>
-          <p:nvPr/>
-        </p:nvCxnSpPr>
-        <p:spPr>
-          <a:xfrm>
-            <a:off x="8804949" y="3096226"/>
-            <a:ext cx="0" cy="191980"/>
-          </a:xfrm>
-          <a:prstGeom prst="straightConnector1">
-            <a:avLst/>
-          </a:prstGeom>
-          <a:ln>
-            <a:solidFill>
-              <a:schemeClr val="tx2"/>
-            </a:solidFill>
-            <a:tailEnd type="triangle"/>
-          </a:ln>
-        </p:spPr>
-        <p:style>
-          <a:lnRef idx="1">
-            <a:schemeClr val="accent1"/>
-          </a:lnRef>
-          <a:fillRef idx="0">
-            <a:schemeClr val="accent1"/>
-          </a:fillRef>
-          <a:effectRef idx="0">
-            <a:schemeClr val="accent1"/>
-          </a:effectRef>
-          <a:fontRef idx="minor">
-            <a:schemeClr val="tx1"/>
-          </a:fontRef>
-        </p:style>
-      </p:cxnSp>
-      <p:sp>
-        <p:nvSpPr>
-          <p:cNvPr id="17" name="Rectangle 16">
-            <a:extLst>
-              <a:ext uri="{FF2B5EF4-FFF2-40B4-BE49-F238E27FC236}">
-                <a16:creationId xmlns:a16="http://schemas.microsoft.com/office/drawing/2014/main" id="{9AA6DD49-C5F6-6CF0-EE74-8AE9853DAD96}"/>
-              </a:ext>
-            </a:extLst>
-          </p:cNvPr>
-          <p:cNvSpPr/>
-          <p:nvPr/>
-        </p:nvSpPr>
-        <p:spPr>
-          <a:xfrm>
-            <a:off x="8344749" y="3288206"/>
-            <a:ext cx="920400" cy="237596"/>
-          </a:xfrm>
-          <a:prstGeom prst="rect">
-            <a:avLst/>
-          </a:prstGeom>
-          <a:ln w="6350">
-            <a:solidFill>
-              <a:schemeClr val="tx1"/>
-            </a:solidFill>
-          </a:ln>
-        </p:spPr>
-        <p:style>
-          <a:lnRef idx="2">
-            <a:schemeClr val="accent6"/>
-          </a:lnRef>
-          <a:fillRef idx="1">
-            <a:schemeClr val="lt1"/>
-          </a:fillRef>
-          <a:effectRef idx="0">
-            <a:schemeClr val="accent6"/>
-          </a:effectRef>
-          <a:fontRef idx="minor">
-            <a:schemeClr val="dk1"/>
-          </a:fontRef>
-        </p:style>
-        <p:txBody>
-          <a:bodyPr rtlCol="0" anchor="ctr"/>
-          <a:lstStyle/>
-          <a:p>
-            <a:pPr algn="ctr"/>
-            <a:r>
-              <a:rPr lang="en-US" sz="1200" dirty="0">
-                <a:latin typeface="Arial" panose="020B0604020202020204" pitchFamily="34" charset="0"/>
-                <a:cs typeface="Arial" panose="020B0604020202020204" pitchFamily="34" charset="0"/>
-              </a:rPr>
-              <a:t>Section</a:t>
-            </a:r>
-            <a:endParaRPr lang="en-MY" sz="1600" dirty="0">
-              <a:latin typeface="Arial" panose="020B0604020202020204" pitchFamily="34" charset="0"/>
-              <a:cs typeface="Arial" panose="020B0604020202020204" pitchFamily="34" charset="0"/>
-            </a:endParaRPr>
-          </a:p>
-        </p:txBody>
-      </p:sp>
-      <p:cxnSp>
-        <p:nvCxnSpPr>
-          <p:cNvPr id="32" name="Straight Arrow Connector 31">
-            <a:extLst>
-              <a:ext uri="{FF2B5EF4-FFF2-40B4-BE49-F238E27FC236}">
-                <a16:creationId xmlns:a16="http://schemas.microsoft.com/office/drawing/2014/main" id="{18AF898B-511A-8BE3-2405-5D4DB8B711CD}"/>
-              </a:ext>
-            </a:extLst>
-          </p:cNvPr>
-          <p:cNvCxnSpPr>
-            <a:cxnSpLocks/>
-            <a:endCxn id="78" idx="3"/>
-          </p:cNvCxnSpPr>
-          <p:nvPr/>
-        </p:nvCxnSpPr>
-        <p:spPr>
-          <a:xfrm flipH="1">
-            <a:off x="10025090" y="5447436"/>
-            <a:ext cx="1626201" cy="9018"/>
-          </a:xfrm>
-          <a:prstGeom prst="straightConnector1">
-            <a:avLst/>
-          </a:prstGeom>
-          <a:ln w="57150">
-            <a:solidFill>
-              <a:schemeClr val="accent1">
-                <a:lumMod val="75000"/>
-              </a:schemeClr>
-            </a:solidFill>
-            <a:tailEnd type="triangle"/>
-          </a:ln>
-        </p:spPr>
-        <p:style>
-          <a:lnRef idx="1">
-            <a:schemeClr val="accent1"/>
-          </a:lnRef>
-          <a:fillRef idx="0">
-            <a:schemeClr val="accent1"/>
-          </a:fillRef>
-          <a:effectRef idx="0">
-            <a:schemeClr val="accent1"/>
-          </a:effectRef>
-          <a:fontRef idx="minor">
-            <a:schemeClr val="tx1"/>
-          </a:fontRef>
-        </p:style>
-      </p:cxnSp>
-      <p:cxnSp>
-        <p:nvCxnSpPr>
-          <p:cNvPr id="36" name="Straight Arrow Connector 35">
-            <a:extLst>
-              <a:ext uri="{FF2B5EF4-FFF2-40B4-BE49-F238E27FC236}">
-                <a16:creationId xmlns:a16="http://schemas.microsoft.com/office/drawing/2014/main" id="{EAE22A58-A49F-1575-0792-64B0D9D0AB38}"/>
-              </a:ext>
-            </a:extLst>
-          </p:cNvPr>
-          <p:cNvCxnSpPr>
-            <a:cxnSpLocks/>
-            <a:endCxn id="48" idx="3"/>
-          </p:cNvCxnSpPr>
-          <p:nvPr/>
-        </p:nvCxnSpPr>
-        <p:spPr>
-          <a:xfrm flipH="1">
-            <a:off x="10296525" y="1846623"/>
-            <a:ext cx="1341564" cy="1"/>
-          </a:xfrm>
-          <a:prstGeom prst="straightConnector1">
-            <a:avLst/>
-          </a:prstGeom>
-          <a:ln w="28575">
-            <a:solidFill>
-              <a:schemeClr val="tx1"/>
-            </a:solidFill>
-            <a:tailEnd type="triangle"/>
-          </a:ln>
-        </p:spPr>
-        <p:style>
-          <a:lnRef idx="1">
-            <a:schemeClr val="accent1"/>
-          </a:lnRef>
-          <a:fillRef idx="0">
-            <a:schemeClr val="accent1"/>
-          </a:fillRef>
-          <a:effectRef idx="0">
-            <a:schemeClr val="accent1"/>
-          </a:effectRef>
-          <a:fontRef idx="minor">
-            <a:schemeClr val="tx1"/>
-          </a:fontRef>
-        </p:style>
-      </p:cxnSp>
-      <p:sp>
-        <p:nvSpPr>
-          <p:cNvPr id="70" name="Rectangle 69">
-            <a:extLst>
-              <a:ext uri="{FF2B5EF4-FFF2-40B4-BE49-F238E27FC236}">
-                <a16:creationId xmlns:a16="http://schemas.microsoft.com/office/drawing/2014/main" id="{E09BE44E-278F-D525-1A62-7D7F305002BB}"/>
-              </a:ext>
-            </a:extLst>
-          </p:cNvPr>
-          <p:cNvSpPr/>
-          <p:nvPr/>
-        </p:nvSpPr>
-        <p:spPr>
-          <a:xfrm>
-            <a:off x="4563687" y="1767340"/>
-            <a:ext cx="1590499" cy="461665"/>
-          </a:xfrm>
-          <a:prstGeom prst="rect">
-            <a:avLst/>
-          </a:prstGeom>
-          <a:noFill/>
-        </p:spPr>
-        <p:txBody>
-          <a:bodyPr wrap="none" lIns="91440" tIns="45720" rIns="91440" bIns="45720">
-            <a:spAutoFit/>
-          </a:bodyPr>
-          <a:lstStyle/>
-          <a:p>
-            <a:pPr algn="ctr"/>
-            <a:r>
-              <a:rPr lang="en-US" sz="1200" cap="none" spc="0" noProof="1">
-                <a:ln w="0"/>
-                <a:solidFill>
-                  <a:schemeClr val="tx1"/>
-                </a:solidFill>
-                <a:effectLst>
-                  <a:outerShdw blurRad="38100" dist="19050" dir="2700000" algn="tl" rotWithShape="0">
-                    <a:schemeClr val="dk1">
-                      <a:alpha val="40000"/>
-                    </a:schemeClr>
-                  </a:outerShdw>
-                </a:effectLst>
-                <a:latin typeface="Arial" panose="020B0604020202020204" pitchFamily="34" charset="0"/>
-                <a:cs typeface="Arial" panose="020B0604020202020204" pitchFamily="34" charset="0"/>
-              </a:rPr>
-              <a:t>RETRIVE </a:t>
-            </a:r>
-          </a:p>
-          <a:p>
-            <a:pPr algn="ctr"/>
-            <a:r>
-              <a:rPr lang="en-US" sz="1200" cap="none" spc="0" noProof="1">
-                <a:ln w="0"/>
-                <a:solidFill>
-                  <a:schemeClr val="tx1"/>
-                </a:solidFill>
-                <a:effectLst>
-                  <a:outerShdw blurRad="38100" dist="19050" dir="2700000" algn="tl" rotWithShape="0">
-                    <a:schemeClr val="dk1">
-                      <a:alpha val="40000"/>
-                    </a:schemeClr>
-                  </a:outerShdw>
-                </a:effectLst>
-                <a:latin typeface="Arial" panose="020B0604020202020204" pitchFamily="34" charset="0"/>
-                <a:cs typeface="Arial" panose="020B0604020202020204" pitchFamily="34" charset="0"/>
-              </a:rPr>
-              <a:t>[new_equipment.pkl]</a:t>
-            </a:r>
-          </a:p>
-        </p:txBody>
-      </p:sp>
-      <p:cxnSp>
-        <p:nvCxnSpPr>
-          <p:cNvPr id="135" name="Straight Connector 134">
-            <a:extLst>
-              <a:ext uri="{FF2B5EF4-FFF2-40B4-BE49-F238E27FC236}">
-                <a16:creationId xmlns:a16="http://schemas.microsoft.com/office/drawing/2014/main" id="{873EAE23-6086-36ED-261E-56A686A69272}"/>
-              </a:ext>
-            </a:extLst>
-          </p:cNvPr>
-          <p:cNvCxnSpPr>
-            <a:cxnSpLocks/>
-          </p:cNvCxnSpPr>
-          <p:nvPr/>
-        </p:nvCxnSpPr>
-        <p:spPr>
-          <a:xfrm>
-            <a:off x="11629621" y="1846623"/>
-            <a:ext cx="21670" cy="3600813"/>
-          </a:xfrm>
-          <a:prstGeom prst="line">
-            <a:avLst/>
-          </a:prstGeom>
-          <a:ln w="57150">
-            <a:solidFill>
-              <a:schemeClr val="accent1">
-                <a:lumMod val="75000"/>
-              </a:schemeClr>
-            </a:solidFill>
-          </a:ln>
-        </p:spPr>
-        <p:style>
-          <a:lnRef idx="1">
-            <a:schemeClr val="accent1"/>
-          </a:lnRef>
-          <a:fillRef idx="0">
-            <a:schemeClr val="accent1"/>
-          </a:fillRef>
-          <a:effectRef idx="0">
-            <a:schemeClr val="accent1"/>
-          </a:effectRef>
-          <a:fontRef idx="minor">
-            <a:schemeClr val="tx1"/>
-          </a:fontRef>
-        </p:style>
-      </p:cxnSp>
-      <p:sp>
-        <p:nvSpPr>
-          <p:cNvPr id="182" name="Oval 181">
-            <a:extLst>
-              <a:ext uri="{FF2B5EF4-FFF2-40B4-BE49-F238E27FC236}">
-                <a16:creationId xmlns:a16="http://schemas.microsoft.com/office/drawing/2014/main" id="{54D4ED0E-F043-6FB3-A181-423D5E2CB353}"/>
-              </a:ext>
-            </a:extLst>
-          </p:cNvPr>
-          <p:cNvSpPr/>
-          <p:nvPr/>
-        </p:nvSpPr>
-        <p:spPr>
-          <a:xfrm>
-            <a:off x="8927206" y="1003952"/>
-            <a:ext cx="457200" cy="432855"/>
-          </a:xfrm>
-          <a:prstGeom prst="ellipse">
-            <a:avLst/>
-          </a:prstGeom>
-          <a:solidFill>
-            <a:srgbClr val="FFFFAF"/>
-          </a:solidFill>
-        </p:spPr>
-        <p:style>
-          <a:lnRef idx="2">
-            <a:schemeClr val="accent1">
-              <a:shade val="15000"/>
-            </a:schemeClr>
-          </a:lnRef>
-          <a:fillRef idx="1">
-            <a:schemeClr val="accent1"/>
-          </a:fillRef>
-          <a:effectRef idx="0">
-            <a:schemeClr val="accent1"/>
-          </a:effectRef>
-          <a:fontRef idx="minor">
-            <a:schemeClr val="lt1"/>
-          </a:fontRef>
-        </p:style>
-        <p:txBody>
-          <a:bodyPr rtlCol="0" anchor="ctr"/>
-          <a:lstStyle/>
-          <a:p>
-            <a:pPr algn="ctr"/>
-            <a:r>
-              <a:rPr lang="en-MY" b="1" dirty="0">
-                <a:solidFill>
-                  <a:sysClr val="windowText" lastClr="000000"/>
-                </a:solidFill>
-              </a:rPr>
-              <a:t>1</a:t>
-            </a:r>
-          </a:p>
-        </p:txBody>
-      </p:sp>
-      <p:sp>
-        <p:nvSpPr>
-          <p:cNvPr id="183" name="Oval 182">
-            <a:extLst>
-              <a:ext uri="{FF2B5EF4-FFF2-40B4-BE49-F238E27FC236}">
-                <a16:creationId xmlns:a16="http://schemas.microsoft.com/office/drawing/2014/main" id="{B9C4718B-EAAE-1FF5-27BE-67E6A56FDCC6}"/>
-              </a:ext>
-            </a:extLst>
-          </p:cNvPr>
-          <p:cNvSpPr/>
-          <p:nvPr/>
-        </p:nvSpPr>
-        <p:spPr>
-          <a:xfrm>
-            <a:off x="5930200" y="4408771"/>
-            <a:ext cx="457200" cy="432855"/>
-          </a:xfrm>
-          <a:prstGeom prst="ellipse">
-            <a:avLst/>
-          </a:prstGeom>
-          <a:solidFill>
-            <a:srgbClr val="FFFFAF"/>
-          </a:solidFill>
-        </p:spPr>
-        <p:style>
-          <a:lnRef idx="2">
-            <a:schemeClr val="accent1">
-              <a:shade val="15000"/>
-            </a:schemeClr>
-          </a:lnRef>
-          <a:fillRef idx="1">
-            <a:schemeClr val="accent1"/>
-          </a:fillRef>
-          <a:effectRef idx="0">
-            <a:schemeClr val="accent1"/>
-          </a:effectRef>
-          <a:fontRef idx="minor">
-            <a:schemeClr val="lt1"/>
-          </a:fontRef>
-        </p:style>
-        <p:txBody>
-          <a:bodyPr rtlCol="0" anchor="ctr"/>
-          <a:lstStyle/>
-          <a:p>
-            <a:pPr algn="ctr"/>
-            <a:r>
-              <a:rPr lang="en-MY" b="1" dirty="0">
-                <a:solidFill>
-                  <a:sysClr val="windowText" lastClr="000000"/>
-                </a:solidFill>
-              </a:rPr>
-              <a:t>2</a:t>
-            </a:r>
-          </a:p>
-        </p:txBody>
-      </p:sp>
-      <p:sp>
-        <p:nvSpPr>
-          <p:cNvPr id="184" name="Oval 183">
-            <a:extLst>
-              <a:ext uri="{FF2B5EF4-FFF2-40B4-BE49-F238E27FC236}">
-                <a16:creationId xmlns:a16="http://schemas.microsoft.com/office/drawing/2014/main" id="{1B49EEA1-3DC4-FAA7-D7AD-A27D3A2B7FF8}"/>
-              </a:ext>
-            </a:extLst>
-          </p:cNvPr>
-          <p:cNvSpPr/>
-          <p:nvPr/>
-        </p:nvSpPr>
-        <p:spPr>
-          <a:xfrm>
-            <a:off x="2064214" y="2930263"/>
-            <a:ext cx="457200" cy="432855"/>
-          </a:xfrm>
-          <a:prstGeom prst="ellipse">
-            <a:avLst/>
-          </a:prstGeom>
-          <a:solidFill>
-            <a:srgbClr val="FFFFAF"/>
-          </a:solidFill>
-        </p:spPr>
-        <p:style>
-          <a:lnRef idx="2">
-            <a:schemeClr val="accent1">
-              <a:shade val="15000"/>
-            </a:schemeClr>
-          </a:lnRef>
-          <a:fillRef idx="1">
-            <a:schemeClr val="accent1"/>
-          </a:fillRef>
-          <a:effectRef idx="0">
-            <a:schemeClr val="accent1"/>
-          </a:effectRef>
-          <a:fontRef idx="minor">
-            <a:schemeClr val="lt1"/>
-          </a:fontRef>
-        </p:style>
-        <p:txBody>
-          <a:bodyPr rtlCol="0" anchor="ctr"/>
-          <a:lstStyle/>
-          <a:p>
-            <a:pPr algn="ctr"/>
-            <a:r>
-              <a:rPr lang="en-MY" b="1" dirty="0">
-                <a:solidFill>
-                  <a:sysClr val="windowText" lastClr="000000"/>
-                </a:solidFill>
-              </a:rPr>
-              <a:t>3</a:t>
-            </a:r>
-          </a:p>
-        </p:txBody>
-      </p:sp>
-      <p:cxnSp>
-        <p:nvCxnSpPr>
-          <p:cNvPr id="198" name="Straight Arrow Connector 197">
-            <a:extLst>
-              <a:ext uri="{FF2B5EF4-FFF2-40B4-BE49-F238E27FC236}">
-                <a16:creationId xmlns:a16="http://schemas.microsoft.com/office/drawing/2014/main" id="{8BA7A56C-0C0C-6716-598D-309AEA4E6F81}"/>
-              </a:ext>
-            </a:extLst>
-          </p:cNvPr>
-          <p:cNvCxnSpPr>
-            <a:cxnSpLocks/>
-          </p:cNvCxnSpPr>
-          <p:nvPr/>
-        </p:nvCxnSpPr>
-        <p:spPr>
-          <a:xfrm flipH="1">
-            <a:off x="10309727" y="1844183"/>
-            <a:ext cx="1341564" cy="1"/>
-          </a:xfrm>
-          <a:prstGeom prst="straightConnector1">
-            <a:avLst/>
-          </a:prstGeom>
-          <a:ln w="57150">
-            <a:solidFill>
-              <a:schemeClr val="accent1">
-                <a:lumMod val="75000"/>
-              </a:schemeClr>
-            </a:solidFill>
-            <a:tailEnd type="triangle"/>
-          </a:ln>
-        </p:spPr>
-        <p:style>
-          <a:lnRef idx="1">
-            <a:schemeClr val="accent1"/>
-          </a:lnRef>
-          <a:fillRef idx="0">
-            <a:schemeClr val="accent1"/>
-          </a:fillRef>
-          <a:effectRef idx="0">
-            <a:schemeClr val="accent1"/>
-          </a:effectRef>
-          <a:fontRef idx="minor">
-            <a:schemeClr val="tx1"/>
-          </a:fontRef>
-        </p:style>
-      </p:cxnSp>
-      <p:cxnSp>
-        <p:nvCxnSpPr>
-          <p:cNvPr id="199" name="Straight Arrow Connector 198">
-            <a:extLst>
-              <a:ext uri="{FF2B5EF4-FFF2-40B4-BE49-F238E27FC236}">
-                <a16:creationId xmlns:a16="http://schemas.microsoft.com/office/drawing/2014/main" id="{6B7DD5E5-DE9D-CEE8-4DB7-9518D1987AC7}"/>
-              </a:ext>
-            </a:extLst>
-          </p:cNvPr>
-          <p:cNvCxnSpPr>
-            <a:cxnSpLocks/>
-          </p:cNvCxnSpPr>
-          <p:nvPr/>
-        </p:nvCxnSpPr>
-        <p:spPr>
-          <a:xfrm>
-            <a:off x="8804949" y="858058"/>
-            <a:ext cx="12617" cy="758447"/>
-          </a:xfrm>
-          <a:prstGeom prst="straightConnector1">
-            <a:avLst/>
-          </a:prstGeom>
-          <a:ln w="57150">
-            <a:solidFill>
-              <a:schemeClr val="accent1">
-                <a:lumMod val="75000"/>
-              </a:schemeClr>
-            </a:solidFill>
-            <a:tailEnd type="triangle"/>
-          </a:ln>
-        </p:spPr>
-        <p:style>
-          <a:lnRef idx="1">
-            <a:schemeClr val="accent1"/>
-          </a:lnRef>
-          <a:fillRef idx="0">
-            <a:schemeClr val="accent1"/>
-          </a:fillRef>
-          <a:effectRef idx="0">
-            <a:schemeClr val="accent1"/>
-          </a:effectRef>
-          <a:fontRef idx="minor">
-            <a:schemeClr val="tx1"/>
-          </a:fontRef>
-        </p:style>
-      </p:cxnSp>
-      <p:sp>
-        <p:nvSpPr>
-          <p:cNvPr id="10" name="TextBox 9">
-            <a:extLst>
-              <a:ext uri="{FF2B5EF4-FFF2-40B4-BE49-F238E27FC236}">
-                <a16:creationId xmlns:a16="http://schemas.microsoft.com/office/drawing/2014/main" id="{40D4CC24-FC09-A829-CBC8-1E9A9F8CE5B8}"/>
-              </a:ext>
-            </a:extLst>
-          </p:cNvPr>
-          <p:cNvSpPr txBox="1"/>
-          <p:nvPr/>
-        </p:nvSpPr>
-        <p:spPr>
-          <a:xfrm>
-            <a:off x="146431" y="5138704"/>
-            <a:ext cx="5710572" cy="1384995"/>
-          </a:xfrm>
-          <a:prstGeom prst="rect">
-            <a:avLst/>
-          </a:prstGeom>
-          <a:noFill/>
-          <a:ln>
-            <a:solidFill>
-              <a:schemeClr val="tx1"/>
-            </a:solidFill>
-          </a:ln>
-        </p:spPr>
-        <p:txBody>
-          <a:bodyPr wrap="square" rtlCol="0">
-            <a:spAutoFit/>
-          </a:bodyPr>
-          <a:lstStyle/>
-          <a:p>
-            <a:r>
-              <a:rPr lang="en-US" sz="1200" b="1" u="sng" dirty="0">
-                <a:latin typeface="Arial" panose="020B0604020202020204" pitchFamily="34" charset="0"/>
-                <a:cs typeface="Arial" panose="020B0604020202020204" pitchFamily="34" charset="0"/>
-              </a:rPr>
-              <a:t>Process flow</a:t>
-            </a:r>
-          </a:p>
-          <a:p>
-            <a:r>
-              <a:rPr lang="en-US" sz="1200" dirty="0">
-                <a:latin typeface="Arial" panose="020B0604020202020204" pitchFamily="34" charset="0"/>
-                <a:cs typeface="Arial" panose="020B0604020202020204" pitchFamily="34" charset="0"/>
-              </a:rPr>
-              <a:t>(1) Input - Model – Result Output – Update &amp; Save Model</a:t>
-            </a:r>
-          </a:p>
-          <a:p>
-            <a:endParaRPr lang="en-US" sz="1200" dirty="0">
-              <a:latin typeface="Arial" panose="020B0604020202020204" pitchFamily="34" charset="0"/>
-              <a:cs typeface="Arial" panose="020B0604020202020204" pitchFamily="34" charset="0"/>
-            </a:endParaRPr>
-          </a:p>
-          <a:p>
-            <a:r>
-              <a:rPr lang="en-US" sz="1200" dirty="0">
-                <a:latin typeface="Arial" panose="020B0604020202020204" pitchFamily="34" charset="0"/>
-                <a:cs typeface="Arial" panose="020B0604020202020204" pitchFamily="34" charset="0"/>
-              </a:rPr>
-              <a:t>(2) Input - Model - Output (UNKNOWN) - Assign by user – New Equipment Data   </a:t>
-            </a:r>
-          </a:p>
-          <a:p>
-            <a:r>
-              <a:rPr lang="en-US" sz="1200" dirty="0">
-                <a:latin typeface="Arial" panose="020B0604020202020204" pitchFamily="34" charset="0"/>
-                <a:cs typeface="Arial" panose="020B0604020202020204" pitchFamily="34" charset="0"/>
-              </a:rPr>
-              <a:t>       - Model – Update &amp; Save Model</a:t>
-            </a:r>
-          </a:p>
-          <a:p>
-            <a:endParaRPr lang="en-US" sz="1200" dirty="0">
-              <a:latin typeface="Arial" panose="020B0604020202020204" pitchFamily="34" charset="0"/>
-              <a:cs typeface="Arial" panose="020B0604020202020204" pitchFamily="34" charset="0"/>
-            </a:endParaRPr>
-          </a:p>
-          <a:p>
-            <a:r>
-              <a:rPr lang="en-US" sz="1200" dirty="0">
-                <a:latin typeface="Arial" panose="020B0604020202020204" pitchFamily="34" charset="0"/>
-                <a:cs typeface="Arial" panose="020B0604020202020204" pitchFamily="34" charset="0"/>
-              </a:rPr>
-              <a:t>(3) New Equipment Data - Model - Update &amp; Save Model</a:t>
-            </a:r>
-            <a:endParaRPr lang="en-MY" sz="1200" dirty="0">
-              <a:latin typeface="Arial" panose="020B0604020202020204" pitchFamily="34" charset="0"/>
-              <a:cs typeface="Arial" panose="020B0604020202020204" pitchFamily="34" charset="0"/>
-            </a:endParaRPr>
-          </a:p>
-        </p:txBody>
-      </p:sp>
-    </p:spTree>
-    <p:extLst>
-      <p:ext uri="{BB962C8B-B14F-4D97-AF65-F5344CB8AC3E}">
-        <p14:creationId xmlns:p14="http://schemas.microsoft.com/office/powerpoint/2010/main" val="2766375949"/>
-      </p:ext>
-    </p:extLst>
-  </p:cSld>
-  <p:clrMapOvr>
-    <a:masterClrMapping/>
-  </p:clrMapOvr>
-</p:sld>
-</file>
-
-<file path=ppt/slides/slide3.xml><?xml version="1.0" encoding="utf-8"?>
-<p:sld xmlns:a="http://schemas.openxmlformats.org/drawingml/2006/main" xmlns:r="http://schemas.openxmlformats.org/officeDocument/2006/relationships" xmlns:p="http://schemas.openxmlformats.org/presentationml/2006/main" showMasterSp="0">
-  <p:cSld>
-    <p:bg>
-      <p:bgPr>
-        <a:solidFill>
-          <a:srgbClr val="CDF6F9"/>
-        </a:solidFill>
-        <a:effectLst/>
-      </p:bgPr>
-    </p:bg>
-    <p:spTree>
-      <p:nvGrpSpPr>
-        <p:cNvPr id="1" name="">
-          <a:extLst>
-            <a:ext uri="{FF2B5EF4-FFF2-40B4-BE49-F238E27FC236}">
-              <a16:creationId xmlns:a16="http://schemas.microsoft.com/office/drawing/2014/main" id="{6AF2F157-8D29-E788-074F-76AA928DFDE3}"/>
-            </a:ext>
-          </a:extLst>
-        </p:cNvPr>
-        <p:cNvGrpSpPr/>
-        <p:nvPr/>
-      </p:nvGrpSpPr>
-      <p:grpSpPr>
-        <a:xfrm>
-          <a:off x="0" y="0"/>
-          <a:ext cx="0" cy="0"/>
-          <a:chOff x="0" y="0"/>
-          <a:chExt cx="0" cy="0"/>
-        </a:xfrm>
-      </p:grpSpPr>
-      <p:sp>
-        <p:nvSpPr>
-          <p:cNvPr id="3" name="Rectangle 2">
-            <a:extLst>
-              <a:ext uri="{FF2B5EF4-FFF2-40B4-BE49-F238E27FC236}">
-                <a16:creationId xmlns:a16="http://schemas.microsoft.com/office/drawing/2014/main" id="{56E07FFD-2E37-CD20-EB0F-0B5C640110D2}"/>
-              </a:ext>
-            </a:extLst>
-          </p:cNvPr>
-          <p:cNvSpPr/>
-          <p:nvPr/>
-        </p:nvSpPr>
-        <p:spPr>
-          <a:xfrm>
-            <a:off x="3964564" y="2276475"/>
-            <a:ext cx="4074536" cy="1587509"/>
-          </a:xfrm>
-          <a:prstGeom prst="rect">
-            <a:avLst/>
-          </a:prstGeom>
-          <a:noFill/>
-          <a:ln>
-            <a:noFill/>
-          </a:ln>
-        </p:spPr>
-        <p:style>
-          <a:lnRef idx="2">
-            <a:schemeClr val="accent6"/>
-          </a:lnRef>
-          <a:fillRef idx="1">
-            <a:schemeClr val="lt1"/>
-          </a:fillRef>
-          <a:effectRef idx="0">
-            <a:schemeClr val="accent6"/>
-          </a:effectRef>
-          <a:fontRef idx="minor">
-            <a:schemeClr val="dk1"/>
-          </a:fontRef>
-        </p:style>
-        <p:txBody>
-          <a:bodyPr rtlCol="0" anchor="ctr"/>
-          <a:lstStyle/>
-          <a:p>
-            <a:pPr algn="ctr"/>
-            <a:r>
-              <a:rPr lang="en-US" sz="4800" dirty="0"/>
-              <a:t>T</a:t>
-            </a:r>
-            <a:r>
-              <a:rPr lang="en-MY" sz="4800" dirty="0"/>
-              <a:t>HANK YOU</a:t>
-            </a:r>
-          </a:p>
-        </p:txBody>
-      </p:sp>
-    </p:spTree>
-    <p:extLst>
-      <p:ext uri="{BB962C8B-B14F-4D97-AF65-F5344CB8AC3E}">
-        <p14:creationId xmlns:p14="http://schemas.microsoft.com/office/powerpoint/2010/main" val="16583078"/>
-      </p:ext>
-    </p:extLst>
-  </p:cSld>
-  <p:clrMapOvr>
-    <a:masterClrMapping/>
-  </p:clrMapOvr>
-</p:sld>
-</file>
-
-<file path=ppt/slides/slide4.xml><?xml version="1.0" encoding="utf-8"?>
-<p:sld xmlns:a="http://schemas.openxmlformats.org/drawingml/2006/main" xmlns:r="http://schemas.openxmlformats.org/officeDocument/2006/relationships" xmlns:p="http://schemas.openxmlformats.org/presentationml/2006/main" showMasterSp="0">
-  <p:cSld>
-    <p:bg>
-      <p:bgPr>
-        <a:solidFill>
-          <a:srgbClr val="CDF6F9"/>
-        </a:solidFill>
-        <a:effectLst/>
-      </p:bgPr>
-    </p:bg>
-    <p:spTree>
-      <p:nvGrpSpPr>
-        <p:cNvPr id="1" name="">
-          <a:extLst>
-            <a:ext uri="{FF2B5EF4-FFF2-40B4-BE49-F238E27FC236}">
-              <a16:creationId xmlns:a16="http://schemas.microsoft.com/office/drawing/2014/main" id="{F9645B29-B38D-7B94-A70E-7D634579EF28}"/>
-            </a:ext>
-          </a:extLst>
-        </p:cNvPr>
-        <p:cNvGrpSpPr/>
-        <p:nvPr/>
-      </p:nvGrpSpPr>
-      <p:grpSpPr>
-        <a:xfrm>
-          <a:off x="0" y="0"/>
-          <a:ext cx="0" cy="0"/>
-          <a:chOff x="0" y="0"/>
-          <a:chExt cx="0" cy="0"/>
-        </a:xfrm>
-      </p:grpSpPr>
-      <p:pic>
-        <p:nvPicPr>
-          <p:cNvPr id="3" name="Picture 2">
-            <a:extLst>
-              <a:ext uri="{FF2B5EF4-FFF2-40B4-BE49-F238E27FC236}">
-                <a16:creationId xmlns:a16="http://schemas.microsoft.com/office/drawing/2014/main" id="{1582A625-0A36-5DBD-23AD-272844215260}"/>
-              </a:ext>
-            </a:extLst>
-          </p:cNvPr>
-          <p:cNvPicPr>
-            <a:picLocks noChangeAspect="1"/>
-          </p:cNvPicPr>
-          <p:nvPr/>
-        </p:nvPicPr>
-        <p:blipFill>
-          <a:blip r:embed="rId3"/>
-          <a:stretch>
-            <a:fillRect/>
-          </a:stretch>
-        </p:blipFill>
-        <p:spPr>
-          <a:xfrm>
-            <a:off x="1219200" y="442912"/>
-            <a:ext cx="9753600" cy="5972175"/>
-          </a:xfrm>
-          <a:prstGeom prst="rect">
-            <a:avLst/>
-          </a:prstGeom>
-        </p:spPr>
-      </p:pic>
-    </p:spTree>
-    <p:extLst>
-      <p:ext uri="{BB962C8B-B14F-4D97-AF65-F5344CB8AC3E}">
-        <p14:creationId xmlns:p14="http://schemas.microsoft.com/office/powerpoint/2010/main" val="2895853449"/>
-      </p:ext>
-    </p:extLst>
-  </p:cSld>
-  <p:clrMapOvr>
-    <a:masterClrMapping/>
-  </p:clrMapOvr>
-</p:sld>
-</file>
-
-<file path=ppt/slides/slide5.xml><?xml version="1.0" encoding="utf-8"?>
-<p:sld xmlns:a="http://schemas.openxmlformats.org/drawingml/2006/main" xmlns:r="http://schemas.openxmlformats.org/officeDocument/2006/relationships" xmlns:p="http://schemas.openxmlformats.org/presentationml/2006/main" showMasterSp="0">
-  <p:cSld>
-    <p:bg>
-      <p:bgPr>
-        <a:solidFill>
-          <a:srgbClr val="CDF6F9"/>
-        </a:solidFill>
-        <a:effectLst/>
-      </p:bgPr>
-    </p:bg>
-    <p:spTree>
-      <p:nvGrpSpPr>
-        <p:cNvPr id="1" name="">
-          <a:extLst>
-            <a:ext uri="{FF2B5EF4-FFF2-40B4-BE49-F238E27FC236}">
-              <a16:creationId xmlns:a16="http://schemas.microsoft.com/office/drawing/2014/main" id="{7F2C4EC8-5B76-523F-ED3F-BC66B74B0733}"/>
-            </a:ext>
-          </a:extLst>
-        </p:cNvPr>
-        <p:cNvGrpSpPr/>
-        <p:nvPr/>
-      </p:nvGrpSpPr>
-      <p:grpSpPr>
-        <a:xfrm>
-          <a:off x="0" y="0"/>
-          <a:ext cx="0" cy="0"/>
-          <a:chOff x="0" y="0"/>
-          <a:chExt cx="0" cy="0"/>
-        </a:xfrm>
-      </p:grpSpPr>
-      <p:pic>
-        <p:nvPicPr>
-          <p:cNvPr id="4" name="Picture 3">
-            <a:extLst>
-              <a:ext uri="{FF2B5EF4-FFF2-40B4-BE49-F238E27FC236}">
-                <a16:creationId xmlns:a16="http://schemas.microsoft.com/office/drawing/2014/main" id="{810480DF-968A-2171-73C4-16EEF11F55E8}"/>
-              </a:ext>
-            </a:extLst>
-          </p:cNvPr>
-          <p:cNvPicPr>
-            <a:picLocks noChangeAspect="1"/>
-          </p:cNvPicPr>
-          <p:nvPr/>
-        </p:nvPicPr>
-        <p:blipFill>
-          <a:blip r:embed="rId3"/>
-          <a:stretch>
-            <a:fillRect/>
-          </a:stretch>
-        </p:blipFill>
-        <p:spPr>
-          <a:xfrm>
-            <a:off x="867707" y="2356149"/>
-            <a:ext cx="10456586" cy="1981110"/>
-          </a:xfrm>
-          <a:prstGeom prst="rect">
-            <a:avLst/>
-          </a:prstGeom>
-        </p:spPr>
-      </p:pic>
-    </p:spTree>
-    <p:extLst>
-      <p:ext uri="{BB962C8B-B14F-4D97-AF65-F5344CB8AC3E}">
-        <p14:creationId xmlns:p14="http://schemas.microsoft.com/office/powerpoint/2010/main" val="3425137762"/>
-      </p:ext>
-    </p:extLst>
-  </p:cSld>
-  <p:clrMapOvr>
-    <a:masterClrMapping/>
-  </p:clrMapOvr>
-</p:sld>
-</file>
-
-<file path=ppt/slides/slide6.xml><?xml version="1.0" encoding="utf-8"?>
-<p:sld xmlns:a="http://schemas.openxmlformats.org/drawingml/2006/main" xmlns:r="http://schemas.openxmlformats.org/officeDocument/2006/relationships" xmlns:p="http://schemas.openxmlformats.org/presentationml/2006/main" showMasterSp="0">
-  <p:cSld>
-    <p:bg>
-      <p:bgPr>
         <a:gradFill>
           <a:gsLst>
             <a:gs pos="0">
@@ -12517,7 +10068,7 @@
 </p:sld>
 </file>
 
-<file path=ppt/slides/slide7.xml><?xml version="1.0" encoding="utf-8"?>
+<file path=ppt/slides/slide11.xml><?xml version="1.0" encoding="utf-8"?>
 <p:sld xmlns:a="http://schemas.openxmlformats.org/drawingml/2006/main" xmlns:r="http://schemas.openxmlformats.org/officeDocument/2006/relationships" xmlns:p="http://schemas.openxmlformats.org/presentationml/2006/main" showMasterSp="0">
   <p:cSld>
     <p:bg>
@@ -13912,7 +11463,7 @@
 </p:sld>
 </file>
 
-<file path=ppt/slides/slide8.xml><?xml version="1.0" encoding="utf-8"?>
+<file path=ppt/slides/slide12.xml><?xml version="1.0" encoding="utf-8"?>
 <p:sld xmlns:a="http://schemas.openxmlformats.org/drawingml/2006/main" xmlns:r="http://schemas.openxmlformats.org/officeDocument/2006/relationships" xmlns:p="http://schemas.openxmlformats.org/presentationml/2006/main" showMasterSp="0">
   <p:cSld>
     <p:bg>
@@ -14007,7 +11558,7 @@
 </p:sld>
 </file>
 
-<file path=ppt/slides/slide9.xml><?xml version="1.0" encoding="utf-8"?>
+<file path=ppt/slides/slide13.xml><?xml version="1.0" encoding="utf-8"?>
 <p:sld xmlns:a="http://schemas.openxmlformats.org/drawingml/2006/main" xmlns:r="http://schemas.openxmlformats.org/officeDocument/2006/relationships" xmlns:p="http://schemas.openxmlformats.org/presentationml/2006/main" showMasterSp="0">
   <p:cSld>
     <p:bg>
@@ -14614,6 +12165,3279 @@
     <p:extLst>
       <p:ext uri="{BB962C8B-B14F-4D97-AF65-F5344CB8AC3E}">
         <p14:creationId xmlns:p14="http://schemas.microsoft.com/office/powerpoint/2010/main" val="2413008996"/>
+      </p:ext>
+    </p:extLst>
+  </p:cSld>
+  <p:clrMapOvr>
+    <a:masterClrMapping/>
+  </p:clrMapOvr>
+</p:sld>
+</file>
+
+<file path=ppt/slides/slide14.xml><?xml version="1.0" encoding="utf-8"?>
+<p:sld xmlns:a="http://schemas.openxmlformats.org/drawingml/2006/main" xmlns:r="http://schemas.openxmlformats.org/officeDocument/2006/relationships" xmlns:p="http://schemas.openxmlformats.org/presentationml/2006/main" showMasterSp="0">
+  <p:cSld>
+    <p:bg>
+      <p:bgPr>
+        <a:solidFill>
+          <a:srgbClr val="CDF6F9"/>
+        </a:solidFill>
+        <a:effectLst/>
+      </p:bgPr>
+    </p:bg>
+    <p:spTree>
+      <p:nvGrpSpPr>
+        <p:cNvPr id="1" name="">
+          <a:extLst>
+            <a:ext uri="{FF2B5EF4-FFF2-40B4-BE49-F238E27FC236}">
+              <a16:creationId xmlns:a16="http://schemas.microsoft.com/office/drawing/2014/main" id="{07E4B138-F79B-3190-6C13-DD914FBA320A}"/>
+            </a:ext>
+          </a:extLst>
+        </p:cNvPr>
+        <p:cNvGrpSpPr/>
+        <p:nvPr/>
+      </p:nvGrpSpPr>
+      <p:grpSpPr>
+        <a:xfrm>
+          <a:off x="0" y="0"/>
+          <a:ext cx="0" cy="0"/>
+          <a:chOff x="0" y="0"/>
+          <a:chExt cx="0" cy="0"/>
+        </a:xfrm>
+      </p:grpSpPr>
+      <p:sp>
+        <p:nvSpPr>
+          <p:cNvPr id="4" name="Rectangle 3">
+            <a:extLst>
+              <a:ext uri="{FF2B5EF4-FFF2-40B4-BE49-F238E27FC236}">
+                <a16:creationId xmlns:a16="http://schemas.microsoft.com/office/drawing/2014/main" id="{096F011D-CEEF-7433-5524-F23B10ACF13E}"/>
+              </a:ext>
+            </a:extLst>
+          </p:cNvPr>
+          <p:cNvSpPr/>
+          <p:nvPr/>
+        </p:nvSpPr>
+        <p:spPr>
+          <a:xfrm>
+            <a:off x="3964564" y="2276475"/>
+            <a:ext cx="4074536" cy="1587509"/>
+          </a:xfrm>
+          <a:prstGeom prst="rect">
+            <a:avLst/>
+          </a:prstGeom>
+          <a:noFill/>
+          <a:ln>
+            <a:noFill/>
+          </a:ln>
+        </p:spPr>
+        <p:style>
+          <a:lnRef idx="2">
+            <a:schemeClr val="accent6"/>
+          </a:lnRef>
+          <a:fillRef idx="1">
+            <a:schemeClr val="lt1"/>
+          </a:fillRef>
+          <a:effectRef idx="0">
+            <a:schemeClr val="accent6"/>
+          </a:effectRef>
+          <a:fontRef idx="minor">
+            <a:schemeClr val="dk1"/>
+          </a:fontRef>
+        </p:style>
+        <p:txBody>
+          <a:bodyPr rtlCol="0" anchor="ctr"/>
+          <a:lstStyle/>
+          <a:p>
+            <a:pPr algn="ctr"/>
+            <a:r>
+              <a:rPr lang="en-MY" sz="4800" dirty="0"/>
+              <a:t>DATASET</a:t>
+            </a:r>
+          </a:p>
+        </p:txBody>
+      </p:sp>
+    </p:spTree>
+    <p:extLst>
+      <p:ext uri="{BB962C8B-B14F-4D97-AF65-F5344CB8AC3E}">
+        <p14:creationId xmlns:p14="http://schemas.microsoft.com/office/powerpoint/2010/main" val="2967482216"/>
+      </p:ext>
+    </p:extLst>
+  </p:cSld>
+  <p:clrMapOvr>
+    <a:masterClrMapping/>
+  </p:clrMapOvr>
+</p:sld>
+</file>
+
+<file path=ppt/slides/slide15.xml><?xml version="1.0" encoding="utf-8"?>
+<p:sld xmlns:a="http://schemas.openxmlformats.org/drawingml/2006/main" xmlns:r="http://schemas.openxmlformats.org/officeDocument/2006/relationships" xmlns:p="http://schemas.openxmlformats.org/presentationml/2006/main" showMasterSp="0">
+  <p:cSld>
+    <p:bg>
+      <p:bgPr>
+        <a:solidFill>
+          <a:srgbClr val="CDF6F9"/>
+        </a:solidFill>
+        <a:effectLst/>
+      </p:bgPr>
+    </p:bg>
+    <p:spTree>
+      <p:nvGrpSpPr>
+        <p:cNvPr id="1" name="">
+          <a:extLst>
+            <a:ext uri="{FF2B5EF4-FFF2-40B4-BE49-F238E27FC236}">
+              <a16:creationId xmlns:a16="http://schemas.microsoft.com/office/drawing/2014/main" id="{9EFF50E8-C2B0-9D88-2CE4-13199422C558}"/>
+            </a:ext>
+          </a:extLst>
+        </p:cNvPr>
+        <p:cNvGrpSpPr/>
+        <p:nvPr/>
+      </p:nvGrpSpPr>
+      <p:grpSpPr>
+        <a:xfrm>
+          <a:off x="0" y="0"/>
+          <a:ext cx="0" cy="0"/>
+          <a:chOff x="0" y="0"/>
+          <a:chExt cx="0" cy="0"/>
+        </a:xfrm>
+      </p:grpSpPr>
+      <p:sp>
+        <p:nvSpPr>
+          <p:cNvPr id="10" name="TextBox 9">
+            <a:extLst>
+              <a:ext uri="{FF2B5EF4-FFF2-40B4-BE49-F238E27FC236}">
+                <a16:creationId xmlns:a16="http://schemas.microsoft.com/office/drawing/2014/main" id="{6CFAA6D5-A483-F1D3-F473-4EB5FF643CAF}"/>
+              </a:ext>
+            </a:extLst>
+          </p:cNvPr>
+          <p:cNvSpPr txBox="1"/>
+          <p:nvPr/>
+        </p:nvSpPr>
+        <p:spPr>
+          <a:xfrm>
+            <a:off x="295275" y="6446936"/>
+            <a:ext cx="7924800" cy="276999"/>
+          </a:xfrm>
+          <a:prstGeom prst="rect">
+            <a:avLst/>
+          </a:prstGeom>
+          <a:noFill/>
+        </p:spPr>
+        <p:txBody>
+          <a:bodyPr wrap="square">
+            <a:spAutoFit/>
+          </a:bodyPr>
+          <a:lstStyle/>
+          <a:p>
+            <a:r>
+              <a:rPr lang="en-MY" sz="1200" dirty="0" err="1"/>
+              <a:t>Filepath</a:t>
+            </a:r>
+            <a:r>
+              <a:rPr lang="en-MY" sz="1200" dirty="0"/>
+              <a:t>  : "C:\Users\sitisyaziyah\Documents\Device_Identifier\Dummy data\</a:t>
+            </a:r>
+            <a:r>
+              <a:rPr lang="en-MY" sz="1200" dirty="0" err="1"/>
+              <a:t>Oiltek</a:t>
+            </a:r>
+            <a:r>
+              <a:rPr lang="en-MY" sz="1200" dirty="0"/>
+              <a:t> - structured data.xlsx“ </a:t>
+            </a:r>
+          </a:p>
+        </p:txBody>
+      </p:sp>
+      <p:pic>
+        <p:nvPicPr>
+          <p:cNvPr id="3" name="Picture 2">
+            <a:extLst>
+              <a:ext uri="{FF2B5EF4-FFF2-40B4-BE49-F238E27FC236}">
+                <a16:creationId xmlns:a16="http://schemas.microsoft.com/office/drawing/2014/main" id="{0C83CBDE-1BA2-B6EE-EF7D-4C4EAB60B290}"/>
+              </a:ext>
+            </a:extLst>
+          </p:cNvPr>
+          <p:cNvPicPr>
+            <a:picLocks noChangeAspect="1"/>
+          </p:cNvPicPr>
+          <p:nvPr/>
+        </p:nvPicPr>
+        <p:blipFill>
+          <a:blip r:embed="rId3"/>
+          <a:stretch>
+            <a:fillRect/>
+          </a:stretch>
+        </p:blipFill>
+        <p:spPr>
+          <a:xfrm>
+            <a:off x="2731019" y="1801640"/>
+            <a:ext cx="6259455" cy="3810103"/>
+          </a:xfrm>
+          <a:prstGeom prst="rect">
+            <a:avLst/>
+          </a:prstGeom>
+        </p:spPr>
+      </p:pic>
+      <p:sp>
+        <p:nvSpPr>
+          <p:cNvPr id="14" name="Rectangle 13">
+            <a:extLst>
+              <a:ext uri="{FF2B5EF4-FFF2-40B4-BE49-F238E27FC236}">
+                <a16:creationId xmlns:a16="http://schemas.microsoft.com/office/drawing/2014/main" id="{C05E45FF-768C-F053-BFFD-3176BF216B90}"/>
+              </a:ext>
+            </a:extLst>
+          </p:cNvPr>
+          <p:cNvSpPr/>
+          <p:nvPr/>
+        </p:nvSpPr>
+        <p:spPr>
+          <a:xfrm>
+            <a:off x="4498993" y="966447"/>
+            <a:ext cx="2369561" cy="733425"/>
+          </a:xfrm>
+          <a:prstGeom prst="rect">
+            <a:avLst/>
+          </a:prstGeom>
+          <a:noFill/>
+          <a:ln>
+            <a:noFill/>
+          </a:ln>
+        </p:spPr>
+        <p:style>
+          <a:lnRef idx="2">
+            <a:schemeClr val="accent6"/>
+          </a:lnRef>
+          <a:fillRef idx="1">
+            <a:schemeClr val="lt1"/>
+          </a:fillRef>
+          <a:effectRef idx="0">
+            <a:schemeClr val="accent6"/>
+          </a:effectRef>
+          <a:fontRef idx="minor">
+            <a:schemeClr val="dk1"/>
+          </a:fontRef>
+        </p:style>
+        <p:txBody>
+          <a:bodyPr rtlCol="0" anchor="ctr"/>
+          <a:lstStyle/>
+          <a:p>
+            <a:r>
+              <a:rPr lang="en-US" sz="1400" dirty="0"/>
+              <a:t>P</a:t>
+            </a:r>
+            <a:r>
+              <a:rPr lang="en-MY" sz="1400" dirty="0"/>
+              <a:t>ROJECT 		: A1706</a:t>
+            </a:r>
+          </a:p>
+          <a:p>
+            <a:r>
+              <a:rPr lang="en-MY" sz="1400" dirty="0"/>
+              <a:t>CUSTOMER 		: </a:t>
+            </a:r>
+            <a:r>
+              <a:rPr lang="en-MY" sz="1400" b="1" dirty="0"/>
+              <a:t>OILTEK</a:t>
+            </a:r>
+          </a:p>
+          <a:p>
+            <a:r>
+              <a:rPr lang="en-MY" sz="1400" dirty="0"/>
+              <a:t>TOTAL DEVICE 	: 130</a:t>
+            </a:r>
+          </a:p>
+        </p:txBody>
+      </p:sp>
+      <p:sp>
+        <p:nvSpPr>
+          <p:cNvPr id="2" name="Rectangle 1">
+            <a:extLst>
+              <a:ext uri="{FF2B5EF4-FFF2-40B4-BE49-F238E27FC236}">
+                <a16:creationId xmlns:a16="http://schemas.microsoft.com/office/drawing/2014/main" id="{21873DC8-6958-BDE3-BB2B-08C22786164B}"/>
+              </a:ext>
+            </a:extLst>
+          </p:cNvPr>
+          <p:cNvSpPr/>
+          <p:nvPr/>
+        </p:nvSpPr>
+        <p:spPr>
+          <a:xfrm>
+            <a:off x="4739671" y="258561"/>
+            <a:ext cx="2242153" cy="707886"/>
+          </a:xfrm>
+          <a:prstGeom prst="rect">
+            <a:avLst/>
+          </a:prstGeom>
+          <a:noFill/>
+        </p:spPr>
+        <p:txBody>
+          <a:bodyPr wrap="square" lIns="91440" tIns="45720" rIns="91440" bIns="45720">
+            <a:spAutoFit/>
+          </a:bodyPr>
+          <a:lstStyle/>
+          <a:p>
+            <a:pPr algn="ctr"/>
+            <a:r>
+              <a:rPr lang="en-US" sz="4000" b="0" cap="none" spc="0" dirty="0">
+                <a:ln w="0"/>
+                <a:solidFill>
+                  <a:schemeClr val="tx1"/>
+                </a:solidFill>
+                <a:effectLst>
+                  <a:outerShdw blurRad="38100" dist="19050" dir="2700000" algn="tl" rotWithShape="0">
+                    <a:schemeClr val="dk1">
+                      <a:alpha val="40000"/>
+                    </a:schemeClr>
+                  </a:outerShdw>
+                </a:effectLst>
+              </a:rPr>
+              <a:t>OILTEK</a:t>
+            </a:r>
+          </a:p>
+        </p:txBody>
+      </p:sp>
+    </p:spTree>
+    <p:extLst>
+      <p:ext uri="{BB962C8B-B14F-4D97-AF65-F5344CB8AC3E}">
+        <p14:creationId xmlns:p14="http://schemas.microsoft.com/office/powerpoint/2010/main" val="3555587184"/>
+      </p:ext>
+    </p:extLst>
+  </p:cSld>
+  <p:clrMapOvr>
+    <a:masterClrMapping/>
+  </p:clrMapOvr>
+</p:sld>
+</file>
+
+<file path=ppt/slides/slide16.xml><?xml version="1.0" encoding="utf-8"?>
+<p:sld xmlns:a="http://schemas.openxmlformats.org/drawingml/2006/main" xmlns:r="http://schemas.openxmlformats.org/officeDocument/2006/relationships" xmlns:p="http://schemas.openxmlformats.org/presentationml/2006/main" showMasterSp="0">
+  <p:cSld>
+    <p:bg>
+      <p:bgPr>
+        <a:solidFill>
+          <a:srgbClr val="CDF6F9"/>
+        </a:solidFill>
+        <a:effectLst/>
+      </p:bgPr>
+    </p:bg>
+    <p:spTree>
+      <p:nvGrpSpPr>
+        <p:cNvPr id="1" name="">
+          <a:extLst>
+            <a:ext uri="{FF2B5EF4-FFF2-40B4-BE49-F238E27FC236}">
+              <a16:creationId xmlns:a16="http://schemas.microsoft.com/office/drawing/2014/main" id="{52304AE1-9FFD-5D1C-EA30-76AB0E14338F}"/>
+            </a:ext>
+          </a:extLst>
+        </p:cNvPr>
+        <p:cNvGrpSpPr/>
+        <p:nvPr/>
+      </p:nvGrpSpPr>
+      <p:grpSpPr>
+        <a:xfrm>
+          <a:off x="0" y="0"/>
+          <a:ext cx="0" cy="0"/>
+          <a:chOff x="0" y="0"/>
+          <a:chExt cx="0" cy="0"/>
+        </a:xfrm>
+      </p:grpSpPr>
+      <p:sp>
+        <p:nvSpPr>
+          <p:cNvPr id="5" name="Rectangle 4">
+            <a:extLst>
+              <a:ext uri="{FF2B5EF4-FFF2-40B4-BE49-F238E27FC236}">
+                <a16:creationId xmlns:a16="http://schemas.microsoft.com/office/drawing/2014/main" id="{DD2F06A8-6F34-FB7C-99CA-D5B7B6BA0829}"/>
+              </a:ext>
+            </a:extLst>
+          </p:cNvPr>
+          <p:cNvSpPr/>
+          <p:nvPr/>
+        </p:nvSpPr>
+        <p:spPr>
+          <a:xfrm>
+            <a:off x="3357243" y="663392"/>
+            <a:ext cx="5235070" cy="389810"/>
+          </a:xfrm>
+          <a:prstGeom prst="rect">
+            <a:avLst/>
+          </a:prstGeom>
+          <a:noFill/>
+          <a:ln>
+            <a:noFill/>
+          </a:ln>
+        </p:spPr>
+        <p:style>
+          <a:lnRef idx="2">
+            <a:schemeClr val="accent6"/>
+          </a:lnRef>
+          <a:fillRef idx="1">
+            <a:schemeClr val="lt1"/>
+          </a:fillRef>
+          <a:effectRef idx="0">
+            <a:schemeClr val="accent6"/>
+          </a:effectRef>
+          <a:fontRef idx="minor">
+            <a:schemeClr val="dk1"/>
+          </a:fontRef>
+        </p:style>
+        <p:txBody>
+          <a:bodyPr rtlCol="0" anchor="ctr"/>
+          <a:lstStyle/>
+          <a:p>
+            <a:pPr algn="ctr"/>
+            <a:r>
+              <a:rPr lang="en-MY" sz="1400" dirty="0"/>
+              <a:t>CUSTOMER : UGS  </a:t>
+            </a:r>
+            <a:r>
+              <a:rPr lang="en-US" sz="1400" dirty="0"/>
+              <a:t>P</a:t>
+            </a:r>
+            <a:r>
+              <a:rPr lang="en-MY" sz="1400" dirty="0"/>
+              <a:t>ROJECT: A2027        TOTAL DEVICE : 328</a:t>
+            </a:r>
+          </a:p>
+        </p:txBody>
+      </p:sp>
+      <p:sp>
+        <p:nvSpPr>
+          <p:cNvPr id="10" name="TextBox 9">
+            <a:extLst>
+              <a:ext uri="{FF2B5EF4-FFF2-40B4-BE49-F238E27FC236}">
+                <a16:creationId xmlns:a16="http://schemas.microsoft.com/office/drawing/2014/main" id="{E950CA3E-626B-CB93-987C-9518012BE204}"/>
+              </a:ext>
+            </a:extLst>
+          </p:cNvPr>
+          <p:cNvSpPr txBox="1"/>
+          <p:nvPr/>
+        </p:nvSpPr>
+        <p:spPr>
+          <a:xfrm>
+            <a:off x="95250" y="6593130"/>
+            <a:ext cx="7924800" cy="261610"/>
+          </a:xfrm>
+          <a:prstGeom prst="rect">
+            <a:avLst/>
+          </a:prstGeom>
+          <a:noFill/>
+        </p:spPr>
+        <p:txBody>
+          <a:bodyPr wrap="square">
+            <a:spAutoFit/>
+          </a:bodyPr>
+          <a:lstStyle/>
+          <a:p>
+            <a:r>
+              <a:rPr lang="en-MY" sz="1050" dirty="0" err="1"/>
+              <a:t>Filepath</a:t>
+            </a:r>
+            <a:r>
+              <a:rPr lang="en-MY" sz="1050" dirty="0"/>
+              <a:t>  : "C:\Users\sitisyaziyah\Documents\Device_Identifier\Dummy data\UGS - structured data.xlsx“ (sheet = A2027-S2)</a:t>
+            </a:r>
+          </a:p>
+        </p:txBody>
+      </p:sp>
+      <p:pic>
+        <p:nvPicPr>
+          <p:cNvPr id="4" name="Picture 3">
+            <a:extLst>
+              <a:ext uri="{FF2B5EF4-FFF2-40B4-BE49-F238E27FC236}">
+                <a16:creationId xmlns:a16="http://schemas.microsoft.com/office/drawing/2014/main" id="{64D1F1BF-BC42-246A-BEF3-35FBB30AFBC6}"/>
+              </a:ext>
+            </a:extLst>
+          </p:cNvPr>
+          <p:cNvPicPr>
+            <a:picLocks noChangeAspect="1"/>
+          </p:cNvPicPr>
+          <p:nvPr/>
+        </p:nvPicPr>
+        <p:blipFill>
+          <a:blip r:embed="rId3"/>
+          <a:stretch>
+            <a:fillRect/>
+          </a:stretch>
+        </p:blipFill>
+        <p:spPr>
+          <a:xfrm>
+            <a:off x="1034810" y="1053202"/>
+            <a:ext cx="10286971" cy="5453172"/>
+          </a:xfrm>
+          <a:prstGeom prst="rect">
+            <a:avLst/>
+          </a:prstGeom>
+        </p:spPr>
+      </p:pic>
+      <p:sp>
+        <p:nvSpPr>
+          <p:cNvPr id="2" name="Rectangle 1">
+            <a:extLst>
+              <a:ext uri="{FF2B5EF4-FFF2-40B4-BE49-F238E27FC236}">
+                <a16:creationId xmlns:a16="http://schemas.microsoft.com/office/drawing/2014/main" id="{AA3692A3-9B0B-DC5B-8A80-F2C1BAA3C152}"/>
+              </a:ext>
+            </a:extLst>
+          </p:cNvPr>
+          <p:cNvSpPr/>
+          <p:nvPr/>
+        </p:nvSpPr>
+        <p:spPr>
+          <a:xfrm>
+            <a:off x="4675663" y="34751"/>
+            <a:ext cx="2242153" cy="707886"/>
+          </a:xfrm>
+          <a:prstGeom prst="rect">
+            <a:avLst/>
+          </a:prstGeom>
+          <a:noFill/>
+        </p:spPr>
+        <p:txBody>
+          <a:bodyPr wrap="square" lIns="91440" tIns="45720" rIns="91440" bIns="45720">
+            <a:spAutoFit/>
+          </a:bodyPr>
+          <a:lstStyle/>
+          <a:p>
+            <a:pPr algn="ctr"/>
+            <a:r>
+              <a:rPr lang="en-US" sz="4000" dirty="0">
+                <a:ln w="0"/>
+                <a:effectLst>
+                  <a:outerShdw blurRad="38100" dist="19050" dir="2700000" algn="tl" rotWithShape="0">
+                    <a:schemeClr val="dk1">
+                      <a:alpha val="40000"/>
+                    </a:schemeClr>
+                  </a:outerShdw>
+                </a:effectLst>
+              </a:rPr>
+              <a:t>UGS</a:t>
+            </a:r>
+            <a:endParaRPr lang="en-US" sz="4000" b="0" cap="none" spc="0" dirty="0">
+              <a:ln w="0"/>
+              <a:solidFill>
+                <a:schemeClr val="tx1"/>
+              </a:solidFill>
+              <a:effectLst>
+                <a:outerShdw blurRad="38100" dist="19050" dir="2700000" algn="tl" rotWithShape="0">
+                  <a:schemeClr val="dk1">
+                    <a:alpha val="40000"/>
+                  </a:schemeClr>
+                </a:outerShdw>
+              </a:effectLst>
+            </a:endParaRPr>
+          </a:p>
+        </p:txBody>
+      </p:sp>
+    </p:spTree>
+    <p:extLst>
+      <p:ext uri="{BB962C8B-B14F-4D97-AF65-F5344CB8AC3E}">
+        <p14:creationId xmlns:p14="http://schemas.microsoft.com/office/powerpoint/2010/main" val="588220425"/>
+      </p:ext>
+    </p:extLst>
+  </p:cSld>
+  <p:clrMapOvr>
+    <a:masterClrMapping/>
+  </p:clrMapOvr>
+</p:sld>
+</file>
+
+<file path=ppt/slides/slide17.xml><?xml version="1.0" encoding="utf-8"?>
+<p:sld xmlns:a="http://schemas.openxmlformats.org/drawingml/2006/main" xmlns:r="http://schemas.openxmlformats.org/officeDocument/2006/relationships" xmlns:p="http://schemas.openxmlformats.org/presentationml/2006/main" showMasterSp="0">
+  <p:cSld>
+    <p:bg>
+      <p:bgPr>
+        <a:solidFill>
+          <a:srgbClr val="CDF6F9"/>
+        </a:solidFill>
+        <a:effectLst/>
+      </p:bgPr>
+    </p:bg>
+    <p:spTree>
+      <p:nvGrpSpPr>
+        <p:cNvPr id="1" name="">
+          <a:extLst>
+            <a:ext uri="{FF2B5EF4-FFF2-40B4-BE49-F238E27FC236}">
+              <a16:creationId xmlns:a16="http://schemas.microsoft.com/office/drawing/2014/main" id="{BF679647-F271-F17F-14F8-01FF566A07DB}"/>
+            </a:ext>
+          </a:extLst>
+        </p:cNvPr>
+        <p:cNvGrpSpPr/>
+        <p:nvPr/>
+      </p:nvGrpSpPr>
+      <p:grpSpPr>
+        <a:xfrm>
+          <a:off x="0" y="0"/>
+          <a:ext cx="0" cy="0"/>
+          <a:chOff x="0" y="0"/>
+          <a:chExt cx="0" cy="0"/>
+        </a:xfrm>
+      </p:grpSpPr>
+      <p:pic>
+        <p:nvPicPr>
+          <p:cNvPr id="4" name="Picture 3">
+            <a:extLst>
+              <a:ext uri="{FF2B5EF4-FFF2-40B4-BE49-F238E27FC236}">
+                <a16:creationId xmlns:a16="http://schemas.microsoft.com/office/drawing/2014/main" id="{F56E8B70-DC69-FF92-CA47-5D65C926AD5B}"/>
+              </a:ext>
+            </a:extLst>
+          </p:cNvPr>
+          <p:cNvPicPr>
+            <a:picLocks noChangeAspect="1"/>
+          </p:cNvPicPr>
+          <p:nvPr/>
+        </p:nvPicPr>
+        <p:blipFill>
+          <a:blip r:embed="rId3"/>
+          <a:stretch>
+            <a:fillRect/>
+          </a:stretch>
+        </p:blipFill>
+        <p:spPr>
+          <a:xfrm>
+            <a:off x="2765534" y="1180986"/>
+            <a:ext cx="6073801" cy="5105514"/>
+          </a:xfrm>
+          <a:prstGeom prst="rect">
+            <a:avLst/>
+          </a:prstGeom>
+        </p:spPr>
+      </p:pic>
+      <p:sp>
+        <p:nvSpPr>
+          <p:cNvPr id="9" name="Rectangle 8">
+            <a:extLst>
+              <a:ext uri="{FF2B5EF4-FFF2-40B4-BE49-F238E27FC236}">
+                <a16:creationId xmlns:a16="http://schemas.microsoft.com/office/drawing/2014/main" id="{6DFF0C8E-DEB7-77E9-5323-611C30F53488}"/>
+              </a:ext>
+            </a:extLst>
+          </p:cNvPr>
+          <p:cNvSpPr/>
+          <p:nvPr/>
+        </p:nvSpPr>
+        <p:spPr>
+          <a:xfrm>
+            <a:off x="194180" y="257175"/>
+            <a:ext cx="2369561" cy="790575"/>
+          </a:xfrm>
+          <a:prstGeom prst="rect">
+            <a:avLst/>
+          </a:prstGeom>
+          <a:noFill/>
+          <a:ln>
+            <a:noFill/>
+          </a:ln>
+        </p:spPr>
+        <p:style>
+          <a:lnRef idx="2">
+            <a:schemeClr val="accent6"/>
+          </a:lnRef>
+          <a:fillRef idx="1">
+            <a:schemeClr val="lt1"/>
+          </a:fillRef>
+          <a:effectRef idx="0">
+            <a:schemeClr val="accent6"/>
+          </a:effectRef>
+          <a:fontRef idx="minor">
+            <a:schemeClr val="dk1"/>
+          </a:fontRef>
+        </p:style>
+        <p:txBody>
+          <a:bodyPr rtlCol="0" anchor="ctr"/>
+          <a:lstStyle/>
+          <a:p>
+            <a:r>
+              <a:rPr lang="en-US" sz="1400" dirty="0"/>
+              <a:t>P</a:t>
+            </a:r>
+            <a:r>
+              <a:rPr lang="en-MY" sz="1400" dirty="0"/>
+              <a:t>ROJECT 	: A1706</a:t>
+            </a:r>
+          </a:p>
+          <a:p>
+            <a:r>
+              <a:rPr lang="en-MY" sz="1400" dirty="0"/>
+              <a:t>CUSTOMER 	: OILTEK</a:t>
+            </a:r>
+          </a:p>
+          <a:p>
+            <a:r>
+              <a:rPr lang="en-MY" sz="1400" dirty="0"/>
+              <a:t>FORMAT DATASET TO LOAD</a:t>
+            </a:r>
+          </a:p>
+        </p:txBody>
+      </p:sp>
+      <p:sp>
+        <p:nvSpPr>
+          <p:cNvPr id="7" name="TextBox 6">
+            <a:extLst>
+              <a:ext uri="{FF2B5EF4-FFF2-40B4-BE49-F238E27FC236}">
+                <a16:creationId xmlns:a16="http://schemas.microsoft.com/office/drawing/2014/main" id="{F21A24C2-F84D-BA8F-3749-5EF19C48A0AF}"/>
+              </a:ext>
+            </a:extLst>
+          </p:cNvPr>
+          <p:cNvSpPr txBox="1"/>
+          <p:nvPr/>
+        </p:nvSpPr>
+        <p:spPr>
+          <a:xfrm>
+            <a:off x="295275" y="6446936"/>
+            <a:ext cx="7924800" cy="276999"/>
+          </a:xfrm>
+          <a:prstGeom prst="rect">
+            <a:avLst/>
+          </a:prstGeom>
+          <a:noFill/>
+        </p:spPr>
+        <p:txBody>
+          <a:bodyPr wrap="square">
+            <a:spAutoFit/>
+          </a:bodyPr>
+          <a:lstStyle/>
+          <a:p>
+            <a:r>
+              <a:rPr lang="en-MY" sz="1200" dirty="0" err="1"/>
+              <a:t>Filepath</a:t>
+            </a:r>
+            <a:r>
+              <a:rPr lang="en-MY" sz="1200" dirty="0"/>
+              <a:t>  : "C:\Users\sitisyaziyah\Documents\Device_Identifier\Dummy data\</a:t>
+            </a:r>
+            <a:r>
+              <a:rPr lang="en-MY" sz="1200" dirty="0" err="1"/>
+              <a:t>Oiltek</a:t>
+            </a:r>
+            <a:r>
+              <a:rPr lang="en-MY" sz="1200" dirty="0"/>
+              <a:t> - structured data.xlsx“ (sheet = A1076_df)</a:t>
+            </a:r>
+          </a:p>
+        </p:txBody>
+      </p:sp>
+    </p:spTree>
+    <p:extLst>
+      <p:ext uri="{BB962C8B-B14F-4D97-AF65-F5344CB8AC3E}">
+        <p14:creationId xmlns:p14="http://schemas.microsoft.com/office/powerpoint/2010/main" val="3597209293"/>
+      </p:ext>
+    </p:extLst>
+  </p:cSld>
+  <p:clrMapOvr>
+    <a:masterClrMapping/>
+  </p:clrMapOvr>
+</p:sld>
+</file>
+
+<file path=ppt/slides/slide18.xml><?xml version="1.0" encoding="utf-8"?>
+<p:sld xmlns:a="http://schemas.openxmlformats.org/drawingml/2006/main" xmlns:r="http://schemas.openxmlformats.org/officeDocument/2006/relationships" xmlns:p="http://schemas.openxmlformats.org/presentationml/2006/main" showMasterSp="0">
+  <p:cSld>
+    <p:bg>
+      <p:bgPr>
+        <a:solidFill>
+          <a:srgbClr val="CDF6F9"/>
+        </a:solidFill>
+        <a:effectLst/>
+      </p:bgPr>
+    </p:bg>
+    <p:spTree>
+      <p:nvGrpSpPr>
+        <p:cNvPr id="1" name="">
+          <a:extLst>
+            <a:ext uri="{FF2B5EF4-FFF2-40B4-BE49-F238E27FC236}">
+              <a16:creationId xmlns:a16="http://schemas.microsoft.com/office/drawing/2014/main" id="{496294E8-DB96-89DD-76FD-F0FEDF6D616B}"/>
+            </a:ext>
+          </a:extLst>
+        </p:cNvPr>
+        <p:cNvGrpSpPr/>
+        <p:nvPr/>
+      </p:nvGrpSpPr>
+      <p:grpSpPr>
+        <a:xfrm>
+          <a:off x="0" y="0"/>
+          <a:ext cx="0" cy="0"/>
+          <a:chOff x="0" y="0"/>
+          <a:chExt cx="0" cy="0"/>
+        </a:xfrm>
+      </p:grpSpPr>
+      <p:sp>
+        <p:nvSpPr>
+          <p:cNvPr id="5" name="Rectangle 4">
+            <a:extLst>
+              <a:ext uri="{FF2B5EF4-FFF2-40B4-BE49-F238E27FC236}">
+                <a16:creationId xmlns:a16="http://schemas.microsoft.com/office/drawing/2014/main" id="{65CA863E-898B-B444-42D6-372454A7A07A}"/>
+              </a:ext>
+            </a:extLst>
+          </p:cNvPr>
+          <p:cNvSpPr/>
+          <p:nvPr/>
+        </p:nvSpPr>
+        <p:spPr>
+          <a:xfrm>
+            <a:off x="3861306" y="134065"/>
+            <a:ext cx="5235070" cy="389810"/>
+          </a:xfrm>
+          <a:prstGeom prst="rect">
+            <a:avLst/>
+          </a:prstGeom>
+          <a:noFill/>
+          <a:ln>
+            <a:noFill/>
+          </a:ln>
+        </p:spPr>
+        <p:style>
+          <a:lnRef idx="2">
+            <a:schemeClr val="accent6"/>
+          </a:lnRef>
+          <a:fillRef idx="1">
+            <a:schemeClr val="lt1"/>
+          </a:fillRef>
+          <a:effectRef idx="0">
+            <a:schemeClr val="accent6"/>
+          </a:effectRef>
+          <a:fontRef idx="minor">
+            <a:schemeClr val="dk1"/>
+          </a:fontRef>
+        </p:style>
+        <p:txBody>
+          <a:bodyPr rtlCol="0" anchor="ctr"/>
+          <a:lstStyle/>
+          <a:p>
+            <a:pPr algn="ctr"/>
+            <a:r>
+              <a:rPr lang="en-MY" sz="1400" dirty="0"/>
+              <a:t>CUSTOMER : UGS  </a:t>
+            </a:r>
+            <a:r>
+              <a:rPr lang="en-US" sz="1400" dirty="0"/>
+              <a:t>P</a:t>
+            </a:r>
+            <a:r>
+              <a:rPr lang="en-MY" sz="1400" dirty="0"/>
+              <a:t>ROJECT: A1887 TOTAL DEVICE : 286</a:t>
+            </a:r>
+          </a:p>
+        </p:txBody>
+      </p:sp>
+      <p:sp>
+        <p:nvSpPr>
+          <p:cNvPr id="10" name="TextBox 9">
+            <a:extLst>
+              <a:ext uri="{FF2B5EF4-FFF2-40B4-BE49-F238E27FC236}">
+                <a16:creationId xmlns:a16="http://schemas.microsoft.com/office/drawing/2014/main" id="{E6238E74-41BE-EAF8-7443-9CB7F70C1DEC}"/>
+              </a:ext>
+            </a:extLst>
+          </p:cNvPr>
+          <p:cNvSpPr txBox="1"/>
+          <p:nvPr/>
+        </p:nvSpPr>
+        <p:spPr>
+          <a:xfrm>
+            <a:off x="95250" y="6593130"/>
+            <a:ext cx="7924800" cy="261610"/>
+          </a:xfrm>
+          <a:prstGeom prst="rect">
+            <a:avLst/>
+          </a:prstGeom>
+          <a:noFill/>
+        </p:spPr>
+        <p:txBody>
+          <a:bodyPr wrap="square">
+            <a:spAutoFit/>
+          </a:bodyPr>
+          <a:lstStyle/>
+          <a:p>
+            <a:r>
+              <a:rPr lang="en-MY" sz="1050" dirty="0" err="1"/>
+              <a:t>Filepath</a:t>
+            </a:r>
+            <a:r>
+              <a:rPr lang="en-MY" sz="1050" dirty="0"/>
+              <a:t>  : "C:\Users\sitisyaziyah\Documents\Device_Identifier\Dummy data\UGS - structured data.xlsx“ (sheet = A1887-S2)</a:t>
+            </a:r>
+          </a:p>
+        </p:txBody>
+      </p:sp>
+      <p:pic>
+        <p:nvPicPr>
+          <p:cNvPr id="3" name="Picture 2">
+            <a:extLst>
+              <a:ext uri="{FF2B5EF4-FFF2-40B4-BE49-F238E27FC236}">
+                <a16:creationId xmlns:a16="http://schemas.microsoft.com/office/drawing/2014/main" id="{26DED758-7E45-8B88-A1CE-96FED269D5C0}"/>
+              </a:ext>
+            </a:extLst>
+          </p:cNvPr>
+          <p:cNvPicPr>
+            <a:picLocks noChangeAspect="1"/>
+          </p:cNvPicPr>
+          <p:nvPr/>
+        </p:nvPicPr>
+        <p:blipFill>
+          <a:blip r:embed="rId3"/>
+          <a:stretch>
+            <a:fillRect/>
+          </a:stretch>
+        </p:blipFill>
+        <p:spPr>
+          <a:xfrm>
+            <a:off x="2081358" y="500715"/>
+            <a:ext cx="8794965" cy="6092415"/>
+          </a:xfrm>
+          <a:prstGeom prst="rect">
+            <a:avLst/>
+          </a:prstGeom>
+        </p:spPr>
+      </p:pic>
+      <p:sp>
+        <p:nvSpPr>
+          <p:cNvPr id="2" name="TextBox 1">
+            <a:extLst>
+              <a:ext uri="{FF2B5EF4-FFF2-40B4-BE49-F238E27FC236}">
+                <a16:creationId xmlns:a16="http://schemas.microsoft.com/office/drawing/2014/main" id="{CF6F83BE-392E-BF69-95E6-E186F278EF24}"/>
+              </a:ext>
+            </a:extLst>
+          </p:cNvPr>
+          <p:cNvSpPr txBox="1"/>
+          <p:nvPr/>
+        </p:nvSpPr>
+        <p:spPr>
+          <a:xfrm>
+            <a:off x="261702" y="500715"/>
+            <a:ext cx="1819656" cy="1200329"/>
+          </a:xfrm>
+          <a:prstGeom prst="rect">
+            <a:avLst/>
+          </a:prstGeom>
+          <a:noFill/>
+        </p:spPr>
+        <p:txBody>
+          <a:bodyPr wrap="square" rtlCol="0">
+            <a:spAutoFit/>
+          </a:bodyPr>
+          <a:lstStyle/>
+          <a:p>
+            <a:r>
+              <a:rPr lang="en-MY" dirty="0">
+                <a:solidFill>
+                  <a:srgbClr val="FF0000"/>
+                </a:solidFill>
+              </a:rPr>
+              <a:t>Note 16/4/2026</a:t>
+            </a:r>
+          </a:p>
+          <a:p>
+            <a:r>
+              <a:rPr lang="en-MY" dirty="0">
+                <a:solidFill>
+                  <a:srgbClr val="FF0000"/>
+                </a:solidFill>
+              </a:rPr>
+              <a:t>DROPOUT OILTEK_A1827</a:t>
+            </a:r>
+          </a:p>
+          <a:p>
+            <a:r>
+              <a:rPr lang="en-MY" dirty="0">
+                <a:solidFill>
+                  <a:srgbClr val="FF0000"/>
+                </a:solidFill>
+              </a:rPr>
+              <a:t>UGS_A1887</a:t>
+            </a:r>
+          </a:p>
+        </p:txBody>
+      </p:sp>
+    </p:spTree>
+    <p:extLst>
+      <p:ext uri="{BB962C8B-B14F-4D97-AF65-F5344CB8AC3E}">
+        <p14:creationId xmlns:p14="http://schemas.microsoft.com/office/powerpoint/2010/main" val="1691097330"/>
+      </p:ext>
+    </p:extLst>
+  </p:cSld>
+  <p:clrMapOvr>
+    <a:masterClrMapping/>
+  </p:clrMapOvr>
+</p:sld>
+</file>
+
+<file path=ppt/slides/slide2.xml><?xml version="1.0" encoding="utf-8"?>
+<p:sld xmlns:a="http://schemas.openxmlformats.org/drawingml/2006/main" xmlns:r="http://schemas.openxmlformats.org/officeDocument/2006/relationships" xmlns:p="http://schemas.openxmlformats.org/presentationml/2006/main" showMasterSp="0">
+  <p:cSld>
+    <p:bg>
+      <p:bgPr>
+        <a:solidFill>
+          <a:schemeClr val="bg1"/>
+        </a:solidFill>
+        <a:effectLst/>
+      </p:bgPr>
+    </p:bg>
+    <p:spTree>
+      <p:nvGrpSpPr>
+        <p:cNvPr id="1" name="">
+          <a:extLst>
+            <a:ext uri="{FF2B5EF4-FFF2-40B4-BE49-F238E27FC236}">
+              <a16:creationId xmlns:a16="http://schemas.microsoft.com/office/drawing/2014/main" id="{5ACDE19C-F5BD-B912-3E54-53724452BF82}"/>
+            </a:ext>
+          </a:extLst>
+        </p:cNvPr>
+        <p:cNvGrpSpPr/>
+        <p:nvPr/>
+      </p:nvGrpSpPr>
+      <p:grpSpPr>
+        <a:xfrm>
+          <a:off x="0" y="0"/>
+          <a:ext cx="0" cy="0"/>
+          <a:chOff x="0" y="0"/>
+          <a:chExt cx="0" cy="0"/>
+        </a:xfrm>
+      </p:grpSpPr>
+      <p:sp>
+        <p:nvSpPr>
+          <p:cNvPr id="4" name="Rectangle 3">
+            <a:extLst>
+              <a:ext uri="{FF2B5EF4-FFF2-40B4-BE49-F238E27FC236}">
+                <a16:creationId xmlns:a16="http://schemas.microsoft.com/office/drawing/2014/main" id="{1DDB410C-EA40-6A78-6A16-2CEC8DDAB8CC}"/>
+              </a:ext>
+            </a:extLst>
+          </p:cNvPr>
+          <p:cNvSpPr/>
+          <p:nvPr/>
+        </p:nvSpPr>
+        <p:spPr>
+          <a:xfrm>
+            <a:off x="7555894" y="235052"/>
+            <a:ext cx="2379453" cy="623006"/>
+          </a:xfrm>
+          <a:prstGeom prst="rect">
+            <a:avLst/>
+          </a:prstGeom>
+          <a:ln>
+            <a:solidFill>
+              <a:schemeClr val="tx1"/>
+            </a:solidFill>
+          </a:ln>
+        </p:spPr>
+        <p:style>
+          <a:lnRef idx="2">
+            <a:schemeClr val="accent6"/>
+          </a:lnRef>
+          <a:fillRef idx="1">
+            <a:schemeClr val="lt1"/>
+          </a:fillRef>
+          <a:effectRef idx="0">
+            <a:schemeClr val="accent6"/>
+          </a:effectRef>
+          <a:fontRef idx="minor">
+            <a:schemeClr val="dk1"/>
+          </a:fontRef>
+        </p:style>
+        <p:txBody>
+          <a:bodyPr rtlCol="0" anchor="ctr"/>
+          <a:lstStyle/>
+          <a:p>
+            <a:pPr algn="ctr">
+              <a:lnSpc>
+                <a:spcPts val="1400"/>
+              </a:lnSpc>
+            </a:pPr>
+            <a:r>
+              <a:rPr lang="en-MY" sz="1200" b="1" dirty="0">
+                <a:latin typeface="Arial" panose="020B0604020202020204" pitchFamily="34" charset="0"/>
+                <a:cs typeface="Arial" panose="020B0604020202020204" pitchFamily="34" charset="0"/>
+              </a:rPr>
+              <a:t>INPUT</a:t>
+            </a:r>
+          </a:p>
+          <a:p>
+            <a:pPr algn="ctr">
+              <a:lnSpc>
+                <a:spcPts val="1400"/>
+              </a:lnSpc>
+            </a:pPr>
+            <a:r>
+              <a:rPr lang="en-MY" sz="1200" dirty="0">
+                <a:latin typeface="Arial" panose="020B0604020202020204" pitchFamily="34" charset="0"/>
+                <a:cs typeface="Arial" panose="020B0604020202020204" pitchFamily="34" charset="0"/>
+              </a:rPr>
+              <a:t>(Customer, Project, Device ID</a:t>
+            </a:r>
+            <a:r>
+              <a:rPr lang="en-MY" sz="1200" b="1" dirty="0">
+                <a:latin typeface="Arial" panose="020B0604020202020204" pitchFamily="34" charset="0"/>
+                <a:cs typeface="Arial" panose="020B0604020202020204" pitchFamily="34" charset="0"/>
+              </a:rPr>
+              <a:t>)</a:t>
+            </a:r>
+          </a:p>
+        </p:txBody>
+      </p:sp>
+      <p:sp>
+        <p:nvSpPr>
+          <p:cNvPr id="11" name="Rectangle 10">
+            <a:extLst>
+              <a:ext uri="{FF2B5EF4-FFF2-40B4-BE49-F238E27FC236}">
+                <a16:creationId xmlns:a16="http://schemas.microsoft.com/office/drawing/2014/main" id="{A0F783AE-E4BB-7E7F-7041-A46A51505740}"/>
+              </a:ext>
+            </a:extLst>
+          </p:cNvPr>
+          <p:cNvSpPr/>
+          <p:nvPr/>
+        </p:nvSpPr>
+        <p:spPr>
+          <a:xfrm>
+            <a:off x="7012337" y="4244120"/>
+            <a:ext cx="3475552" cy="597506"/>
+          </a:xfrm>
+          <a:prstGeom prst="rect">
+            <a:avLst/>
+          </a:prstGeom>
+          <a:ln>
+            <a:solidFill>
+              <a:schemeClr val="tx1"/>
+            </a:solidFill>
+          </a:ln>
+        </p:spPr>
+        <p:style>
+          <a:lnRef idx="2">
+            <a:schemeClr val="accent6"/>
+          </a:lnRef>
+          <a:fillRef idx="1">
+            <a:schemeClr val="lt1"/>
+          </a:fillRef>
+          <a:effectRef idx="0">
+            <a:schemeClr val="accent6"/>
+          </a:effectRef>
+          <a:fontRef idx="minor">
+            <a:schemeClr val="dk1"/>
+          </a:fontRef>
+        </p:style>
+        <p:txBody>
+          <a:bodyPr rtlCol="0" anchor="ctr"/>
+          <a:lstStyle/>
+          <a:p>
+            <a:pPr algn="ctr"/>
+            <a:r>
+              <a:rPr lang="en-MY" sz="1200" b="1" dirty="0">
+                <a:latin typeface="Arial" panose="020B0604020202020204" pitchFamily="34" charset="0"/>
+                <a:cs typeface="Arial" panose="020B0604020202020204" pitchFamily="34" charset="0"/>
+              </a:rPr>
+              <a:t>RESULT OUTPUT</a:t>
+            </a:r>
+          </a:p>
+          <a:p>
+            <a:pPr algn="ctr"/>
+            <a:r>
+              <a:rPr lang="en-MY" sz="1200" dirty="0">
+                <a:latin typeface="Arial" panose="020B0604020202020204" pitchFamily="34" charset="0"/>
+                <a:cs typeface="Arial" panose="020B0604020202020204" pitchFamily="34" charset="0"/>
+              </a:rPr>
+              <a:t>(Customer, Project, Device ID,  Section, Cluster)</a:t>
+            </a:r>
+          </a:p>
+        </p:txBody>
+      </p:sp>
+      <p:sp>
+        <p:nvSpPr>
+          <p:cNvPr id="13" name="Rectangle 12">
+            <a:extLst>
+              <a:ext uri="{FF2B5EF4-FFF2-40B4-BE49-F238E27FC236}">
+                <a16:creationId xmlns:a16="http://schemas.microsoft.com/office/drawing/2014/main" id="{467A7917-7751-58A4-D13B-2017E2CC3231}"/>
+              </a:ext>
+            </a:extLst>
+          </p:cNvPr>
+          <p:cNvSpPr/>
+          <p:nvPr/>
+        </p:nvSpPr>
+        <p:spPr>
+          <a:xfrm>
+            <a:off x="4365" y="318300"/>
+            <a:ext cx="2312411" cy="368381"/>
+          </a:xfrm>
+          <a:prstGeom prst="rect">
+            <a:avLst/>
+          </a:prstGeom>
+          <a:noFill/>
+          <a:ln>
+            <a:noFill/>
+          </a:ln>
+        </p:spPr>
+        <p:style>
+          <a:lnRef idx="2">
+            <a:schemeClr val="accent6"/>
+          </a:lnRef>
+          <a:fillRef idx="1">
+            <a:schemeClr val="lt1"/>
+          </a:fillRef>
+          <a:effectRef idx="0">
+            <a:schemeClr val="accent6"/>
+          </a:effectRef>
+          <a:fontRef idx="minor">
+            <a:schemeClr val="dk1"/>
+          </a:fontRef>
+        </p:style>
+        <p:txBody>
+          <a:bodyPr rtlCol="0" anchor="ctr"/>
+          <a:lstStyle/>
+          <a:p>
+            <a:pPr algn="ctr"/>
+            <a:r>
+              <a:rPr lang="en-MY" sz="1400" dirty="0"/>
+              <a:t>UPDATE ON (16.04.2026)</a:t>
+            </a:r>
+          </a:p>
+        </p:txBody>
+      </p:sp>
+      <p:sp>
+        <p:nvSpPr>
+          <p:cNvPr id="3" name="Rectangle 2">
+            <a:extLst>
+              <a:ext uri="{FF2B5EF4-FFF2-40B4-BE49-F238E27FC236}">
+                <a16:creationId xmlns:a16="http://schemas.microsoft.com/office/drawing/2014/main" id="{DB4ADA14-556C-C309-8718-D47DA0A7B155}"/>
+              </a:ext>
+            </a:extLst>
+          </p:cNvPr>
+          <p:cNvSpPr/>
+          <p:nvPr/>
+        </p:nvSpPr>
+        <p:spPr>
+          <a:xfrm>
+            <a:off x="2627196" y="3465462"/>
+            <a:ext cx="2240611" cy="478898"/>
+          </a:xfrm>
+          <a:prstGeom prst="rect">
+            <a:avLst/>
+          </a:prstGeom>
+          <a:ln>
+            <a:solidFill>
+              <a:schemeClr val="tx1"/>
+            </a:solidFill>
+          </a:ln>
+        </p:spPr>
+        <p:style>
+          <a:lnRef idx="2">
+            <a:schemeClr val="accent6"/>
+          </a:lnRef>
+          <a:fillRef idx="1">
+            <a:schemeClr val="lt1"/>
+          </a:fillRef>
+          <a:effectRef idx="0">
+            <a:schemeClr val="accent6"/>
+          </a:effectRef>
+          <a:fontRef idx="minor">
+            <a:schemeClr val="dk1"/>
+          </a:fontRef>
+        </p:style>
+        <p:txBody>
+          <a:bodyPr rtlCol="0" anchor="ctr"/>
+          <a:lstStyle/>
+          <a:p>
+            <a:pPr algn="ctr"/>
+            <a:r>
+              <a:rPr lang="en-MY" sz="1200" b="1" dirty="0">
+                <a:solidFill>
+                  <a:srgbClr val="FF0000"/>
+                </a:solidFill>
+                <a:latin typeface="Arial" panose="020B0604020202020204" pitchFamily="34" charset="0"/>
+                <a:cs typeface="Arial" panose="020B0604020202020204" pitchFamily="34" charset="0"/>
+              </a:rPr>
+              <a:t>UNKNOWN</a:t>
+            </a:r>
+          </a:p>
+          <a:p>
+            <a:pPr algn="ctr"/>
+            <a:r>
+              <a:rPr lang="en-MY" sz="1200" dirty="0">
+                <a:latin typeface="Arial" panose="020B0604020202020204" pitchFamily="34" charset="0"/>
+                <a:cs typeface="Arial" panose="020B0604020202020204" pitchFamily="34" charset="0"/>
+              </a:rPr>
+              <a:t>= Assign by User</a:t>
+            </a:r>
+          </a:p>
+        </p:txBody>
+      </p:sp>
+      <p:sp>
+        <p:nvSpPr>
+          <p:cNvPr id="15" name="Rectangle 14">
+            <a:extLst>
+              <a:ext uri="{FF2B5EF4-FFF2-40B4-BE49-F238E27FC236}">
+                <a16:creationId xmlns:a16="http://schemas.microsoft.com/office/drawing/2014/main" id="{C961EBCC-E49B-C93D-F2D2-210F5633FD72}"/>
+              </a:ext>
+            </a:extLst>
+          </p:cNvPr>
+          <p:cNvSpPr/>
+          <p:nvPr/>
+        </p:nvSpPr>
+        <p:spPr>
+          <a:xfrm>
+            <a:off x="2627194" y="2541670"/>
+            <a:ext cx="2240613" cy="338527"/>
+          </a:xfrm>
+          <a:prstGeom prst="rect">
+            <a:avLst/>
+          </a:prstGeom>
+          <a:ln>
+            <a:solidFill>
+              <a:schemeClr val="tx1"/>
+            </a:solidFill>
+          </a:ln>
+        </p:spPr>
+        <p:style>
+          <a:lnRef idx="2">
+            <a:schemeClr val="accent6"/>
+          </a:lnRef>
+          <a:fillRef idx="1">
+            <a:schemeClr val="lt1"/>
+          </a:fillRef>
+          <a:effectRef idx="0">
+            <a:schemeClr val="accent6"/>
+          </a:effectRef>
+          <a:fontRef idx="minor">
+            <a:schemeClr val="dk1"/>
+          </a:fontRef>
+        </p:style>
+        <p:txBody>
+          <a:bodyPr rtlCol="0" anchor="ctr"/>
+          <a:lstStyle/>
+          <a:p>
+            <a:pPr algn="ctr"/>
+            <a:r>
+              <a:rPr lang="en-MY" sz="1200" dirty="0">
+                <a:latin typeface="Arial" panose="020B0604020202020204" pitchFamily="34" charset="0"/>
+                <a:cs typeface="Arial" panose="020B0604020202020204" pitchFamily="34" charset="0"/>
+              </a:rPr>
+              <a:t>NEW LIST OF EQUIPMENT</a:t>
+            </a:r>
+          </a:p>
+        </p:txBody>
+      </p:sp>
+      <p:sp>
+        <p:nvSpPr>
+          <p:cNvPr id="33" name="Rectangle 32">
+            <a:extLst>
+              <a:ext uri="{FF2B5EF4-FFF2-40B4-BE49-F238E27FC236}">
+                <a16:creationId xmlns:a16="http://schemas.microsoft.com/office/drawing/2014/main" id="{C45C02FA-690D-C3CB-2191-C15372D0FC28}"/>
+              </a:ext>
+            </a:extLst>
+          </p:cNvPr>
+          <p:cNvSpPr/>
+          <p:nvPr/>
+        </p:nvSpPr>
+        <p:spPr>
+          <a:xfrm>
+            <a:off x="7214203" y="1909007"/>
+            <a:ext cx="3076565" cy="1795904"/>
+          </a:xfrm>
+          <a:prstGeom prst="rect">
+            <a:avLst/>
+          </a:prstGeom>
+          <a:solidFill>
+            <a:schemeClr val="bg1"/>
+          </a:solidFill>
+          <a:ln w="12700">
+            <a:solidFill>
+              <a:schemeClr val="tx1"/>
+            </a:solidFill>
+          </a:ln>
+        </p:spPr>
+        <p:style>
+          <a:lnRef idx="2">
+            <a:schemeClr val="accent6"/>
+          </a:lnRef>
+          <a:fillRef idx="1">
+            <a:schemeClr val="lt1"/>
+          </a:fillRef>
+          <a:effectRef idx="0">
+            <a:schemeClr val="accent6"/>
+          </a:effectRef>
+          <a:fontRef idx="minor">
+            <a:schemeClr val="dk1"/>
+          </a:fontRef>
+        </p:style>
+        <p:txBody>
+          <a:bodyPr rtlCol="0" anchor="ctr"/>
+          <a:lstStyle/>
+          <a:p>
+            <a:pPr algn="ctr"/>
+            <a:endParaRPr lang="en-MY" sz="1600" b="1" dirty="0"/>
+          </a:p>
+        </p:txBody>
+      </p:sp>
+      <p:cxnSp>
+        <p:nvCxnSpPr>
+          <p:cNvPr id="86" name="Straight Arrow Connector 85">
+            <a:extLst>
+              <a:ext uri="{FF2B5EF4-FFF2-40B4-BE49-F238E27FC236}">
+                <a16:creationId xmlns:a16="http://schemas.microsoft.com/office/drawing/2014/main" id="{62DE82C8-536C-FB4F-0DF1-B2B400ED795F}"/>
+              </a:ext>
+            </a:extLst>
+          </p:cNvPr>
+          <p:cNvCxnSpPr>
+            <a:cxnSpLocks/>
+            <a:stCxn id="15" idx="3"/>
+            <a:endCxn id="48" idx="1"/>
+          </p:cNvCxnSpPr>
+          <p:nvPr/>
+        </p:nvCxnSpPr>
+        <p:spPr>
+          <a:xfrm flipV="1">
+            <a:off x="4867807" y="1846624"/>
+            <a:ext cx="2352143" cy="864310"/>
+          </a:xfrm>
+          <a:prstGeom prst="straightConnector1">
+            <a:avLst/>
+          </a:prstGeom>
+          <a:ln w="57150">
+            <a:solidFill>
+              <a:schemeClr val="accent1">
+                <a:lumMod val="75000"/>
+              </a:schemeClr>
+            </a:solidFill>
+            <a:tailEnd type="triangle"/>
+          </a:ln>
+        </p:spPr>
+        <p:style>
+          <a:lnRef idx="1">
+            <a:schemeClr val="accent1"/>
+          </a:lnRef>
+          <a:fillRef idx="0">
+            <a:schemeClr val="accent1"/>
+          </a:fillRef>
+          <a:effectRef idx="0">
+            <a:schemeClr val="accent1"/>
+          </a:effectRef>
+          <a:fontRef idx="minor">
+            <a:schemeClr val="tx1"/>
+          </a:fontRef>
+        </p:style>
+      </p:cxnSp>
+      <p:cxnSp>
+        <p:nvCxnSpPr>
+          <p:cNvPr id="20" name="Straight Arrow Connector 19">
+            <a:extLst>
+              <a:ext uri="{FF2B5EF4-FFF2-40B4-BE49-F238E27FC236}">
+                <a16:creationId xmlns:a16="http://schemas.microsoft.com/office/drawing/2014/main" id="{B6F19441-888D-F983-EB9B-43F03913D145}"/>
+              </a:ext>
+            </a:extLst>
+          </p:cNvPr>
+          <p:cNvCxnSpPr>
+            <a:cxnSpLocks/>
+            <a:stCxn id="33" idx="2"/>
+            <a:endCxn id="11" idx="0"/>
+          </p:cNvCxnSpPr>
+          <p:nvPr/>
+        </p:nvCxnSpPr>
+        <p:spPr>
+          <a:xfrm flipH="1">
+            <a:off x="8750113" y="3704911"/>
+            <a:ext cx="2373" cy="539209"/>
+          </a:xfrm>
+          <a:prstGeom prst="straightConnector1">
+            <a:avLst/>
+          </a:prstGeom>
+          <a:ln w="57150">
+            <a:solidFill>
+              <a:schemeClr val="accent1">
+                <a:lumMod val="75000"/>
+              </a:schemeClr>
+            </a:solidFill>
+            <a:tailEnd type="triangle"/>
+          </a:ln>
+        </p:spPr>
+        <p:style>
+          <a:lnRef idx="1">
+            <a:schemeClr val="accent1"/>
+          </a:lnRef>
+          <a:fillRef idx="0">
+            <a:schemeClr val="accent1"/>
+          </a:fillRef>
+          <a:effectRef idx="0">
+            <a:schemeClr val="accent1"/>
+          </a:effectRef>
+          <a:fontRef idx="minor">
+            <a:schemeClr val="tx1"/>
+          </a:fontRef>
+        </p:style>
+      </p:cxnSp>
+      <p:sp>
+        <p:nvSpPr>
+          <p:cNvPr id="104" name="Rectangle 103">
+            <a:extLst>
+              <a:ext uri="{FF2B5EF4-FFF2-40B4-BE49-F238E27FC236}">
+                <a16:creationId xmlns:a16="http://schemas.microsoft.com/office/drawing/2014/main" id="{E50DA2D7-5321-C782-AAA8-70008D5D8EB0}"/>
+              </a:ext>
+            </a:extLst>
+          </p:cNvPr>
+          <p:cNvSpPr/>
+          <p:nvPr/>
+        </p:nvSpPr>
+        <p:spPr>
+          <a:xfrm>
+            <a:off x="8279967" y="2315001"/>
+            <a:ext cx="1049965" cy="267977"/>
+          </a:xfrm>
+          <a:prstGeom prst="rect">
+            <a:avLst/>
+          </a:prstGeom>
+          <a:ln w="6350">
+            <a:solidFill>
+              <a:schemeClr val="tx1"/>
+            </a:solidFill>
+          </a:ln>
+        </p:spPr>
+        <p:style>
+          <a:lnRef idx="2">
+            <a:schemeClr val="accent6"/>
+          </a:lnRef>
+          <a:fillRef idx="1">
+            <a:schemeClr val="lt1"/>
+          </a:fillRef>
+          <a:effectRef idx="0">
+            <a:schemeClr val="accent6"/>
+          </a:effectRef>
+          <a:fontRef idx="minor">
+            <a:schemeClr val="dk1"/>
+          </a:fontRef>
+        </p:style>
+        <p:txBody>
+          <a:bodyPr rtlCol="0" anchor="ctr"/>
+          <a:lstStyle/>
+          <a:p>
+            <a:pPr algn="ctr"/>
+            <a:r>
+              <a:rPr lang="en-US" sz="1200" b="1" noProof="1">
+                <a:latin typeface="Arial" panose="020B0604020202020204" pitchFamily="34" charset="0"/>
+                <a:cs typeface="Arial" panose="020B0604020202020204" pitchFamily="34" charset="0"/>
+              </a:rPr>
+              <a:t>XGBoost</a:t>
+            </a:r>
+            <a:endParaRPr lang="en-MY" sz="1100" dirty="0">
+              <a:latin typeface="Arial" panose="020B0604020202020204" pitchFamily="34" charset="0"/>
+              <a:cs typeface="Arial" panose="020B0604020202020204" pitchFamily="34" charset="0"/>
+            </a:endParaRPr>
+          </a:p>
+        </p:txBody>
+      </p:sp>
+      <p:sp>
+        <p:nvSpPr>
+          <p:cNvPr id="113" name="Rectangle 112">
+            <a:extLst>
+              <a:ext uri="{FF2B5EF4-FFF2-40B4-BE49-F238E27FC236}">
+                <a16:creationId xmlns:a16="http://schemas.microsoft.com/office/drawing/2014/main" id="{1498A5A2-DD75-04DF-0A80-6D33023126E4}"/>
+              </a:ext>
+            </a:extLst>
+          </p:cNvPr>
+          <p:cNvSpPr/>
+          <p:nvPr/>
+        </p:nvSpPr>
+        <p:spPr>
+          <a:xfrm>
+            <a:off x="8344749" y="2858630"/>
+            <a:ext cx="920400" cy="237596"/>
+          </a:xfrm>
+          <a:prstGeom prst="rect">
+            <a:avLst/>
+          </a:prstGeom>
+          <a:ln w="6350">
+            <a:solidFill>
+              <a:schemeClr val="tx1"/>
+            </a:solidFill>
+          </a:ln>
+        </p:spPr>
+        <p:style>
+          <a:lnRef idx="2">
+            <a:schemeClr val="accent6"/>
+          </a:lnRef>
+          <a:fillRef idx="1">
+            <a:schemeClr val="lt1"/>
+          </a:fillRef>
+          <a:effectRef idx="0">
+            <a:schemeClr val="accent6"/>
+          </a:effectRef>
+          <a:fontRef idx="minor">
+            <a:schemeClr val="dk1"/>
+          </a:fontRef>
+        </p:style>
+        <p:txBody>
+          <a:bodyPr rtlCol="0" anchor="ctr"/>
+          <a:lstStyle/>
+          <a:p>
+            <a:pPr algn="ctr"/>
+            <a:r>
+              <a:rPr lang="en-US" sz="1200" dirty="0">
+                <a:latin typeface="Arial" panose="020B0604020202020204" pitchFamily="34" charset="0"/>
+                <a:cs typeface="Arial" panose="020B0604020202020204" pitchFamily="34" charset="0"/>
+              </a:rPr>
+              <a:t>Cluster</a:t>
+            </a:r>
+            <a:endParaRPr lang="en-MY" sz="1600" dirty="0">
+              <a:latin typeface="Arial" panose="020B0604020202020204" pitchFamily="34" charset="0"/>
+              <a:cs typeface="Arial" panose="020B0604020202020204" pitchFamily="34" charset="0"/>
+            </a:endParaRPr>
+          </a:p>
+        </p:txBody>
+      </p:sp>
+      <p:cxnSp>
+        <p:nvCxnSpPr>
+          <p:cNvPr id="114" name="Straight Arrow Connector 113">
+            <a:extLst>
+              <a:ext uri="{FF2B5EF4-FFF2-40B4-BE49-F238E27FC236}">
+                <a16:creationId xmlns:a16="http://schemas.microsoft.com/office/drawing/2014/main" id="{0900296C-AD16-20AA-03BB-D5F941E72D3A}"/>
+              </a:ext>
+            </a:extLst>
+          </p:cNvPr>
+          <p:cNvCxnSpPr>
+            <a:cxnSpLocks/>
+            <a:stCxn id="104" idx="2"/>
+            <a:endCxn id="113" idx="0"/>
+          </p:cNvCxnSpPr>
+          <p:nvPr/>
+        </p:nvCxnSpPr>
+        <p:spPr>
+          <a:xfrm flipH="1">
+            <a:off x="8804949" y="2582978"/>
+            <a:ext cx="1" cy="275652"/>
+          </a:xfrm>
+          <a:prstGeom prst="straightConnector1">
+            <a:avLst/>
+          </a:prstGeom>
+          <a:ln>
+            <a:solidFill>
+              <a:schemeClr val="tx2"/>
+            </a:solidFill>
+            <a:tailEnd type="triangle"/>
+          </a:ln>
+        </p:spPr>
+        <p:style>
+          <a:lnRef idx="1">
+            <a:schemeClr val="accent1"/>
+          </a:lnRef>
+          <a:fillRef idx="0">
+            <a:schemeClr val="accent1"/>
+          </a:fillRef>
+          <a:effectRef idx="0">
+            <a:schemeClr val="accent1"/>
+          </a:effectRef>
+          <a:fontRef idx="minor">
+            <a:schemeClr val="tx1"/>
+          </a:fontRef>
+        </p:style>
+      </p:cxnSp>
+      <p:cxnSp>
+        <p:nvCxnSpPr>
+          <p:cNvPr id="68" name="Straight Arrow Connector 67">
+            <a:extLst>
+              <a:ext uri="{FF2B5EF4-FFF2-40B4-BE49-F238E27FC236}">
+                <a16:creationId xmlns:a16="http://schemas.microsoft.com/office/drawing/2014/main" id="{411AFC0C-CF7A-CDF2-EC1E-07215C078581}"/>
+              </a:ext>
+            </a:extLst>
+          </p:cNvPr>
+          <p:cNvCxnSpPr>
+            <a:cxnSpLocks/>
+            <a:stCxn id="11" idx="1"/>
+            <a:endCxn id="3" idx="3"/>
+          </p:cNvCxnSpPr>
+          <p:nvPr/>
+        </p:nvCxnSpPr>
+        <p:spPr>
+          <a:xfrm flipH="1" flipV="1">
+            <a:off x="4867807" y="3704911"/>
+            <a:ext cx="2144530" cy="837962"/>
+          </a:xfrm>
+          <a:prstGeom prst="straightConnector1">
+            <a:avLst/>
+          </a:prstGeom>
+          <a:ln w="57150">
+            <a:solidFill>
+              <a:schemeClr val="accent1">
+                <a:lumMod val="75000"/>
+              </a:schemeClr>
+            </a:solidFill>
+            <a:tailEnd type="triangle"/>
+          </a:ln>
+        </p:spPr>
+        <p:style>
+          <a:lnRef idx="1">
+            <a:schemeClr val="accent1"/>
+          </a:lnRef>
+          <a:fillRef idx="0">
+            <a:schemeClr val="accent1"/>
+          </a:fillRef>
+          <a:effectRef idx="0">
+            <a:schemeClr val="accent1"/>
+          </a:effectRef>
+          <a:fontRef idx="minor">
+            <a:schemeClr val="tx1"/>
+          </a:fontRef>
+        </p:style>
+      </p:cxnSp>
+      <p:sp>
+        <p:nvSpPr>
+          <p:cNvPr id="78" name="Rectangle 77">
+            <a:extLst>
+              <a:ext uri="{FF2B5EF4-FFF2-40B4-BE49-F238E27FC236}">
+                <a16:creationId xmlns:a16="http://schemas.microsoft.com/office/drawing/2014/main" id="{82450F8A-D658-9FDB-7531-BCD001B299A6}"/>
+              </a:ext>
+            </a:extLst>
+          </p:cNvPr>
+          <p:cNvSpPr/>
+          <p:nvPr/>
+        </p:nvSpPr>
+        <p:spPr>
+          <a:xfrm>
+            <a:off x="7483204" y="5312444"/>
+            <a:ext cx="2541886" cy="288020"/>
+          </a:xfrm>
+          <a:prstGeom prst="rect">
+            <a:avLst/>
+          </a:prstGeom>
+          <a:ln>
+            <a:solidFill>
+              <a:schemeClr val="tx1"/>
+            </a:solidFill>
+          </a:ln>
+        </p:spPr>
+        <p:style>
+          <a:lnRef idx="2">
+            <a:schemeClr val="accent6"/>
+          </a:lnRef>
+          <a:fillRef idx="1">
+            <a:schemeClr val="lt1"/>
+          </a:fillRef>
+          <a:effectRef idx="0">
+            <a:schemeClr val="accent6"/>
+          </a:effectRef>
+          <a:fontRef idx="minor">
+            <a:schemeClr val="dk1"/>
+          </a:fontRef>
+        </p:style>
+        <p:txBody>
+          <a:bodyPr rtlCol="0" anchor="ctr"/>
+          <a:lstStyle/>
+          <a:p>
+            <a:pPr algn="ctr"/>
+            <a:r>
+              <a:rPr lang="en-US" sz="1600" dirty="0"/>
+              <a:t>UPDATE &amp; SAVE MODEL</a:t>
+            </a:r>
+            <a:endParaRPr lang="en-MY" sz="1600" dirty="0"/>
+          </a:p>
+        </p:txBody>
+      </p:sp>
+      <p:cxnSp>
+        <p:nvCxnSpPr>
+          <p:cNvPr id="79" name="Straight Arrow Connector 78">
+            <a:extLst>
+              <a:ext uri="{FF2B5EF4-FFF2-40B4-BE49-F238E27FC236}">
+                <a16:creationId xmlns:a16="http://schemas.microsoft.com/office/drawing/2014/main" id="{47316FE7-4B6A-51D9-845B-5E9B0697049A}"/>
+              </a:ext>
+            </a:extLst>
+          </p:cNvPr>
+          <p:cNvCxnSpPr>
+            <a:cxnSpLocks/>
+            <a:stCxn id="11" idx="2"/>
+            <a:endCxn id="78" idx="0"/>
+          </p:cNvCxnSpPr>
+          <p:nvPr/>
+        </p:nvCxnSpPr>
+        <p:spPr>
+          <a:xfrm>
+            <a:off x="8750113" y="4841626"/>
+            <a:ext cx="4034" cy="470818"/>
+          </a:xfrm>
+          <a:prstGeom prst="straightConnector1">
+            <a:avLst/>
+          </a:prstGeom>
+          <a:ln w="57150">
+            <a:solidFill>
+              <a:schemeClr val="accent1">
+                <a:lumMod val="75000"/>
+              </a:schemeClr>
+            </a:solidFill>
+            <a:tailEnd type="triangle"/>
+          </a:ln>
+        </p:spPr>
+        <p:style>
+          <a:lnRef idx="1">
+            <a:schemeClr val="accent1"/>
+          </a:lnRef>
+          <a:fillRef idx="0">
+            <a:schemeClr val="accent1"/>
+          </a:fillRef>
+          <a:effectRef idx="0">
+            <a:schemeClr val="accent1"/>
+          </a:effectRef>
+          <a:fontRef idx="minor">
+            <a:schemeClr val="tx1"/>
+          </a:fontRef>
+        </p:style>
+      </p:cxnSp>
+      <p:cxnSp>
+        <p:nvCxnSpPr>
+          <p:cNvPr id="87" name="Straight Arrow Connector 86">
+            <a:extLst>
+              <a:ext uri="{FF2B5EF4-FFF2-40B4-BE49-F238E27FC236}">
+                <a16:creationId xmlns:a16="http://schemas.microsoft.com/office/drawing/2014/main" id="{C3DC5C35-9205-120B-F8B2-E5B5DF7F3564}"/>
+              </a:ext>
+            </a:extLst>
+          </p:cNvPr>
+          <p:cNvCxnSpPr>
+            <a:cxnSpLocks/>
+            <a:stCxn id="3" idx="0"/>
+            <a:endCxn id="15" idx="2"/>
+          </p:cNvCxnSpPr>
+          <p:nvPr/>
+        </p:nvCxnSpPr>
+        <p:spPr>
+          <a:xfrm flipH="1" flipV="1">
+            <a:off x="3747501" y="2880197"/>
+            <a:ext cx="1" cy="585265"/>
+          </a:xfrm>
+          <a:prstGeom prst="straightConnector1">
+            <a:avLst/>
+          </a:prstGeom>
+          <a:ln w="57150">
+            <a:solidFill>
+              <a:schemeClr val="accent1">
+                <a:lumMod val="75000"/>
+              </a:schemeClr>
+            </a:solidFill>
+            <a:tailEnd type="triangle"/>
+          </a:ln>
+        </p:spPr>
+        <p:style>
+          <a:lnRef idx="1">
+            <a:schemeClr val="accent1"/>
+          </a:lnRef>
+          <a:fillRef idx="0">
+            <a:schemeClr val="accent1"/>
+          </a:fillRef>
+          <a:effectRef idx="0">
+            <a:schemeClr val="accent1"/>
+          </a:effectRef>
+          <a:fontRef idx="minor">
+            <a:schemeClr val="tx1"/>
+          </a:fontRef>
+        </p:style>
+      </p:cxnSp>
+      <p:sp>
+        <p:nvSpPr>
+          <p:cNvPr id="100" name="Rectangle 99">
+            <a:extLst>
+              <a:ext uri="{FF2B5EF4-FFF2-40B4-BE49-F238E27FC236}">
+                <a16:creationId xmlns:a16="http://schemas.microsoft.com/office/drawing/2014/main" id="{5FB6E3BF-51CF-78EE-4FA8-C9102DF918B9}"/>
+              </a:ext>
+            </a:extLst>
+          </p:cNvPr>
+          <p:cNvSpPr/>
+          <p:nvPr/>
+        </p:nvSpPr>
+        <p:spPr>
+          <a:xfrm>
+            <a:off x="32941" y="100051"/>
+            <a:ext cx="2647950" cy="316961"/>
+          </a:xfrm>
+          <a:prstGeom prst="rect">
+            <a:avLst/>
+          </a:prstGeom>
+          <a:ln>
+            <a:noFill/>
+          </a:ln>
+        </p:spPr>
+        <p:style>
+          <a:lnRef idx="2">
+            <a:schemeClr val="accent6"/>
+          </a:lnRef>
+          <a:fillRef idx="1">
+            <a:schemeClr val="lt1"/>
+          </a:fillRef>
+          <a:effectRef idx="0">
+            <a:schemeClr val="accent6"/>
+          </a:effectRef>
+          <a:fontRef idx="minor">
+            <a:schemeClr val="dk1"/>
+          </a:fontRef>
+        </p:style>
+        <p:txBody>
+          <a:bodyPr rtlCol="0" anchor="ctr"/>
+          <a:lstStyle/>
+          <a:p>
+            <a:pPr algn="ctr"/>
+            <a:r>
+              <a:rPr lang="en-MY" sz="1400" b="1" dirty="0"/>
+              <a:t>MACHINE LEARNING PIPELINE</a:t>
+            </a:r>
+          </a:p>
+        </p:txBody>
+      </p:sp>
+      <p:sp>
+        <p:nvSpPr>
+          <p:cNvPr id="48" name="Rectangle 47">
+            <a:extLst>
+              <a:ext uri="{FF2B5EF4-FFF2-40B4-BE49-F238E27FC236}">
+                <a16:creationId xmlns:a16="http://schemas.microsoft.com/office/drawing/2014/main" id="{0E2A37EF-F5AC-7249-4426-A2982CEBE2CF}"/>
+              </a:ext>
+            </a:extLst>
+          </p:cNvPr>
+          <p:cNvSpPr/>
+          <p:nvPr/>
+        </p:nvSpPr>
+        <p:spPr>
+          <a:xfrm>
+            <a:off x="7219950" y="1616505"/>
+            <a:ext cx="3076575" cy="460237"/>
+          </a:xfrm>
+          <a:prstGeom prst="rect">
+            <a:avLst/>
+          </a:prstGeom>
+          <a:solidFill>
+            <a:schemeClr val="bg1"/>
+          </a:solidFill>
+          <a:ln>
+            <a:solidFill>
+              <a:schemeClr val="tx1"/>
+            </a:solidFill>
+          </a:ln>
+        </p:spPr>
+        <p:style>
+          <a:lnRef idx="2">
+            <a:schemeClr val="accent6"/>
+          </a:lnRef>
+          <a:fillRef idx="1">
+            <a:schemeClr val="lt1"/>
+          </a:fillRef>
+          <a:effectRef idx="0">
+            <a:schemeClr val="accent6"/>
+          </a:effectRef>
+          <a:fontRef idx="minor">
+            <a:schemeClr val="dk1"/>
+          </a:fontRef>
+        </p:style>
+        <p:txBody>
+          <a:bodyPr rtlCol="0" anchor="ctr"/>
+          <a:lstStyle/>
+          <a:p>
+            <a:pPr algn="ctr"/>
+            <a:r>
+              <a:rPr lang="en-US" sz="1600" b="1" dirty="0"/>
+              <a:t>ML </a:t>
+            </a:r>
+            <a:r>
+              <a:rPr lang="en-US" sz="1600" b="1" dirty="0">
+                <a:latin typeface="Arial" panose="020B0604020202020204" pitchFamily="34" charset="0"/>
+                <a:cs typeface="Arial" panose="020B0604020202020204" pitchFamily="34" charset="0"/>
+              </a:rPr>
+              <a:t>MODEL</a:t>
+            </a:r>
+            <a:endParaRPr lang="en-MY" sz="1600" b="1" dirty="0">
+              <a:latin typeface="Arial" panose="020B0604020202020204" pitchFamily="34" charset="0"/>
+              <a:cs typeface="Arial" panose="020B0604020202020204" pitchFamily="34" charset="0"/>
+            </a:endParaRPr>
+          </a:p>
+        </p:txBody>
+      </p:sp>
+      <p:cxnSp>
+        <p:nvCxnSpPr>
+          <p:cNvPr id="9" name="Straight Arrow Connector 8">
+            <a:extLst>
+              <a:ext uri="{FF2B5EF4-FFF2-40B4-BE49-F238E27FC236}">
+                <a16:creationId xmlns:a16="http://schemas.microsoft.com/office/drawing/2014/main" id="{52E69D06-D05B-E33C-20DE-DEE14E7B6417}"/>
+              </a:ext>
+            </a:extLst>
+          </p:cNvPr>
+          <p:cNvCxnSpPr>
+            <a:cxnSpLocks/>
+            <a:stCxn id="113" idx="2"/>
+            <a:endCxn id="17" idx="0"/>
+          </p:cNvCxnSpPr>
+          <p:nvPr/>
+        </p:nvCxnSpPr>
+        <p:spPr>
+          <a:xfrm>
+            <a:off x="8804949" y="3096226"/>
+            <a:ext cx="0" cy="191980"/>
+          </a:xfrm>
+          <a:prstGeom prst="straightConnector1">
+            <a:avLst/>
+          </a:prstGeom>
+          <a:ln>
+            <a:solidFill>
+              <a:schemeClr val="tx2"/>
+            </a:solidFill>
+            <a:tailEnd type="triangle"/>
+          </a:ln>
+        </p:spPr>
+        <p:style>
+          <a:lnRef idx="1">
+            <a:schemeClr val="accent1"/>
+          </a:lnRef>
+          <a:fillRef idx="0">
+            <a:schemeClr val="accent1"/>
+          </a:fillRef>
+          <a:effectRef idx="0">
+            <a:schemeClr val="accent1"/>
+          </a:effectRef>
+          <a:fontRef idx="minor">
+            <a:schemeClr val="tx1"/>
+          </a:fontRef>
+        </p:style>
+      </p:cxnSp>
+      <p:sp>
+        <p:nvSpPr>
+          <p:cNvPr id="17" name="Rectangle 16">
+            <a:extLst>
+              <a:ext uri="{FF2B5EF4-FFF2-40B4-BE49-F238E27FC236}">
+                <a16:creationId xmlns:a16="http://schemas.microsoft.com/office/drawing/2014/main" id="{9AA6DD49-C5F6-6CF0-EE74-8AE9853DAD96}"/>
+              </a:ext>
+            </a:extLst>
+          </p:cNvPr>
+          <p:cNvSpPr/>
+          <p:nvPr/>
+        </p:nvSpPr>
+        <p:spPr>
+          <a:xfrm>
+            <a:off x="8344749" y="3288206"/>
+            <a:ext cx="920400" cy="237596"/>
+          </a:xfrm>
+          <a:prstGeom prst="rect">
+            <a:avLst/>
+          </a:prstGeom>
+          <a:ln w="6350">
+            <a:solidFill>
+              <a:schemeClr val="tx1"/>
+            </a:solidFill>
+          </a:ln>
+        </p:spPr>
+        <p:style>
+          <a:lnRef idx="2">
+            <a:schemeClr val="accent6"/>
+          </a:lnRef>
+          <a:fillRef idx="1">
+            <a:schemeClr val="lt1"/>
+          </a:fillRef>
+          <a:effectRef idx="0">
+            <a:schemeClr val="accent6"/>
+          </a:effectRef>
+          <a:fontRef idx="minor">
+            <a:schemeClr val="dk1"/>
+          </a:fontRef>
+        </p:style>
+        <p:txBody>
+          <a:bodyPr rtlCol="0" anchor="ctr"/>
+          <a:lstStyle/>
+          <a:p>
+            <a:pPr algn="ctr"/>
+            <a:r>
+              <a:rPr lang="en-US" sz="1200" dirty="0">
+                <a:latin typeface="Arial" panose="020B0604020202020204" pitchFamily="34" charset="0"/>
+                <a:cs typeface="Arial" panose="020B0604020202020204" pitchFamily="34" charset="0"/>
+              </a:rPr>
+              <a:t>Section</a:t>
+            </a:r>
+            <a:endParaRPr lang="en-MY" sz="1600" dirty="0">
+              <a:latin typeface="Arial" panose="020B0604020202020204" pitchFamily="34" charset="0"/>
+              <a:cs typeface="Arial" panose="020B0604020202020204" pitchFamily="34" charset="0"/>
+            </a:endParaRPr>
+          </a:p>
+        </p:txBody>
+      </p:sp>
+      <p:cxnSp>
+        <p:nvCxnSpPr>
+          <p:cNvPr id="32" name="Straight Arrow Connector 31">
+            <a:extLst>
+              <a:ext uri="{FF2B5EF4-FFF2-40B4-BE49-F238E27FC236}">
+                <a16:creationId xmlns:a16="http://schemas.microsoft.com/office/drawing/2014/main" id="{18AF898B-511A-8BE3-2405-5D4DB8B711CD}"/>
+              </a:ext>
+            </a:extLst>
+          </p:cNvPr>
+          <p:cNvCxnSpPr>
+            <a:cxnSpLocks/>
+            <a:endCxn id="78" idx="3"/>
+          </p:cNvCxnSpPr>
+          <p:nvPr/>
+        </p:nvCxnSpPr>
+        <p:spPr>
+          <a:xfrm flipH="1">
+            <a:off x="10025090" y="5447436"/>
+            <a:ext cx="1626201" cy="9018"/>
+          </a:xfrm>
+          <a:prstGeom prst="straightConnector1">
+            <a:avLst/>
+          </a:prstGeom>
+          <a:ln w="57150">
+            <a:solidFill>
+              <a:schemeClr val="accent1">
+                <a:lumMod val="75000"/>
+              </a:schemeClr>
+            </a:solidFill>
+            <a:tailEnd type="triangle"/>
+          </a:ln>
+        </p:spPr>
+        <p:style>
+          <a:lnRef idx="1">
+            <a:schemeClr val="accent1"/>
+          </a:lnRef>
+          <a:fillRef idx="0">
+            <a:schemeClr val="accent1"/>
+          </a:fillRef>
+          <a:effectRef idx="0">
+            <a:schemeClr val="accent1"/>
+          </a:effectRef>
+          <a:fontRef idx="minor">
+            <a:schemeClr val="tx1"/>
+          </a:fontRef>
+        </p:style>
+      </p:cxnSp>
+      <p:cxnSp>
+        <p:nvCxnSpPr>
+          <p:cNvPr id="36" name="Straight Arrow Connector 35">
+            <a:extLst>
+              <a:ext uri="{FF2B5EF4-FFF2-40B4-BE49-F238E27FC236}">
+                <a16:creationId xmlns:a16="http://schemas.microsoft.com/office/drawing/2014/main" id="{EAE22A58-A49F-1575-0792-64B0D9D0AB38}"/>
+              </a:ext>
+            </a:extLst>
+          </p:cNvPr>
+          <p:cNvCxnSpPr>
+            <a:cxnSpLocks/>
+            <a:endCxn id="48" idx="3"/>
+          </p:cNvCxnSpPr>
+          <p:nvPr/>
+        </p:nvCxnSpPr>
+        <p:spPr>
+          <a:xfrm flipH="1">
+            <a:off x="10296525" y="1846623"/>
+            <a:ext cx="1341564" cy="1"/>
+          </a:xfrm>
+          <a:prstGeom prst="straightConnector1">
+            <a:avLst/>
+          </a:prstGeom>
+          <a:ln w="28575">
+            <a:solidFill>
+              <a:schemeClr val="tx1"/>
+            </a:solidFill>
+            <a:tailEnd type="triangle"/>
+          </a:ln>
+        </p:spPr>
+        <p:style>
+          <a:lnRef idx="1">
+            <a:schemeClr val="accent1"/>
+          </a:lnRef>
+          <a:fillRef idx="0">
+            <a:schemeClr val="accent1"/>
+          </a:fillRef>
+          <a:effectRef idx="0">
+            <a:schemeClr val="accent1"/>
+          </a:effectRef>
+          <a:fontRef idx="minor">
+            <a:schemeClr val="tx1"/>
+          </a:fontRef>
+        </p:style>
+      </p:cxnSp>
+      <p:sp>
+        <p:nvSpPr>
+          <p:cNvPr id="70" name="Rectangle 69">
+            <a:extLst>
+              <a:ext uri="{FF2B5EF4-FFF2-40B4-BE49-F238E27FC236}">
+                <a16:creationId xmlns:a16="http://schemas.microsoft.com/office/drawing/2014/main" id="{E09BE44E-278F-D525-1A62-7D7F305002BB}"/>
+              </a:ext>
+            </a:extLst>
+          </p:cNvPr>
+          <p:cNvSpPr/>
+          <p:nvPr/>
+        </p:nvSpPr>
+        <p:spPr>
+          <a:xfrm>
+            <a:off x="4563687" y="1767340"/>
+            <a:ext cx="1590499" cy="461665"/>
+          </a:xfrm>
+          <a:prstGeom prst="rect">
+            <a:avLst/>
+          </a:prstGeom>
+          <a:noFill/>
+        </p:spPr>
+        <p:txBody>
+          <a:bodyPr wrap="none" lIns="91440" tIns="45720" rIns="91440" bIns="45720">
+            <a:spAutoFit/>
+          </a:bodyPr>
+          <a:lstStyle/>
+          <a:p>
+            <a:pPr algn="ctr"/>
+            <a:r>
+              <a:rPr lang="en-US" sz="1200" cap="none" spc="0" noProof="1">
+                <a:ln w="0"/>
+                <a:solidFill>
+                  <a:schemeClr val="tx1"/>
+                </a:solidFill>
+                <a:effectLst>
+                  <a:outerShdw blurRad="38100" dist="19050" dir="2700000" algn="tl" rotWithShape="0">
+                    <a:schemeClr val="dk1">
+                      <a:alpha val="40000"/>
+                    </a:schemeClr>
+                  </a:outerShdw>
+                </a:effectLst>
+                <a:latin typeface="Arial" panose="020B0604020202020204" pitchFamily="34" charset="0"/>
+                <a:cs typeface="Arial" panose="020B0604020202020204" pitchFamily="34" charset="0"/>
+              </a:rPr>
+              <a:t>RETRIVE </a:t>
+            </a:r>
+          </a:p>
+          <a:p>
+            <a:pPr algn="ctr"/>
+            <a:r>
+              <a:rPr lang="en-US" sz="1200" cap="none" spc="0" noProof="1">
+                <a:ln w="0"/>
+                <a:solidFill>
+                  <a:schemeClr val="tx1"/>
+                </a:solidFill>
+                <a:effectLst>
+                  <a:outerShdw blurRad="38100" dist="19050" dir="2700000" algn="tl" rotWithShape="0">
+                    <a:schemeClr val="dk1">
+                      <a:alpha val="40000"/>
+                    </a:schemeClr>
+                  </a:outerShdw>
+                </a:effectLst>
+                <a:latin typeface="Arial" panose="020B0604020202020204" pitchFamily="34" charset="0"/>
+                <a:cs typeface="Arial" panose="020B0604020202020204" pitchFamily="34" charset="0"/>
+              </a:rPr>
+              <a:t>[new_equipment.pkl]</a:t>
+            </a:r>
+          </a:p>
+        </p:txBody>
+      </p:sp>
+      <p:cxnSp>
+        <p:nvCxnSpPr>
+          <p:cNvPr id="135" name="Straight Connector 134">
+            <a:extLst>
+              <a:ext uri="{FF2B5EF4-FFF2-40B4-BE49-F238E27FC236}">
+                <a16:creationId xmlns:a16="http://schemas.microsoft.com/office/drawing/2014/main" id="{873EAE23-6086-36ED-261E-56A686A69272}"/>
+              </a:ext>
+            </a:extLst>
+          </p:cNvPr>
+          <p:cNvCxnSpPr>
+            <a:cxnSpLocks/>
+          </p:cNvCxnSpPr>
+          <p:nvPr/>
+        </p:nvCxnSpPr>
+        <p:spPr>
+          <a:xfrm>
+            <a:off x="11629621" y="1846623"/>
+            <a:ext cx="21670" cy="3600813"/>
+          </a:xfrm>
+          <a:prstGeom prst="line">
+            <a:avLst/>
+          </a:prstGeom>
+          <a:ln w="57150">
+            <a:solidFill>
+              <a:schemeClr val="accent1">
+                <a:lumMod val="75000"/>
+              </a:schemeClr>
+            </a:solidFill>
+          </a:ln>
+        </p:spPr>
+        <p:style>
+          <a:lnRef idx="1">
+            <a:schemeClr val="accent1"/>
+          </a:lnRef>
+          <a:fillRef idx="0">
+            <a:schemeClr val="accent1"/>
+          </a:fillRef>
+          <a:effectRef idx="0">
+            <a:schemeClr val="accent1"/>
+          </a:effectRef>
+          <a:fontRef idx="minor">
+            <a:schemeClr val="tx1"/>
+          </a:fontRef>
+        </p:style>
+      </p:cxnSp>
+      <p:sp>
+        <p:nvSpPr>
+          <p:cNvPr id="182" name="Oval 181">
+            <a:extLst>
+              <a:ext uri="{FF2B5EF4-FFF2-40B4-BE49-F238E27FC236}">
+                <a16:creationId xmlns:a16="http://schemas.microsoft.com/office/drawing/2014/main" id="{54D4ED0E-F043-6FB3-A181-423D5E2CB353}"/>
+              </a:ext>
+            </a:extLst>
+          </p:cNvPr>
+          <p:cNvSpPr/>
+          <p:nvPr/>
+        </p:nvSpPr>
+        <p:spPr>
+          <a:xfrm>
+            <a:off x="8927206" y="1003952"/>
+            <a:ext cx="457200" cy="432855"/>
+          </a:xfrm>
+          <a:prstGeom prst="ellipse">
+            <a:avLst/>
+          </a:prstGeom>
+          <a:solidFill>
+            <a:srgbClr val="FFFFAF"/>
+          </a:solidFill>
+        </p:spPr>
+        <p:style>
+          <a:lnRef idx="2">
+            <a:schemeClr val="accent1">
+              <a:shade val="15000"/>
+            </a:schemeClr>
+          </a:lnRef>
+          <a:fillRef idx="1">
+            <a:schemeClr val="accent1"/>
+          </a:fillRef>
+          <a:effectRef idx="0">
+            <a:schemeClr val="accent1"/>
+          </a:effectRef>
+          <a:fontRef idx="minor">
+            <a:schemeClr val="lt1"/>
+          </a:fontRef>
+        </p:style>
+        <p:txBody>
+          <a:bodyPr rtlCol="0" anchor="ctr"/>
+          <a:lstStyle/>
+          <a:p>
+            <a:pPr algn="ctr"/>
+            <a:r>
+              <a:rPr lang="en-MY" b="1" dirty="0">
+                <a:solidFill>
+                  <a:sysClr val="windowText" lastClr="000000"/>
+                </a:solidFill>
+              </a:rPr>
+              <a:t>1</a:t>
+            </a:r>
+          </a:p>
+        </p:txBody>
+      </p:sp>
+      <p:sp>
+        <p:nvSpPr>
+          <p:cNvPr id="183" name="Oval 182">
+            <a:extLst>
+              <a:ext uri="{FF2B5EF4-FFF2-40B4-BE49-F238E27FC236}">
+                <a16:creationId xmlns:a16="http://schemas.microsoft.com/office/drawing/2014/main" id="{B9C4718B-EAAE-1FF5-27BE-67E6A56FDCC6}"/>
+              </a:ext>
+            </a:extLst>
+          </p:cNvPr>
+          <p:cNvSpPr/>
+          <p:nvPr/>
+        </p:nvSpPr>
+        <p:spPr>
+          <a:xfrm>
+            <a:off x="5930200" y="4408771"/>
+            <a:ext cx="457200" cy="432855"/>
+          </a:xfrm>
+          <a:prstGeom prst="ellipse">
+            <a:avLst/>
+          </a:prstGeom>
+          <a:solidFill>
+            <a:srgbClr val="FFFFAF"/>
+          </a:solidFill>
+        </p:spPr>
+        <p:style>
+          <a:lnRef idx="2">
+            <a:schemeClr val="accent1">
+              <a:shade val="15000"/>
+            </a:schemeClr>
+          </a:lnRef>
+          <a:fillRef idx="1">
+            <a:schemeClr val="accent1"/>
+          </a:fillRef>
+          <a:effectRef idx="0">
+            <a:schemeClr val="accent1"/>
+          </a:effectRef>
+          <a:fontRef idx="minor">
+            <a:schemeClr val="lt1"/>
+          </a:fontRef>
+        </p:style>
+        <p:txBody>
+          <a:bodyPr rtlCol="0" anchor="ctr"/>
+          <a:lstStyle/>
+          <a:p>
+            <a:pPr algn="ctr"/>
+            <a:r>
+              <a:rPr lang="en-MY" b="1" dirty="0">
+                <a:solidFill>
+                  <a:sysClr val="windowText" lastClr="000000"/>
+                </a:solidFill>
+              </a:rPr>
+              <a:t>2</a:t>
+            </a:r>
+          </a:p>
+        </p:txBody>
+      </p:sp>
+      <p:sp>
+        <p:nvSpPr>
+          <p:cNvPr id="184" name="Oval 183">
+            <a:extLst>
+              <a:ext uri="{FF2B5EF4-FFF2-40B4-BE49-F238E27FC236}">
+                <a16:creationId xmlns:a16="http://schemas.microsoft.com/office/drawing/2014/main" id="{1B49EEA1-3DC4-FAA7-D7AD-A27D3A2B7FF8}"/>
+              </a:ext>
+            </a:extLst>
+          </p:cNvPr>
+          <p:cNvSpPr/>
+          <p:nvPr/>
+        </p:nvSpPr>
+        <p:spPr>
+          <a:xfrm>
+            <a:off x="2064214" y="2930263"/>
+            <a:ext cx="457200" cy="432855"/>
+          </a:xfrm>
+          <a:prstGeom prst="ellipse">
+            <a:avLst/>
+          </a:prstGeom>
+          <a:solidFill>
+            <a:srgbClr val="FFFFAF"/>
+          </a:solidFill>
+        </p:spPr>
+        <p:style>
+          <a:lnRef idx="2">
+            <a:schemeClr val="accent1">
+              <a:shade val="15000"/>
+            </a:schemeClr>
+          </a:lnRef>
+          <a:fillRef idx="1">
+            <a:schemeClr val="accent1"/>
+          </a:fillRef>
+          <a:effectRef idx="0">
+            <a:schemeClr val="accent1"/>
+          </a:effectRef>
+          <a:fontRef idx="minor">
+            <a:schemeClr val="lt1"/>
+          </a:fontRef>
+        </p:style>
+        <p:txBody>
+          <a:bodyPr rtlCol="0" anchor="ctr"/>
+          <a:lstStyle/>
+          <a:p>
+            <a:pPr algn="ctr"/>
+            <a:r>
+              <a:rPr lang="en-MY" b="1" dirty="0">
+                <a:solidFill>
+                  <a:sysClr val="windowText" lastClr="000000"/>
+                </a:solidFill>
+              </a:rPr>
+              <a:t>3</a:t>
+            </a:r>
+          </a:p>
+        </p:txBody>
+      </p:sp>
+      <p:cxnSp>
+        <p:nvCxnSpPr>
+          <p:cNvPr id="198" name="Straight Arrow Connector 197">
+            <a:extLst>
+              <a:ext uri="{FF2B5EF4-FFF2-40B4-BE49-F238E27FC236}">
+                <a16:creationId xmlns:a16="http://schemas.microsoft.com/office/drawing/2014/main" id="{8BA7A56C-0C0C-6716-598D-309AEA4E6F81}"/>
+              </a:ext>
+            </a:extLst>
+          </p:cNvPr>
+          <p:cNvCxnSpPr>
+            <a:cxnSpLocks/>
+          </p:cNvCxnSpPr>
+          <p:nvPr/>
+        </p:nvCxnSpPr>
+        <p:spPr>
+          <a:xfrm flipH="1">
+            <a:off x="10309727" y="1844183"/>
+            <a:ext cx="1341564" cy="1"/>
+          </a:xfrm>
+          <a:prstGeom prst="straightConnector1">
+            <a:avLst/>
+          </a:prstGeom>
+          <a:ln w="57150">
+            <a:solidFill>
+              <a:schemeClr val="accent1">
+                <a:lumMod val="75000"/>
+              </a:schemeClr>
+            </a:solidFill>
+            <a:tailEnd type="triangle"/>
+          </a:ln>
+        </p:spPr>
+        <p:style>
+          <a:lnRef idx="1">
+            <a:schemeClr val="accent1"/>
+          </a:lnRef>
+          <a:fillRef idx="0">
+            <a:schemeClr val="accent1"/>
+          </a:fillRef>
+          <a:effectRef idx="0">
+            <a:schemeClr val="accent1"/>
+          </a:effectRef>
+          <a:fontRef idx="minor">
+            <a:schemeClr val="tx1"/>
+          </a:fontRef>
+        </p:style>
+      </p:cxnSp>
+      <p:cxnSp>
+        <p:nvCxnSpPr>
+          <p:cNvPr id="199" name="Straight Arrow Connector 198">
+            <a:extLst>
+              <a:ext uri="{FF2B5EF4-FFF2-40B4-BE49-F238E27FC236}">
+                <a16:creationId xmlns:a16="http://schemas.microsoft.com/office/drawing/2014/main" id="{6B7DD5E5-DE9D-CEE8-4DB7-9518D1987AC7}"/>
+              </a:ext>
+            </a:extLst>
+          </p:cNvPr>
+          <p:cNvCxnSpPr>
+            <a:cxnSpLocks/>
+          </p:cNvCxnSpPr>
+          <p:nvPr/>
+        </p:nvCxnSpPr>
+        <p:spPr>
+          <a:xfrm>
+            <a:off x="8804949" y="858058"/>
+            <a:ext cx="12617" cy="758447"/>
+          </a:xfrm>
+          <a:prstGeom prst="straightConnector1">
+            <a:avLst/>
+          </a:prstGeom>
+          <a:ln w="57150">
+            <a:solidFill>
+              <a:schemeClr val="accent1">
+                <a:lumMod val="75000"/>
+              </a:schemeClr>
+            </a:solidFill>
+            <a:tailEnd type="triangle"/>
+          </a:ln>
+        </p:spPr>
+        <p:style>
+          <a:lnRef idx="1">
+            <a:schemeClr val="accent1"/>
+          </a:lnRef>
+          <a:fillRef idx="0">
+            <a:schemeClr val="accent1"/>
+          </a:fillRef>
+          <a:effectRef idx="0">
+            <a:schemeClr val="accent1"/>
+          </a:effectRef>
+          <a:fontRef idx="minor">
+            <a:schemeClr val="tx1"/>
+          </a:fontRef>
+        </p:style>
+      </p:cxnSp>
+      <p:sp>
+        <p:nvSpPr>
+          <p:cNvPr id="10" name="TextBox 9">
+            <a:extLst>
+              <a:ext uri="{FF2B5EF4-FFF2-40B4-BE49-F238E27FC236}">
+                <a16:creationId xmlns:a16="http://schemas.microsoft.com/office/drawing/2014/main" id="{40D4CC24-FC09-A829-CBC8-1E9A9F8CE5B8}"/>
+              </a:ext>
+            </a:extLst>
+          </p:cNvPr>
+          <p:cNvSpPr txBox="1"/>
+          <p:nvPr/>
+        </p:nvSpPr>
+        <p:spPr>
+          <a:xfrm>
+            <a:off x="146431" y="5138704"/>
+            <a:ext cx="5710572" cy="1384995"/>
+          </a:xfrm>
+          <a:prstGeom prst="rect">
+            <a:avLst/>
+          </a:prstGeom>
+          <a:noFill/>
+          <a:ln>
+            <a:solidFill>
+              <a:schemeClr val="tx1"/>
+            </a:solidFill>
+          </a:ln>
+        </p:spPr>
+        <p:txBody>
+          <a:bodyPr wrap="square" rtlCol="0">
+            <a:spAutoFit/>
+          </a:bodyPr>
+          <a:lstStyle/>
+          <a:p>
+            <a:r>
+              <a:rPr lang="en-US" sz="1200" b="1" u="sng" dirty="0">
+                <a:latin typeface="Arial" panose="020B0604020202020204" pitchFamily="34" charset="0"/>
+                <a:cs typeface="Arial" panose="020B0604020202020204" pitchFamily="34" charset="0"/>
+              </a:rPr>
+              <a:t>Process flow</a:t>
+            </a:r>
+          </a:p>
+          <a:p>
+            <a:r>
+              <a:rPr lang="en-US" sz="1200" dirty="0">
+                <a:latin typeface="Arial" panose="020B0604020202020204" pitchFamily="34" charset="0"/>
+                <a:cs typeface="Arial" panose="020B0604020202020204" pitchFamily="34" charset="0"/>
+              </a:rPr>
+              <a:t>(1) Input - Model – Result Output – Update &amp; Save Model</a:t>
+            </a:r>
+          </a:p>
+          <a:p>
+            <a:endParaRPr lang="en-US" sz="1200" dirty="0">
+              <a:latin typeface="Arial" panose="020B0604020202020204" pitchFamily="34" charset="0"/>
+              <a:cs typeface="Arial" panose="020B0604020202020204" pitchFamily="34" charset="0"/>
+            </a:endParaRPr>
+          </a:p>
+          <a:p>
+            <a:r>
+              <a:rPr lang="en-US" sz="1200" dirty="0">
+                <a:latin typeface="Arial" panose="020B0604020202020204" pitchFamily="34" charset="0"/>
+                <a:cs typeface="Arial" panose="020B0604020202020204" pitchFamily="34" charset="0"/>
+              </a:rPr>
+              <a:t>(2) Input - Model - Output (UNKNOWN) - Assign by user – New Equipment Data   </a:t>
+            </a:r>
+          </a:p>
+          <a:p>
+            <a:r>
+              <a:rPr lang="en-US" sz="1200" dirty="0">
+                <a:latin typeface="Arial" panose="020B0604020202020204" pitchFamily="34" charset="0"/>
+                <a:cs typeface="Arial" panose="020B0604020202020204" pitchFamily="34" charset="0"/>
+              </a:rPr>
+              <a:t>       - Model – Update &amp; Save Model</a:t>
+            </a:r>
+          </a:p>
+          <a:p>
+            <a:endParaRPr lang="en-US" sz="1200" dirty="0">
+              <a:latin typeface="Arial" panose="020B0604020202020204" pitchFamily="34" charset="0"/>
+              <a:cs typeface="Arial" panose="020B0604020202020204" pitchFamily="34" charset="0"/>
+            </a:endParaRPr>
+          </a:p>
+          <a:p>
+            <a:r>
+              <a:rPr lang="en-US" sz="1200" dirty="0">
+                <a:latin typeface="Arial" panose="020B0604020202020204" pitchFamily="34" charset="0"/>
+                <a:cs typeface="Arial" panose="020B0604020202020204" pitchFamily="34" charset="0"/>
+              </a:rPr>
+              <a:t>(3) New Equipment Data - Model - Update &amp; Save Model</a:t>
+            </a:r>
+            <a:endParaRPr lang="en-MY" sz="1200" dirty="0">
+              <a:latin typeface="Arial" panose="020B0604020202020204" pitchFamily="34" charset="0"/>
+              <a:cs typeface="Arial" panose="020B0604020202020204" pitchFamily="34" charset="0"/>
+            </a:endParaRPr>
+          </a:p>
+        </p:txBody>
+      </p:sp>
+    </p:spTree>
+    <p:extLst>
+      <p:ext uri="{BB962C8B-B14F-4D97-AF65-F5344CB8AC3E}">
+        <p14:creationId xmlns:p14="http://schemas.microsoft.com/office/powerpoint/2010/main" val="2766375949"/>
+      </p:ext>
+    </p:extLst>
+  </p:cSld>
+  <p:clrMapOvr>
+    <a:masterClrMapping/>
+  </p:clrMapOvr>
+</p:sld>
+</file>
+
+<file path=ppt/slides/slide3.xml><?xml version="1.0" encoding="utf-8"?>
+<p:sld xmlns:a="http://schemas.openxmlformats.org/drawingml/2006/main" xmlns:r="http://schemas.openxmlformats.org/officeDocument/2006/relationships" xmlns:p="http://schemas.openxmlformats.org/presentationml/2006/main" showMasterSp="0">
+  <p:cSld>
+    <p:bg>
+      <p:bgPr>
+        <a:solidFill>
+          <a:srgbClr val="CDF6F9"/>
+        </a:solidFill>
+        <a:effectLst/>
+      </p:bgPr>
+    </p:bg>
+    <p:spTree>
+      <p:nvGrpSpPr>
+        <p:cNvPr id="1" name="">
+          <a:extLst>
+            <a:ext uri="{FF2B5EF4-FFF2-40B4-BE49-F238E27FC236}">
+              <a16:creationId xmlns:a16="http://schemas.microsoft.com/office/drawing/2014/main" id="{6AF2F157-8D29-E788-074F-76AA928DFDE3}"/>
+            </a:ext>
+          </a:extLst>
+        </p:cNvPr>
+        <p:cNvGrpSpPr/>
+        <p:nvPr/>
+      </p:nvGrpSpPr>
+      <p:grpSpPr>
+        <a:xfrm>
+          <a:off x="0" y="0"/>
+          <a:ext cx="0" cy="0"/>
+          <a:chOff x="0" y="0"/>
+          <a:chExt cx="0" cy="0"/>
+        </a:xfrm>
+      </p:grpSpPr>
+      <p:sp>
+        <p:nvSpPr>
+          <p:cNvPr id="3" name="Rectangle 2">
+            <a:extLst>
+              <a:ext uri="{FF2B5EF4-FFF2-40B4-BE49-F238E27FC236}">
+                <a16:creationId xmlns:a16="http://schemas.microsoft.com/office/drawing/2014/main" id="{56E07FFD-2E37-CD20-EB0F-0B5C640110D2}"/>
+              </a:ext>
+            </a:extLst>
+          </p:cNvPr>
+          <p:cNvSpPr/>
+          <p:nvPr/>
+        </p:nvSpPr>
+        <p:spPr>
+          <a:xfrm>
+            <a:off x="3964564" y="2276475"/>
+            <a:ext cx="4074536" cy="1587509"/>
+          </a:xfrm>
+          <a:prstGeom prst="rect">
+            <a:avLst/>
+          </a:prstGeom>
+          <a:noFill/>
+          <a:ln>
+            <a:noFill/>
+          </a:ln>
+        </p:spPr>
+        <p:style>
+          <a:lnRef idx="2">
+            <a:schemeClr val="accent6"/>
+          </a:lnRef>
+          <a:fillRef idx="1">
+            <a:schemeClr val="lt1"/>
+          </a:fillRef>
+          <a:effectRef idx="0">
+            <a:schemeClr val="accent6"/>
+          </a:effectRef>
+          <a:fontRef idx="minor">
+            <a:schemeClr val="dk1"/>
+          </a:fontRef>
+        </p:style>
+        <p:txBody>
+          <a:bodyPr rtlCol="0" anchor="ctr"/>
+          <a:lstStyle/>
+          <a:p>
+            <a:pPr algn="ctr"/>
+            <a:r>
+              <a:rPr lang="en-US" sz="4800" dirty="0"/>
+              <a:t>T</a:t>
+            </a:r>
+            <a:r>
+              <a:rPr lang="en-MY" sz="4800" dirty="0"/>
+              <a:t>HANK YOU</a:t>
+            </a:r>
+          </a:p>
+        </p:txBody>
+      </p:sp>
+    </p:spTree>
+    <p:extLst>
+      <p:ext uri="{BB962C8B-B14F-4D97-AF65-F5344CB8AC3E}">
+        <p14:creationId xmlns:p14="http://schemas.microsoft.com/office/powerpoint/2010/main" val="16583078"/>
+      </p:ext>
+    </p:extLst>
+  </p:cSld>
+  <p:clrMapOvr>
+    <a:masterClrMapping/>
+  </p:clrMapOvr>
+</p:sld>
+</file>
+
+<file path=ppt/slides/slide4.xml><?xml version="1.0" encoding="utf-8"?>
+<p:sld xmlns:a="http://schemas.openxmlformats.org/drawingml/2006/main" xmlns:r="http://schemas.openxmlformats.org/officeDocument/2006/relationships" xmlns:p="http://schemas.openxmlformats.org/presentationml/2006/main" showMasterSp="0">
+  <p:cSld>
+    <p:bg>
+      <p:bgPr>
+        <a:solidFill>
+          <a:srgbClr val="CDF6F9"/>
+        </a:solidFill>
+        <a:effectLst/>
+      </p:bgPr>
+    </p:bg>
+    <p:spTree>
+      <p:nvGrpSpPr>
+        <p:cNvPr id="1" name="">
+          <a:extLst>
+            <a:ext uri="{FF2B5EF4-FFF2-40B4-BE49-F238E27FC236}">
+              <a16:creationId xmlns:a16="http://schemas.microsoft.com/office/drawing/2014/main" id="{F9645B29-B38D-7B94-A70E-7D634579EF28}"/>
+            </a:ext>
+          </a:extLst>
+        </p:cNvPr>
+        <p:cNvGrpSpPr/>
+        <p:nvPr/>
+      </p:nvGrpSpPr>
+      <p:grpSpPr>
+        <a:xfrm>
+          <a:off x="0" y="0"/>
+          <a:ext cx="0" cy="0"/>
+          <a:chOff x="0" y="0"/>
+          <a:chExt cx="0" cy="0"/>
+        </a:xfrm>
+      </p:grpSpPr>
+      <p:pic>
+        <p:nvPicPr>
+          <p:cNvPr id="3" name="Picture 2">
+            <a:extLst>
+              <a:ext uri="{FF2B5EF4-FFF2-40B4-BE49-F238E27FC236}">
+                <a16:creationId xmlns:a16="http://schemas.microsoft.com/office/drawing/2014/main" id="{1582A625-0A36-5DBD-23AD-272844215260}"/>
+              </a:ext>
+            </a:extLst>
+          </p:cNvPr>
+          <p:cNvPicPr>
+            <a:picLocks noChangeAspect="1"/>
+          </p:cNvPicPr>
+          <p:nvPr/>
+        </p:nvPicPr>
+        <p:blipFill>
+          <a:blip r:embed="rId3"/>
+          <a:stretch>
+            <a:fillRect/>
+          </a:stretch>
+        </p:blipFill>
+        <p:spPr>
+          <a:xfrm>
+            <a:off x="1219200" y="442912"/>
+            <a:ext cx="9753600" cy="5972175"/>
+          </a:xfrm>
+          <a:prstGeom prst="rect">
+            <a:avLst/>
+          </a:prstGeom>
+        </p:spPr>
+      </p:pic>
+    </p:spTree>
+    <p:extLst>
+      <p:ext uri="{BB962C8B-B14F-4D97-AF65-F5344CB8AC3E}">
+        <p14:creationId xmlns:p14="http://schemas.microsoft.com/office/powerpoint/2010/main" val="2895853449"/>
+      </p:ext>
+    </p:extLst>
+  </p:cSld>
+  <p:clrMapOvr>
+    <a:masterClrMapping/>
+  </p:clrMapOvr>
+</p:sld>
+</file>
+
+<file path=ppt/slides/slide5.xml><?xml version="1.0" encoding="utf-8"?>
+<p:sld xmlns:a="http://schemas.openxmlformats.org/drawingml/2006/main" xmlns:r="http://schemas.openxmlformats.org/officeDocument/2006/relationships" xmlns:p="http://schemas.openxmlformats.org/presentationml/2006/main" showMasterSp="0">
+  <p:cSld>
+    <p:bg>
+      <p:bgPr>
+        <a:solidFill>
+          <a:srgbClr val="CDF6F9"/>
+        </a:solidFill>
+        <a:effectLst/>
+      </p:bgPr>
+    </p:bg>
+    <p:spTree>
+      <p:nvGrpSpPr>
+        <p:cNvPr id="1" name="">
+          <a:extLst>
+            <a:ext uri="{FF2B5EF4-FFF2-40B4-BE49-F238E27FC236}">
+              <a16:creationId xmlns:a16="http://schemas.microsoft.com/office/drawing/2014/main" id="{FF2729C3-C2C7-E7F9-D253-A8DC793D72F2}"/>
+            </a:ext>
+          </a:extLst>
+        </p:cNvPr>
+        <p:cNvGrpSpPr/>
+        <p:nvPr/>
+      </p:nvGrpSpPr>
+      <p:grpSpPr>
+        <a:xfrm>
+          <a:off x="0" y="0"/>
+          <a:ext cx="0" cy="0"/>
+          <a:chOff x="0" y="0"/>
+          <a:chExt cx="0" cy="0"/>
+        </a:xfrm>
+      </p:grpSpPr>
+      <p:pic>
+        <p:nvPicPr>
+          <p:cNvPr id="4" name="Picture 3">
+            <a:extLst>
+              <a:ext uri="{FF2B5EF4-FFF2-40B4-BE49-F238E27FC236}">
+                <a16:creationId xmlns:a16="http://schemas.microsoft.com/office/drawing/2014/main" id="{CB5D7633-D9D5-A1C5-6671-AA9ED1F95862}"/>
+              </a:ext>
+            </a:extLst>
+          </p:cNvPr>
+          <p:cNvPicPr>
+            <a:picLocks noChangeAspect="1"/>
+          </p:cNvPicPr>
+          <p:nvPr/>
+        </p:nvPicPr>
+        <p:blipFill>
+          <a:blip r:embed="rId3"/>
+          <a:stretch>
+            <a:fillRect/>
+          </a:stretch>
+        </p:blipFill>
+        <p:spPr>
+          <a:xfrm>
+            <a:off x="423672" y="218122"/>
+            <a:ext cx="11493196" cy="6274118"/>
+          </a:xfrm>
+          <a:prstGeom prst="rect">
+            <a:avLst/>
+          </a:prstGeom>
+        </p:spPr>
+      </p:pic>
+    </p:spTree>
+    <p:extLst>
+      <p:ext uri="{BB962C8B-B14F-4D97-AF65-F5344CB8AC3E}">
+        <p14:creationId xmlns:p14="http://schemas.microsoft.com/office/powerpoint/2010/main" val="4281060781"/>
+      </p:ext>
+    </p:extLst>
+  </p:cSld>
+  <p:clrMapOvr>
+    <a:masterClrMapping/>
+  </p:clrMapOvr>
+</p:sld>
+</file>
+
+<file path=ppt/slides/slide6.xml><?xml version="1.0" encoding="utf-8"?>
+<p:sld xmlns:a="http://schemas.openxmlformats.org/drawingml/2006/main" xmlns:r="http://schemas.openxmlformats.org/officeDocument/2006/relationships" xmlns:p="http://schemas.openxmlformats.org/presentationml/2006/main" showMasterSp="0">
+  <p:cSld>
+    <p:bg>
+      <p:bgPr>
+        <a:solidFill>
+          <a:srgbClr val="CDF6F9"/>
+        </a:solidFill>
+        <a:effectLst/>
+      </p:bgPr>
+    </p:bg>
+    <p:spTree>
+      <p:nvGrpSpPr>
+        <p:cNvPr id="1" name="">
+          <a:extLst>
+            <a:ext uri="{FF2B5EF4-FFF2-40B4-BE49-F238E27FC236}">
+              <a16:creationId xmlns:a16="http://schemas.microsoft.com/office/drawing/2014/main" id="{7F2C4EC8-5B76-523F-ED3F-BC66B74B0733}"/>
+            </a:ext>
+          </a:extLst>
+        </p:cNvPr>
+        <p:cNvGrpSpPr/>
+        <p:nvPr/>
+      </p:nvGrpSpPr>
+      <p:grpSpPr>
+        <a:xfrm>
+          <a:off x="0" y="0"/>
+          <a:ext cx="0" cy="0"/>
+          <a:chOff x="0" y="0"/>
+          <a:chExt cx="0" cy="0"/>
+        </a:xfrm>
+      </p:grpSpPr>
+      <p:pic>
+        <p:nvPicPr>
+          <p:cNvPr id="4" name="Picture 3">
+            <a:extLst>
+              <a:ext uri="{FF2B5EF4-FFF2-40B4-BE49-F238E27FC236}">
+                <a16:creationId xmlns:a16="http://schemas.microsoft.com/office/drawing/2014/main" id="{810480DF-968A-2171-73C4-16EEF11F55E8}"/>
+              </a:ext>
+            </a:extLst>
+          </p:cNvPr>
+          <p:cNvPicPr>
+            <a:picLocks noChangeAspect="1"/>
+          </p:cNvPicPr>
+          <p:nvPr/>
+        </p:nvPicPr>
+        <p:blipFill>
+          <a:blip r:embed="rId3"/>
+          <a:stretch>
+            <a:fillRect/>
+          </a:stretch>
+        </p:blipFill>
+        <p:spPr>
+          <a:xfrm>
+            <a:off x="867707" y="2356149"/>
+            <a:ext cx="10456586" cy="1981110"/>
+          </a:xfrm>
+          <a:prstGeom prst="rect">
+            <a:avLst/>
+          </a:prstGeom>
+        </p:spPr>
+      </p:pic>
+    </p:spTree>
+    <p:extLst>
+      <p:ext uri="{BB962C8B-B14F-4D97-AF65-F5344CB8AC3E}">
+        <p14:creationId xmlns:p14="http://schemas.microsoft.com/office/powerpoint/2010/main" val="3425137762"/>
+      </p:ext>
+    </p:extLst>
+  </p:cSld>
+  <p:clrMapOvr>
+    <a:masterClrMapping/>
+  </p:clrMapOvr>
+</p:sld>
+</file>
+
+<file path=ppt/slides/slide7.xml><?xml version="1.0" encoding="utf-8"?>
+<p:sld xmlns:a="http://schemas.openxmlformats.org/drawingml/2006/main" xmlns:r="http://schemas.openxmlformats.org/officeDocument/2006/relationships" xmlns:p="http://schemas.openxmlformats.org/presentationml/2006/main" showMasterSp="0">
+  <p:cSld>
+    <p:bg>
+      <p:bgPr>
+        <a:solidFill>
+          <a:srgbClr val="CDF6F9"/>
+        </a:solidFill>
+        <a:effectLst/>
+      </p:bgPr>
+    </p:bg>
+    <p:spTree>
+      <p:nvGrpSpPr>
+        <p:cNvPr id="1" name="">
+          <a:extLst>
+            <a:ext uri="{FF2B5EF4-FFF2-40B4-BE49-F238E27FC236}">
+              <a16:creationId xmlns:a16="http://schemas.microsoft.com/office/drawing/2014/main" id="{98704D49-57CA-89F2-F039-0DC36F5D475B}"/>
+            </a:ext>
+          </a:extLst>
+        </p:cNvPr>
+        <p:cNvGrpSpPr/>
+        <p:nvPr/>
+      </p:nvGrpSpPr>
+      <p:grpSpPr>
+        <a:xfrm>
+          <a:off x="0" y="0"/>
+          <a:ext cx="0" cy="0"/>
+          <a:chOff x="0" y="0"/>
+          <a:chExt cx="0" cy="0"/>
+        </a:xfrm>
+      </p:grpSpPr>
+      <p:pic>
+        <p:nvPicPr>
+          <p:cNvPr id="3" name="Picture 2">
+            <a:extLst>
+              <a:ext uri="{FF2B5EF4-FFF2-40B4-BE49-F238E27FC236}">
+                <a16:creationId xmlns:a16="http://schemas.microsoft.com/office/drawing/2014/main" id="{B70F5462-43EE-4DAC-20E1-637BD8FCDEE2}"/>
+              </a:ext>
+            </a:extLst>
+          </p:cNvPr>
+          <p:cNvPicPr>
+            <a:picLocks noChangeAspect="1"/>
+          </p:cNvPicPr>
+          <p:nvPr/>
+        </p:nvPicPr>
+        <p:blipFill>
+          <a:blip r:embed="rId3"/>
+          <a:stretch>
+            <a:fillRect/>
+          </a:stretch>
+        </p:blipFill>
+        <p:spPr>
+          <a:xfrm>
+            <a:off x="5831588" y="1030069"/>
+            <a:ext cx="5430008" cy="4944165"/>
+          </a:xfrm>
+          <a:prstGeom prst="rect">
+            <a:avLst/>
+          </a:prstGeom>
+        </p:spPr>
+      </p:pic>
+      <p:pic>
+        <p:nvPicPr>
+          <p:cNvPr id="6" name="Picture 5">
+            <a:extLst>
+              <a:ext uri="{FF2B5EF4-FFF2-40B4-BE49-F238E27FC236}">
+                <a16:creationId xmlns:a16="http://schemas.microsoft.com/office/drawing/2014/main" id="{7F8DBAB1-30CC-E82A-C2AD-554DB087866E}"/>
+              </a:ext>
+            </a:extLst>
+          </p:cNvPr>
+          <p:cNvPicPr>
+            <a:picLocks noChangeAspect="1"/>
+          </p:cNvPicPr>
+          <p:nvPr/>
+        </p:nvPicPr>
+        <p:blipFill>
+          <a:blip r:embed="rId4"/>
+          <a:srcRect r="22821"/>
+          <a:stretch>
+            <a:fillRect/>
+          </a:stretch>
+        </p:blipFill>
+        <p:spPr>
+          <a:xfrm>
+            <a:off x="434860" y="828518"/>
+            <a:ext cx="5166644" cy="5347265"/>
+          </a:xfrm>
+          <a:prstGeom prst="rect">
+            <a:avLst/>
+          </a:prstGeom>
+        </p:spPr>
+      </p:pic>
+    </p:spTree>
+    <p:extLst>
+      <p:ext uri="{BB962C8B-B14F-4D97-AF65-F5344CB8AC3E}">
+        <p14:creationId xmlns:p14="http://schemas.microsoft.com/office/powerpoint/2010/main" val="149887682"/>
+      </p:ext>
+    </p:extLst>
+  </p:cSld>
+  <p:clrMapOvr>
+    <a:masterClrMapping/>
+  </p:clrMapOvr>
+</p:sld>
+</file>
+
+<file path=ppt/slides/slide8.xml><?xml version="1.0" encoding="utf-8"?>
+<p:sld xmlns:a="http://schemas.openxmlformats.org/drawingml/2006/main" xmlns:r="http://schemas.openxmlformats.org/officeDocument/2006/relationships" xmlns:p="http://schemas.openxmlformats.org/presentationml/2006/main" showMasterSp="0">
+  <p:cSld>
+    <p:bg>
+      <p:bgPr>
+        <a:solidFill>
+          <a:srgbClr val="CDF6F9"/>
+        </a:solidFill>
+        <a:effectLst/>
+      </p:bgPr>
+    </p:bg>
+    <p:spTree>
+      <p:nvGrpSpPr>
+        <p:cNvPr id="1" name="">
+          <a:extLst>
+            <a:ext uri="{FF2B5EF4-FFF2-40B4-BE49-F238E27FC236}">
+              <a16:creationId xmlns:a16="http://schemas.microsoft.com/office/drawing/2014/main" id="{3FBC84F0-4790-2E5C-BD77-A69CA39F653E}"/>
+            </a:ext>
+          </a:extLst>
+        </p:cNvPr>
+        <p:cNvGrpSpPr/>
+        <p:nvPr/>
+      </p:nvGrpSpPr>
+      <p:grpSpPr>
+        <a:xfrm>
+          <a:off x="0" y="0"/>
+          <a:ext cx="0" cy="0"/>
+          <a:chOff x="0" y="0"/>
+          <a:chExt cx="0" cy="0"/>
+        </a:xfrm>
+      </p:grpSpPr>
+      <p:pic>
+        <p:nvPicPr>
+          <p:cNvPr id="3" name="Picture 2">
+            <a:extLst>
+              <a:ext uri="{FF2B5EF4-FFF2-40B4-BE49-F238E27FC236}">
+                <a16:creationId xmlns:a16="http://schemas.microsoft.com/office/drawing/2014/main" id="{765F6181-9D1F-12D2-690A-B5E1843D8AAA}"/>
+              </a:ext>
+            </a:extLst>
+          </p:cNvPr>
+          <p:cNvPicPr>
+            <a:picLocks noChangeAspect="1"/>
+          </p:cNvPicPr>
+          <p:nvPr/>
+        </p:nvPicPr>
+        <p:blipFill>
+          <a:blip r:embed="rId3"/>
+          <a:stretch>
+            <a:fillRect/>
+          </a:stretch>
+        </p:blipFill>
+        <p:spPr>
+          <a:xfrm>
+            <a:off x="6505599" y="427712"/>
+            <a:ext cx="5106113" cy="4887007"/>
+          </a:xfrm>
+          <a:prstGeom prst="rect">
+            <a:avLst/>
+          </a:prstGeom>
+        </p:spPr>
+      </p:pic>
+      <p:pic>
+        <p:nvPicPr>
+          <p:cNvPr id="5" name="Picture 4">
+            <a:extLst>
+              <a:ext uri="{FF2B5EF4-FFF2-40B4-BE49-F238E27FC236}">
+                <a16:creationId xmlns:a16="http://schemas.microsoft.com/office/drawing/2014/main" id="{6A5C0805-4E2A-35B6-B6D6-E50B70D35153}"/>
+              </a:ext>
+            </a:extLst>
+          </p:cNvPr>
+          <p:cNvPicPr>
+            <a:picLocks noChangeAspect="1"/>
+          </p:cNvPicPr>
+          <p:nvPr/>
+        </p:nvPicPr>
+        <p:blipFill>
+          <a:blip r:embed="rId4"/>
+          <a:stretch>
+            <a:fillRect/>
+          </a:stretch>
+        </p:blipFill>
+        <p:spPr>
+          <a:xfrm>
+            <a:off x="856870" y="427712"/>
+            <a:ext cx="5449060" cy="5210902"/>
+          </a:xfrm>
+          <a:prstGeom prst="rect">
+            <a:avLst/>
+          </a:prstGeom>
+        </p:spPr>
+      </p:pic>
+    </p:spTree>
+    <p:extLst>
+      <p:ext uri="{BB962C8B-B14F-4D97-AF65-F5344CB8AC3E}">
+        <p14:creationId xmlns:p14="http://schemas.microsoft.com/office/powerpoint/2010/main" val="1025226808"/>
+      </p:ext>
+    </p:extLst>
+  </p:cSld>
+  <p:clrMapOvr>
+    <a:masterClrMapping/>
+  </p:clrMapOvr>
+</p:sld>
+</file>
+
+<file path=ppt/slides/slide9.xml><?xml version="1.0" encoding="utf-8"?>
+<p:sld xmlns:a="http://schemas.openxmlformats.org/drawingml/2006/main" xmlns:r="http://schemas.openxmlformats.org/officeDocument/2006/relationships" xmlns:p="http://schemas.openxmlformats.org/presentationml/2006/main" showMasterSp="0">
+  <p:cSld>
+    <p:bg>
+      <p:bgPr>
+        <a:solidFill>
+          <a:srgbClr val="CDF6F9"/>
+        </a:solidFill>
+        <a:effectLst/>
+      </p:bgPr>
+    </p:bg>
+    <p:spTree>
+      <p:nvGrpSpPr>
+        <p:cNvPr id="1" name="">
+          <a:extLst>
+            <a:ext uri="{FF2B5EF4-FFF2-40B4-BE49-F238E27FC236}">
+              <a16:creationId xmlns:a16="http://schemas.microsoft.com/office/drawing/2014/main" id="{58E68DF9-9D3D-F010-53FB-6A72464ACF27}"/>
+            </a:ext>
+          </a:extLst>
+        </p:cNvPr>
+        <p:cNvGrpSpPr/>
+        <p:nvPr/>
+      </p:nvGrpSpPr>
+      <p:grpSpPr>
+        <a:xfrm>
+          <a:off x="0" y="0"/>
+          <a:ext cx="0" cy="0"/>
+          <a:chOff x="0" y="0"/>
+          <a:chExt cx="0" cy="0"/>
+        </a:xfrm>
+      </p:grpSpPr>
+      <p:pic>
+        <p:nvPicPr>
+          <p:cNvPr id="6" name="Picture 5">
+            <a:extLst>
+              <a:ext uri="{FF2B5EF4-FFF2-40B4-BE49-F238E27FC236}">
+                <a16:creationId xmlns:a16="http://schemas.microsoft.com/office/drawing/2014/main" id="{FE39C31F-E5A2-7795-A7FA-E1F5E00A70A7}"/>
+              </a:ext>
+            </a:extLst>
+          </p:cNvPr>
+          <p:cNvPicPr>
+            <a:picLocks noChangeAspect="1"/>
+          </p:cNvPicPr>
+          <p:nvPr/>
+        </p:nvPicPr>
+        <p:blipFill>
+          <a:blip r:embed="rId3"/>
+          <a:stretch>
+            <a:fillRect/>
+          </a:stretch>
+        </p:blipFill>
+        <p:spPr>
+          <a:xfrm>
+            <a:off x="7013359" y="153393"/>
+            <a:ext cx="4444074" cy="6569501"/>
+          </a:xfrm>
+          <a:prstGeom prst="rect">
+            <a:avLst/>
+          </a:prstGeom>
+        </p:spPr>
+      </p:pic>
+      <p:pic>
+        <p:nvPicPr>
+          <p:cNvPr id="8" name="Picture 7">
+            <a:extLst>
+              <a:ext uri="{FF2B5EF4-FFF2-40B4-BE49-F238E27FC236}">
+                <a16:creationId xmlns:a16="http://schemas.microsoft.com/office/drawing/2014/main" id="{F4AE3FA1-DB72-74DB-ADFA-01033F972B3F}"/>
+              </a:ext>
+            </a:extLst>
+          </p:cNvPr>
+          <p:cNvPicPr>
+            <a:picLocks noChangeAspect="1"/>
+          </p:cNvPicPr>
+          <p:nvPr/>
+        </p:nvPicPr>
+        <p:blipFill>
+          <a:blip r:embed="rId4"/>
+          <a:srcRect r="57064"/>
+          <a:stretch>
+            <a:fillRect/>
+          </a:stretch>
+        </p:blipFill>
+        <p:spPr>
+          <a:xfrm>
+            <a:off x="2139697" y="345417"/>
+            <a:ext cx="4063597" cy="4473471"/>
+          </a:xfrm>
+          <a:prstGeom prst="rect">
+            <a:avLst/>
+          </a:prstGeom>
+        </p:spPr>
+      </p:pic>
+    </p:spTree>
+    <p:extLst>
+      <p:ext uri="{BB962C8B-B14F-4D97-AF65-F5344CB8AC3E}">
+        <p14:creationId xmlns:p14="http://schemas.microsoft.com/office/powerpoint/2010/main" val="1869276804"/>
       </p:ext>
     </p:extLst>
   </p:cSld>

--- a/1.training_model/slide_presentation/Device Identifier 20260414.pptx
+++ b/1.training_model/slide_presentation/Device Identifier 20260414.pptx
@@ -5,7 +5,7 @@
     <p:sldMasterId id="2147483696" r:id="rId1"/>
   </p:sldMasterIdLst>
   <p:notesMasterIdLst>
-    <p:notesMasterId r:id="rId20"/>
+    <p:notesMasterId r:id="rId21"/>
   </p:notesMasterIdLst>
   <p:sldIdLst>
     <p:sldId id="256" r:id="rId2"/>
@@ -14,18 +14,19 @@
     <p:sldId id="324" r:id="rId5"/>
     <p:sldId id="326" r:id="rId6"/>
     <p:sldId id="325" r:id="rId7"/>
-    <p:sldId id="329" r:id="rId8"/>
-    <p:sldId id="328" r:id="rId9"/>
-    <p:sldId id="327" r:id="rId10"/>
-    <p:sldId id="322" r:id="rId11"/>
-    <p:sldId id="321" r:id="rId12"/>
-    <p:sldId id="308" r:id="rId13"/>
-    <p:sldId id="318" r:id="rId14"/>
-    <p:sldId id="319" r:id="rId15"/>
-    <p:sldId id="315" r:id="rId16"/>
-    <p:sldId id="317" r:id="rId17"/>
-    <p:sldId id="313" r:id="rId18"/>
-    <p:sldId id="316" r:id="rId19"/>
+    <p:sldId id="330" r:id="rId8"/>
+    <p:sldId id="329" r:id="rId9"/>
+    <p:sldId id="328" r:id="rId10"/>
+    <p:sldId id="327" r:id="rId11"/>
+    <p:sldId id="322" r:id="rId12"/>
+    <p:sldId id="321" r:id="rId13"/>
+    <p:sldId id="308" r:id="rId14"/>
+    <p:sldId id="318" r:id="rId15"/>
+    <p:sldId id="319" r:id="rId16"/>
+    <p:sldId id="315" r:id="rId17"/>
+    <p:sldId id="317" r:id="rId18"/>
+    <p:sldId id="313" r:id="rId19"/>
+    <p:sldId id="316" r:id="rId20"/>
   </p:sldIdLst>
   <p:sldSz cx="12192000" cy="6858000"/>
   <p:notesSz cx="6858000" cy="9144000"/>
@@ -214,7 +215,7 @@
           <a:p>
             <a:fld id="{23D8B80A-F233-4240-BDAF-6537AE249829}" type="datetimeFigureOut">
               <a:rPr lang="en-MY" smtClean="0"/>
-              <a:t>30/4/2026</a:t>
+              <a:t>6/5/2026</a:t>
             </a:fld>
             <a:endParaRPr lang="en-MY"/>
           </a:p>
@@ -574,6 +575,114 @@
         <p:cNvPr id="1" name="">
           <a:extLst>
             <a:ext uri="{FF2B5EF4-FFF2-40B4-BE49-F238E27FC236}">
+              <a16:creationId xmlns:a16="http://schemas.microsoft.com/office/drawing/2014/main" id="{760B0DA3-B6BD-4EFE-90F9-176D4D36867B}"/>
+            </a:ext>
+          </a:extLst>
+        </p:cNvPr>
+        <p:cNvGrpSpPr/>
+        <p:nvPr/>
+      </p:nvGrpSpPr>
+      <p:grpSpPr>
+        <a:xfrm>
+          <a:off x="0" y="0"/>
+          <a:ext cx="0" cy="0"/>
+          <a:chOff x="0" y="0"/>
+          <a:chExt cx="0" cy="0"/>
+        </a:xfrm>
+      </p:grpSpPr>
+      <p:sp>
+        <p:nvSpPr>
+          <p:cNvPr id="2" name="Slide Image Placeholder 1">
+            <a:extLst>
+              <a:ext uri="{FF2B5EF4-FFF2-40B4-BE49-F238E27FC236}">
+                <a16:creationId xmlns:a16="http://schemas.microsoft.com/office/drawing/2014/main" id="{EF2C6C26-27B8-DF79-8EDF-4AB016FBB81B}"/>
+              </a:ext>
+            </a:extLst>
+          </p:cNvPr>
+          <p:cNvSpPr>
+            <a:spLocks noGrp="1" noRot="1" noChangeAspect="1"/>
+          </p:cNvSpPr>
+          <p:nvPr>
+            <p:ph type="sldImg"/>
+          </p:nvPr>
+        </p:nvSpPr>
+        <p:spPr/>
+      </p:sp>
+      <p:sp>
+        <p:nvSpPr>
+          <p:cNvPr id="3" name="Notes Placeholder 2">
+            <a:extLst>
+              <a:ext uri="{FF2B5EF4-FFF2-40B4-BE49-F238E27FC236}">
+                <a16:creationId xmlns:a16="http://schemas.microsoft.com/office/drawing/2014/main" id="{61A80787-D40B-6096-611B-13772FD3FEF2}"/>
+              </a:ext>
+            </a:extLst>
+          </p:cNvPr>
+          <p:cNvSpPr>
+            <a:spLocks noGrp="1"/>
+          </p:cNvSpPr>
+          <p:nvPr>
+            <p:ph type="body" idx="1"/>
+          </p:nvPr>
+        </p:nvSpPr>
+        <p:spPr/>
+        <p:txBody>
+          <a:bodyPr/>
+          <a:lstStyle/>
+          <a:p>
+            <a:endParaRPr lang="en-MY" dirty="0"/>
+          </a:p>
+        </p:txBody>
+      </p:sp>
+      <p:sp>
+        <p:nvSpPr>
+          <p:cNvPr id="4" name="Slide Number Placeholder 3">
+            <a:extLst>
+              <a:ext uri="{FF2B5EF4-FFF2-40B4-BE49-F238E27FC236}">
+                <a16:creationId xmlns:a16="http://schemas.microsoft.com/office/drawing/2014/main" id="{2735CA75-2047-3865-5A46-147438F48E96}"/>
+              </a:ext>
+            </a:extLst>
+          </p:cNvPr>
+          <p:cNvSpPr>
+            <a:spLocks noGrp="1"/>
+          </p:cNvSpPr>
+          <p:nvPr>
+            <p:ph type="sldNum" sz="quarter" idx="5"/>
+          </p:nvPr>
+        </p:nvSpPr>
+        <p:spPr/>
+        <p:txBody>
+          <a:bodyPr/>
+          <a:lstStyle/>
+          <a:p>
+            <a:fld id="{D16833E0-5E66-4D1D-89F5-BD860FDD8F71}" type="slidenum">
+              <a:rPr lang="en-MY" smtClean="0"/>
+              <a:t>11</a:t>
+            </a:fld>
+            <a:endParaRPr lang="en-MY"/>
+          </a:p>
+        </p:txBody>
+      </p:sp>
+    </p:spTree>
+    <p:extLst>
+      <p:ext uri="{BB962C8B-B14F-4D97-AF65-F5344CB8AC3E}">
+        <p14:creationId xmlns:p14="http://schemas.microsoft.com/office/powerpoint/2010/main" val="1721200387"/>
+      </p:ext>
+    </p:extLst>
+  </p:cSld>
+  <p:clrMapOvr>
+    <a:masterClrMapping/>
+  </p:clrMapOvr>
+</p:notes>
+</file>
+
+<file path=ppt/notesSlides/notesSlide11.xml><?xml version="1.0" encoding="utf-8"?>
+<p:notes xmlns:a="http://schemas.openxmlformats.org/drawingml/2006/main" xmlns:r="http://schemas.openxmlformats.org/officeDocument/2006/relationships" xmlns:p="http://schemas.openxmlformats.org/presentationml/2006/main">
+  <p:cSld>
+    <p:spTree>
+      <p:nvGrpSpPr>
+        <p:cNvPr id="1" name="">
+          <a:extLst>
+            <a:ext uri="{FF2B5EF4-FFF2-40B4-BE49-F238E27FC236}">
               <a16:creationId xmlns:a16="http://schemas.microsoft.com/office/drawing/2014/main" id="{C3584F9D-DF34-D68D-5A96-B29CB925814B}"/>
             </a:ext>
           </a:extLst>
@@ -655,7 +764,7 @@
           <a:p>
             <a:fld id="{D16833E0-5E66-4D1D-89F5-BD860FDD8F71}" type="slidenum">
               <a:rPr lang="en-MY" smtClean="0"/>
-              <a:t>11</a:t>
+              <a:t>12</a:t>
             </a:fld>
             <a:endParaRPr lang="en-MY"/>
           </a:p>
@@ -674,7 +783,7 @@
 </p:notes>
 </file>
 
-<file path=ppt/notesSlides/notesSlide11.xml><?xml version="1.0" encoding="utf-8"?>
+<file path=ppt/notesSlides/notesSlide12.xml><?xml version="1.0" encoding="utf-8"?>
 <p:notes xmlns:a="http://schemas.openxmlformats.org/drawingml/2006/main" xmlns:r="http://schemas.openxmlformats.org/officeDocument/2006/relationships" xmlns:p="http://schemas.openxmlformats.org/presentationml/2006/main">
   <p:cSld>
     <p:spTree>
@@ -763,7 +872,7 @@
           <a:p>
             <a:fld id="{D16833E0-5E66-4D1D-89F5-BD860FDD8F71}" type="slidenum">
               <a:rPr lang="en-MY" smtClean="0"/>
-              <a:t>12</a:t>
+              <a:t>13</a:t>
             </a:fld>
             <a:endParaRPr lang="en-MY"/>
           </a:p>
@@ -782,7 +891,7 @@
 </p:notes>
 </file>
 
-<file path=ppt/notesSlides/notesSlide12.xml><?xml version="1.0" encoding="utf-8"?>
+<file path=ppt/notesSlides/notesSlide13.xml><?xml version="1.0" encoding="utf-8"?>
 <p:notes xmlns:a="http://schemas.openxmlformats.org/drawingml/2006/main" xmlns:r="http://schemas.openxmlformats.org/officeDocument/2006/relationships" xmlns:p="http://schemas.openxmlformats.org/presentationml/2006/main">
   <p:cSld>
     <p:spTree>
@@ -871,7 +980,7 @@
           <a:p>
             <a:fld id="{D16833E0-5E66-4D1D-89F5-BD860FDD8F71}" type="slidenum">
               <a:rPr lang="en-MY" smtClean="0"/>
-              <a:t>13</a:t>
+              <a:t>14</a:t>
             </a:fld>
             <a:endParaRPr lang="en-MY"/>
           </a:p>
@@ -890,7 +999,7 @@
 </p:notes>
 </file>
 
-<file path=ppt/notesSlides/notesSlide13.xml><?xml version="1.0" encoding="utf-8"?>
+<file path=ppt/notesSlides/notesSlide14.xml><?xml version="1.0" encoding="utf-8"?>
 <p:notes xmlns:a="http://schemas.openxmlformats.org/drawingml/2006/main" xmlns:r="http://schemas.openxmlformats.org/officeDocument/2006/relationships" xmlns:p="http://schemas.openxmlformats.org/presentationml/2006/main">
   <p:cSld>
     <p:spTree>
@@ -979,7 +1088,7 @@
           <a:p>
             <a:fld id="{D16833E0-5E66-4D1D-89F5-BD860FDD8F71}" type="slidenum">
               <a:rPr lang="en-MY" smtClean="0"/>
-              <a:t>14</a:t>
+              <a:t>15</a:t>
             </a:fld>
             <a:endParaRPr lang="en-MY"/>
           </a:p>
@@ -998,7 +1107,7 @@
 </p:notes>
 </file>
 
-<file path=ppt/notesSlides/notesSlide14.xml><?xml version="1.0" encoding="utf-8"?>
+<file path=ppt/notesSlides/notesSlide15.xml><?xml version="1.0" encoding="utf-8"?>
 <p:notes xmlns:a="http://schemas.openxmlformats.org/drawingml/2006/main" xmlns:r="http://schemas.openxmlformats.org/officeDocument/2006/relationships" xmlns:p="http://schemas.openxmlformats.org/presentationml/2006/main">
   <p:cSld>
     <p:spTree>
@@ -1087,7 +1196,7 @@
           <a:p>
             <a:fld id="{D16833E0-5E66-4D1D-89F5-BD860FDD8F71}" type="slidenum">
               <a:rPr lang="en-MY" smtClean="0"/>
-              <a:t>15</a:t>
+              <a:t>16</a:t>
             </a:fld>
             <a:endParaRPr lang="en-MY"/>
           </a:p>
@@ -1106,7 +1215,7 @@
 </p:notes>
 </file>
 
-<file path=ppt/notesSlides/notesSlide15.xml><?xml version="1.0" encoding="utf-8"?>
+<file path=ppt/notesSlides/notesSlide16.xml><?xml version="1.0" encoding="utf-8"?>
 <p:notes xmlns:a="http://schemas.openxmlformats.org/drawingml/2006/main" xmlns:r="http://schemas.openxmlformats.org/officeDocument/2006/relationships" xmlns:p="http://schemas.openxmlformats.org/presentationml/2006/main">
   <p:cSld>
     <p:spTree>
@@ -1195,7 +1304,7 @@
           <a:p>
             <a:fld id="{D16833E0-5E66-4D1D-89F5-BD860FDD8F71}" type="slidenum">
               <a:rPr lang="en-MY" smtClean="0"/>
-              <a:t>16</a:t>
+              <a:t>17</a:t>
             </a:fld>
             <a:endParaRPr lang="en-MY"/>
           </a:p>
@@ -1214,7 +1323,7 @@
 </p:notes>
 </file>
 
-<file path=ppt/notesSlides/notesSlide16.xml><?xml version="1.0" encoding="utf-8"?>
+<file path=ppt/notesSlides/notesSlide17.xml><?xml version="1.0" encoding="utf-8"?>
 <p:notes xmlns:a="http://schemas.openxmlformats.org/drawingml/2006/main" xmlns:r="http://schemas.openxmlformats.org/officeDocument/2006/relationships" xmlns:p="http://schemas.openxmlformats.org/presentationml/2006/main">
   <p:cSld>
     <p:spTree>
@@ -1303,7 +1412,7 @@
           <a:p>
             <a:fld id="{D16833E0-5E66-4D1D-89F5-BD860FDD8F71}" type="slidenum">
               <a:rPr lang="en-MY" smtClean="0"/>
-              <a:t>17</a:t>
+              <a:t>18</a:t>
             </a:fld>
             <a:endParaRPr lang="en-MY"/>
           </a:p>
@@ -1322,7 +1431,7 @@
 </p:notes>
 </file>
 
-<file path=ppt/notesSlides/notesSlide17.xml><?xml version="1.0" encoding="utf-8"?>
+<file path=ppt/notesSlides/notesSlide18.xml><?xml version="1.0" encoding="utf-8"?>
 <p:notes xmlns:a="http://schemas.openxmlformats.org/drawingml/2006/main" xmlns:r="http://schemas.openxmlformats.org/officeDocument/2006/relationships" xmlns:p="http://schemas.openxmlformats.org/presentationml/2006/main">
   <p:cSld>
     <p:spTree>
@@ -1411,7 +1520,7 @@
           <a:p>
             <a:fld id="{D16833E0-5E66-4D1D-89F5-BD860FDD8F71}" type="slidenum">
               <a:rPr lang="en-MY" smtClean="0"/>
-              <a:t>18</a:t>
+              <a:t>19</a:t>
             </a:fld>
             <a:endParaRPr lang="en-MY"/>
           </a:p>
@@ -1870,6 +1979,114 @@
         <p:cNvPr id="1" name="">
           <a:extLst>
             <a:ext uri="{FF2B5EF4-FFF2-40B4-BE49-F238E27FC236}">
+              <a16:creationId xmlns:a16="http://schemas.microsoft.com/office/drawing/2014/main" id="{8AC23F3C-9F52-E969-49A3-3C9CC016D8D9}"/>
+            </a:ext>
+          </a:extLst>
+        </p:cNvPr>
+        <p:cNvGrpSpPr/>
+        <p:nvPr/>
+      </p:nvGrpSpPr>
+      <p:grpSpPr>
+        <a:xfrm>
+          <a:off x="0" y="0"/>
+          <a:ext cx="0" cy="0"/>
+          <a:chOff x="0" y="0"/>
+          <a:chExt cx="0" cy="0"/>
+        </a:xfrm>
+      </p:grpSpPr>
+      <p:sp>
+        <p:nvSpPr>
+          <p:cNvPr id="2" name="Slide Image Placeholder 1">
+            <a:extLst>
+              <a:ext uri="{FF2B5EF4-FFF2-40B4-BE49-F238E27FC236}">
+                <a16:creationId xmlns:a16="http://schemas.microsoft.com/office/drawing/2014/main" id="{8AA5056C-0FD1-4E15-DF1B-CFF1B4E719D0}"/>
+              </a:ext>
+            </a:extLst>
+          </p:cNvPr>
+          <p:cNvSpPr>
+            <a:spLocks noGrp="1" noRot="1" noChangeAspect="1"/>
+          </p:cNvSpPr>
+          <p:nvPr>
+            <p:ph type="sldImg"/>
+          </p:nvPr>
+        </p:nvSpPr>
+        <p:spPr/>
+      </p:sp>
+      <p:sp>
+        <p:nvSpPr>
+          <p:cNvPr id="3" name="Notes Placeholder 2">
+            <a:extLst>
+              <a:ext uri="{FF2B5EF4-FFF2-40B4-BE49-F238E27FC236}">
+                <a16:creationId xmlns:a16="http://schemas.microsoft.com/office/drawing/2014/main" id="{874D3FB6-0727-E2C2-75AC-B66030207A5D}"/>
+              </a:ext>
+            </a:extLst>
+          </p:cNvPr>
+          <p:cNvSpPr>
+            <a:spLocks noGrp="1"/>
+          </p:cNvSpPr>
+          <p:nvPr>
+            <p:ph type="body" idx="1"/>
+          </p:nvPr>
+        </p:nvSpPr>
+        <p:spPr/>
+        <p:txBody>
+          <a:bodyPr/>
+          <a:lstStyle/>
+          <a:p>
+            <a:endParaRPr lang="en-MY" dirty="0"/>
+          </a:p>
+        </p:txBody>
+      </p:sp>
+      <p:sp>
+        <p:nvSpPr>
+          <p:cNvPr id="4" name="Slide Number Placeholder 3">
+            <a:extLst>
+              <a:ext uri="{FF2B5EF4-FFF2-40B4-BE49-F238E27FC236}">
+                <a16:creationId xmlns:a16="http://schemas.microsoft.com/office/drawing/2014/main" id="{B4548EB5-BACE-0833-2F10-5FF74ECB5951}"/>
+              </a:ext>
+            </a:extLst>
+          </p:cNvPr>
+          <p:cNvSpPr>
+            <a:spLocks noGrp="1"/>
+          </p:cNvSpPr>
+          <p:nvPr>
+            <p:ph type="sldNum" sz="quarter" idx="5"/>
+          </p:nvPr>
+        </p:nvSpPr>
+        <p:spPr/>
+        <p:txBody>
+          <a:bodyPr/>
+          <a:lstStyle/>
+          <a:p>
+            <a:fld id="{D16833E0-5E66-4D1D-89F5-BD860FDD8F71}" type="slidenum">
+              <a:rPr lang="en-MY" smtClean="0"/>
+              <a:t>7</a:t>
+            </a:fld>
+            <a:endParaRPr lang="en-MY"/>
+          </a:p>
+        </p:txBody>
+      </p:sp>
+    </p:spTree>
+    <p:extLst>
+      <p:ext uri="{BB962C8B-B14F-4D97-AF65-F5344CB8AC3E}">
+        <p14:creationId xmlns:p14="http://schemas.microsoft.com/office/powerpoint/2010/main" val="3099366044"/>
+      </p:ext>
+    </p:extLst>
+  </p:cSld>
+  <p:clrMapOvr>
+    <a:masterClrMapping/>
+  </p:clrMapOvr>
+</p:notes>
+</file>
+
+<file path=ppt/notesSlides/notesSlide7.xml><?xml version="1.0" encoding="utf-8"?>
+<p:notes xmlns:a="http://schemas.openxmlformats.org/drawingml/2006/main" xmlns:r="http://schemas.openxmlformats.org/officeDocument/2006/relationships" xmlns:p="http://schemas.openxmlformats.org/presentationml/2006/main">
+  <p:cSld>
+    <p:spTree>
+      <p:nvGrpSpPr>
+        <p:cNvPr id="1" name="">
+          <a:extLst>
+            <a:ext uri="{FF2B5EF4-FFF2-40B4-BE49-F238E27FC236}">
               <a16:creationId xmlns:a16="http://schemas.microsoft.com/office/drawing/2014/main" id="{5DF51BCA-D6CF-8A81-1124-AC45526060B0}"/>
             </a:ext>
           </a:extLst>
@@ -1951,7 +2168,7 @@
           <a:p>
             <a:fld id="{D16833E0-5E66-4D1D-89F5-BD860FDD8F71}" type="slidenum">
               <a:rPr lang="en-MY" smtClean="0"/>
-              <a:t>7</a:t>
+              <a:t>8</a:t>
             </a:fld>
             <a:endParaRPr lang="en-MY"/>
           </a:p>
@@ -1970,7 +2187,7 @@
 </p:notes>
 </file>
 
-<file path=ppt/notesSlides/notesSlide7.xml><?xml version="1.0" encoding="utf-8"?>
+<file path=ppt/notesSlides/notesSlide8.xml><?xml version="1.0" encoding="utf-8"?>
 <p:notes xmlns:a="http://schemas.openxmlformats.org/drawingml/2006/main" xmlns:r="http://schemas.openxmlformats.org/officeDocument/2006/relationships" xmlns:p="http://schemas.openxmlformats.org/presentationml/2006/main">
   <p:cSld>
     <p:spTree>
@@ -2059,7 +2276,7 @@
           <a:p>
             <a:fld id="{D16833E0-5E66-4D1D-89F5-BD860FDD8F71}" type="slidenum">
               <a:rPr lang="en-MY" smtClean="0"/>
-              <a:t>8</a:t>
+              <a:t>9</a:t>
             </a:fld>
             <a:endParaRPr lang="en-MY"/>
           </a:p>
@@ -2078,7 +2295,7 @@
 </p:notes>
 </file>
 
-<file path=ppt/notesSlides/notesSlide8.xml><?xml version="1.0" encoding="utf-8"?>
+<file path=ppt/notesSlides/notesSlide9.xml><?xml version="1.0" encoding="utf-8"?>
 <p:notes xmlns:a="http://schemas.openxmlformats.org/drawingml/2006/main" xmlns:r="http://schemas.openxmlformats.org/officeDocument/2006/relationships" xmlns:p="http://schemas.openxmlformats.org/presentationml/2006/main">
   <p:cSld>
     <p:spTree>
@@ -2167,7 +2384,7 @@
           <a:p>
             <a:fld id="{D16833E0-5E66-4D1D-89F5-BD860FDD8F71}" type="slidenum">
               <a:rPr lang="en-MY" smtClean="0"/>
-              <a:t>9</a:t>
+              <a:t>10</a:t>
             </a:fld>
             <a:endParaRPr lang="en-MY"/>
           </a:p>
@@ -2177,114 +2394,6 @@
     <p:extLst>
       <p:ext uri="{BB962C8B-B14F-4D97-AF65-F5344CB8AC3E}">
         <p14:creationId xmlns:p14="http://schemas.microsoft.com/office/powerpoint/2010/main" val="1599132718"/>
-      </p:ext>
-    </p:extLst>
-  </p:cSld>
-  <p:clrMapOvr>
-    <a:masterClrMapping/>
-  </p:clrMapOvr>
-</p:notes>
-</file>
-
-<file path=ppt/notesSlides/notesSlide9.xml><?xml version="1.0" encoding="utf-8"?>
-<p:notes xmlns:a="http://schemas.openxmlformats.org/drawingml/2006/main" xmlns:r="http://schemas.openxmlformats.org/officeDocument/2006/relationships" xmlns:p="http://schemas.openxmlformats.org/presentationml/2006/main">
-  <p:cSld>
-    <p:spTree>
-      <p:nvGrpSpPr>
-        <p:cNvPr id="1" name="">
-          <a:extLst>
-            <a:ext uri="{FF2B5EF4-FFF2-40B4-BE49-F238E27FC236}">
-              <a16:creationId xmlns:a16="http://schemas.microsoft.com/office/drawing/2014/main" id="{760B0DA3-B6BD-4EFE-90F9-176D4D36867B}"/>
-            </a:ext>
-          </a:extLst>
-        </p:cNvPr>
-        <p:cNvGrpSpPr/>
-        <p:nvPr/>
-      </p:nvGrpSpPr>
-      <p:grpSpPr>
-        <a:xfrm>
-          <a:off x="0" y="0"/>
-          <a:ext cx="0" cy="0"/>
-          <a:chOff x="0" y="0"/>
-          <a:chExt cx="0" cy="0"/>
-        </a:xfrm>
-      </p:grpSpPr>
-      <p:sp>
-        <p:nvSpPr>
-          <p:cNvPr id="2" name="Slide Image Placeholder 1">
-            <a:extLst>
-              <a:ext uri="{FF2B5EF4-FFF2-40B4-BE49-F238E27FC236}">
-                <a16:creationId xmlns:a16="http://schemas.microsoft.com/office/drawing/2014/main" id="{EF2C6C26-27B8-DF79-8EDF-4AB016FBB81B}"/>
-              </a:ext>
-            </a:extLst>
-          </p:cNvPr>
-          <p:cNvSpPr>
-            <a:spLocks noGrp="1" noRot="1" noChangeAspect="1"/>
-          </p:cNvSpPr>
-          <p:nvPr>
-            <p:ph type="sldImg"/>
-          </p:nvPr>
-        </p:nvSpPr>
-        <p:spPr/>
-      </p:sp>
-      <p:sp>
-        <p:nvSpPr>
-          <p:cNvPr id="3" name="Notes Placeholder 2">
-            <a:extLst>
-              <a:ext uri="{FF2B5EF4-FFF2-40B4-BE49-F238E27FC236}">
-                <a16:creationId xmlns:a16="http://schemas.microsoft.com/office/drawing/2014/main" id="{61A80787-D40B-6096-611B-13772FD3FEF2}"/>
-              </a:ext>
-            </a:extLst>
-          </p:cNvPr>
-          <p:cNvSpPr>
-            <a:spLocks noGrp="1"/>
-          </p:cNvSpPr>
-          <p:nvPr>
-            <p:ph type="body" idx="1"/>
-          </p:nvPr>
-        </p:nvSpPr>
-        <p:spPr/>
-        <p:txBody>
-          <a:bodyPr/>
-          <a:lstStyle/>
-          <a:p>
-            <a:endParaRPr lang="en-MY" dirty="0"/>
-          </a:p>
-        </p:txBody>
-      </p:sp>
-      <p:sp>
-        <p:nvSpPr>
-          <p:cNvPr id="4" name="Slide Number Placeholder 3">
-            <a:extLst>
-              <a:ext uri="{FF2B5EF4-FFF2-40B4-BE49-F238E27FC236}">
-                <a16:creationId xmlns:a16="http://schemas.microsoft.com/office/drawing/2014/main" id="{2735CA75-2047-3865-5A46-147438F48E96}"/>
-              </a:ext>
-            </a:extLst>
-          </p:cNvPr>
-          <p:cNvSpPr>
-            <a:spLocks noGrp="1"/>
-          </p:cNvSpPr>
-          <p:nvPr>
-            <p:ph type="sldNum" sz="quarter" idx="5"/>
-          </p:nvPr>
-        </p:nvSpPr>
-        <p:spPr/>
-        <p:txBody>
-          <a:bodyPr/>
-          <a:lstStyle/>
-          <a:p>
-            <a:fld id="{D16833E0-5E66-4D1D-89F5-BD860FDD8F71}" type="slidenum">
-              <a:rPr lang="en-MY" smtClean="0"/>
-              <a:t>10</a:t>
-            </a:fld>
-            <a:endParaRPr lang="en-MY"/>
-          </a:p>
-        </p:txBody>
-      </p:sp>
-    </p:spTree>
-    <p:extLst>
-      <p:ext uri="{BB962C8B-B14F-4D97-AF65-F5344CB8AC3E}">
-        <p14:creationId xmlns:p14="http://schemas.microsoft.com/office/powerpoint/2010/main" val="1721200387"/>
       </p:ext>
     </p:extLst>
   </p:cSld>
@@ -2465,7 +2574,7 @@
           <a:p>
             <a:fld id="{1CD01395-AC05-405C-BAB9-E5D2B9FDBB40}" type="datetimeFigureOut">
               <a:rPr lang="en-MY" smtClean="0"/>
-              <a:t>30/4/2026</a:t>
+              <a:t>6/5/2026</a:t>
             </a:fld>
             <a:endParaRPr lang="en-MY"/>
           </a:p>
@@ -2780,7 +2889,7 @@
           <a:p>
             <a:fld id="{1CD01395-AC05-405C-BAB9-E5D2B9FDBB40}" type="datetimeFigureOut">
               <a:rPr lang="en-MY" smtClean="0"/>
-              <a:t>30/4/2026</a:t>
+              <a:t>6/5/2026</a:t>
             </a:fld>
             <a:endParaRPr lang="en-MY"/>
           </a:p>
@@ -3002,7 +3111,7 @@
           <a:p>
             <a:fld id="{1CD01395-AC05-405C-BAB9-E5D2B9FDBB40}" type="datetimeFigureOut">
               <a:rPr lang="en-MY" smtClean="0"/>
-              <a:t>30/4/2026</a:t>
+              <a:t>6/5/2026</a:t>
             </a:fld>
             <a:endParaRPr lang="en-MY"/>
           </a:p>
@@ -3293,7 +3402,7 @@
           <a:p>
             <a:fld id="{1CD01395-AC05-405C-BAB9-E5D2B9FDBB40}" type="datetimeFigureOut">
               <a:rPr lang="en-MY" smtClean="0"/>
-              <a:t>30/4/2026</a:t>
+              <a:t>6/5/2026</a:t>
             </a:fld>
             <a:endParaRPr lang="en-MY"/>
           </a:p>
@@ -3747,7 +3856,7 @@
           <a:p>
             <a:fld id="{1CD01395-AC05-405C-BAB9-E5D2B9FDBB40}" type="datetimeFigureOut">
               <a:rPr lang="en-MY" smtClean="0"/>
-              <a:t>30/4/2026</a:t>
+              <a:t>6/5/2026</a:t>
             </a:fld>
             <a:endParaRPr lang="en-MY"/>
           </a:p>
@@ -4323,7 +4432,7 @@
           <a:p>
             <a:fld id="{1CD01395-AC05-405C-BAB9-E5D2B9FDBB40}" type="datetimeFigureOut">
               <a:rPr lang="en-MY" smtClean="0"/>
-              <a:t>30/4/2026</a:t>
+              <a:t>6/5/2026</a:t>
             </a:fld>
             <a:endParaRPr lang="en-MY"/>
           </a:p>
@@ -5184,7 +5293,7 @@
           <a:p>
             <a:fld id="{1CD01395-AC05-405C-BAB9-E5D2B9FDBB40}" type="datetimeFigureOut">
               <a:rPr lang="en-MY" smtClean="0"/>
-              <a:t>30/4/2026</a:t>
+              <a:t>6/5/2026</a:t>
             </a:fld>
             <a:endParaRPr lang="en-MY"/>
           </a:p>
@@ -5389,7 +5498,7 @@
           <a:p>
             <a:fld id="{1CD01395-AC05-405C-BAB9-E5D2B9FDBB40}" type="datetimeFigureOut">
               <a:rPr lang="en-MY" smtClean="0"/>
-              <a:t>30/4/2026</a:t>
+              <a:t>6/5/2026</a:t>
             </a:fld>
             <a:endParaRPr lang="en-MY"/>
           </a:p>
@@ -5603,7 +5712,7 @@
           <a:p>
             <a:fld id="{1CD01395-AC05-405C-BAB9-E5D2B9FDBB40}" type="datetimeFigureOut">
               <a:rPr lang="en-MY" smtClean="0"/>
-              <a:t>30/4/2026</a:t>
+              <a:t>6/5/2026</a:t>
             </a:fld>
             <a:endParaRPr lang="en-MY"/>
           </a:p>
@@ -5808,7 +5917,7 @@
           <a:p>
             <a:fld id="{1CD01395-AC05-405C-BAB9-E5D2B9FDBB40}" type="datetimeFigureOut">
               <a:rPr lang="en-MY" smtClean="0"/>
-              <a:t>30/4/2026</a:t>
+              <a:t>6/5/2026</a:t>
             </a:fld>
             <a:endParaRPr lang="en-MY"/>
           </a:p>
@@ -6088,7 +6197,7 @@
           <a:p>
             <a:fld id="{1CD01395-AC05-405C-BAB9-E5D2B9FDBB40}" type="datetimeFigureOut">
               <a:rPr lang="en-MY" smtClean="0"/>
-              <a:t>30/4/2026</a:t>
+              <a:t>6/5/2026</a:t>
             </a:fld>
             <a:endParaRPr lang="en-MY"/>
           </a:p>
@@ -6355,7 +6464,7 @@
           <a:p>
             <a:fld id="{1CD01395-AC05-405C-BAB9-E5D2B9FDBB40}" type="datetimeFigureOut">
               <a:rPr lang="en-MY" smtClean="0"/>
-              <a:t>30/4/2026</a:t>
+              <a:t>6/5/2026</a:t>
             </a:fld>
             <a:endParaRPr lang="en-MY"/>
           </a:p>
@@ -6770,7 +6879,7 @@
           <a:p>
             <a:fld id="{1CD01395-AC05-405C-BAB9-E5D2B9FDBB40}" type="datetimeFigureOut">
               <a:rPr lang="en-MY" smtClean="0"/>
-              <a:t>30/4/2026</a:t>
+              <a:t>6/5/2026</a:t>
             </a:fld>
             <a:endParaRPr lang="en-MY"/>
           </a:p>
@@ -6918,7 +7027,7 @@
           <a:p>
             <a:fld id="{1CD01395-AC05-405C-BAB9-E5D2B9FDBB40}" type="datetimeFigureOut">
               <a:rPr lang="en-MY" smtClean="0"/>
-              <a:t>30/4/2026</a:t>
+              <a:t>6/5/2026</a:t>
             </a:fld>
             <a:endParaRPr lang="en-MY"/>
           </a:p>
@@ -7043,7 +7152,7 @@
           <a:p>
             <a:fld id="{1CD01395-AC05-405C-BAB9-E5D2B9FDBB40}" type="datetimeFigureOut">
               <a:rPr lang="en-MY" smtClean="0"/>
-              <a:t>30/4/2026</a:t>
+              <a:t>6/5/2026</a:t>
             </a:fld>
             <a:endParaRPr lang="en-MY"/>
           </a:p>
@@ -7322,7 +7431,7 @@
           <a:p>
             <a:fld id="{1CD01395-AC05-405C-BAB9-E5D2B9FDBB40}" type="datetimeFigureOut">
               <a:rPr lang="en-MY" smtClean="0"/>
-              <a:t>30/4/2026</a:t>
+              <a:t>6/5/2026</a:t>
             </a:fld>
             <a:endParaRPr lang="en-MY"/>
           </a:p>
@@ -7637,7 +7746,7 @@
           <a:p>
             <a:fld id="{1CD01395-AC05-405C-BAB9-E5D2B9FDBB40}" type="datetimeFigureOut">
               <a:rPr lang="en-MY" smtClean="0"/>
-              <a:t>30/4/2026</a:t>
+              <a:t>6/5/2026</a:t>
             </a:fld>
             <a:endParaRPr lang="en-MY"/>
           </a:p>
@@ -7890,7 +7999,7 @@
           <a:p>
             <a:fld id="{1CD01395-AC05-405C-BAB9-E5D2B9FDBB40}" type="datetimeFigureOut">
               <a:rPr lang="en-MY" smtClean="0"/>
-              <a:t>30/4/2026</a:t>
+              <a:t>6/5/2026</a:t>
             </a:fld>
             <a:endParaRPr lang="en-MY"/>
           </a:p>
@@ -8416,6 +8525,111 @@
   <p:cSld>
     <p:bg>
       <p:bgPr>
+        <a:solidFill>
+          <a:srgbClr val="CDF6F9"/>
+        </a:solidFill>
+        <a:effectLst/>
+      </p:bgPr>
+    </p:bg>
+    <p:spTree>
+      <p:nvGrpSpPr>
+        <p:cNvPr id="1" name="">
+          <a:extLst>
+            <a:ext uri="{FF2B5EF4-FFF2-40B4-BE49-F238E27FC236}">
+              <a16:creationId xmlns:a16="http://schemas.microsoft.com/office/drawing/2014/main" id="{58E68DF9-9D3D-F010-53FB-6A72464ACF27}"/>
+            </a:ext>
+          </a:extLst>
+        </p:cNvPr>
+        <p:cNvGrpSpPr/>
+        <p:nvPr/>
+      </p:nvGrpSpPr>
+      <p:grpSpPr>
+        <a:xfrm>
+          <a:off x="0" y="0"/>
+          <a:ext cx="0" cy="0"/>
+          <a:chOff x="0" y="0"/>
+          <a:chExt cx="0" cy="0"/>
+        </a:xfrm>
+      </p:grpSpPr>
+      <p:pic>
+        <p:nvPicPr>
+          <p:cNvPr id="6" name="Picture 5">
+            <a:extLst>
+              <a:ext uri="{FF2B5EF4-FFF2-40B4-BE49-F238E27FC236}">
+                <a16:creationId xmlns:a16="http://schemas.microsoft.com/office/drawing/2014/main" id="{FE39C31F-E5A2-7795-A7FA-E1F5E00A70A7}"/>
+              </a:ext>
+            </a:extLst>
+          </p:cNvPr>
+          <p:cNvPicPr>
+            <a:picLocks noChangeAspect="1"/>
+          </p:cNvPicPr>
+          <p:nvPr/>
+        </p:nvPicPr>
+        <p:blipFill>
+          <a:blip r:embed="rId3"/>
+          <a:stretch>
+            <a:fillRect/>
+          </a:stretch>
+        </p:blipFill>
+        <p:spPr>
+          <a:xfrm>
+            <a:off x="7013359" y="153393"/>
+            <a:ext cx="4444074" cy="6569501"/>
+          </a:xfrm>
+          <a:prstGeom prst="rect">
+            <a:avLst/>
+          </a:prstGeom>
+        </p:spPr>
+      </p:pic>
+      <p:pic>
+        <p:nvPicPr>
+          <p:cNvPr id="8" name="Picture 7">
+            <a:extLst>
+              <a:ext uri="{FF2B5EF4-FFF2-40B4-BE49-F238E27FC236}">
+                <a16:creationId xmlns:a16="http://schemas.microsoft.com/office/drawing/2014/main" id="{F4AE3FA1-DB72-74DB-ADFA-01033F972B3F}"/>
+              </a:ext>
+            </a:extLst>
+          </p:cNvPr>
+          <p:cNvPicPr>
+            <a:picLocks noChangeAspect="1"/>
+          </p:cNvPicPr>
+          <p:nvPr/>
+        </p:nvPicPr>
+        <p:blipFill>
+          <a:blip r:embed="rId4"/>
+          <a:srcRect r="57064"/>
+          <a:stretch>
+            <a:fillRect/>
+          </a:stretch>
+        </p:blipFill>
+        <p:spPr>
+          <a:xfrm>
+            <a:off x="2139697" y="345417"/>
+            <a:ext cx="4063597" cy="4473471"/>
+          </a:xfrm>
+          <a:prstGeom prst="rect">
+            <a:avLst/>
+          </a:prstGeom>
+        </p:spPr>
+      </p:pic>
+    </p:spTree>
+    <p:extLst>
+      <p:ext uri="{BB962C8B-B14F-4D97-AF65-F5344CB8AC3E}">
+        <p14:creationId xmlns:p14="http://schemas.microsoft.com/office/powerpoint/2010/main" val="1869276804"/>
+      </p:ext>
+    </p:extLst>
+  </p:cSld>
+  <p:clrMapOvr>
+    <a:masterClrMapping/>
+  </p:clrMapOvr>
+</p:sld>
+</file>
+
+<file path=ppt/slides/slide11.xml><?xml version="1.0" encoding="utf-8"?>
+<p:sld xmlns:a="http://schemas.openxmlformats.org/drawingml/2006/main" xmlns:r="http://schemas.openxmlformats.org/officeDocument/2006/relationships" xmlns:p="http://schemas.openxmlformats.org/presentationml/2006/main" showMasterSp="0">
+  <p:cSld>
+    <p:bg>
+      <p:bgPr>
         <a:gradFill>
           <a:gsLst>
             <a:gs pos="0">
@@ -10068,7 +10282,7 @@
 </p:sld>
 </file>
 
-<file path=ppt/slides/slide11.xml><?xml version="1.0" encoding="utf-8"?>
+<file path=ppt/slides/slide12.xml><?xml version="1.0" encoding="utf-8"?>
 <p:sld xmlns:a="http://schemas.openxmlformats.org/drawingml/2006/main" xmlns:r="http://schemas.openxmlformats.org/officeDocument/2006/relationships" xmlns:p="http://schemas.openxmlformats.org/presentationml/2006/main" showMasterSp="0">
   <p:cSld>
     <p:bg>
@@ -11463,7 +11677,7 @@
 </p:sld>
 </file>
 
-<file path=ppt/slides/slide12.xml><?xml version="1.0" encoding="utf-8"?>
+<file path=ppt/slides/slide13.xml><?xml version="1.0" encoding="utf-8"?>
 <p:sld xmlns:a="http://schemas.openxmlformats.org/drawingml/2006/main" xmlns:r="http://schemas.openxmlformats.org/officeDocument/2006/relationships" xmlns:p="http://schemas.openxmlformats.org/presentationml/2006/main" showMasterSp="0">
   <p:cSld>
     <p:bg>
@@ -11558,7 +11772,7 @@
 </p:sld>
 </file>
 
-<file path=ppt/slides/slide13.xml><?xml version="1.0" encoding="utf-8"?>
+<file path=ppt/slides/slide14.xml><?xml version="1.0" encoding="utf-8"?>
 <p:sld xmlns:a="http://schemas.openxmlformats.org/drawingml/2006/main" xmlns:r="http://schemas.openxmlformats.org/officeDocument/2006/relationships" xmlns:p="http://schemas.openxmlformats.org/presentationml/2006/main" showMasterSp="0">
   <p:cSld>
     <p:bg>
@@ -12174,7 +12388,7 @@
 </p:sld>
 </file>
 
-<file path=ppt/slides/slide14.xml><?xml version="1.0" encoding="utf-8"?>
+<file path=ppt/slides/slide15.xml><?xml version="1.0" encoding="utf-8"?>
 <p:sld xmlns:a="http://schemas.openxmlformats.org/drawingml/2006/main" xmlns:r="http://schemas.openxmlformats.org/officeDocument/2006/relationships" xmlns:p="http://schemas.openxmlformats.org/presentationml/2006/main" showMasterSp="0">
   <p:cSld>
     <p:bg>
@@ -12269,7 +12483,7 @@
 </p:sld>
 </file>
 
-<file path=ppt/slides/slide15.xml><?xml version="1.0" encoding="utf-8"?>
+<file path=ppt/slides/slide16.xml><?xml version="1.0" encoding="utf-8"?>
 <p:sld xmlns:a="http://schemas.openxmlformats.org/drawingml/2006/main" xmlns:r="http://schemas.openxmlformats.org/officeDocument/2006/relationships" xmlns:p="http://schemas.openxmlformats.org/presentationml/2006/main" showMasterSp="0">
   <p:cSld>
     <p:bg>
@@ -12508,7 +12722,7 @@
 </p:sld>
 </file>
 
-<file path=ppt/slides/slide16.xml><?xml version="1.0" encoding="utf-8"?>
+<file path=ppt/slides/slide17.xml><?xml version="1.0" encoding="utf-8"?>
 <p:sld xmlns:a="http://schemas.openxmlformats.org/drawingml/2006/main" xmlns:r="http://schemas.openxmlformats.org/officeDocument/2006/relationships" xmlns:p="http://schemas.openxmlformats.org/presentationml/2006/main" showMasterSp="0">
   <p:cSld>
     <p:bg>
@@ -12738,7 +12952,7 @@
 </p:sld>
 </file>
 
-<file path=ppt/slides/slide17.xml><?xml version="1.0" encoding="utf-8"?>
+<file path=ppt/slides/slide18.xml><?xml version="1.0" encoding="utf-8"?>
 <p:sld xmlns:a="http://schemas.openxmlformats.org/drawingml/2006/main" xmlns:r="http://schemas.openxmlformats.org/officeDocument/2006/relationships" xmlns:p="http://schemas.openxmlformats.org/presentationml/2006/main" showMasterSp="0">
   <p:cSld>
     <p:bg>
@@ -12925,7 +13139,7 @@
 </p:sld>
 </file>
 
-<file path=ppt/slides/slide18.xml><?xml version="1.0" encoding="utf-8"?>
+<file path=ppt/slides/slide19.xml><?xml version="1.0" encoding="utf-8"?>
 <p:sld xmlns:a="http://schemas.openxmlformats.org/drawingml/2006/main" xmlns:r="http://schemas.openxmlformats.org/officeDocument/2006/relationships" xmlns:p="http://schemas.openxmlformats.org/presentationml/2006/main" showMasterSp="0">
   <p:cSld>
     <p:bg>
@@ -15092,10 +15306,10 @@
       </p:grpSpPr>
       <p:pic>
         <p:nvPicPr>
-          <p:cNvPr id="4" name="Picture 3">
-            <a:extLst>
-              <a:ext uri="{FF2B5EF4-FFF2-40B4-BE49-F238E27FC236}">
-                <a16:creationId xmlns:a16="http://schemas.microsoft.com/office/drawing/2014/main" id="{810480DF-968A-2171-73C4-16EEF11F55E8}"/>
+          <p:cNvPr id="3" name="Picture 2">
+            <a:extLst>
+              <a:ext uri="{FF2B5EF4-FFF2-40B4-BE49-F238E27FC236}">
+                <a16:creationId xmlns:a16="http://schemas.microsoft.com/office/drawing/2014/main" id="{313C9F84-FE75-27FD-EE98-B6F1E6085AC3}"/>
               </a:ext>
             </a:extLst>
           </p:cNvPr>
@@ -15112,8 +15326,8 @@
         </p:blipFill>
         <p:spPr>
           <a:xfrm>
-            <a:off x="867707" y="2356149"/>
-            <a:ext cx="10456586" cy="1981110"/>
+            <a:off x="974671" y="377560"/>
+            <a:ext cx="4932354" cy="6102880"/>
           </a:xfrm>
           <a:prstGeom prst="rect">
             <a:avLst/>
@@ -15134,6 +15348,80 @@
 </file>
 
 <file path=ppt/slides/slide7.xml><?xml version="1.0" encoding="utf-8"?>
+<p:sld xmlns:a="http://schemas.openxmlformats.org/drawingml/2006/main" xmlns:r="http://schemas.openxmlformats.org/officeDocument/2006/relationships" xmlns:p="http://schemas.openxmlformats.org/presentationml/2006/main" showMasterSp="0">
+  <p:cSld>
+    <p:bg>
+      <p:bgPr>
+        <a:solidFill>
+          <a:srgbClr val="CDF6F9"/>
+        </a:solidFill>
+        <a:effectLst/>
+      </p:bgPr>
+    </p:bg>
+    <p:spTree>
+      <p:nvGrpSpPr>
+        <p:cNvPr id="1" name="">
+          <a:extLst>
+            <a:ext uri="{FF2B5EF4-FFF2-40B4-BE49-F238E27FC236}">
+              <a16:creationId xmlns:a16="http://schemas.microsoft.com/office/drawing/2014/main" id="{5700AD06-AC27-890A-9253-1A1180DFE688}"/>
+            </a:ext>
+          </a:extLst>
+        </p:cNvPr>
+        <p:cNvGrpSpPr/>
+        <p:nvPr/>
+      </p:nvGrpSpPr>
+      <p:grpSpPr>
+        <a:xfrm>
+          <a:off x="0" y="0"/>
+          <a:ext cx="0" cy="0"/>
+          <a:chOff x="0" y="0"/>
+          <a:chExt cx="0" cy="0"/>
+        </a:xfrm>
+      </p:grpSpPr>
+      <p:pic>
+        <p:nvPicPr>
+          <p:cNvPr id="6" name="Picture 5">
+            <a:extLst>
+              <a:ext uri="{FF2B5EF4-FFF2-40B4-BE49-F238E27FC236}">
+                <a16:creationId xmlns:a16="http://schemas.microsoft.com/office/drawing/2014/main" id="{0F607F7C-167A-2937-1BA7-9C58E65950C4}"/>
+              </a:ext>
+            </a:extLst>
+          </p:cNvPr>
+          <p:cNvPicPr>
+            <a:picLocks noChangeAspect="1"/>
+          </p:cNvPicPr>
+          <p:nvPr/>
+        </p:nvPicPr>
+        <p:blipFill>
+          <a:blip r:embed="rId3"/>
+          <a:stretch>
+            <a:fillRect/>
+          </a:stretch>
+        </p:blipFill>
+        <p:spPr>
+          <a:xfrm>
+            <a:off x="615695" y="336994"/>
+            <a:ext cx="11174939" cy="6100382"/>
+          </a:xfrm>
+          <a:prstGeom prst="rect">
+            <a:avLst/>
+          </a:prstGeom>
+        </p:spPr>
+      </p:pic>
+    </p:spTree>
+    <p:extLst>
+      <p:ext uri="{BB962C8B-B14F-4D97-AF65-F5344CB8AC3E}">
+        <p14:creationId xmlns:p14="http://schemas.microsoft.com/office/powerpoint/2010/main" val="1620742594"/>
+      </p:ext>
+    </p:extLst>
+  </p:cSld>
+  <p:clrMapOvr>
+    <a:masterClrMapping/>
+  </p:clrMapOvr>
+</p:sld>
+</file>
+
+<file path=ppt/slides/slide8.xml><?xml version="1.0" encoding="utf-8"?>
 <p:sld xmlns:a="http://schemas.openxmlformats.org/drawingml/2006/main" xmlns:r="http://schemas.openxmlformats.org/officeDocument/2006/relationships" xmlns:p="http://schemas.openxmlformats.org/presentationml/2006/main" showMasterSp="0">
   <p:cSld>
     <p:bg>
@@ -15238,7 +15526,7 @@
 </p:sld>
 </file>
 
-<file path=ppt/slides/slide8.xml><?xml version="1.0" encoding="utf-8"?>
+<file path=ppt/slides/slide9.xml><?xml version="1.0" encoding="utf-8"?>
 <p:sld xmlns:a="http://schemas.openxmlformats.org/drawingml/2006/main" xmlns:r="http://schemas.openxmlformats.org/officeDocument/2006/relationships" xmlns:p="http://schemas.openxmlformats.org/presentationml/2006/main" showMasterSp="0">
   <p:cSld>
     <p:bg>
@@ -15333,111 +15621,6 @@
     <p:extLst>
       <p:ext uri="{BB962C8B-B14F-4D97-AF65-F5344CB8AC3E}">
         <p14:creationId xmlns:p14="http://schemas.microsoft.com/office/powerpoint/2010/main" val="1025226808"/>
-      </p:ext>
-    </p:extLst>
-  </p:cSld>
-  <p:clrMapOvr>
-    <a:masterClrMapping/>
-  </p:clrMapOvr>
-</p:sld>
-</file>
-
-<file path=ppt/slides/slide9.xml><?xml version="1.0" encoding="utf-8"?>
-<p:sld xmlns:a="http://schemas.openxmlformats.org/drawingml/2006/main" xmlns:r="http://schemas.openxmlformats.org/officeDocument/2006/relationships" xmlns:p="http://schemas.openxmlformats.org/presentationml/2006/main" showMasterSp="0">
-  <p:cSld>
-    <p:bg>
-      <p:bgPr>
-        <a:solidFill>
-          <a:srgbClr val="CDF6F9"/>
-        </a:solidFill>
-        <a:effectLst/>
-      </p:bgPr>
-    </p:bg>
-    <p:spTree>
-      <p:nvGrpSpPr>
-        <p:cNvPr id="1" name="">
-          <a:extLst>
-            <a:ext uri="{FF2B5EF4-FFF2-40B4-BE49-F238E27FC236}">
-              <a16:creationId xmlns:a16="http://schemas.microsoft.com/office/drawing/2014/main" id="{58E68DF9-9D3D-F010-53FB-6A72464ACF27}"/>
-            </a:ext>
-          </a:extLst>
-        </p:cNvPr>
-        <p:cNvGrpSpPr/>
-        <p:nvPr/>
-      </p:nvGrpSpPr>
-      <p:grpSpPr>
-        <a:xfrm>
-          <a:off x="0" y="0"/>
-          <a:ext cx="0" cy="0"/>
-          <a:chOff x="0" y="0"/>
-          <a:chExt cx="0" cy="0"/>
-        </a:xfrm>
-      </p:grpSpPr>
-      <p:pic>
-        <p:nvPicPr>
-          <p:cNvPr id="6" name="Picture 5">
-            <a:extLst>
-              <a:ext uri="{FF2B5EF4-FFF2-40B4-BE49-F238E27FC236}">
-                <a16:creationId xmlns:a16="http://schemas.microsoft.com/office/drawing/2014/main" id="{FE39C31F-E5A2-7795-A7FA-E1F5E00A70A7}"/>
-              </a:ext>
-            </a:extLst>
-          </p:cNvPr>
-          <p:cNvPicPr>
-            <a:picLocks noChangeAspect="1"/>
-          </p:cNvPicPr>
-          <p:nvPr/>
-        </p:nvPicPr>
-        <p:blipFill>
-          <a:blip r:embed="rId3"/>
-          <a:stretch>
-            <a:fillRect/>
-          </a:stretch>
-        </p:blipFill>
-        <p:spPr>
-          <a:xfrm>
-            <a:off x="7013359" y="153393"/>
-            <a:ext cx="4444074" cy="6569501"/>
-          </a:xfrm>
-          <a:prstGeom prst="rect">
-            <a:avLst/>
-          </a:prstGeom>
-        </p:spPr>
-      </p:pic>
-      <p:pic>
-        <p:nvPicPr>
-          <p:cNvPr id="8" name="Picture 7">
-            <a:extLst>
-              <a:ext uri="{FF2B5EF4-FFF2-40B4-BE49-F238E27FC236}">
-                <a16:creationId xmlns:a16="http://schemas.microsoft.com/office/drawing/2014/main" id="{F4AE3FA1-DB72-74DB-ADFA-01033F972B3F}"/>
-              </a:ext>
-            </a:extLst>
-          </p:cNvPr>
-          <p:cNvPicPr>
-            <a:picLocks noChangeAspect="1"/>
-          </p:cNvPicPr>
-          <p:nvPr/>
-        </p:nvPicPr>
-        <p:blipFill>
-          <a:blip r:embed="rId4"/>
-          <a:srcRect r="57064"/>
-          <a:stretch>
-            <a:fillRect/>
-          </a:stretch>
-        </p:blipFill>
-        <p:spPr>
-          <a:xfrm>
-            <a:off x="2139697" y="345417"/>
-            <a:ext cx="4063597" cy="4473471"/>
-          </a:xfrm>
-          <a:prstGeom prst="rect">
-            <a:avLst/>
-          </a:prstGeom>
-        </p:spPr>
-      </p:pic>
-    </p:spTree>
-    <p:extLst>
-      <p:ext uri="{BB962C8B-B14F-4D97-AF65-F5344CB8AC3E}">
-        <p14:creationId xmlns:p14="http://schemas.microsoft.com/office/powerpoint/2010/main" val="1869276804"/>
       </p:ext>
     </p:extLst>
   </p:cSld>

--- a/1.training_model/slide_presentation/Device Identifier 20260414.pptx
+++ b/1.training_model/slide_presentation/Device Identifier 20260414.pptx
@@ -5,7 +5,7 @@
     <p:sldMasterId id="2147483696" r:id="rId1"/>
   </p:sldMasterIdLst>
   <p:notesMasterIdLst>
-    <p:notesMasterId r:id="rId21"/>
+    <p:notesMasterId r:id="rId22"/>
   </p:notesMasterIdLst>
   <p:sldIdLst>
     <p:sldId id="256" r:id="rId2"/>
@@ -14,19 +14,20 @@
     <p:sldId id="324" r:id="rId5"/>
     <p:sldId id="326" r:id="rId6"/>
     <p:sldId id="325" r:id="rId7"/>
-    <p:sldId id="330" r:id="rId8"/>
-    <p:sldId id="329" r:id="rId9"/>
-    <p:sldId id="328" r:id="rId10"/>
-    <p:sldId id="327" r:id="rId11"/>
-    <p:sldId id="322" r:id="rId12"/>
-    <p:sldId id="321" r:id="rId13"/>
-    <p:sldId id="308" r:id="rId14"/>
-    <p:sldId id="318" r:id="rId15"/>
-    <p:sldId id="319" r:id="rId16"/>
-    <p:sldId id="315" r:id="rId17"/>
-    <p:sldId id="317" r:id="rId18"/>
-    <p:sldId id="313" r:id="rId19"/>
-    <p:sldId id="316" r:id="rId20"/>
+    <p:sldId id="332" r:id="rId8"/>
+    <p:sldId id="330" r:id="rId9"/>
+    <p:sldId id="329" r:id="rId10"/>
+    <p:sldId id="328" r:id="rId11"/>
+    <p:sldId id="327" r:id="rId12"/>
+    <p:sldId id="322" r:id="rId13"/>
+    <p:sldId id="321" r:id="rId14"/>
+    <p:sldId id="308" r:id="rId15"/>
+    <p:sldId id="318" r:id="rId16"/>
+    <p:sldId id="319" r:id="rId17"/>
+    <p:sldId id="315" r:id="rId18"/>
+    <p:sldId id="317" r:id="rId19"/>
+    <p:sldId id="313" r:id="rId20"/>
+    <p:sldId id="316" r:id="rId21"/>
   </p:sldIdLst>
   <p:sldSz cx="12192000" cy="6858000"/>
   <p:notesSz cx="6858000" cy="9144000"/>
@@ -215,7 +216,7 @@
           <a:p>
             <a:fld id="{23D8B80A-F233-4240-BDAF-6537AE249829}" type="datetimeFigureOut">
               <a:rPr lang="en-MY" smtClean="0"/>
-              <a:t>6/5/2026</a:t>
+              <a:t>7/5/2026</a:t>
             </a:fld>
             <a:endParaRPr lang="en-MY"/>
           </a:p>
@@ -575,6 +576,114 @@
         <p:cNvPr id="1" name="">
           <a:extLst>
             <a:ext uri="{FF2B5EF4-FFF2-40B4-BE49-F238E27FC236}">
+              <a16:creationId xmlns:a16="http://schemas.microsoft.com/office/drawing/2014/main" id="{CD65CC31-DDBD-A83E-77AD-73DD9EA7AADA}"/>
+            </a:ext>
+          </a:extLst>
+        </p:cNvPr>
+        <p:cNvGrpSpPr/>
+        <p:nvPr/>
+      </p:nvGrpSpPr>
+      <p:grpSpPr>
+        <a:xfrm>
+          <a:off x="0" y="0"/>
+          <a:ext cx="0" cy="0"/>
+          <a:chOff x="0" y="0"/>
+          <a:chExt cx="0" cy="0"/>
+        </a:xfrm>
+      </p:grpSpPr>
+      <p:sp>
+        <p:nvSpPr>
+          <p:cNvPr id="2" name="Slide Image Placeholder 1">
+            <a:extLst>
+              <a:ext uri="{FF2B5EF4-FFF2-40B4-BE49-F238E27FC236}">
+                <a16:creationId xmlns:a16="http://schemas.microsoft.com/office/drawing/2014/main" id="{75A6BE32-AD46-3994-D2B5-596BFA4482B9}"/>
+              </a:ext>
+            </a:extLst>
+          </p:cNvPr>
+          <p:cNvSpPr>
+            <a:spLocks noGrp="1" noRot="1" noChangeAspect="1"/>
+          </p:cNvSpPr>
+          <p:nvPr>
+            <p:ph type="sldImg"/>
+          </p:nvPr>
+        </p:nvSpPr>
+        <p:spPr/>
+      </p:sp>
+      <p:sp>
+        <p:nvSpPr>
+          <p:cNvPr id="3" name="Notes Placeholder 2">
+            <a:extLst>
+              <a:ext uri="{FF2B5EF4-FFF2-40B4-BE49-F238E27FC236}">
+                <a16:creationId xmlns:a16="http://schemas.microsoft.com/office/drawing/2014/main" id="{2DD8584B-F663-50AD-7BAD-29E261633728}"/>
+              </a:ext>
+            </a:extLst>
+          </p:cNvPr>
+          <p:cNvSpPr>
+            <a:spLocks noGrp="1"/>
+          </p:cNvSpPr>
+          <p:nvPr>
+            <p:ph type="body" idx="1"/>
+          </p:nvPr>
+        </p:nvSpPr>
+        <p:spPr/>
+        <p:txBody>
+          <a:bodyPr/>
+          <a:lstStyle/>
+          <a:p>
+            <a:endParaRPr lang="en-MY" dirty="0"/>
+          </a:p>
+        </p:txBody>
+      </p:sp>
+      <p:sp>
+        <p:nvSpPr>
+          <p:cNvPr id="4" name="Slide Number Placeholder 3">
+            <a:extLst>
+              <a:ext uri="{FF2B5EF4-FFF2-40B4-BE49-F238E27FC236}">
+                <a16:creationId xmlns:a16="http://schemas.microsoft.com/office/drawing/2014/main" id="{0A1087DB-E39A-687F-05EB-96BC857E8EC2}"/>
+              </a:ext>
+            </a:extLst>
+          </p:cNvPr>
+          <p:cNvSpPr>
+            <a:spLocks noGrp="1"/>
+          </p:cNvSpPr>
+          <p:nvPr>
+            <p:ph type="sldNum" sz="quarter" idx="5"/>
+          </p:nvPr>
+        </p:nvSpPr>
+        <p:spPr/>
+        <p:txBody>
+          <a:bodyPr/>
+          <a:lstStyle/>
+          <a:p>
+            <a:fld id="{D16833E0-5E66-4D1D-89F5-BD860FDD8F71}" type="slidenum">
+              <a:rPr lang="en-MY" smtClean="0"/>
+              <a:t>11</a:t>
+            </a:fld>
+            <a:endParaRPr lang="en-MY"/>
+          </a:p>
+        </p:txBody>
+      </p:sp>
+    </p:spTree>
+    <p:extLst>
+      <p:ext uri="{BB962C8B-B14F-4D97-AF65-F5344CB8AC3E}">
+        <p14:creationId xmlns:p14="http://schemas.microsoft.com/office/powerpoint/2010/main" val="1599132718"/>
+      </p:ext>
+    </p:extLst>
+  </p:cSld>
+  <p:clrMapOvr>
+    <a:masterClrMapping/>
+  </p:clrMapOvr>
+</p:notes>
+</file>
+
+<file path=ppt/notesSlides/notesSlide11.xml><?xml version="1.0" encoding="utf-8"?>
+<p:notes xmlns:a="http://schemas.openxmlformats.org/drawingml/2006/main" xmlns:r="http://schemas.openxmlformats.org/officeDocument/2006/relationships" xmlns:p="http://schemas.openxmlformats.org/presentationml/2006/main">
+  <p:cSld>
+    <p:spTree>
+      <p:nvGrpSpPr>
+        <p:cNvPr id="1" name="">
+          <a:extLst>
+            <a:ext uri="{FF2B5EF4-FFF2-40B4-BE49-F238E27FC236}">
               <a16:creationId xmlns:a16="http://schemas.microsoft.com/office/drawing/2014/main" id="{760B0DA3-B6BD-4EFE-90F9-176D4D36867B}"/>
             </a:ext>
           </a:extLst>
@@ -656,7 +765,7 @@
           <a:p>
             <a:fld id="{D16833E0-5E66-4D1D-89F5-BD860FDD8F71}" type="slidenum">
               <a:rPr lang="en-MY" smtClean="0"/>
-              <a:t>11</a:t>
+              <a:t>12</a:t>
             </a:fld>
             <a:endParaRPr lang="en-MY"/>
           </a:p>
@@ -675,7 +784,7 @@
 </p:notes>
 </file>
 
-<file path=ppt/notesSlides/notesSlide11.xml><?xml version="1.0" encoding="utf-8"?>
+<file path=ppt/notesSlides/notesSlide12.xml><?xml version="1.0" encoding="utf-8"?>
 <p:notes xmlns:a="http://schemas.openxmlformats.org/drawingml/2006/main" xmlns:r="http://schemas.openxmlformats.org/officeDocument/2006/relationships" xmlns:p="http://schemas.openxmlformats.org/presentationml/2006/main">
   <p:cSld>
     <p:spTree>
@@ -764,7 +873,7 @@
           <a:p>
             <a:fld id="{D16833E0-5E66-4D1D-89F5-BD860FDD8F71}" type="slidenum">
               <a:rPr lang="en-MY" smtClean="0"/>
-              <a:t>12</a:t>
+              <a:t>13</a:t>
             </a:fld>
             <a:endParaRPr lang="en-MY"/>
           </a:p>
@@ -783,7 +892,7 @@
 </p:notes>
 </file>
 
-<file path=ppt/notesSlides/notesSlide12.xml><?xml version="1.0" encoding="utf-8"?>
+<file path=ppt/notesSlides/notesSlide13.xml><?xml version="1.0" encoding="utf-8"?>
 <p:notes xmlns:a="http://schemas.openxmlformats.org/drawingml/2006/main" xmlns:r="http://schemas.openxmlformats.org/officeDocument/2006/relationships" xmlns:p="http://schemas.openxmlformats.org/presentationml/2006/main">
   <p:cSld>
     <p:spTree>
@@ -872,7 +981,7 @@
           <a:p>
             <a:fld id="{D16833E0-5E66-4D1D-89F5-BD860FDD8F71}" type="slidenum">
               <a:rPr lang="en-MY" smtClean="0"/>
-              <a:t>13</a:t>
+              <a:t>14</a:t>
             </a:fld>
             <a:endParaRPr lang="en-MY"/>
           </a:p>
@@ -891,7 +1000,7 @@
 </p:notes>
 </file>
 
-<file path=ppt/notesSlides/notesSlide13.xml><?xml version="1.0" encoding="utf-8"?>
+<file path=ppt/notesSlides/notesSlide14.xml><?xml version="1.0" encoding="utf-8"?>
 <p:notes xmlns:a="http://schemas.openxmlformats.org/drawingml/2006/main" xmlns:r="http://schemas.openxmlformats.org/officeDocument/2006/relationships" xmlns:p="http://schemas.openxmlformats.org/presentationml/2006/main">
   <p:cSld>
     <p:spTree>
@@ -980,7 +1089,7 @@
           <a:p>
             <a:fld id="{D16833E0-5E66-4D1D-89F5-BD860FDD8F71}" type="slidenum">
               <a:rPr lang="en-MY" smtClean="0"/>
-              <a:t>14</a:t>
+              <a:t>15</a:t>
             </a:fld>
             <a:endParaRPr lang="en-MY"/>
           </a:p>
@@ -999,7 +1108,7 @@
 </p:notes>
 </file>
 
-<file path=ppt/notesSlides/notesSlide14.xml><?xml version="1.0" encoding="utf-8"?>
+<file path=ppt/notesSlides/notesSlide15.xml><?xml version="1.0" encoding="utf-8"?>
 <p:notes xmlns:a="http://schemas.openxmlformats.org/drawingml/2006/main" xmlns:r="http://schemas.openxmlformats.org/officeDocument/2006/relationships" xmlns:p="http://schemas.openxmlformats.org/presentationml/2006/main">
   <p:cSld>
     <p:spTree>
@@ -1088,7 +1197,7 @@
           <a:p>
             <a:fld id="{D16833E0-5E66-4D1D-89F5-BD860FDD8F71}" type="slidenum">
               <a:rPr lang="en-MY" smtClean="0"/>
-              <a:t>15</a:t>
+              <a:t>16</a:t>
             </a:fld>
             <a:endParaRPr lang="en-MY"/>
           </a:p>
@@ -1107,7 +1216,7 @@
 </p:notes>
 </file>
 
-<file path=ppt/notesSlides/notesSlide15.xml><?xml version="1.0" encoding="utf-8"?>
+<file path=ppt/notesSlides/notesSlide16.xml><?xml version="1.0" encoding="utf-8"?>
 <p:notes xmlns:a="http://schemas.openxmlformats.org/drawingml/2006/main" xmlns:r="http://schemas.openxmlformats.org/officeDocument/2006/relationships" xmlns:p="http://schemas.openxmlformats.org/presentationml/2006/main">
   <p:cSld>
     <p:spTree>
@@ -1196,7 +1305,7 @@
           <a:p>
             <a:fld id="{D16833E0-5E66-4D1D-89F5-BD860FDD8F71}" type="slidenum">
               <a:rPr lang="en-MY" smtClean="0"/>
-              <a:t>16</a:t>
+              <a:t>17</a:t>
             </a:fld>
             <a:endParaRPr lang="en-MY"/>
           </a:p>
@@ -1215,7 +1324,7 @@
 </p:notes>
 </file>
 
-<file path=ppt/notesSlides/notesSlide16.xml><?xml version="1.0" encoding="utf-8"?>
+<file path=ppt/notesSlides/notesSlide17.xml><?xml version="1.0" encoding="utf-8"?>
 <p:notes xmlns:a="http://schemas.openxmlformats.org/drawingml/2006/main" xmlns:r="http://schemas.openxmlformats.org/officeDocument/2006/relationships" xmlns:p="http://schemas.openxmlformats.org/presentationml/2006/main">
   <p:cSld>
     <p:spTree>
@@ -1304,7 +1413,7 @@
           <a:p>
             <a:fld id="{D16833E0-5E66-4D1D-89F5-BD860FDD8F71}" type="slidenum">
               <a:rPr lang="en-MY" smtClean="0"/>
-              <a:t>17</a:t>
+              <a:t>18</a:t>
             </a:fld>
             <a:endParaRPr lang="en-MY"/>
           </a:p>
@@ -1323,7 +1432,7 @@
 </p:notes>
 </file>
 
-<file path=ppt/notesSlides/notesSlide17.xml><?xml version="1.0" encoding="utf-8"?>
+<file path=ppt/notesSlides/notesSlide18.xml><?xml version="1.0" encoding="utf-8"?>
 <p:notes xmlns:a="http://schemas.openxmlformats.org/drawingml/2006/main" xmlns:r="http://schemas.openxmlformats.org/officeDocument/2006/relationships" xmlns:p="http://schemas.openxmlformats.org/presentationml/2006/main">
   <p:cSld>
     <p:spTree>
@@ -1412,7 +1521,7 @@
           <a:p>
             <a:fld id="{D16833E0-5E66-4D1D-89F5-BD860FDD8F71}" type="slidenum">
               <a:rPr lang="en-MY" smtClean="0"/>
-              <a:t>18</a:t>
+              <a:t>19</a:t>
             </a:fld>
             <a:endParaRPr lang="en-MY"/>
           </a:p>
@@ -1431,7 +1540,7 @@
 </p:notes>
 </file>
 
-<file path=ppt/notesSlides/notesSlide18.xml><?xml version="1.0" encoding="utf-8"?>
+<file path=ppt/notesSlides/notesSlide19.xml><?xml version="1.0" encoding="utf-8"?>
 <p:notes xmlns:a="http://schemas.openxmlformats.org/drawingml/2006/main" xmlns:r="http://schemas.openxmlformats.org/officeDocument/2006/relationships" xmlns:p="http://schemas.openxmlformats.org/presentationml/2006/main">
   <p:cSld>
     <p:spTree>
@@ -1520,7 +1629,7 @@
           <a:p>
             <a:fld id="{D16833E0-5E66-4D1D-89F5-BD860FDD8F71}" type="slidenum">
               <a:rPr lang="en-MY" smtClean="0"/>
-              <a:t>19</a:t>
+              <a:t>20</a:t>
             </a:fld>
             <a:endParaRPr lang="en-MY"/>
           </a:p>
@@ -1979,6 +2088,114 @@
         <p:cNvPr id="1" name="">
           <a:extLst>
             <a:ext uri="{FF2B5EF4-FFF2-40B4-BE49-F238E27FC236}">
+              <a16:creationId xmlns:a16="http://schemas.microsoft.com/office/drawing/2014/main" id="{490AA5E8-43DA-D62D-FB88-C294FC079058}"/>
+            </a:ext>
+          </a:extLst>
+        </p:cNvPr>
+        <p:cNvGrpSpPr/>
+        <p:nvPr/>
+      </p:nvGrpSpPr>
+      <p:grpSpPr>
+        <a:xfrm>
+          <a:off x="0" y="0"/>
+          <a:ext cx="0" cy="0"/>
+          <a:chOff x="0" y="0"/>
+          <a:chExt cx="0" cy="0"/>
+        </a:xfrm>
+      </p:grpSpPr>
+      <p:sp>
+        <p:nvSpPr>
+          <p:cNvPr id="2" name="Slide Image Placeholder 1">
+            <a:extLst>
+              <a:ext uri="{FF2B5EF4-FFF2-40B4-BE49-F238E27FC236}">
+                <a16:creationId xmlns:a16="http://schemas.microsoft.com/office/drawing/2014/main" id="{C45C137E-8AB1-3054-683E-73C9C0A71AE3}"/>
+              </a:ext>
+            </a:extLst>
+          </p:cNvPr>
+          <p:cNvSpPr>
+            <a:spLocks noGrp="1" noRot="1" noChangeAspect="1"/>
+          </p:cNvSpPr>
+          <p:nvPr>
+            <p:ph type="sldImg"/>
+          </p:nvPr>
+        </p:nvSpPr>
+        <p:spPr/>
+      </p:sp>
+      <p:sp>
+        <p:nvSpPr>
+          <p:cNvPr id="3" name="Notes Placeholder 2">
+            <a:extLst>
+              <a:ext uri="{FF2B5EF4-FFF2-40B4-BE49-F238E27FC236}">
+                <a16:creationId xmlns:a16="http://schemas.microsoft.com/office/drawing/2014/main" id="{F590523D-806B-67DF-85E6-BEE033FCCC56}"/>
+              </a:ext>
+            </a:extLst>
+          </p:cNvPr>
+          <p:cNvSpPr>
+            <a:spLocks noGrp="1"/>
+          </p:cNvSpPr>
+          <p:nvPr>
+            <p:ph type="body" idx="1"/>
+          </p:nvPr>
+        </p:nvSpPr>
+        <p:spPr/>
+        <p:txBody>
+          <a:bodyPr/>
+          <a:lstStyle/>
+          <a:p>
+            <a:endParaRPr lang="en-MY" dirty="0"/>
+          </a:p>
+        </p:txBody>
+      </p:sp>
+      <p:sp>
+        <p:nvSpPr>
+          <p:cNvPr id="4" name="Slide Number Placeholder 3">
+            <a:extLst>
+              <a:ext uri="{FF2B5EF4-FFF2-40B4-BE49-F238E27FC236}">
+                <a16:creationId xmlns:a16="http://schemas.microsoft.com/office/drawing/2014/main" id="{980BF987-8233-AB67-4586-17379D826862}"/>
+              </a:ext>
+            </a:extLst>
+          </p:cNvPr>
+          <p:cNvSpPr>
+            <a:spLocks noGrp="1"/>
+          </p:cNvSpPr>
+          <p:nvPr>
+            <p:ph type="sldNum" sz="quarter" idx="5"/>
+          </p:nvPr>
+        </p:nvSpPr>
+        <p:spPr/>
+        <p:txBody>
+          <a:bodyPr/>
+          <a:lstStyle/>
+          <a:p>
+            <a:fld id="{D16833E0-5E66-4D1D-89F5-BD860FDD8F71}" type="slidenum">
+              <a:rPr lang="en-MY" smtClean="0"/>
+              <a:t>7</a:t>
+            </a:fld>
+            <a:endParaRPr lang="en-MY"/>
+          </a:p>
+        </p:txBody>
+      </p:sp>
+    </p:spTree>
+    <p:extLst>
+      <p:ext uri="{BB962C8B-B14F-4D97-AF65-F5344CB8AC3E}">
+        <p14:creationId xmlns:p14="http://schemas.microsoft.com/office/powerpoint/2010/main" val="477282213"/>
+      </p:ext>
+    </p:extLst>
+  </p:cSld>
+  <p:clrMapOvr>
+    <a:masterClrMapping/>
+  </p:clrMapOvr>
+</p:notes>
+</file>
+
+<file path=ppt/notesSlides/notesSlide7.xml><?xml version="1.0" encoding="utf-8"?>
+<p:notes xmlns:a="http://schemas.openxmlformats.org/drawingml/2006/main" xmlns:r="http://schemas.openxmlformats.org/officeDocument/2006/relationships" xmlns:p="http://schemas.openxmlformats.org/presentationml/2006/main">
+  <p:cSld>
+    <p:spTree>
+      <p:nvGrpSpPr>
+        <p:cNvPr id="1" name="">
+          <a:extLst>
+            <a:ext uri="{FF2B5EF4-FFF2-40B4-BE49-F238E27FC236}">
               <a16:creationId xmlns:a16="http://schemas.microsoft.com/office/drawing/2014/main" id="{8AC23F3C-9F52-E969-49A3-3C9CC016D8D9}"/>
             </a:ext>
           </a:extLst>
@@ -2060,7 +2277,7 @@
           <a:p>
             <a:fld id="{D16833E0-5E66-4D1D-89F5-BD860FDD8F71}" type="slidenum">
               <a:rPr lang="en-MY" smtClean="0"/>
-              <a:t>7</a:t>
+              <a:t>8</a:t>
             </a:fld>
             <a:endParaRPr lang="en-MY"/>
           </a:p>
@@ -2079,7 +2296,7 @@
 </p:notes>
 </file>
 
-<file path=ppt/notesSlides/notesSlide7.xml><?xml version="1.0" encoding="utf-8"?>
+<file path=ppt/notesSlides/notesSlide8.xml><?xml version="1.0" encoding="utf-8"?>
 <p:notes xmlns:a="http://schemas.openxmlformats.org/drawingml/2006/main" xmlns:r="http://schemas.openxmlformats.org/officeDocument/2006/relationships" xmlns:p="http://schemas.openxmlformats.org/presentationml/2006/main">
   <p:cSld>
     <p:spTree>
@@ -2168,7 +2385,7 @@
           <a:p>
             <a:fld id="{D16833E0-5E66-4D1D-89F5-BD860FDD8F71}" type="slidenum">
               <a:rPr lang="en-MY" smtClean="0"/>
-              <a:t>8</a:t>
+              <a:t>9</a:t>
             </a:fld>
             <a:endParaRPr lang="en-MY"/>
           </a:p>
@@ -2187,7 +2404,7 @@
 </p:notes>
 </file>
 
-<file path=ppt/notesSlides/notesSlide8.xml><?xml version="1.0" encoding="utf-8"?>
+<file path=ppt/notesSlides/notesSlide9.xml><?xml version="1.0" encoding="utf-8"?>
 <p:notes xmlns:a="http://schemas.openxmlformats.org/drawingml/2006/main" xmlns:r="http://schemas.openxmlformats.org/officeDocument/2006/relationships" xmlns:p="http://schemas.openxmlformats.org/presentationml/2006/main">
   <p:cSld>
     <p:spTree>
@@ -2276,7 +2493,7 @@
           <a:p>
             <a:fld id="{D16833E0-5E66-4D1D-89F5-BD860FDD8F71}" type="slidenum">
               <a:rPr lang="en-MY" smtClean="0"/>
-              <a:t>9</a:t>
+              <a:t>10</a:t>
             </a:fld>
             <a:endParaRPr lang="en-MY"/>
           </a:p>
@@ -2286,114 +2503,6 @@
     <p:extLst>
       <p:ext uri="{BB962C8B-B14F-4D97-AF65-F5344CB8AC3E}">
         <p14:creationId xmlns:p14="http://schemas.microsoft.com/office/powerpoint/2010/main" val="2039971155"/>
-      </p:ext>
-    </p:extLst>
-  </p:cSld>
-  <p:clrMapOvr>
-    <a:masterClrMapping/>
-  </p:clrMapOvr>
-</p:notes>
-</file>
-
-<file path=ppt/notesSlides/notesSlide9.xml><?xml version="1.0" encoding="utf-8"?>
-<p:notes xmlns:a="http://schemas.openxmlformats.org/drawingml/2006/main" xmlns:r="http://schemas.openxmlformats.org/officeDocument/2006/relationships" xmlns:p="http://schemas.openxmlformats.org/presentationml/2006/main">
-  <p:cSld>
-    <p:spTree>
-      <p:nvGrpSpPr>
-        <p:cNvPr id="1" name="">
-          <a:extLst>
-            <a:ext uri="{FF2B5EF4-FFF2-40B4-BE49-F238E27FC236}">
-              <a16:creationId xmlns:a16="http://schemas.microsoft.com/office/drawing/2014/main" id="{CD65CC31-DDBD-A83E-77AD-73DD9EA7AADA}"/>
-            </a:ext>
-          </a:extLst>
-        </p:cNvPr>
-        <p:cNvGrpSpPr/>
-        <p:nvPr/>
-      </p:nvGrpSpPr>
-      <p:grpSpPr>
-        <a:xfrm>
-          <a:off x="0" y="0"/>
-          <a:ext cx="0" cy="0"/>
-          <a:chOff x="0" y="0"/>
-          <a:chExt cx="0" cy="0"/>
-        </a:xfrm>
-      </p:grpSpPr>
-      <p:sp>
-        <p:nvSpPr>
-          <p:cNvPr id="2" name="Slide Image Placeholder 1">
-            <a:extLst>
-              <a:ext uri="{FF2B5EF4-FFF2-40B4-BE49-F238E27FC236}">
-                <a16:creationId xmlns:a16="http://schemas.microsoft.com/office/drawing/2014/main" id="{75A6BE32-AD46-3994-D2B5-596BFA4482B9}"/>
-              </a:ext>
-            </a:extLst>
-          </p:cNvPr>
-          <p:cNvSpPr>
-            <a:spLocks noGrp="1" noRot="1" noChangeAspect="1"/>
-          </p:cNvSpPr>
-          <p:nvPr>
-            <p:ph type="sldImg"/>
-          </p:nvPr>
-        </p:nvSpPr>
-        <p:spPr/>
-      </p:sp>
-      <p:sp>
-        <p:nvSpPr>
-          <p:cNvPr id="3" name="Notes Placeholder 2">
-            <a:extLst>
-              <a:ext uri="{FF2B5EF4-FFF2-40B4-BE49-F238E27FC236}">
-                <a16:creationId xmlns:a16="http://schemas.microsoft.com/office/drawing/2014/main" id="{2DD8584B-F663-50AD-7BAD-29E261633728}"/>
-              </a:ext>
-            </a:extLst>
-          </p:cNvPr>
-          <p:cNvSpPr>
-            <a:spLocks noGrp="1"/>
-          </p:cNvSpPr>
-          <p:nvPr>
-            <p:ph type="body" idx="1"/>
-          </p:nvPr>
-        </p:nvSpPr>
-        <p:spPr/>
-        <p:txBody>
-          <a:bodyPr/>
-          <a:lstStyle/>
-          <a:p>
-            <a:endParaRPr lang="en-MY" dirty="0"/>
-          </a:p>
-        </p:txBody>
-      </p:sp>
-      <p:sp>
-        <p:nvSpPr>
-          <p:cNvPr id="4" name="Slide Number Placeholder 3">
-            <a:extLst>
-              <a:ext uri="{FF2B5EF4-FFF2-40B4-BE49-F238E27FC236}">
-                <a16:creationId xmlns:a16="http://schemas.microsoft.com/office/drawing/2014/main" id="{0A1087DB-E39A-687F-05EB-96BC857E8EC2}"/>
-              </a:ext>
-            </a:extLst>
-          </p:cNvPr>
-          <p:cNvSpPr>
-            <a:spLocks noGrp="1"/>
-          </p:cNvSpPr>
-          <p:nvPr>
-            <p:ph type="sldNum" sz="quarter" idx="5"/>
-          </p:nvPr>
-        </p:nvSpPr>
-        <p:spPr/>
-        <p:txBody>
-          <a:bodyPr/>
-          <a:lstStyle/>
-          <a:p>
-            <a:fld id="{D16833E0-5E66-4D1D-89F5-BD860FDD8F71}" type="slidenum">
-              <a:rPr lang="en-MY" smtClean="0"/>
-              <a:t>10</a:t>
-            </a:fld>
-            <a:endParaRPr lang="en-MY"/>
-          </a:p>
-        </p:txBody>
-      </p:sp>
-    </p:spTree>
-    <p:extLst>
-      <p:ext uri="{BB962C8B-B14F-4D97-AF65-F5344CB8AC3E}">
-        <p14:creationId xmlns:p14="http://schemas.microsoft.com/office/powerpoint/2010/main" val="1599132718"/>
       </p:ext>
     </p:extLst>
   </p:cSld>
@@ -2574,7 +2683,7 @@
           <a:p>
             <a:fld id="{1CD01395-AC05-405C-BAB9-E5D2B9FDBB40}" type="datetimeFigureOut">
               <a:rPr lang="en-MY" smtClean="0"/>
-              <a:t>6/5/2026</a:t>
+              <a:t>7/5/2026</a:t>
             </a:fld>
             <a:endParaRPr lang="en-MY"/>
           </a:p>
@@ -2889,7 +2998,7 @@
           <a:p>
             <a:fld id="{1CD01395-AC05-405C-BAB9-E5D2B9FDBB40}" type="datetimeFigureOut">
               <a:rPr lang="en-MY" smtClean="0"/>
-              <a:t>6/5/2026</a:t>
+              <a:t>7/5/2026</a:t>
             </a:fld>
             <a:endParaRPr lang="en-MY"/>
           </a:p>
@@ -3111,7 +3220,7 @@
           <a:p>
             <a:fld id="{1CD01395-AC05-405C-BAB9-E5D2B9FDBB40}" type="datetimeFigureOut">
               <a:rPr lang="en-MY" smtClean="0"/>
-              <a:t>6/5/2026</a:t>
+              <a:t>7/5/2026</a:t>
             </a:fld>
             <a:endParaRPr lang="en-MY"/>
           </a:p>
@@ -3402,7 +3511,7 @@
           <a:p>
             <a:fld id="{1CD01395-AC05-405C-BAB9-E5D2B9FDBB40}" type="datetimeFigureOut">
               <a:rPr lang="en-MY" smtClean="0"/>
-              <a:t>6/5/2026</a:t>
+              <a:t>7/5/2026</a:t>
             </a:fld>
             <a:endParaRPr lang="en-MY"/>
           </a:p>
@@ -3856,7 +3965,7 @@
           <a:p>
             <a:fld id="{1CD01395-AC05-405C-BAB9-E5D2B9FDBB40}" type="datetimeFigureOut">
               <a:rPr lang="en-MY" smtClean="0"/>
-              <a:t>6/5/2026</a:t>
+              <a:t>7/5/2026</a:t>
             </a:fld>
             <a:endParaRPr lang="en-MY"/>
           </a:p>
@@ -4432,7 +4541,7 @@
           <a:p>
             <a:fld id="{1CD01395-AC05-405C-BAB9-E5D2B9FDBB40}" type="datetimeFigureOut">
               <a:rPr lang="en-MY" smtClean="0"/>
-              <a:t>6/5/2026</a:t>
+              <a:t>7/5/2026</a:t>
             </a:fld>
             <a:endParaRPr lang="en-MY"/>
           </a:p>
@@ -5293,7 +5402,7 @@
           <a:p>
             <a:fld id="{1CD01395-AC05-405C-BAB9-E5D2B9FDBB40}" type="datetimeFigureOut">
               <a:rPr lang="en-MY" smtClean="0"/>
-              <a:t>6/5/2026</a:t>
+              <a:t>7/5/2026</a:t>
             </a:fld>
             <a:endParaRPr lang="en-MY"/>
           </a:p>
@@ -5498,7 +5607,7 @@
           <a:p>
             <a:fld id="{1CD01395-AC05-405C-BAB9-E5D2B9FDBB40}" type="datetimeFigureOut">
               <a:rPr lang="en-MY" smtClean="0"/>
-              <a:t>6/5/2026</a:t>
+              <a:t>7/5/2026</a:t>
             </a:fld>
             <a:endParaRPr lang="en-MY"/>
           </a:p>
@@ -5712,7 +5821,7 @@
           <a:p>
             <a:fld id="{1CD01395-AC05-405C-BAB9-E5D2B9FDBB40}" type="datetimeFigureOut">
               <a:rPr lang="en-MY" smtClean="0"/>
-              <a:t>6/5/2026</a:t>
+              <a:t>7/5/2026</a:t>
             </a:fld>
             <a:endParaRPr lang="en-MY"/>
           </a:p>
@@ -5917,7 +6026,7 @@
           <a:p>
             <a:fld id="{1CD01395-AC05-405C-BAB9-E5D2B9FDBB40}" type="datetimeFigureOut">
               <a:rPr lang="en-MY" smtClean="0"/>
-              <a:t>6/5/2026</a:t>
+              <a:t>7/5/2026</a:t>
             </a:fld>
             <a:endParaRPr lang="en-MY"/>
           </a:p>
@@ -6197,7 +6306,7 @@
           <a:p>
             <a:fld id="{1CD01395-AC05-405C-BAB9-E5D2B9FDBB40}" type="datetimeFigureOut">
               <a:rPr lang="en-MY" smtClean="0"/>
-              <a:t>6/5/2026</a:t>
+              <a:t>7/5/2026</a:t>
             </a:fld>
             <a:endParaRPr lang="en-MY"/>
           </a:p>
@@ -6464,7 +6573,7 @@
           <a:p>
             <a:fld id="{1CD01395-AC05-405C-BAB9-E5D2B9FDBB40}" type="datetimeFigureOut">
               <a:rPr lang="en-MY" smtClean="0"/>
-              <a:t>6/5/2026</a:t>
+              <a:t>7/5/2026</a:t>
             </a:fld>
             <a:endParaRPr lang="en-MY"/>
           </a:p>
@@ -6879,7 +6988,7 @@
           <a:p>
             <a:fld id="{1CD01395-AC05-405C-BAB9-E5D2B9FDBB40}" type="datetimeFigureOut">
               <a:rPr lang="en-MY" smtClean="0"/>
-              <a:t>6/5/2026</a:t>
+              <a:t>7/5/2026</a:t>
             </a:fld>
             <a:endParaRPr lang="en-MY"/>
           </a:p>
@@ -7027,7 +7136,7 @@
           <a:p>
             <a:fld id="{1CD01395-AC05-405C-BAB9-E5D2B9FDBB40}" type="datetimeFigureOut">
               <a:rPr lang="en-MY" smtClean="0"/>
-              <a:t>6/5/2026</a:t>
+              <a:t>7/5/2026</a:t>
             </a:fld>
             <a:endParaRPr lang="en-MY"/>
           </a:p>
@@ -7152,7 +7261,7 @@
           <a:p>
             <a:fld id="{1CD01395-AC05-405C-BAB9-E5D2B9FDBB40}" type="datetimeFigureOut">
               <a:rPr lang="en-MY" smtClean="0"/>
-              <a:t>6/5/2026</a:t>
+              <a:t>7/5/2026</a:t>
             </a:fld>
             <a:endParaRPr lang="en-MY"/>
           </a:p>
@@ -7431,7 +7540,7 @@
           <a:p>
             <a:fld id="{1CD01395-AC05-405C-BAB9-E5D2B9FDBB40}" type="datetimeFigureOut">
               <a:rPr lang="en-MY" smtClean="0"/>
-              <a:t>6/5/2026</a:t>
+              <a:t>7/5/2026</a:t>
             </a:fld>
             <a:endParaRPr lang="en-MY"/>
           </a:p>
@@ -7746,7 +7855,7 @@
           <a:p>
             <a:fld id="{1CD01395-AC05-405C-BAB9-E5D2B9FDBB40}" type="datetimeFigureOut">
               <a:rPr lang="en-MY" smtClean="0"/>
-              <a:t>6/5/2026</a:t>
+              <a:t>7/5/2026</a:t>
             </a:fld>
             <a:endParaRPr lang="en-MY"/>
           </a:p>
@@ -7999,7 +8108,7 @@
           <a:p>
             <a:fld id="{1CD01395-AC05-405C-BAB9-E5D2B9FDBB40}" type="datetimeFigureOut">
               <a:rPr lang="en-MY" smtClean="0"/>
-              <a:t>6/5/2026</a:t>
+              <a:t>7/5/2026</a:t>
             </a:fld>
             <a:endParaRPr lang="en-MY"/>
           </a:p>
@@ -8536,6 +8645,110 @@
         <p:cNvPr id="1" name="">
           <a:extLst>
             <a:ext uri="{FF2B5EF4-FFF2-40B4-BE49-F238E27FC236}">
+              <a16:creationId xmlns:a16="http://schemas.microsoft.com/office/drawing/2014/main" id="{3FBC84F0-4790-2E5C-BD77-A69CA39F653E}"/>
+            </a:ext>
+          </a:extLst>
+        </p:cNvPr>
+        <p:cNvGrpSpPr/>
+        <p:nvPr/>
+      </p:nvGrpSpPr>
+      <p:grpSpPr>
+        <a:xfrm>
+          <a:off x="0" y="0"/>
+          <a:ext cx="0" cy="0"/>
+          <a:chOff x="0" y="0"/>
+          <a:chExt cx="0" cy="0"/>
+        </a:xfrm>
+      </p:grpSpPr>
+      <p:pic>
+        <p:nvPicPr>
+          <p:cNvPr id="3" name="Picture 2">
+            <a:extLst>
+              <a:ext uri="{FF2B5EF4-FFF2-40B4-BE49-F238E27FC236}">
+                <a16:creationId xmlns:a16="http://schemas.microsoft.com/office/drawing/2014/main" id="{765F6181-9D1F-12D2-690A-B5E1843D8AAA}"/>
+              </a:ext>
+            </a:extLst>
+          </p:cNvPr>
+          <p:cNvPicPr>
+            <a:picLocks noChangeAspect="1"/>
+          </p:cNvPicPr>
+          <p:nvPr/>
+        </p:nvPicPr>
+        <p:blipFill>
+          <a:blip r:embed="rId3"/>
+          <a:stretch>
+            <a:fillRect/>
+          </a:stretch>
+        </p:blipFill>
+        <p:spPr>
+          <a:xfrm>
+            <a:off x="6505599" y="427712"/>
+            <a:ext cx="5106113" cy="4887007"/>
+          </a:xfrm>
+          <a:prstGeom prst="rect">
+            <a:avLst/>
+          </a:prstGeom>
+        </p:spPr>
+      </p:pic>
+      <p:pic>
+        <p:nvPicPr>
+          <p:cNvPr id="5" name="Picture 4">
+            <a:extLst>
+              <a:ext uri="{FF2B5EF4-FFF2-40B4-BE49-F238E27FC236}">
+                <a16:creationId xmlns:a16="http://schemas.microsoft.com/office/drawing/2014/main" id="{6A5C0805-4E2A-35B6-B6D6-E50B70D35153}"/>
+              </a:ext>
+            </a:extLst>
+          </p:cNvPr>
+          <p:cNvPicPr>
+            <a:picLocks noChangeAspect="1"/>
+          </p:cNvPicPr>
+          <p:nvPr/>
+        </p:nvPicPr>
+        <p:blipFill>
+          <a:blip r:embed="rId4"/>
+          <a:stretch>
+            <a:fillRect/>
+          </a:stretch>
+        </p:blipFill>
+        <p:spPr>
+          <a:xfrm>
+            <a:off x="856870" y="427712"/>
+            <a:ext cx="5449060" cy="5210902"/>
+          </a:xfrm>
+          <a:prstGeom prst="rect">
+            <a:avLst/>
+          </a:prstGeom>
+        </p:spPr>
+      </p:pic>
+    </p:spTree>
+    <p:extLst>
+      <p:ext uri="{BB962C8B-B14F-4D97-AF65-F5344CB8AC3E}">
+        <p14:creationId xmlns:p14="http://schemas.microsoft.com/office/powerpoint/2010/main" val="1025226808"/>
+      </p:ext>
+    </p:extLst>
+  </p:cSld>
+  <p:clrMapOvr>
+    <a:masterClrMapping/>
+  </p:clrMapOvr>
+</p:sld>
+</file>
+
+<file path=ppt/slides/slide11.xml><?xml version="1.0" encoding="utf-8"?>
+<p:sld xmlns:a="http://schemas.openxmlformats.org/drawingml/2006/main" xmlns:r="http://schemas.openxmlformats.org/officeDocument/2006/relationships" xmlns:p="http://schemas.openxmlformats.org/presentationml/2006/main" showMasterSp="0">
+  <p:cSld>
+    <p:bg>
+      <p:bgPr>
+        <a:solidFill>
+          <a:srgbClr val="CDF6F9"/>
+        </a:solidFill>
+        <a:effectLst/>
+      </p:bgPr>
+    </p:bg>
+    <p:spTree>
+      <p:nvGrpSpPr>
+        <p:cNvPr id="1" name="">
+          <a:extLst>
+            <a:ext uri="{FF2B5EF4-FFF2-40B4-BE49-F238E27FC236}">
               <a16:creationId xmlns:a16="http://schemas.microsoft.com/office/drawing/2014/main" id="{58E68DF9-9D3D-F010-53FB-6A72464ACF27}"/>
             </a:ext>
           </a:extLst>
@@ -8625,7 +8838,7 @@
 </p:sld>
 </file>
 
-<file path=ppt/slides/slide11.xml><?xml version="1.0" encoding="utf-8"?>
+<file path=ppt/slides/slide12.xml><?xml version="1.0" encoding="utf-8"?>
 <p:sld xmlns:a="http://schemas.openxmlformats.org/drawingml/2006/main" xmlns:r="http://schemas.openxmlformats.org/officeDocument/2006/relationships" xmlns:p="http://schemas.openxmlformats.org/presentationml/2006/main" showMasterSp="0">
   <p:cSld>
     <p:bg>
@@ -10282,7 +10495,7 @@
 </p:sld>
 </file>
 
-<file path=ppt/slides/slide12.xml><?xml version="1.0" encoding="utf-8"?>
+<file path=ppt/slides/slide13.xml><?xml version="1.0" encoding="utf-8"?>
 <p:sld xmlns:a="http://schemas.openxmlformats.org/drawingml/2006/main" xmlns:r="http://schemas.openxmlformats.org/officeDocument/2006/relationships" xmlns:p="http://schemas.openxmlformats.org/presentationml/2006/main" showMasterSp="0">
   <p:cSld>
     <p:bg>
@@ -11677,7 +11890,7 @@
 </p:sld>
 </file>
 
-<file path=ppt/slides/slide13.xml><?xml version="1.0" encoding="utf-8"?>
+<file path=ppt/slides/slide14.xml><?xml version="1.0" encoding="utf-8"?>
 <p:sld xmlns:a="http://schemas.openxmlformats.org/drawingml/2006/main" xmlns:r="http://schemas.openxmlformats.org/officeDocument/2006/relationships" xmlns:p="http://schemas.openxmlformats.org/presentationml/2006/main" showMasterSp="0">
   <p:cSld>
     <p:bg>
@@ -11772,7 +11985,7 @@
 </p:sld>
 </file>
 
-<file path=ppt/slides/slide14.xml><?xml version="1.0" encoding="utf-8"?>
+<file path=ppt/slides/slide15.xml><?xml version="1.0" encoding="utf-8"?>
 <p:sld xmlns:a="http://schemas.openxmlformats.org/drawingml/2006/main" xmlns:r="http://schemas.openxmlformats.org/officeDocument/2006/relationships" xmlns:p="http://schemas.openxmlformats.org/presentationml/2006/main" showMasterSp="0">
   <p:cSld>
     <p:bg>
@@ -12388,7 +12601,7 @@
 </p:sld>
 </file>
 
-<file path=ppt/slides/slide15.xml><?xml version="1.0" encoding="utf-8"?>
+<file path=ppt/slides/slide16.xml><?xml version="1.0" encoding="utf-8"?>
 <p:sld xmlns:a="http://schemas.openxmlformats.org/drawingml/2006/main" xmlns:r="http://schemas.openxmlformats.org/officeDocument/2006/relationships" xmlns:p="http://schemas.openxmlformats.org/presentationml/2006/main" showMasterSp="0">
   <p:cSld>
     <p:bg>
@@ -12483,7 +12696,7 @@
 </p:sld>
 </file>
 
-<file path=ppt/slides/slide16.xml><?xml version="1.0" encoding="utf-8"?>
+<file path=ppt/slides/slide17.xml><?xml version="1.0" encoding="utf-8"?>
 <p:sld xmlns:a="http://schemas.openxmlformats.org/drawingml/2006/main" xmlns:r="http://schemas.openxmlformats.org/officeDocument/2006/relationships" xmlns:p="http://schemas.openxmlformats.org/presentationml/2006/main" showMasterSp="0">
   <p:cSld>
     <p:bg>
@@ -12722,7 +12935,7 @@
 </p:sld>
 </file>
 
-<file path=ppt/slides/slide17.xml><?xml version="1.0" encoding="utf-8"?>
+<file path=ppt/slides/slide18.xml><?xml version="1.0" encoding="utf-8"?>
 <p:sld xmlns:a="http://schemas.openxmlformats.org/drawingml/2006/main" xmlns:r="http://schemas.openxmlformats.org/officeDocument/2006/relationships" xmlns:p="http://schemas.openxmlformats.org/presentationml/2006/main" showMasterSp="0">
   <p:cSld>
     <p:bg>
@@ -12952,7 +13165,7 @@
 </p:sld>
 </file>
 
-<file path=ppt/slides/slide18.xml><?xml version="1.0" encoding="utf-8"?>
+<file path=ppt/slides/slide19.xml><?xml version="1.0" encoding="utf-8"?>
 <p:sld xmlns:a="http://schemas.openxmlformats.org/drawingml/2006/main" xmlns:r="http://schemas.openxmlformats.org/officeDocument/2006/relationships" xmlns:p="http://schemas.openxmlformats.org/presentationml/2006/main" showMasterSp="0">
   <p:cSld>
     <p:bg>
@@ -13130,237 +13343,6 @@
     <p:extLst>
       <p:ext uri="{BB962C8B-B14F-4D97-AF65-F5344CB8AC3E}">
         <p14:creationId xmlns:p14="http://schemas.microsoft.com/office/powerpoint/2010/main" val="3597209293"/>
-      </p:ext>
-    </p:extLst>
-  </p:cSld>
-  <p:clrMapOvr>
-    <a:masterClrMapping/>
-  </p:clrMapOvr>
-</p:sld>
-</file>
-
-<file path=ppt/slides/slide19.xml><?xml version="1.0" encoding="utf-8"?>
-<p:sld xmlns:a="http://schemas.openxmlformats.org/drawingml/2006/main" xmlns:r="http://schemas.openxmlformats.org/officeDocument/2006/relationships" xmlns:p="http://schemas.openxmlformats.org/presentationml/2006/main" showMasterSp="0">
-  <p:cSld>
-    <p:bg>
-      <p:bgPr>
-        <a:solidFill>
-          <a:srgbClr val="CDF6F9"/>
-        </a:solidFill>
-        <a:effectLst/>
-      </p:bgPr>
-    </p:bg>
-    <p:spTree>
-      <p:nvGrpSpPr>
-        <p:cNvPr id="1" name="">
-          <a:extLst>
-            <a:ext uri="{FF2B5EF4-FFF2-40B4-BE49-F238E27FC236}">
-              <a16:creationId xmlns:a16="http://schemas.microsoft.com/office/drawing/2014/main" id="{496294E8-DB96-89DD-76FD-F0FEDF6D616B}"/>
-            </a:ext>
-          </a:extLst>
-        </p:cNvPr>
-        <p:cNvGrpSpPr/>
-        <p:nvPr/>
-      </p:nvGrpSpPr>
-      <p:grpSpPr>
-        <a:xfrm>
-          <a:off x="0" y="0"/>
-          <a:ext cx="0" cy="0"/>
-          <a:chOff x="0" y="0"/>
-          <a:chExt cx="0" cy="0"/>
-        </a:xfrm>
-      </p:grpSpPr>
-      <p:sp>
-        <p:nvSpPr>
-          <p:cNvPr id="5" name="Rectangle 4">
-            <a:extLst>
-              <a:ext uri="{FF2B5EF4-FFF2-40B4-BE49-F238E27FC236}">
-                <a16:creationId xmlns:a16="http://schemas.microsoft.com/office/drawing/2014/main" id="{65CA863E-898B-B444-42D6-372454A7A07A}"/>
-              </a:ext>
-            </a:extLst>
-          </p:cNvPr>
-          <p:cNvSpPr/>
-          <p:nvPr/>
-        </p:nvSpPr>
-        <p:spPr>
-          <a:xfrm>
-            <a:off x="3861306" y="134065"/>
-            <a:ext cx="5235070" cy="389810"/>
-          </a:xfrm>
-          <a:prstGeom prst="rect">
-            <a:avLst/>
-          </a:prstGeom>
-          <a:noFill/>
-          <a:ln>
-            <a:noFill/>
-          </a:ln>
-        </p:spPr>
-        <p:style>
-          <a:lnRef idx="2">
-            <a:schemeClr val="accent6"/>
-          </a:lnRef>
-          <a:fillRef idx="1">
-            <a:schemeClr val="lt1"/>
-          </a:fillRef>
-          <a:effectRef idx="0">
-            <a:schemeClr val="accent6"/>
-          </a:effectRef>
-          <a:fontRef idx="minor">
-            <a:schemeClr val="dk1"/>
-          </a:fontRef>
-        </p:style>
-        <p:txBody>
-          <a:bodyPr rtlCol="0" anchor="ctr"/>
-          <a:lstStyle/>
-          <a:p>
-            <a:pPr algn="ctr"/>
-            <a:r>
-              <a:rPr lang="en-MY" sz="1400" dirty="0"/>
-              <a:t>CUSTOMER : UGS  </a:t>
-            </a:r>
-            <a:r>
-              <a:rPr lang="en-US" sz="1400" dirty="0"/>
-              <a:t>P</a:t>
-            </a:r>
-            <a:r>
-              <a:rPr lang="en-MY" sz="1400" dirty="0"/>
-              <a:t>ROJECT: A1887 TOTAL DEVICE : 286</a:t>
-            </a:r>
-          </a:p>
-        </p:txBody>
-      </p:sp>
-      <p:sp>
-        <p:nvSpPr>
-          <p:cNvPr id="10" name="TextBox 9">
-            <a:extLst>
-              <a:ext uri="{FF2B5EF4-FFF2-40B4-BE49-F238E27FC236}">
-                <a16:creationId xmlns:a16="http://schemas.microsoft.com/office/drawing/2014/main" id="{E6238E74-41BE-EAF8-7443-9CB7F70C1DEC}"/>
-              </a:ext>
-            </a:extLst>
-          </p:cNvPr>
-          <p:cNvSpPr txBox="1"/>
-          <p:nvPr/>
-        </p:nvSpPr>
-        <p:spPr>
-          <a:xfrm>
-            <a:off x="95250" y="6593130"/>
-            <a:ext cx="7924800" cy="261610"/>
-          </a:xfrm>
-          <a:prstGeom prst="rect">
-            <a:avLst/>
-          </a:prstGeom>
-          <a:noFill/>
-        </p:spPr>
-        <p:txBody>
-          <a:bodyPr wrap="square">
-            <a:spAutoFit/>
-          </a:bodyPr>
-          <a:lstStyle/>
-          <a:p>
-            <a:r>
-              <a:rPr lang="en-MY" sz="1050" dirty="0" err="1"/>
-              <a:t>Filepath</a:t>
-            </a:r>
-            <a:r>
-              <a:rPr lang="en-MY" sz="1050" dirty="0"/>
-              <a:t>  : "C:\Users\sitisyaziyah\Documents\Device_Identifier\Dummy data\UGS - structured data.xlsx“ (sheet = A1887-S2)</a:t>
-            </a:r>
-          </a:p>
-        </p:txBody>
-      </p:sp>
-      <p:pic>
-        <p:nvPicPr>
-          <p:cNvPr id="3" name="Picture 2">
-            <a:extLst>
-              <a:ext uri="{FF2B5EF4-FFF2-40B4-BE49-F238E27FC236}">
-                <a16:creationId xmlns:a16="http://schemas.microsoft.com/office/drawing/2014/main" id="{26DED758-7E45-8B88-A1CE-96FED269D5C0}"/>
-              </a:ext>
-            </a:extLst>
-          </p:cNvPr>
-          <p:cNvPicPr>
-            <a:picLocks noChangeAspect="1"/>
-          </p:cNvPicPr>
-          <p:nvPr/>
-        </p:nvPicPr>
-        <p:blipFill>
-          <a:blip r:embed="rId3"/>
-          <a:stretch>
-            <a:fillRect/>
-          </a:stretch>
-        </p:blipFill>
-        <p:spPr>
-          <a:xfrm>
-            <a:off x="2081358" y="500715"/>
-            <a:ext cx="8794965" cy="6092415"/>
-          </a:xfrm>
-          <a:prstGeom prst="rect">
-            <a:avLst/>
-          </a:prstGeom>
-        </p:spPr>
-      </p:pic>
-      <p:sp>
-        <p:nvSpPr>
-          <p:cNvPr id="2" name="TextBox 1">
-            <a:extLst>
-              <a:ext uri="{FF2B5EF4-FFF2-40B4-BE49-F238E27FC236}">
-                <a16:creationId xmlns:a16="http://schemas.microsoft.com/office/drawing/2014/main" id="{CF6F83BE-392E-BF69-95E6-E186F278EF24}"/>
-              </a:ext>
-            </a:extLst>
-          </p:cNvPr>
-          <p:cNvSpPr txBox="1"/>
-          <p:nvPr/>
-        </p:nvSpPr>
-        <p:spPr>
-          <a:xfrm>
-            <a:off x="261702" y="500715"/>
-            <a:ext cx="1819656" cy="1200329"/>
-          </a:xfrm>
-          <a:prstGeom prst="rect">
-            <a:avLst/>
-          </a:prstGeom>
-          <a:noFill/>
-        </p:spPr>
-        <p:txBody>
-          <a:bodyPr wrap="square" rtlCol="0">
-            <a:spAutoFit/>
-          </a:bodyPr>
-          <a:lstStyle/>
-          <a:p>
-            <a:r>
-              <a:rPr lang="en-MY" dirty="0">
-                <a:solidFill>
-                  <a:srgbClr val="FF0000"/>
-                </a:solidFill>
-              </a:rPr>
-              <a:t>Note 16/4/2026</a:t>
-            </a:r>
-          </a:p>
-          <a:p>
-            <a:r>
-              <a:rPr lang="en-MY" dirty="0">
-                <a:solidFill>
-                  <a:srgbClr val="FF0000"/>
-                </a:solidFill>
-              </a:rPr>
-              <a:t>DROPOUT OILTEK_A1827</a:t>
-            </a:r>
-          </a:p>
-          <a:p>
-            <a:r>
-              <a:rPr lang="en-MY" dirty="0">
-                <a:solidFill>
-                  <a:srgbClr val="FF0000"/>
-                </a:solidFill>
-              </a:rPr>
-              <a:t>UGS_A1887</a:t>
-            </a:r>
-          </a:p>
-        </p:txBody>
-      </p:sp>
-    </p:spTree>
-    <p:extLst>
-      <p:ext uri="{BB962C8B-B14F-4D97-AF65-F5344CB8AC3E}">
-        <p14:creationId xmlns:p14="http://schemas.microsoft.com/office/powerpoint/2010/main" val="1691097330"/>
       </p:ext>
     </p:extLst>
   </p:cSld>
@@ -15017,6 +14999,237 @@
     <p:extLst>
       <p:ext uri="{BB962C8B-B14F-4D97-AF65-F5344CB8AC3E}">
         <p14:creationId xmlns:p14="http://schemas.microsoft.com/office/powerpoint/2010/main" val="2766375949"/>
+      </p:ext>
+    </p:extLst>
+  </p:cSld>
+  <p:clrMapOvr>
+    <a:masterClrMapping/>
+  </p:clrMapOvr>
+</p:sld>
+</file>
+
+<file path=ppt/slides/slide20.xml><?xml version="1.0" encoding="utf-8"?>
+<p:sld xmlns:a="http://schemas.openxmlformats.org/drawingml/2006/main" xmlns:r="http://schemas.openxmlformats.org/officeDocument/2006/relationships" xmlns:p="http://schemas.openxmlformats.org/presentationml/2006/main" showMasterSp="0">
+  <p:cSld>
+    <p:bg>
+      <p:bgPr>
+        <a:solidFill>
+          <a:srgbClr val="CDF6F9"/>
+        </a:solidFill>
+        <a:effectLst/>
+      </p:bgPr>
+    </p:bg>
+    <p:spTree>
+      <p:nvGrpSpPr>
+        <p:cNvPr id="1" name="">
+          <a:extLst>
+            <a:ext uri="{FF2B5EF4-FFF2-40B4-BE49-F238E27FC236}">
+              <a16:creationId xmlns:a16="http://schemas.microsoft.com/office/drawing/2014/main" id="{496294E8-DB96-89DD-76FD-F0FEDF6D616B}"/>
+            </a:ext>
+          </a:extLst>
+        </p:cNvPr>
+        <p:cNvGrpSpPr/>
+        <p:nvPr/>
+      </p:nvGrpSpPr>
+      <p:grpSpPr>
+        <a:xfrm>
+          <a:off x="0" y="0"/>
+          <a:ext cx="0" cy="0"/>
+          <a:chOff x="0" y="0"/>
+          <a:chExt cx="0" cy="0"/>
+        </a:xfrm>
+      </p:grpSpPr>
+      <p:sp>
+        <p:nvSpPr>
+          <p:cNvPr id="5" name="Rectangle 4">
+            <a:extLst>
+              <a:ext uri="{FF2B5EF4-FFF2-40B4-BE49-F238E27FC236}">
+                <a16:creationId xmlns:a16="http://schemas.microsoft.com/office/drawing/2014/main" id="{65CA863E-898B-B444-42D6-372454A7A07A}"/>
+              </a:ext>
+            </a:extLst>
+          </p:cNvPr>
+          <p:cNvSpPr/>
+          <p:nvPr/>
+        </p:nvSpPr>
+        <p:spPr>
+          <a:xfrm>
+            <a:off x="3861306" y="134065"/>
+            <a:ext cx="5235070" cy="389810"/>
+          </a:xfrm>
+          <a:prstGeom prst="rect">
+            <a:avLst/>
+          </a:prstGeom>
+          <a:noFill/>
+          <a:ln>
+            <a:noFill/>
+          </a:ln>
+        </p:spPr>
+        <p:style>
+          <a:lnRef idx="2">
+            <a:schemeClr val="accent6"/>
+          </a:lnRef>
+          <a:fillRef idx="1">
+            <a:schemeClr val="lt1"/>
+          </a:fillRef>
+          <a:effectRef idx="0">
+            <a:schemeClr val="accent6"/>
+          </a:effectRef>
+          <a:fontRef idx="minor">
+            <a:schemeClr val="dk1"/>
+          </a:fontRef>
+        </p:style>
+        <p:txBody>
+          <a:bodyPr rtlCol="0" anchor="ctr"/>
+          <a:lstStyle/>
+          <a:p>
+            <a:pPr algn="ctr"/>
+            <a:r>
+              <a:rPr lang="en-MY" sz="1400" dirty="0"/>
+              <a:t>CUSTOMER : UGS  </a:t>
+            </a:r>
+            <a:r>
+              <a:rPr lang="en-US" sz="1400" dirty="0"/>
+              <a:t>P</a:t>
+            </a:r>
+            <a:r>
+              <a:rPr lang="en-MY" sz="1400" dirty="0"/>
+              <a:t>ROJECT: A1887 TOTAL DEVICE : 286</a:t>
+            </a:r>
+          </a:p>
+        </p:txBody>
+      </p:sp>
+      <p:sp>
+        <p:nvSpPr>
+          <p:cNvPr id="10" name="TextBox 9">
+            <a:extLst>
+              <a:ext uri="{FF2B5EF4-FFF2-40B4-BE49-F238E27FC236}">
+                <a16:creationId xmlns:a16="http://schemas.microsoft.com/office/drawing/2014/main" id="{E6238E74-41BE-EAF8-7443-9CB7F70C1DEC}"/>
+              </a:ext>
+            </a:extLst>
+          </p:cNvPr>
+          <p:cNvSpPr txBox="1"/>
+          <p:nvPr/>
+        </p:nvSpPr>
+        <p:spPr>
+          <a:xfrm>
+            <a:off x="95250" y="6593130"/>
+            <a:ext cx="7924800" cy="261610"/>
+          </a:xfrm>
+          <a:prstGeom prst="rect">
+            <a:avLst/>
+          </a:prstGeom>
+          <a:noFill/>
+        </p:spPr>
+        <p:txBody>
+          <a:bodyPr wrap="square">
+            <a:spAutoFit/>
+          </a:bodyPr>
+          <a:lstStyle/>
+          <a:p>
+            <a:r>
+              <a:rPr lang="en-MY" sz="1050" dirty="0" err="1"/>
+              <a:t>Filepath</a:t>
+            </a:r>
+            <a:r>
+              <a:rPr lang="en-MY" sz="1050" dirty="0"/>
+              <a:t>  : "C:\Users\sitisyaziyah\Documents\Device_Identifier\Dummy data\UGS - structured data.xlsx“ (sheet = A1887-S2)</a:t>
+            </a:r>
+          </a:p>
+        </p:txBody>
+      </p:sp>
+      <p:pic>
+        <p:nvPicPr>
+          <p:cNvPr id="3" name="Picture 2">
+            <a:extLst>
+              <a:ext uri="{FF2B5EF4-FFF2-40B4-BE49-F238E27FC236}">
+                <a16:creationId xmlns:a16="http://schemas.microsoft.com/office/drawing/2014/main" id="{26DED758-7E45-8B88-A1CE-96FED269D5C0}"/>
+              </a:ext>
+            </a:extLst>
+          </p:cNvPr>
+          <p:cNvPicPr>
+            <a:picLocks noChangeAspect="1"/>
+          </p:cNvPicPr>
+          <p:nvPr/>
+        </p:nvPicPr>
+        <p:blipFill>
+          <a:blip r:embed="rId3"/>
+          <a:stretch>
+            <a:fillRect/>
+          </a:stretch>
+        </p:blipFill>
+        <p:spPr>
+          <a:xfrm>
+            <a:off x="2081358" y="500715"/>
+            <a:ext cx="8794965" cy="6092415"/>
+          </a:xfrm>
+          <a:prstGeom prst="rect">
+            <a:avLst/>
+          </a:prstGeom>
+        </p:spPr>
+      </p:pic>
+      <p:sp>
+        <p:nvSpPr>
+          <p:cNvPr id="2" name="TextBox 1">
+            <a:extLst>
+              <a:ext uri="{FF2B5EF4-FFF2-40B4-BE49-F238E27FC236}">
+                <a16:creationId xmlns:a16="http://schemas.microsoft.com/office/drawing/2014/main" id="{CF6F83BE-392E-BF69-95E6-E186F278EF24}"/>
+              </a:ext>
+            </a:extLst>
+          </p:cNvPr>
+          <p:cNvSpPr txBox="1"/>
+          <p:nvPr/>
+        </p:nvSpPr>
+        <p:spPr>
+          <a:xfrm>
+            <a:off x="261702" y="500715"/>
+            <a:ext cx="1819656" cy="1200329"/>
+          </a:xfrm>
+          <a:prstGeom prst="rect">
+            <a:avLst/>
+          </a:prstGeom>
+          <a:noFill/>
+        </p:spPr>
+        <p:txBody>
+          <a:bodyPr wrap="square" rtlCol="0">
+            <a:spAutoFit/>
+          </a:bodyPr>
+          <a:lstStyle/>
+          <a:p>
+            <a:r>
+              <a:rPr lang="en-MY" dirty="0">
+                <a:solidFill>
+                  <a:srgbClr val="FF0000"/>
+                </a:solidFill>
+              </a:rPr>
+              <a:t>Note 16/4/2026</a:t>
+            </a:r>
+          </a:p>
+          <a:p>
+            <a:r>
+              <a:rPr lang="en-MY" dirty="0">
+                <a:solidFill>
+                  <a:srgbClr val="FF0000"/>
+                </a:solidFill>
+              </a:rPr>
+              <a:t>DROPOUT OILTEK_A1827</a:t>
+            </a:r>
+          </a:p>
+          <a:p>
+            <a:r>
+              <a:rPr lang="en-MY" dirty="0">
+                <a:solidFill>
+                  <a:srgbClr val="FF0000"/>
+                </a:solidFill>
+              </a:rPr>
+              <a:t>UGS_A1887</a:t>
+            </a:r>
+          </a:p>
+        </p:txBody>
+      </p:sp>
+    </p:spTree>
+    <p:extLst>
+      <p:ext uri="{BB962C8B-B14F-4D97-AF65-F5344CB8AC3E}">
+        <p14:creationId xmlns:p14="http://schemas.microsoft.com/office/powerpoint/2010/main" val="1691097330"/>
       </p:ext>
     </p:extLst>
   </p:cSld>
@@ -15363,6 +15576,80 @@
         <p:cNvPr id="1" name="">
           <a:extLst>
             <a:ext uri="{FF2B5EF4-FFF2-40B4-BE49-F238E27FC236}">
+              <a16:creationId xmlns:a16="http://schemas.microsoft.com/office/drawing/2014/main" id="{696F804E-D4EC-500A-6070-EB128E4F073E}"/>
+            </a:ext>
+          </a:extLst>
+        </p:cNvPr>
+        <p:cNvGrpSpPr/>
+        <p:nvPr/>
+      </p:nvGrpSpPr>
+      <p:grpSpPr>
+        <a:xfrm>
+          <a:off x="0" y="0"/>
+          <a:ext cx="0" cy="0"/>
+          <a:chOff x="0" y="0"/>
+          <a:chExt cx="0" cy="0"/>
+        </a:xfrm>
+      </p:grpSpPr>
+      <p:pic>
+        <p:nvPicPr>
+          <p:cNvPr id="4" name="Picture 3">
+            <a:extLst>
+              <a:ext uri="{FF2B5EF4-FFF2-40B4-BE49-F238E27FC236}">
+                <a16:creationId xmlns:a16="http://schemas.microsoft.com/office/drawing/2014/main" id="{1705D8E4-4CF0-C70E-4707-E5D08580DE9F}"/>
+              </a:ext>
+            </a:extLst>
+          </p:cNvPr>
+          <p:cNvPicPr>
+            <a:picLocks noChangeAspect="1"/>
+          </p:cNvPicPr>
+          <p:nvPr/>
+        </p:nvPicPr>
+        <p:blipFill>
+          <a:blip r:embed="rId3"/>
+          <a:stretch>
+            <a:fillRect/>
+          </a:stretch>
+        </p:blipFill>
+        <p:spPr>
+          <a:xfrm>
+            <a:off x="189675" y="2528762"/>
+            <a:ext cx="11812649" cy="1800476"/>
+          </a:xfrm>
+          <a:prstGeom prst="rect">
+            <a:avLst/>
+          </a:prstGeom>
+        </p:spPr>
+      </p:pic>
+    </p:spTree>
+    <p:extLst>
+      <p:ext uri="{BB962C8B-B14F-4D97-AF65-F5344CB8AC3E}">
+        <p14:creationId xmlns:p14="http://schemas.microsoft.com/office/powerpoint/2010/main" val="3409841615"/>
+      </p:ext>
+    </p:extLst>
+  </p:cSld>
+  <p:clrMapOvr>
+    <a:masterClrMapping/>
+  </p:clrMapOvr>
+</p:sld>
+</file>
+
+<file path=ppt/slides/slide8.xml><?xml version="1.0" encoding="utf-8"?>
+<p:sld xmlns:a="http://schemas.openxmlformats.org/drawingml/2006/main" xmlns:r="http://schemas.openxmlformats.org/officeDocument/2006/relationships" xmlns:p="http://schemas.openxmlformats.org/presentationml/2006/main" showMasterSp="0">
+  <p:cSld>
+    <p:bg>
+      <p:bgPr>
+        <a:solidFill>
+          <a:srgbClr val="CDF6F9"/>
+        </a:solidFill>
+        <a:effectLst/>
+      </p:bgPr>
+    </p:bg>
+    <p:spTree>
+      <p:nvGrpSpPr>
+        <p:cNvPr id="1" name="">
+          <a:extLst>
+            <a:ext uri="{FF2B5EF4-FFF2-40B4-BE49-F238E27FC236}">
               <a16:creationId xmlns:a16="http://schemas.microsoft.com/office/drawing/2014/main" id="{5700AD06-AC27-890A-9253-1A1180DFE688}"/>
             </a:ext>
           </a:extLst>
@@ -15421,7 +15708,7 @@
 </p:sld>
 </file>
 
-<file path=ppt/slides/slide8.xml><?xml version="1.0" encoding="utf-8"?>
+<file path=ppt/slides/slide9.xml><?xml version="1.0" encoding="utf-8"?>
 <p:sld xmlns:a="http://schemas.openxmlformats.org/drawingml/2006/main" xmlns:r="http://schemas.openxmlformats.org/officeDocument/2006/relationships" xmlns:p="http://schemas.openxmlformats.org/presentationml/2006/main" showMasterSp="0">
   <p:cSld>
     <p:bg>
@@ -15517,110 +15804,6 @@
     <p:extLst>
       <p:ext uri="{BB962C8B-B14F-4D97-AF65-F5344CB8AC3E}">
         <p14:creationId xmlns:p14="http://schemas.microsoft.com/office/powerpoint/2010/main" val="149887682"/>
-      </p:ext>
-    </p:extLst>
-  </p:cSld>
-  <p:clrMapOvr>
-    <a:masterClrMapping/>
-  </p:clrMapOvr>
-</p:sld>
-</file>
-
-<file path=ppt/slides/slide9.xml><?xml version="1.0" encoding="utf-8"?>
-<p:sld xmlns:a="http://schemas.openxmlformats.org/drawingml/2006/main" xmlns:r="http://schemas.openxmlformats.org/officeDocument/2006/relationships" xmlns:p="http://schemas.openxmlformats.org/presentationml/2006/main" showMasterSp="0">
-  <p:cSld>
-    <p:bg>
-      <p:bgPr>
-        <a:solidFill>
-          <a:srgbClr val="CDF6F9"/>
-        </a:solidFill>
-        <a:effectLst/>
-      </p:bgPr>
-    </p:bg>
-    <p:spTree>
-      <p:nvGrpSpPr>
-        <p:cNvPr id="1" name="">
-          <a:extLst>
-            <a:ext uri="{FF2B5EF4-FFF2-40B4-BE49-F238E27FC236}">
-              <a16:creationId xmlns:a16="http://schemas.microsoft.com/office/drawing/2014/main" id="{3FBC84F0-4790-2E5C-BD77-A69CA39F653E}"/>
-            </a:ext>
-          </a:extLst>
-        </p:cNvPr>
-        <p:cNvGrpSpPr/>
-        <p:nvPr/>
-      </p:nvGrpSpPr>
-      <p:grpSpPr>
-        <a:xfrm>
-          <a:off x="0" y="0"/>
-          <a:ext cx="0" cy="0"/>
-          <a:chOff x="0" y="0"/>
-          <a:chExt cx="0" cy="0"/>
-        </a:xfrm>
-      </p:grpSpPr>
-      <p:pic>
-        <p:nvPicPr>
-          <p:cNvPr id="3" name="Picture 2">
-            <a:extLst>
-              <a:ext uri="{FF2B5EF4-FFF2-40B4-BE49-F238E27FC236}">
-                <a16:creationId xmlns:a16="http://schemas.microsoft.com/office/drawing/2014/main" id="{765F6181-9D1F-12D2-690A-B5E1843D8AAA}"/>
-              </a:ext>
-            </a:extLst>
-          </p:cNvPr>
-          <p:cNvPicPr>
-            <a:picLocks noChangeAspect="1"/>
-          </p:cNvPicPr>
-          <p:nvPr/>
-        </p:nvPicPr>
-        <p:blipFill>
-          <a:blip r:embed="rId3"/>
-          <a:stretch>
-            <a:fillRect/>
-          </a:stretch>
-        </p:blipFill>
-        <p:spPr>
-          <a:xfrm>
-            <a:off x="6505599" y="427712"/>
-            <a:ext cx="5106113" cy="4887007"/>
-          </a:xfrm>
-          <a:prstGeom prst="rect">
-            <a:avLst/>
-          </a:prstGeom>
-        </p:spPr>
-      </p:pic>
-      <p:pic>
-        <p:nvPicPr>
-          <p:cNvPr id="5" name="Picture 4">
-            <a:extLst>
-              <a:ext uri="{FF2B5EF4-FFF2-40B4-BE49-F238E27FC236}">
-                <a16:creationId xmlns:a16="http://schemas.microsoft.com/office/drawing/2014/main" id="{6A5C0805-4E2A-35B6-B6D6-E50B70D35153}"/>
-              </a:ext>
-            </a:extLst>
-          </p:cNvPr>
-          <p:cNvPicPr>
-            <a:picLocks noChangeAspect="1"/>
-          </p:cNvPicPr>
-          <p:nvPr/>
-        </p:nvPicPr>
-        <p:blipFill>
-          <a:blip r:embed="rId4"/>
-          <a:stretch>
-            <a:fillRect/>
-          </a:stretch>
-        </p:blipFill>
-        <p:spPr>
-          <a:xfrm>
-            <a:off x="856870" y="427712"/>
-            <a:ext cx="5449060" cy="5210902"/>
-          </a:xfrm>
-          <a:prstGeom prst="rect">
-            <a:avLst/>
-          </a:prstGeom>
-        </p:spPr>
-      </p:pic>
-    </p:spTree>
-    <p:extLst>
-      <p:ext uri="{BB962C8B-B14F-4D97-AF65-F5344CB8AC3E}">
-        <p14:creationId xmlns:p14="http://schemas.microsoft.com/office/powerpoint/2010/main" val="1025226808"/>
       </p:ext>
     </p:extLst>
   </p:cSld>
